--- a/Instructions.pptx
+++ b/Instructions.pptx
@@ -5,7 +5,7 @@
     <p:sldMasterId id="2147483648" r:id="rId1"/>
   </p:sldMasterIdLst>
   <p:notesMasterIdLst>
-    <p:notesMasterId r:id="rId17"/>
+    <p:notesMasterId r:id="rId18"/>
   </p:notesMasterIdLst>
   <p:sldIdLst>
     <p:sldId id="273" r:id="rId2"/>
@@ -20,9 +20,10 @@
     <p:sldId id="260" r:id="rId11"/>
     <p:sldId id="261" r:id="rId12"/>
     <p:sldId id="271" r:id="rId13"/>
-    <p:sldId id="279" r:id="rId14"/>
-    <p:sldId id="278" r:id="rId15"/>
-    <p:sldId id="277" r:id="rId16"/>
+    <p:sldId id="282" r:id="rId14"/>
+    <p:sldId id="279" r:id="rId15"/>
+    <p:sldId id="278" r:id="rId16"/>
+    <p:sldId id="277" r:id="rId17"/>
   </p:sldIdLst>
   <p:sldSz cx="12192000" cy="6858000"/>
   <p:notesSz cx="6858000" cy="9144000"/>
@@ -171,6 +172,7 @@
         </p14:section>
         <p14:section name="任务二 正式实验" id="{5E91EF60-2A33-4FB8-BE00-B2C3CA6CD8E4}">
           <p14:sldIdLst>
+            <p14:sldId id="282"/>
             <p14:sldId id="279"/>
           </p14:sldIdLst>
         </p14:section>
@@ -275,7 +277,7 @@
           <a:p>
             <a:fld id="{373AEA94-00EF-4DE4-8FA3-F9ECAA6DD2CF}" type="datetimeFigureOut">
               <a:rPr lang="zh-CN" altLang="en-US" smtClean="0"/>
-              <a:t>2026/1/20</a:t>
+              <a:t>2026/3/26</a:t>
             </a:fld>
             <a:endParaRPr lang="zh-CN" altLang="en-US"/>
           </a:p>
@@ -1445,7 +1447,7 @@
           <a:p>
             <a:fld id="{E45C1C0B-BEED-40A4-BB03-2B5E358FDD63}" type="datetimeFigureOut">
               <a:rPr lang="zh-CN" altLang="en-US" smtClean="0"/>
-              <a:t>2026/1/20</a:t>
+              <a:t>2026/3/26</a:t>
             </a:fld>
             <a:endParaRPr lang="zh-CN" altLang="en-US"/>
           </a:p>
@@ -1643,7 +1645,7 @@
           <a:p>
             <a:fld id="{E45C1C0B-BEED-40A4-BB03-2B5E358FDD63}" type="datetimeFigureOut">
               <a:rPr lang="zh-CN" altLang="en-US" smtClean="0"/>
-              <a:t>2026/1/20</a:t>
+              <a:t>2026/3/26</a:t>
             </a:fld>
             <a:endParaRPr lang="zh-CN" altLang="en-US"/>
           </a:p>
@@ -1851,7 +1853,7 @@
           <a:p>
             <a:fld id="{E45C1C0B-BEED-40A4-BB03-2B5E358FDD63}" type="datetimeFigureOut">
               <a:rPr lang="zh-CN" altLang="en-US" smtClean="0"/>
-              <a:t>2026/1/20</a:t>
+              <a:t>2026/3/26</a:t>
             </a:fld>
             <a:endParaRPr lang="zh-CN" altLang="en-US"/>
           </a:p>
@@ -2049,7 +2051,7 @@
           <a:p>
             <a:fld id="{E45C1C0B-BEED-40A4-BB03-2B5E358FDD63}" type="datetimeFigureOut">
               <a:rPr lang="zh-CN" altLang="en-US" smtClean="0"/>
-              <a:t>2026/1/20</a:t>
+              <a:t>2026/3/26</a:t>
             </a:fld>
             <a:endParaRPr lang="zh-CN" altLang="en-US"/>
           </a:p>
@@ -2324,7 +2326,7 @@
           <a:p>
             <a:fld id="{E45C1C0B-BEED-40A4-BB03-2B5E358FDD63}" type="datetimeFigureOut">
               <a:rPr lang="zh-CN" altLang="en-US" smtClean="0"/>
-              <a:t>2026/1/20</a:t>
+              <a:t>2026/3/26</a:t>
             </a:fld>
             <a:endParaRPr lang="zh-CN" altLang="en-US"/>
           </a:p>
@@ -2589,7 +2591,7 @@
           <a:p>
             <a:fld id="{E45C1C0B-BEED-40A4-BB03-2B5E358FDD63}" type="datetimeFigureOut">
               <a:rPr lang="zh-CN" altLang="en-US" smtClean="0"/>
-              <a:t>2026/1/20</a:t>
+              <a:t>2026/3/26</a:t>
             </a:fld>
             <a:endParaRPr lang="zh-CN" altLang="en-US"/>
           </a:p>
@@ -3001,7 +3003,7 @@
           <a:p>
             <a:fld id="{E45C1C0B-BEED-40A4-BB03-2B5E358FDD63}" type="datetimeFigureOut">
               <a:rPr lang="zh-CN" altLang="en-US" smtClean="0"/>
-              <a:t>2026/1/20</a:t>
+              <a:t>2026/3/26</a:t>
             </a:fld>
             <a:endParaRPr lang="zh-CN" altLang="en-US"/>
           </a:p>
@@ -3142,7 +3144,7 @@
           <a:p>
             <a:fld id="{E45C1C0B-BEED-40A4-BB03-2B5E358FDD63}" type="datetimeFigureOut">
               <a:rPr lang="zh-CN" altLang="en-US" smtClean="0"/>
-              <a:t>2026/1/20</a:t>
+              <a:t>2026/3/26</a:t>
             </a:fld>
             <a:endParaRPr lang="zh-CN" altLang="en-US"/>
           </a:p>
@@ -3255,7 +3257,7 @@
           <a:p>
             <a:fld id="{E45C1C0B-BEED-40A4-BB03-2B5E358FDD63}" type="datetimeFigureOut">
               <a:rPr lang="zh-CN" altLang="en-US" smtClean="0"/>
-              <a:t>2026/1/20</a:t>
+              <a:t>2026/3/26</a:t>
             </a:fld>
             <a:endParaRPr lang="zh-CN" altLang="en-US"/>
           </a:p>
@@ -3566,7 +3568,7 @@
           <a:p>
             <a:fld id="{E45C1C0B-BEED-40A4-BB03-2B5E358FDD63}" type="datetimeFigureOut">
               <a:rPr lang="zh-CN" altLang="en-US" smtClean="0"/>
-              <a:t>2026/1/20</a:t>
+              <a:t>2026/3/26</a:t>
             </a:fld>
             <a:endParaRPr lang="zh-CN" altLang="en-US"/>
           </a:p>
@@ -3854,7 +3856,7 @@
           <a:p>
             <a:fld id="{E45C1C0B-BEED-40A4-BB03-2B5E358FDD63}" type="datetimeFigureOut">
               <a:rPr lang="zh-CN" altLang="en-US" smtClean="0"/>
-              <a:t>2026/1/20</a:t>
+              <a:t>2026/3/26</a:t>
             </a:fld>
             <a:endParaRPr lang="zh-CN" altLang="en-US"/>
           </a:p>
@@ -4095,7 +4097,7 @@
           <a:p>
             <a:fld id="{E45C1C0B-BEED-40A4-BB03-2B5E358FDD63}" type="datetimeFigureOut">
               <a:rPr lang="zh-CN" altLang="en-US" smtClean="0"/>
-              <a:t>2026/1/20</a:t>
+              <a:t>2026/3/26</a:t>
             </a:fld>
             <a:endParaRPr lang="zh-CN" altLang="en-US"/>
           </a:p>
@@ -4654,7 +4656,7 @@
                 <a:ea typeface="楷体" panose="02010609060101010101" pitchFamily="49" charset="-122"/>
                 <a:cs typeface="+mn-cs"/>
               </a:rPr>
-              <a:t>实验共包含</a:t>
+              <a:t>实验预计</a:t>
             </a:r>
             <a:r>
               <a:rPr kumimoji="0" lang="zh-CN" altLang="en-US" sz="4000" b="1" i="0" u="sng" strike="noStrike" kern="1200" cap="none" spc="0" normalizeH="0" baseline="0" noProof="0" dirty="0">
@@ -4671,10 +4673,10 @@
                 <a:ea typeface="楷体" panose="02010609060101010101" pitchFamily="49" charset="-122"/>
                 <a:cs typeface="+mn-cs"/>
               </a:rPr>
-              <a:t>两个任务</a:t>
-            </a:r>
-            <a:r>
-              <a:rPr kumimoji="0" lang="zh-CN" altLang="en-US" sz="4000" b="0" i="0" u="none" strike="noStrike" kern="1200" cap="none" spc="0" normalizeH="0" baseline="0" noProof="0" dirty="0">
+              <a:t>用时</a:t>
+            </a:r>
+            <a:r>
+              <a:rPr kumimoji="0" lang="en-US" altLang="zh-CN" sz="4000" b="1" i="0" u="sng" strike="noStrike" kern="1200" cap="none" spc="0" normalizeH="0" baseline="0" noProof="0" dirty="0">
                 <a:ln>
                   <a:noFill/>
                 </a:ln>
@@ -4688,7 +4690,17 @@
                 <a:ea typeface="楷体" panose="02010609060101010101" pitchFamily="49" charset="-122"/>
                 <a:cs typeface="+mn-cs"/>
               </a:rPr>
-              <a:t>，预计</a:t>
+              <a:t>1</a:t>
+            </a:r>
+            <a:r>
+              <a:rPr lang="en-US" altLang="zh-CN" sz="4000" b="1" u="sng" dirty="0">
+                <a:solidFill>
+                  <a:prstClr val="black"/>
+                </a:solidFill>
+                <a:latin typeface="楷体" panose="02010609060101010101" pitchFamily="49" charset="-122"/>
+                <a:ea typeface="楷体" panose="02010609060101010101" pitchFamily="49" charset="-122"/>
+              </a:rPr>
+              <a:t>.5</a:t>
             </a:r>
             <a:r>
               <a:rPr kumimoji="0" lang="zh-CN" altLang="en-US" sz="4000" b="1" i="0" u="sng" strike="noStrike" kern="1200" cap="none" spc="0" normalizeH="0" baseline="0" noProof="0" dirty="0">
@@ -4705,10 +4717,10 @@
                 <a:ea typeface="楷体" panose="02010609060101010101" pitchFamily="49" charset="-122"/>
                 <a:cs typeface="+mn-cs"/>
               </a:rPr>
-              <a:t>用时</a:t>
-            </a:r>
-            <a:r>
-              <a:rPr kumimoji="0" lang="en-US" altLang="zh-CN" sz="4000" b="1" i="0" u="sng" strike="noStrike" kern="1200" cap="none" spc="0" normalizeH="0" baseline="0" noProof="0" dirty="0">
+              <a:t>小时</a:t>
+            </a:r>
+            <a:r>
+              <a:rPr kumimoji="0" lang="zh-CN" altLang="en-US" sz="4000" b="1" i="0" strike="noStrike" kern="1200" cap="none" spc="0" normalizeH="0" baseline="0" noProof="0" dirty="0">
                 <a:ln>
                   <a:noFill/>
                 </a:ln>
@@ -4722,10 +4734,10 @@
                 <a:ea typeface="楷体" panose="02010609060101010101" pitchFamily="49" charset="-122"/>
                 <a:cs typeface="+mn-cs"/>
               </a:rPr>
-              <a:t>1</a:t>
-            </a:r>
-            <a:r>
-              <a:rPr kumimoji="0" lang="zh-CN" altLang="en-US" sz="4000" b="1" i="0" u="sng" strike="noStrike" kern="1200" cap="none" spc="0" normalizeH="0" baseline="0" noProof="0" dirty="0">
+              <a:t>，</a:t>
+            </a:r>
+            <a:r>
+              <a:rPr kumimoji="0" lang="zh-CN" altLang="en-US" sz="4000" i="0" strike="noStrike" kern="1200" cap="none" spc="0" normalizeH="0" baseline="0" noProof="0" dirty="0">
                 <a:ln>
                   <a:noFill/>
                 </a:ln>
@@ -4739,9 +4751,9 @@
                 <a:ea typeface="楷体" panose="02010609060101010101" pitchFamily="49" charset="-122"/>
                 <a:cs typeface="+mn-cs"/>
               </a:rPr>
-              <a:t>小时</a:t>
-            </a:r>
-            <a:endParaRPr kumimoji="0" lang="en-US" altLang="zh-CN" sz="4000" b="1" i="0" u="sng" strike="noStrike" kern="1200" cap="none" spc="0" normalizeH="0" baseline="0" noProof="0" dirty="0">
+              <a:t>期间可以休息</a:t>
+            </a:r>
+            <a:endParaRPr kumimoji="0" lang="en-US" altLang="zh-CN" sz="4000" i="0" strike="noStrike" kern="1200" cap="none" spc="0" normalizeH="0" baseline="0" noProof="0" dirty="0">
               <a:ln>
                 <a:noFill/>
               </a:ln>
@@ -4775,6 +4787,16 @@
               <a:defRPr/>
             </a:pPr>
             <a:r>
+              <a:rPr lang="zh-CN" altLang="en-US" sz="4000" dirty="0">
+                <a:solidFill>
+                  <a:prstClr val="black"/>
+                </a:solidFill>
+                <a:latin typeface="楷体" panose="02010609060101010101" pitchFamily="49" charset="-122"/>
+                <a:ea typeface="楷体" panose="02010609060101010101" pitchFamily="49" charset="-122"/>
+              </a:rPr>
+              <a:t>认真完成实验，</a:t>
+            </a:r>
+            <a:r>
               <a:rPr kumimoji="0" lang="zh-CN" altLang="en-US" sz="4000" b="0" i="0" u="none" strike="noStrike" kern="1200" cap="none" spc="0" normalizeH="0" baseline="0" noProof="0" dirty="0">
                 <a:ln>
                   <a:noFill/>
@@ -4789,61 +4811,20 @@
                 <a:ea typeface="楷体" panose="02010609060101010101" pitchFamily="49" charset="-122"/>
                 <a:cs typeface="+mn-cs"/>
               </a:rPr>
-              <a:t>正式实验约</a:t>
-            </a:r>
-            <a:r>
-              <a:rPr kumimoji="0" lang="en-US" altLang="zh-CN" sz="4000" b="0" i="0" u="none" strike="noStrike" kern="1200" cap="none" spc="0" normalizeH="0" baseline="0" noProof="0" dirty="0">
-                <a:ln>
-                  <a:noFill/>
-                </a:ln>
-                <a:solidFill>
-                  <a:prstClr val="black"/>
-                </a:solidFill>
-                <a:effectLst/>
-                <a:uLnTx/>
-                <a:uFillTx/>
-                <a:latin typeface="楷体" panose="02010609060101010101" pitchFamily="49" charset="-122"/>
-                <a:ea typeface="楷体" panose="02010609060101010101" pitchFamily="49" charset="-122"/>
-                <a:cs typeface="+mn-cs"/>
-              </a:rPr>
-              <a:t>1</a:t>
-            </a:r>
-            <a:r>
-              <a:rPr kumimoji="0" lang="zh-CN" altLang="en-US" sz="4000" b="0" i="0" u="none" strike="noStrike" kern="1200" cap="none" spc="0" normalizeH="0" baseline="0" noProof="0" dirty="0">
-                <a:ln>
-                  <a:noFill/>
-                </a:ln>
-                <a:solidFill>
-                  <a:prstClr val="black"/>
-                </a:solidFill>
-                <a:effectLst/>
-                <a:uLnTx/>
-                <a:uFillTx/>
-                <a:latin typeface="楷体" panose="02010609060101010101" pitchFamily="49" charset="-122"/>
-                <a:ea typeface="楷体" panose="02010609060101010101" pitchFamily="49" charset="-122"/>
-                <a:cs typeface="+mn-cs"/>
-              </a:rPr>
-              <a:t>个小时，平均可获</a:t>
-            </a:r>
-            <a:r>
-              <a:rPr kumimoji="0" lang="en-US" altLang="zh-CN" sz="4000" b="0" i="0" u="none" strike="noStrike" kern="1200" cap="none" spc="0" normalizeH="0" baseline="0" noProof="0" dirty="0">
-                <a:ln>
-                  <a:noFill/>
-                </a:ln>
-                <a:solidFill>
-                  <a:prstClr val="black"/>
-                </a:solidFill>
-                <a:effectLst/>
-                <a:uLnTx/>
-                <a:uFillTx/>
-                <a:latin typeface="楷体" panose="02010609060101010101" pitchFamily="49" charset="-122"/>
-                <a:ea typeface="楷体" panose="02010609060101010101" pitchFamily="49" charset="-122"/>
-                <a:cs typeface="+mn-cs"/>
-              </a:rPr>
-              <a:t>50</a:t>
-            </a:r>
-            <a:r>
-              <a:rPr kumimoji="0" lang="zh-CN" altLang="en-US" sz="4000" b="0" i="0" u="none" strike="noStrike" kern="1200" cap="none" spc="0" normalizeH="0" baseline="0" noProof="0" dirty="0">
+              <a:t>平均可获</a:t>
+            </a:r>
+            <a:r>
+              <a:rPr lang="en-US" altLang="zh-CN" sz="4000" dirty="0">
+                <a:solidFill>
+                  <a:prstClr val="black"/>
+                </a:solidFill>
+                <a:latin typeface="楷体" panose="02010609060101010101" pitchFamily="49" charset="-122"/>
+                <a:ea typeface="楷体" panose="02010609060101010101" pitchFamily="49" charset="-122"/>
+              </a:rPr>
+              <a:t>75</a:t>
+            </a:r>
+            <a:r>
+              <a:rPr kumimoji="0" lang="zh-CN" altLang="en-US" sz="4000" b="0" i="0" u="none" strike="noStrike" kern="1200" cap="none" spc="0" normalizeH="0" baseline="0" noProof="0">
                 <a:ln>
                   <a:noFill/>
                 </a:ln>
@@ -8527,35 +8508,27 @@
               <a:t>”</a:t>
             </a:r>
             <a:r>
-              <a:rPr kumimoji="0" lang="zh-CN" altLang="en-US" sz="2800" b="1" i="0" u="none" strike="noStrike" kern="1200" cap="none" spc="0" normalizeH="0" baseline="0" noProof="0" dirty="0">
-                <a:ln>
-                  <a:noFill/>
-                </a:ln>
-                <a:solidFill>
-                  <a:srgbClr val="FF0000"/>
-                </a:solidFill>
-                <a:effectLst/>
-                <a:uLnTx/>
-                <a:uFillTx/>
-                <a:latin typeface="黑体" panose="02010609060101010101" pitchFamily="49" charset="-122"/>
-                <a:ea typeface="黑体" panose="02010609060101010101" pitchFamily="49" charset="-122"/>
-                <a:cs typeface="+mn-cs"/>
-              </a:rPr>
-              <a:t>开始</a:t>
-            </a:r>
-            <a:endParaRPr kumimoji="0" lang="zh-CN" altLang="en-US" sz="1200" b="1" i="0" u="none" strike="noStrike" kern="1200" cap="none" spc="0" normalizeH="0" baseline="0" noProof="0" dirty="0">
+              <a:rPr kumimoji="0" lang="zh-CN" altLang="en-US" sz="2800" i="0" u="none" strike="noStrike" kern="1200" cap="none" spc="0" normalizeH="0" baseline="0" noProof="0" dirty="0">
+                <a:ln>
+                  <a:noFill/>
+                </a:ln>
+                <a:effectLst/>
+                <a:uLnTx/>
+                <a:uFillTx/>
+                <a:latin typeface="楷体" panose="02010609060101010101" pitchFamily="49" charset="-122"/>
+                <a:ea typeface="楷体" panose="02010609060101010101" pitchFamily="49" charset="-122"/>
+              </a:rPr>
+              <a:t>继续</a:t>
+            </a:r>
+            <a:endParaRPr kumimoji="0" lang="zh-CN" altLang="en-US" sz="1200" i="0" u="none" strike="noStrike" kern="1200" cap="none" spc="0" normalizeH="0" baseline="0" noProof="0" dirty="0">
               <a:ln>
                 <a:noFill/>
               </a:ln>
-              <a:solidFill>
-                <a:srgbClr val="FF0000"/>
-              </a:solidFill>
               <a:effectLst/>
               <a:uLnTx/>
               <a:uFillTx/>
-              <a:latin typeface="黑体" panose="02010609060101010101" pitchFamily="49" charset="-122"/>
-              <a:ea typeface="黑体" panose="02010609060101010101" pitchFamily="49" charset="-122"/>
-              <a:cs typeface="+mn-cs"/>
+              <a:latin typeface="楷体" panose="02010609060101010101" pitchFamily="49" charset="-122"/>
+              <a:ea typeface="楷体" panose="02010609060101010101" pitchFamily="49" charset="-122"/>
             </a:endParaRPr>
           </a:p>
         </p:txBody>
@@ -8598,6 +8571,778 @@
     </p:spTree>
     <p:extLst>
       <p:ext uri="{BB962C8B-B14F-4D97-AF65-F5344CB8AC3E}">
+        <p14:creationId xmlns:p14="http://schemas.microsoft.com/office/powerpoint/2010/main" val="1658203442"/>
+      </p:ext>
+    </p:extLst>
+  </p:cSld>
+  <p:clrMapOvr>
+    <a:masterClrMapping/>
+  </p:clrMapOvr>
+</p:sld>
+</file>
+
+<file path=ppt/slides/slide14.xml><?xml version="1.0" encoding="utf-8"?>
+<p:sld xmlns:a="http://schemas.openxmlformats.org/drawingml/2006/main" xmlns:r="http://schemas.openxmlformats.org/officeDocument/2006/relationships" xmlns:p="http://schemas.openxmlformats.org/presentationml/2006/main">
+  <p:cSld>
+    <p:bg>
+      <p:bgPr>
+        <a:solidFill>
+          <a:schemeClr val="tx1">
+            <a:lumMod val="50000"/>
+            <a:lumOff val="50000"/>
+          </a:schemeClr>
+        </a:solidFill>
+        <a:effectLst/>
+      </p:bgPr>
+    </p:bg>
+    <p:spTree>
+      <p:nvGrpSpPr>
+        <p:cNvPr id="1" name="">
+          <a:extLst>
+            <a:ext uri="{FF2B5EF4-FFF2-40B4-BE49-F238E27FC236}">
+              <a16:creationId xmlns:a16="http://schemas.microsoft.com/office/drawing/2014/main" id="{88D91545-4F1F-9411-2960-5739C3EFA610}"/>
+            </a:ext>
+          </a:extLst>
+        </p:cNvPr>
+        <p:cNvGrpSpPr/>
+        <p:nvPr/>
+      </p:nvGrpSpPr>
+      <p:grpSpPr>
+        <a:xfrm>
+          <a:off x="0" y="0"/>
+          <a:ext cx="0" cy="0"/>
+          <a:chOff x="0" y="0"/>
+          <a:chExt cx="0" cy="0"/>
+        </a:xfrm>
+      </p:grpSpPr>
+      <p:sp>
+        <p:nvSpPr>
+          <p:cNvPr id="4" name="文本框 3">
+            <a:extLst>
+              <a:ext uri="{FF2B5EF4-FFF2-40B4-BE49-F238E27FC236}">
+                <a16:creationId xmlns:a16="http://schemas.microsoft.com/office/drawing/2014/main" id="{4C19970D-795F-8CA4-674B-CE3516C7E879}"/>
+              </a:ext>
+            </a:extLst>
+          </p:cNvPr>
+          <p:cNvSpPr txBox="1"/>
+          <p:nvPr/>
+        </p:nvSpPr>
+        <p:spPr>
+          <a:xfrm>
+            <a:off x="2729049" y="515981"/>
+            <a:ext cx="6733902" cy="923330"/>
+          </a:xfrm>
+          <a:prstGeom prst="rect">
+            <a:avLst/>
+          </a:prstGeom>
+          <a:noFill/>
+        </p:spPr>
+        <p:txBody>
+          <a:bodyPr wrap="square" rtlCol="0">
+            <a:spAutoFit/>
+          </a:bodyPr>
+          <a:lstStyle/>
+          <a:p>
+            <a:pPr marL="0" marR="0" lvl="0" indent="0" algn="ctr" defTabSz="914400" rtl="0" eaLnBrk="1" fontAlgn="auto" latinLnBrk="0" hangingPunct="1">
+              <a:lnSpc>
+                <a:spcPct val="100000"/>
+              </a:lnSpc>
+              <a:spcBef>
+                <a:spcPts val="0"/>
+              </a:spcBef>
+              <a:spcAft>
+                <a:spcPts val="0"/>
+              </a:spcAft>
+              <a:buClrTx/>
+              <a:buSzTx/>
+              <a:buFontTx/>
+              <a:buNone/>
+              <a:tabLst/>
+              <a:defRPr/>
+            </a:pPr>
+            <a:r>
+              <a:rPr kumimoji="0" lang="zh-CN" altLang="en-US" sz="5400" b="0" i="0" u="none" strike="noStrike" kern="1200" cap="none" spc="0" normalizeH="0" baseline="0" noProof="0" dirty="0">
+                <a:ln>
+                  <a:noFill/>
+                </a:ln>
+                <a:solidFill>
+                  <a:prstClr val="black"/>
+                </a:solidFill>
+                <a:effectLst/>
+                <a:uLnTx/>
+                <a:uFillTx/>
+                <a:latin typeface="楷体" panose="02010609060101010101" pitchFamily="49" charset="-122"/>
+                <a:ea typeface="楷体" panose="02010609060101010101" pitchFamily="49" charset="-122"/>
+                <a:cs typeface="+mn-cs"/>
+              </a:rPr>
+              <a:t>正式实验</a:t>
+            </a:r>
+          </a:p>
+        </p:txBody>
+      </p:sp>
+      <p:sp>
+        <p:nvSpPr>
+          <p:cNvPr id="6" name="文本框 5">
+            <a:extLst>
+              <a:ext uri="{FF2B5EF4-FFF2-40B4-BE49-F238E27FC236}">
+                <a16:creationId xmlns:a16="http://schemas.microsoft.com/office/drawing/2014/main" id="{BCBF8823-E7CD-5669-CB54-04211FDD59C1}"/>
+              </a:ext>
+            </a:extLst>
+          </p:cNvPr>
+          <p:cNvSpPr txBox="1"/>
+          <p:nvPr/>
+        </p:nvSpPr>
+        <p:spPr>
+          <a:xfrm>
+            <a:off x="1037571" y="1612442"/>
+            <a:ext cx="10504571" cy="4152099"/>
+          </a:xfrm>
+          <a:prstGeom prst="rect">
+            <a:avLst/>
+          </a:prstGeom>
+          <a:noFill/>
+        </p:spPr>
+        <p:txBody>
+          <a:bodyPr wrap="square" rtlCol="0">
+            <a:spAutoFit/>
+          </a:bodyPr>
+          <a:lstStyle/>
+          <a:p>
+            <a:pPr marL="685800" lvl="0" indent="-685800">
+              <a:lnSpc>
+                <a:spcPct val="125000"/>
+              </a:lnSpc>
+              <a:buFont typeface="Wingdings" panose="05000000000000000000" pitchFamily="2" charset="2"/>
+              <a:buChar char="p"/>
+              <a:defRPr/>
+            </a:pPr>
+            <a:r>
+              <a:rPr kumimoji="0" lang="zh-CN" altLang="en-US" sz="3600" b="0" i="0" u="none" strike="noStrike" kern="1200" cap="none" spc="0" normalizeH="0" baseline="0" noProof="0" dirty="0">
+                <a:ln>
+                  <a:noFill/>
+                </a:ln>
+                <a:solidFill>
+                  <a:prstClr val="black"/>
+                </a:solidFill>
+                <a:effectLst/>
+                <a:uLnTx/>
+                <a:uFillTx/>
+                <a:latin typeface="楷体" panose="02010609060101010101" pitchFamily="49" charset="-122"/>
+                <a:ea typeface="楷体" panose="02010609060101010101" pitchFamily="49" charset="-122"/>
+                <a:cs typeface="+mn-cs"/>
+              </a:rPr>
+              <a:t>小光斑颜色会</a:t>
+            </a:r>
+            <a:r>
+              <a:rPr kumimoji="0" lang="zh-CN" altLang="en-US" sz="3600" b="1" i="0" u="none" strike="noStrike" kern="1200" cap="none" spc="0" normalizeH="0" baseline="0" noProof="0" dirty="0">
+                <a:ln>
+                  <a:noFill/>
+                </a:ln>
+                <a:solidFill>
+                  <a:prstClr val="black"/>
+                </a:solidFill>
+                <a:effectLst/>
+                <a:uLnTx/>
+                <a:uFillTx/>
+                <a:latin typeface="楷体" panose="02010609060101010101" pitchFamily="49" charset="-122"/>
+                <a:ea typeface="楷体" panose="02010609060101010101" pitchFamily="49" charset="-122"/>
+                <a:cs typeface="+mn-cs"/>
+              </a:rPr>
+              <a:t>变淡</a:t>
+            </a:r>
+            <a:r>
+              <a:rPr kumimoji="0" lang="zh-CN" altLang="en-US" sz="3600" b="0" i="0" u="none" strike="noStrike" kern="1200" cap="none" spc="0" normalizeH="0" baseline="0" noProof="0" dirty="0">
+                <a:ln>
+                  <a:noFill/>
+                </a:ln>
+                <a:solidFill>
+                  <a:prstClr val="black"/>
+                </a:solidFill>
+                <a:effectLst/>
+                <a:uLnTx/>
+                <a:uFillTx/>
+                <a:latin typeface="楷体" panose="02010609060101010101" pitchFamily="49" charset="-122"/>
+                <a:ea typeface="楷体" panose="02010609060101010101" pitchFamily="49" charset="-122"/>
+                <a:cs typeface="+mn-cs"/>
+              </a:rPr>
+              <a:t>从而提高难度，但是</a:t>
+            </a:r>
+            <a:r>
+              <a:rPr kumimoji="0" lang="zh-CN" altLang="en-US" sz="3600" b="1" i="0" u="none" strike="noStrike" kern="1200" cap="none" spc="0" normalizeH="0" baseline="0" noProof="0" dirty="0">
+                <a:ln>
+                  <a:noFill/>
+                </a:ln>
+                <a:solidFill>
+                  <a:prstClr val="black"/>
+                </a:solidFill>
+                <a:effectLst/>
+                <a:uLnTx/>
+                <a:uFillTx/>
+                <a:latin typeface="楷体" panose="02010609060101010101" pitchFamily="49" charset="-122"/>
+                <a:ea typeface="楷体" panose="02010609060101010101" pitchFamily="49" charset="-122"/>
+                <a:cs typeface="+mn-cs"/>
+              </a:rPr>
+              <a:t>形状、大小、纹理</a:t>
+            </a:r>
+            <a:r>
+              <a:rPr kumimoji="0" lang="zh-CN" altLang="en-US" sz="3600" b="0" i="0" u="none" strike="noStrike" kern="1200" cap="none" spc="0" normalizeH="0" baseline="0" noProof="0" dirty="0">
+                <a:ln>
+                  <a:noFill/>
+                </a:ln>
+                <a:solidFill>
+                  <a:prstClr val="black"/>
+                </a:solidFill>
+                <a:effectLst/>
+                <a:uLnTx/>
+                <a:uFillTx/>
+                <a:latin typeface="楷体" panose="02010609060101010101" pitchFamily="49" charset="-122"/>
+                <a:ea typeface="楷体" panose="02010609060101010101" pitchFamily="49" charset="-122"/>
+                <a:cs typeface="+mn-cs"/>
+              </a:rPr>
+              <a:t>都不会变，请确认找到再按键。</a:t>
+            </a:r>
+            <a:endParaRPr lang="en-US" altLang="zh-CN" sz="3600" dirty="0">
+              <a:solidFill>
+                <a:prstClr val="black"/>
+              </a:solidFill>
+              <a:latin typeface="楷体" panose="02010609060101010101" pitchFamily="49" charset="-122"/>
+              <a:ea typeface="楷体" panose="02010609060101010101" pitchFamily="49" charset="-122"/>
+            </a:endParaRPr>
+          </a:p>
+          <a:p>
+            <a:pPr marL="685800" lvl="0" indent="-685800">
+              <a:lnSpc>
+                <a:spcPct val="125000"/>
+              </a:lnSpc>
+              <a:buFont typeface="Wingdings" panose="05000000000000000000" pitchFamily="2" charset="2"/>
+              <a:buChar char="p"/>
+              <a:defRPr/>
+            </a:pPr>
+            <a:r>
+              <a:rPr lang="zh-CN" altLang="en-US" sz="3600" dirty="0">
+                <a:solidFill>
+                  <a:prstClr val="black"/>
+                </a:solidFill>
+                <a:latin typeface="楷体" panose="02010609060101010101" pitchFamily="49" charset="-122"/>
+                <a:ea typeface="楷体" panose="02010609060101010101" pitchFamily="49" charset="-122"/>
+              </a:rPr>
+              <a:t>因难度提高，可能只能找到一半，</a:t>
+            </a:r>
+            <a:r>
+              <a:rPr lang="zh-CN" altLang="en-US" sz="3600" b="1" dirty="0">
+                <a:solidFill>
+                  <a:prstClr val="black"/>
+                </a:solidFill>
+                <a:latin typeface="楷体" panose="02010609060101010101" pitchFamily="49" charset="-122"/>
+                <a:ea typeface="楷体" panose="02010609060101010101" pitchFamily="49" charset="-122"/>
+              </a:rPr>
+              <a:t>这是正常的</a:t>
+            </a:r>
+            <a:r>
+              <a:rPr lang="zh-CN" altLang="en-US" sz="3600" dirty="0">
+                <a:solidFill>
+                  <a:prstClr val="black"/>
+                </a:solidFill>
+                <a:latin typeface="楷体" panose="02010609060101010101" pitchFamily="49" charset="-122"/>
+                <a:ea typeface="楷体" panose="02010609060101010101" pitchFamily="49" charset="-122"/>
+              </a:rPr>
+              <a:t>。</a:t>
+            </a:r>
+          </a:p>
+          <a:p>
+            <a:pPr marL="685800" lvl="0" indent="-685800">
+              <a:lnSpc>
+                <a:spcPct val="125000"/>
+              </a:lnSpc>
+              <a:buFont typeface="Wingdings" panose="05000000000000000000" pitchFamily="2" charset="2"/>
+              <a:buChar char="p"/>
+              <a:defRPr/>
+            </a:pPr>
+            <a:r>
+              <a:rPr lang="en-US" altLang="zh-CN" sz="3600" dirty="0">
+                <a:solidFill>
+                  <a:prstClr val="black"/>
+                </a:solidFill>
+                <a:latin typeface="楷体" panose="02010609060101010101" pitchFamily="49" charset="-122"/>
+                <a:ea typeface="楷体" panose="02010609060101010101" pitchFamily="49" charset="-122"/>
+              </a:rPr>
+              <a:t>5</a:t>
+            </a:r>
+            <a:r>
+              <a:rPr lang="zh-CN" altLang="en-US" sz="3600" dirty="0">
+                <a:solidFill>
+                  <a:prstClr val="black"/>
+                </a:solidFill>
+                <a:latin typeface="楷体" panose="02010609060101010101" pitchFamily="49" charset="-122"/>
+                <a:ea typeface="楷体" panose="02010609060101010101" pitchFamily="49" charset="-122"/>
+              </a:rPr>
+              <a:t>秒计时结束后，程序会自动帮你按下两个按键，并出现一个标记你最后注视位置的蓝点或者黄点，注意这</a:t>
+            </a:r>
+            <a:r>
+              <a:rPr lang="zh-CN" altLang="en-US" sz="3600" b="1" dirty="0">
+                <a:solidFill>
+                  <a:prstClr val="black"/>
+                </a:solidFill>
+                <a:latin typeface="楷体" panose="02010609060101010101" pitchFamily="49" charset="-122"/>
+                <a:ea typeface="楷体" panose="02010609060101010101" pitchFamily="49" charset="-122"/>
+              </a:rPr>
+              <a:t>不是答案</a:t>
+            </a:r>
+            <a:r>
+              <a:rPr lang="zh-CN" altLang="en-US" sz="3600" dirty="0">
+                <a:solidFill>
+                  <a:prstClr val="black"/>
+                </a:solidFill>
+                <a:latin typeface="楷体" panose="02010609060101010101" pitchFamily="49" charset="-122"/>
+                <a:ea typeface="楷体" panose="02010609060101010101" pitchFamily="49" charset="-122"/>
+              </a:rPr>
+              <a:t>位置。</a:t>
+            </a:r>
+            <a:endParaRPr lang="en-US" altLang="zh-CN" sz="3600" dirty="0">
+              <a:solidFill>
+                <a:prstClr val="black"/>
+              </a:solidFill>
+              <a:latin typeface="楷体" panose="02010609060101010101" pitchFamily="49" charset="-122"/>
+              <a:ea typeface="楷体" panose="02010609060101010101" pitchFamily="49" charset="-122"/>
+            </a:endParaRPr>
+          </a:p>
+        </p:txBody>
+      </p:sp>
+      <p:sp>
+        <p:nvSpPr>
+          <p:cNvPr id="7" name="椭圆 6">
+            <a:extLst>
+              <a:ext uri="{FF2B5EF4-FFF2-40B4-BE49-F238E27FC236}">
+                <a16:creationId xmlns:a16="http://schemas.microsoft.com/office/drawing/2014/main" id="{0C58A188-F879-48FC-4777-4ABD0F9204F7}"/>
+              </a:ext>
+            </a:extLst>
+          </p:cNvPr>
+          <p:cNvSpPr/>
+          <p:nvPr/>
+        </p:nvSpPr>
+        <p:spPr>
+          <a:xfrm>
+            <a:off x="8948060" y="5051714"/>
+            <a:ext cx="306977" cy="306977"/>
+          </a:xfrm>
+          <a:prstGeom prst="ellipse">
+            <a:avLst/>
+          </a:prstGeom>
+          <a:solidFill>
+            <a:srgbClr val="0070C0"/>
+          </a:solidFill>
+          <a:ln>
+            <a:noFill/>
+          </a:ln>
+        </p:spPr>
+        <p:style>
+          <a:lnRef idx="2">
+            <a:schemeClr val="accent1">
+              <a:shade val="15000"/>
+            </a:schemeClr>
+          </a:lnRef>
+          <a:fillRef idx="1">
+            <a:schemeClr val="accent1"/>
+          </a:fillRef>
+          <a:effectRef idx="0">
+            <a:schemeClr val="accent1"/>
+          </a:effectRef>
+          <a:fontRef idx="minor">
+            <a:schemeClr val="lt1"/>
+          </a:fontRef>
+        </p:style>
+        <p:txBody>
+          <a:bodyPr rtlCol="0" anchor="ctr"/>
+          <a:lstStyle/>
+          <a:p>
+            <a:pPr marL="0" marR="0" lvl="0" indent="0" algn="ctr" defTabSz="914400" rtl="0" eaLnBrk="1" fontAlgn="auto" latinLnBrk="0" hangingPunct="1">
+              <a:lnSpc>
+                <a:spcPct val="100000"/>
+              </a:lnSpc>
+              <a:spcBef>
+                <a:spcPts val="0"/>
+              </a:spcBef>
+              <a:spcAft>
+                <a:spcPts val="0"/>
+              </a:spcAft>
+              <a:buClrTx/>
+              <a:buSzTx/>
+              <a:buFontTx/>
+              <a:buNone/>
+              <a:tabLst/>
+              <a:defRPr/>
+            </a:pPr>
+            <a:endParaRPr kumimoji="0" lang="zh-CN" altLang="en-US" sz="1800" b="0" i="0" u="none" strike="noStrike" kern="1200" cap="none" spc="0" normalizeH="0" baseline="0" noProof="0">
+              <a:ln>
+                <a:noFill/>
+              </a:ln>
+              <a:solidFill>
+                <a:prstClr val="white"/>
+              </a:solidFill>
+              <a:effectLst/>
+              <a:uLnTx/>
+              <a:uFillTx/>
+              <a:latin typeface="等线" panose="02110004020202020204"/>
+              <a:ea typeface="等线" panose="02010600030101010101" pitchFamily="2" charset="-122"/>
+              <a:cs typeface="+mn-cs"/>
+            </a:endParaRPr>
+          </a:p>
+        </p:txBody>
+      </p:sp>
+      <p:sp>
+        <p:nvSpPr>
+          <p:cNvPr id="2" name="矩形: 圆角 1">
+            <a:extLst>
+              <a:ext uri="{FF2B5EF4-FFF2-40B4-BE49-F238E27FC236}">
+                <a16:creationId xmlns:a16="http://schemas.microsoft.com/office/drawing/2014/main" id="{EBCB5E52-C679-1B08-ED22-E1B50D22AA03}"/>
+              </a:ext>
+            </a:extLst>
+          </p:cNvPr>
+          <p:cNvSpPr/>
+          <p:nvPr/>
+        </p:nvSpPr>
+        <p:spPr>
+          <a:xfrm>
+            <a:off x="9255037" y="6115676"/>
+            <a:ext cx="2481943" cy="509451"/>
+          </a:xfrm>
+          <a:prstGeom prst="roundRect">
+            <a:avLst/>
+          </a:prstGeom>
+          <a:solidFill>
+            <a:schemeClr val="tx1"/>
+          </a:solidFill>
+          <a:ln>
+            <a:noFill/>
+          </a:ln>
+          <a:scene3d>
+            <a:camera prst="orthographicFront"/>
+            <a:lightRig rig="threePt" dir="t"/>
+          </a:scene3d>
+          <a:sp3d>
+            <a:bevelT/>
+          </a:sp3d>
+        </p:spPr>
+        <p:style>
+          <a:lnRef idx="2">
+            <a:schemeClr val="accent1">
+              <a:shade val="15000"/>
+            </a:schemeClr>
+          </a:lnRef>
+          <a:fillRef idx="1">
+            <a:schemeClr val="accent1"/>
+          </a:fillRef>
+          <a:effectRef idx="0">
+            <a:schemeClr val="accent1"/>
+          </a:effectRef>
+          <a:fontRef idx="minor">
+            <a:schemeClr val="lt1"/>
+          </a:fontRef>
+        </p:style>
+        <p:txBody>
+          <a:bodyPr rtlCol="0" anchor="ctr"/>
+          <a:lstStyle/>
+          <a:p>
+            <a:pPr marL="0" marR="0" lvl="0" indent="0" algn="ctr" defTabSz="914400" rtl="0" eaLnBrk="1" fontAlgn="auto" latinLnBrk="0" hangingPunct="1">
+              <a:lnSpc>
+                <a:spcPct val="100000"/>
+              </a:lnSpc>
+              <a:spcBef>
+                <a:spcPts val="0"/>
+              </a:spcBef>
+              <a:spcAft>
+                <a:spcPts val="0"/>
+              </a:spcAft>
+              <a:buClrTx/>
+              <a:buSzTx/>
+              <a:buFontTx/>
+              <a:buNone/>
+              <a:tabLst/>
+              <a:defRPr/>
+            </a:pPr>
+            <a:r>
+              <a:rPr kumimoji="0" lang="en-US" altLang="zh-CN" sz="1800" b="1" i="0" u="none" strike="noStrike" kern="1200" cap="none" spc="0" normalizeH="0" baseline="0" noProof="0" dirty="0">
+                <a:ln>
+                  <a:noFill/>
+                </a:ln>
+                <a:solidFill>
+                  <a:prstClr val="white"/>
+                </a:solidFill>
+                <a:effectLst/>
+                <a:uLnTx/>
+                <a:uFillTx/>
+                <a:latin typeface="等线" panose="02110004020202020204"/>
+                <a:ea typeface="等线" panose="02010600030101010101" pitchFamily="2" charset="-122"/>
+                <a:cs typeface="+mn-cs"/>
+              </a:rPr>
+              <a:t>space</a:t>
+            </a:r>
+            <a:endParaRPr kumimoji="0" lang="zh-CN" altLang="en-US" sz="1800" b="1" i="0" u="none" strike="noStrike" kern="1200" cap="none" spc="0" normalizeH="0" baseline="0" noProof="0" dirty="0">
+              <a:ln>
+                <a:noFill/>
+              </a:ln>
+              <a:solidFill>
+                <a:prstClr val="white"/>
+              </a:solidFill>
+              <a:effectLst/>
+              <a:uLnTx/>
+              <a:uFillTx/>
+              <a:latin typeface="等线" panose="02110004020202020204"/>
+              <a:ea typeface="等线" panose="02010600030101010101" pitchFamily="2" charset="-122"/>
+              <a:cs typeface="+mn-cs"/>
+            </a:endParaRPr>
+          </a:p>
+        </p:txBody>
+      </p:sp>
+      <p:sp>
+        <p:nvSpPr>
+          <p:cNvPr id="3" name="文本框 2">
+            <a:extLst>
+              <a:ext uri="{FF2B5EF4-FFF2-40B4-BE49-F238E27FC236}">
+                <a16:creationId xmlns:a16="http://schemas.microsoft.com/office/drawing/2014/main" id="{228665A7-B7D3-D636-B10E-1E9DE83C5995}"/>
+              </a:ext>
+            </a:extLst>
+          </p:cNvPr>
+          <p:cNvSpPr txBox="1"/>
+          <p:nvPr/>
+        </p:nvSpPr>
+        <p:spPr>
+          <a:xfrm>
+            <a:off x="5889913" y="6080409"/>
+            <a:ext cx="3132908" cy="523220"/>
+          </a:xfrm>
+          <a:prstGeom prst="rect">
+            <a:avLst/>
+          </a:prstGeom>
+          <a:noFill/>
+        </p:spPr>
+        <p:txBody>
+          <a:bodyPr wrap="square">
+            <a:spAutoFit/>
+          </a:bodyPr>
+          <a:lstStyle/>
+          <a:p>
+            <a:pPr marL="0" marR="0" lvl="0" indent="0" algn="ctr" defTabSz="914400" rtl="0" eaLnBrk="1" fontAlgn="auto" latinLnBrk="0" hangingPunct="1">
+              <a:lnSpc>
+                <a:spcPct val="100000"/>
+              </a:lnSpc>
+              <a:spcBef>
+                <a:spcPts val="0"/>
+              </a:spcBef>
+              <a:spcAft>
+                <a:spcPts val="0"/>
+              </a:spcAft>
+              <a:buClrTx/>
+              <a:buSzTx/>
+              <a:buFontTx/>
+              <a:buNone/>
+              <a:tabLst/>
+              <a:defRPr/>
+            </a:pPr>
+            <a:r>
+              <a:rPr kumimoji="0" lang="zh-CN" altLang="en-US" sz="2800" b="0" i="0" u="none" strike="noStrike" kern="1200" cap="none" spc="0" normalizeH="0" baseline="0" noProof="0" dirty="0">
+                <a:ln>
+                  <a:noFill/>
+                </a:ln>
+                <a:solidFill>
+                  <a:prstClr val="black"/>
+                </a:solidFill>
+                <a:effectLst/>
+                <a:uLnTx/>
+                <a:uFillTx/>
+                <a:latin typeface="楷体" panose="02010609060101010101" pitchFamily="49" charset="-122"/>
+                <a:ea typeface="楷体" panose="02010609060101010101" pitchFamily="49" charset="-122"/>
+                <a:cs typeface="+mn-cs"/>
+              </a:rPr>
+              <a:t>按“</a:t>
+            </a:r>
+            <a:r>
+              <a:rPr kumimoji="0" lang="zh-CN" altLang="en-US" sz="2800" b="1" i="0" u="sng" strike="noStrike" kern="1200" cap="none" spc="0" normalizeH="0" baseline="0" noProof="0" dirty="0">
+                <a:ln>
+                  <a:noFill/>
+                </a:ln>
+                <a:solidFill>
+                  <a:prstClr val="black"/>
+                </a:solidFill>
+                <a:effectLst/>
+                <a:uLnTx/>
+                <a:uFillTx/>
+                <a:latin typeface="楷体" panose="02010609060101010101" pitchFamily="49" charset="-122"/>
+                <a:ea typeface="楷体" panose="02010609060101010101" pitchFamily="49" charset="-122"/>
+                <a:cs typeface="+mn-cs"/>
+              </a:rPr>
+              <a:t>空格键</a:t>
+            </a:r>
+            <a:r>
+              <a:rPr kumimoji="0" lang="zh-CN" altLang="en-US" sz="2800" b="0" i="0" u="none" strike="noStrike" kern="1200" cap="none" spc="0" normalizeH="0" baseline="0" noProof="0" dirty="0">
+                <a:ln>
+                  <a:noFill/>
+                </a:ln>
+                <a:solidFill>
+                  <a:prstClr val="black"/>
+                </a:solidFill>
+                <a:effectLst/>
+                <a:uLnTx/>
+                <a:uFillTx/>
+                <a:latin typeface="楷体" panose="02010609060101010101" pitchFamily="49" charset="-122"/>
+                <a:ea typeface="楷体" panose="02010609060101010101" pitchFamily="49" charset="-122"/>
+                <a:cs typeface="+mn-cs"/>
+              </a:rPr>
+              <a:t>”</a:t>
+            </a:r>
+            <a:r>
+              <a:rPr kumimoji="0" lang="zh-CN" altLang="en-US" sz="2800" b="1" i="0" u="none" strike="noStrike" kern="1200" cap="none" spc="0" normalizeH="0" baseline="0" noProof="0" dirty="0">
+                <a:ln>
+                  <a:noFill/>
+                </a:ln>
+                <a:solidFill>
+                  <a:srgbClr val="FF0000"/>
+                </a:solidFill>
+                <a:effectLst/>
+                <a:uLnTx/>
+                <a:uFillTx/>
+                <a:latin typeface="黑体" panose="02010609060101010101" pitchFamily="49" charset="-122"/>
+                <a:ea typeface="黑体" panose="02010609060101010101" pitchFamily="49" charset="-122"/>
+                <a:cs typeface="+mn-cs"/>
+              </a:rPr>
+              <a:t>开始</a:t>
+            </a:r>
+            <a:endParaRPr kumimoji="0" lang="zh-CN" altLang="en-US" sz="1200" b="1" i="0" u="none" strike="noStrike" kern="1200" cap="none" spc="0" normalizeH="0" baseline="0" noProof="0" dirty="0">
+              <a:ln>
+                <a:noFill/>
+              </a:ln>
+              <a:solidFill>
+                <a:srgbClr val="FF0000"/>
+              </a:solidFill>
+              <a:effectLst/>
+              <a:uLnTx/>
+              <a:uFillTx/>
+              <a:latin typeface="黑体" panose="02010609060101010101" pitchFamily="49" charset="-122"/>
+              <a:ea typeface="黑体" panose="02010609060101010101" pitchFamily="49" charset="-122"/>
+              <a:cs typeface="+mn-cs"/>
+            </a:endParaRPr>
+          </a:p>
+        </p:txBody>
+      </p:sp>
+      <p:pic>
+        <p:nvPicPr>
+          <p:cNvPr id="5" name="图片 4" descr="卡通人物&#10;&#10;低可信度描述已自动生成">
+            <a:extLst>
+              <a:ext uri="{FF2B5EF4-FFF2-40B4-BE49-F238E27FC236}">
+                <a16:creationId xmlns:a16="http://schemas.microsoft.com/office/drawing/2014/main" id="{37F18B09-1B83-9ABE-94DC-CBDE5C0123A6}"/>
+              </a:ext>
+            </a:extLst>
+          </p:cNvPr>
+          <p:cNvPicPr>
+            <a:picLocks noChangeAspect="1"/>
+          </p:cNvPicPr>
+          <p:nvPr/>
+        </p:nvPicPr>
+        <p:blipFill>
+          <a:blip r:embed="rId2" cstate="hqprint">
+            <a:extLst>
+              <a:ext uri="{28A0092B-C50C-407E-A947-70E740481C1C}">
+                <a14:useLocalDpi xmlns:a14="http://schemas.microsoft.com/office/drawing/2010/main"/>
+              </a:ext>
+            </a:extLst>
+          </a:blip>
+          <a:srcRect/>
+          <a:stretch/>
+        </p:blipFill>
+        <p:spPr>
+          <a:xfrm>
+            <a:off x="9885999" y="2379054"/>
+            <a:ext cx="610009" cy="596751"/>
+          </a:xfrm>
+          <a:prstGeom prst="rect">
+            <a:avLst/>
+          </a:prstGeom>
+        </p:spPr>
+      </p:pic>
+      <p:sp>
+        <p:nvSpPr>
+          <p:cNvPr id="8" name="椭圆 7">
+            <a:extLst>
+              <a:ext uri="{FF2B5EF4-FFF2-40B4-BE49-F238E27FC236}">
+                <a16:creationId xmlns:a16="http://schemas.microsoft.com/office/drawing/2014/main" id="{EC82AC17-D982-6541-EF21-BD63B32FB9D6}"/>
+              </a:ext>
+            </a:extLst>
+          </p:cNvPr>
+          <p:cNvSpPr/>
+          <p:nvPr/>
+        </p:nvSpPr>
+        <p:spPr>
+          <a:xfrm>
+            <a:off x="10847452" y="5051714"/>
+            <a:ext cx="306977" cy="306977"/>
+          </a:xfrm>
+          <a:prstGeom prst="ellipse">
+            <a:avLst/>
+          </a:prstGeom>
+          <a:solidFill>
+            <a:srgbClr val="FFC000"/>
+          </a:solidFill>
+          <a:ln>
+            <a:noFill/>
+          </a:ln>
+        </p:spPr>
+        <p:style>
+          <a:lnRef idx="2">
+            <a:schemeClr val="accent1">
+              <a:shade val="15000"/>
+            </a:schemeClr>
+          </a:lnRef>
+          <a:fillRef idx="1">
+            <a:schemeClr val="accent1"/>
+          </a:fillRef>
+          <a:effectRef idx="0">
+            <a:schemeClr val="accent1"/>
+          </a:effectRef>
+          <a:fontRef idx="minor">
+            <a:schemeClr val="lt1"/>
+          </a:fontRef>
+        </p:style>
+        <p:txBody>
+          <a:bodyPr rtlCol="0" anchor="ctr"/>
+          <a:lstStyle/>
+          <a:p>
+            <a:pPr marL="0" marR="0" lvl="0" indent="0" algn="ctr" defTabSz="914400" rtl="0" eaLnBrk="1" fontAlgn="auto" latinLnBrk="0" hangingPunct="1">
+              <a:lnSpc>
+                <a:spcPct val="100000"/>
+              </a:lnSpc>
+              <a:spcBef>
+                <a:spcPts val="0"/>
+              </a:spcBef>
+              <a:spcAft>
+                <a:spcPts val="0"/>
+              </a:spcAft>
+              <a:buClrTx/>
+              <a:buSzTx/>
+              <a:buFontTx/>
+              <a:buNone/>
+              <a:tabLst/>
+              <a:defRPr/>
+            </a:pPr>
+            <a:endParaRPr kumimoji="0" lang="zh-CN" altLang="en-US" sz="1800" b="0" i="0" u="none" strike="noStrike" kern="1200" cap="none" spc="0" normalizeH="0" baseline="0" noProof="0">
+              <a:ln>
+                <a:noFill/>
+              </a:ln>
+              <a:solidFill>
+                <a:prstClr val="white"/>
+              </a:solidFill>
+              <a:effectLst/>
+              <a:uLnTx/>
+              <a:uFillTx/>
+              <a:latin typeface="等线" panose="02110004020202020204"/>
+              <a:ea typeface="等线" panose="02010600030101010101" pitchFamily="2" charset="-122"/>
+              <a:cs typeface="+mn-cs"/>
+            </a:endParaRPr>
+          </a:p>
+        </p:txBody>
+      </p:sp>
+    </p:spTree>
+    <p:extLst>
+      <p:ext uri="{BB962C8B-B14F-4D97-AF65-F5344CB8AC3E}">
         <p14:creationId xmlns:p14="http://schemas.microsoft.com/office/powerpoint/2010/main" val="2115238071"/>
       </p:ext>
     </p:extLst>
@@ -8608,7 +9353,7 @@
 </p:sld>
 </file>
 
-<file path=ppt/slides/slide14.xml><?xml version="1.0" encoding="utf-8"?>
+<file path=ppt/slides/slide15.xml><?xml version="1.0" encoding="utf-8"?>
 <p:sld xmlns:a="http://schemas.openxmlformats.org/drawingml/2006/main" xmlns:r="http://schemas.openxmlformats.org/officeDocument/2006/relationships" xmlns:p="http://schemas.openxmlformats.org/presentationml/2006/main">
   <p:cSld>
     <p:bg>
@@ -8924,7 +9669,7 @@
 </p:sld>
 </file>
 
-<file path=ppt/slides/slide15.xml><?xml version="1.0" encoding="utf-8"?>
+<file path=ppt/slides/slide16.xml><?xml version="1.0" encoding="utf-8"?>
 <p:sld xmlns:a="http://schemas.openxmlformats.org/drawingml/2006/main" xmlns:r="http://schemas.openxmlformats.org/officeDocument/2006/relationships" xmlns:p="http://schemas.openxmlformats.org/presentationml/2006/main">
   <p:cSld>
     <p:bg>

--- a/Instructions.pptx
+++ b/Instructions.pptx
@@ -5,7 +5,7 @@
     <p:sldMasterId id="2147483648" r:id="rId1"/>
   </p:sldMasterIdLst>
   <p:notesMasterIdLst>
-    <p:notesMasterId r:id="rId18"/>
+    <p:notesMasterId r:id="rId22"/>
   </p:notesMasterIdLst>
   <p:sldIdLst>
     <p:sldId id="273" r:id="rId2"/>
@@ -13,17 +13,21 @@
     <p:sldId id="274" r:id="rId4"/>
     <p:sldId id="275" r:id="rId5"/>
     <p:sldId id="281" r:id="rId6"/>
-    <p:sldId id="256" r:id="rId7"/>
-    <p:sldId id="257" r:id="rId8"/>
-    <p:sldId id="258" r:id="rId9"/>
-    <p:sldId id="259" r:id="rId10"/>
-    <p:sldId id="260" r:id="rId11"/>
-    <p:sldId id="261" r:id="rId12"/>
-    <p:sldId id="271" r:id="rId13"/>
-    <p:sldId id="282" r:id="rId14"/>
-    <p:sldId id="279" r:id="rId15"/>
-    <p:sldId id="278" r:id="rId16"/>
-    <p:sldId id="277" r:id="rId17"/>
+    <p:sldId id="284" r:id="rId7"/>
+    <p:sldId id="285" r:id="rId8"/>
+    <p:sldId id="286" r:id="rId9"/>
+    <p:sldId id="283" r:id="rId10"/>
+    <p:sldId id="256" r:id="rId11"/>
+    <p:sldId id="257" r:id="rId12"/>
+    <p:sldId id="258" r:id="rId13"/>
+    <p:sldId id="259" r:id="rId14"/>
+    <p:sldId id="260" r:id="rId15"/>
+    <p:sldId id="261" r:id="rId16"/>
+    <p:sldId id="271" r:id="rId17"/>
+    <p:sldId id="282" r:id="rId18"/>
+    <p:sldId id="279" r:id="rId19"/>
+    <p:sldId id="278" r:id="rId20"/>
+    <p:sldId id="277" r:id="rId21"/>
   </p:sldIdLst>
   <p:sldSz cx="12192000" cy="6858000"/>
   <p:notesSz cx="6858000" cy="9144000"/>
@@ -147,6 +151,10 @@
         <p14:section name="任务一 自由观看" id="{F32354CF-77DC-4D84-809A-B062A9BD7B65}">
           <p14:sldIdLst>
             <p14:sldId id="281"/>
+            <p14:sldId id="284"/>
+            <p14:sldId id="285"/>
+            <p14:sldId id="286"/>
+            <p14:sldId id="283"/>
           </p14:sldIdLst>
         </p14:section>
         <p14:section name="任务一 练习阶段" id="{65576218-A7F1-4A8F-9766-0DB76C5735BC}">
@@ -277,7 +285,7 @@
           <a:p>
             <a:fld id="{373AEA94-00EF-4DE4-8FA3-F9ECAA6DD2CF}" type="datetimeFigureOut">
               <a:rPr lang="zh-CN" altLang="en-US" smtClean="0"/>
-              <a:t>2026/3/26</a:t>
+              <a:t>2026/4/18</a:t>
             </a:fld>
             <a:endParaRPr lang="zh-CN" altLang="en-US"/>
           </a:p>
@@ -1300,6 +1308,678 @@
 </p:notes>
 </file>
 
+<file path=ppt/notesSlides/notesSlide6.xml><?xml version="1.0" encoding="utf-8"?>
+<p:notes xmlns:a="http://schemas.openxmlformats.org/drawingml/2006/main" xmlns:r="http://schemas.openxmlformats.org/officeDocument/2006/relationships" xmlns:p="http://schemas.openxmlformats.org/presentationml/2006/main">
+  <p:cSld>
+    <p:spTree>
+      <p:nvGrpSpPr>
+        <p:cNvPr id="1" name="">
+          <a:extLst>
+            <a:ext uri="{FF2B5EF4-FFF2-40B4-BE49-F238E27FC236}">
+              <a16:creationId xmlns:a16="http://schemas.microsoft.com/office/drawing/2014/main" id="{C39595AF-4D91-8ADD-3C92-B100FFD5B3AD}"/>
+            </a:ext>
+          </a:extLst>
+        </p:cNvPr>
+        <p:cNvGrpSpPr/>
+        <p:nvPr/>
+      </p:nvGrpSpPr>
+      <p:grpSpPr>
+        <a:xfrm>
+          <a:off x="0" y="0"/>
+          <a:ext cx="0" cy="0"/>
+          <a:chOff x="0" y="0"/>
+          <a:chExt cx="0" cy="0"/>
+        </a:xfrm>
+      </p:grpSpPr>
+      <p:sp>
+        <p:nvSpPr>
+          <p:cNvPr id="2" name="幻灯片图像占位符 1">
+            <a:extLst>
+              <a:ext uri="{FF2B5EF4-FFF2-40B4-BE49-F238E27FC236}">
+                <a16:creationId xmlns:a16="http://schemas.microsoft.com/office/drawing/2014/main" id="{3F09D572-36B3-959B-ABF8-CD6CD0F16781}"/>
+              </a:ext>
+            </a:extLst>
+          </p:cNvPr>
+          <p:cNvSpPr>
+            <a:spLocks noGrp="1" noRot="1" noChangeAspect="1"/>
+          </p:cNvSpPr>
+          <p:nvPr>
+            <p:ph type="sldImg"/>
+          </p:nvPr>
+        </p:nvSpPr>
+        <p:spPr/>
+      </p:sp>
+      <p:sp>
+        <p:nvSpPr>
+          <p:cNvPr id="3" name="备注占位符 2">
+            <a:extLst>
+              <a:ext uri="{FF2B5EF4-FFF2-40B4-BE49-F238E27FC236}">
+                <a16:creationId xmlns:a16="http://schemas.microsoft.com/office/drawing/2014/main" id="{B007508C-B834-B018-D40D-A20E5970E61B}"/>
+              </a:ext>
+            </a:extLst>
+          </p:cNvPr>
+          <p:cNvSpPr>
+            <a:spLocks noGrp="1"/>
+          </p:cNvSpPr>
+          <p:nvPr>
+            <p:ph type="body" idx="1"/>
+          </p:nvPr>
+        </p:nvSpPr>
+        <p:spPr/>
+        <p:txBody>
+          <a:bodyPr/>
+          <a:lstStyle/>
+          <a:p>
+            <a:endParaRPr lang="zh-CN" altLang="en-US" dirty="0"/>
+          </a:p>
+        </p:txBody>
+      </p:sp>
+      <p:sp>
+        <p:nvSpPr>
+          <p:cNvPr id="4" name="灯片编号占位符 3">
+            <a:extLst>
+              <a:ext uri="{FF2B5EF4-FFF2-40B4-BE49-F238E27FC236}">
+                <a16:creationId xmlns:a16="http://schemas.microsoft.com/office/drawing/2014/main" id="{70B714AB-817A-2FAB-674D-2C962E6023C8}"/>
+              </a:ext>
+            </a:extLst>
+          </p:cNvPr>
+          <p:cNvSpPr>
+            <a:spLocks noGrp="1"/>
+          </p:cNvSpPr>
+          <p:nvPr>
+            <p:ph type="sldNum" sz="quarter" idx="5"/>
+          </p:nvPr>
+        </p:nvSpPr>
+        <p:spPr/>
+        <p:txBody>
+          <a:bodyPr/>
+          <a:lstStyle/>
+          <a:p>
+            <a:pPr marL="0" marR="0" lvl="0" indent="0" algn="r" defTabSz="914400" rtl="0" eaLnBrk="1" fontAlgn="auto" latinLnBrk="0" hangingPunct="1">
+              <a:lnSpc>
+                <a:spcPct val="100000"/>
+              </a:lnSpc>
+              <a:spcBef>
+                <a:spcPts val="0"/>
+              </a:spcBef>
+              <a:spcAft>
+                <a:spcPts val="0"/>
+              </a:spcAft>
+              <a:buClrTx/>
+              <a:buSzTx/>
+              <a:buFontTx/>
+              <a:buNone/>
+              <a:tabLst/>
+              <a:defRPr/>
+            </a:pPr>
+            <a:fld id="{8F8145D6-6EE7-4E56-9B77-0EB069CF9533}" type="slidenum">
+              <a:rPr kumimoji="0" lang="zh-CN" altLang="en-US" sz="1200" b="0" i="0" u="none" strike="noStrike" kern="1200" cap="none" spc="0" normalizeH="0" baseline="0" noProof="0" smtClean="0">
+                <a:ln>
+                  <a:noFill/>
+                </a:ln>
+                <a:solidFill>
+                  <a:prstClr val="black"/>
+                </a:solidFill>
+                <a:effectLst/>
+                <a:uLnTx/>
+                <a:uFillTx/>
+                <a:latin typeface="等线" panose="02110004020202020204"/>
+                <a:ea typeface="等线" panose="02010600030101010101" pitchFamily="2" charset="-122"/>
+                <a:cs typeface="+mn-cs"/>
+              </a:rPr>
+              <a:pPr marL="0" marR="0" lvl="0" indent="0" algn="r" defTabSz="914400" rtl="0" eaLnBrk="1" fontAlgn="auto" latinLnBrk="0" hangingPunct="1">
+                <a:lnSpc>
+                  <a:spcPct val="100000"/>
+                </a:lnSpc>
+                <a:spcBef>
+                  <a:spcPts val="0"/>
+                </a:spcBef>
+                <a:spcAft>
+                  <a:spcPts val="0"/>
+                </a:spcAft>
+                <a:buClrTx/>
+                <a:buSzTx/>
+                <a:buFontTx/>
+                <a:buNone/>
+                <a:tabLst/>
+                <a:defRPr/>
+              </a:pPr>
+              <a:t>6</a:t>
+            </a:fld>
+            <a:endParaRPr kumimoji="0" lang="zh-CN" altLang="en-US" sz="1200" b="0" i="0" u="none" strike="noStrike" kern="1200" cap="none" spc="0" normalizeH="0" baseline="0" noProof="0">
+              <a:ln>
+                <a:noFill/>
+              </a:ln>
+              <a:solidFill>
+                <a:prstClr val="black"/>
+              </a:solidFill>
+              <a:effectLst/>
+              <a:uLnTx/>
+              <a:uFillTx/>
+              <a:latin typeface="等线" panose="02110004020202020204"/>
+              <a:ea typeface="等线" panose="02010600030101010101" pitchFamily="2" charset="-122"/>
+              <a:cs typeface="+mn-cs"/>
+            </a:endParaRPr>
+          </a:p>
+        </p:txBody>
+      </p:sp>
+    </p:spTree>
+    <p:extLst>
+      <p:ext uri="{BB962C8B-B14F-4D97-AF65-F5344CB8AC3E}">
+        <p14:creationId xmlns:p14="http://schemas.microsoft.com/office/powerpoint/2010/main" val="265597795"/>
+      </p:ext>
+    </p:extLst>
+  </p:cSld>
+  <p:clrMapOvr>
+    <a:masterClrMapping/>
+  </p:clrMapOvr>
+</p:notes>
+</file>
+
+<file path=ppt/notesSlides/notesSlide7.xml><?xml version="1.0" encoding="utf-8"?>
+<p:notes xmlns:a="http://schemas.openxmlformats.org/drawingml/2006/main" xmlns:r="http://schemas.openxmlformats.org/officeDocument/2006/relationships" xmlns:p="http://schemas.openxmlformats.org/presentationml/2006/main">
+  <p:cSld>
+    <p:spTree>
+      <p:nvGrpSpPr>
+        <p:cNvPr id="1" name="">
+          <a:extLst>
+            <a:ext uri="{FF2B5EF4-FFF2-40B4-BE49-F238E27FC236}">
+              <a16:creationId xmlns:a16="http://schemas.microsoft.com/office/drawing/2014/main" id="{C39595AF-4D91-8ADD-3C92-B100FFD5B3AD}"/>
+            </a:ext>
+          </a:extLst>
+        </p:cNvPr>
+        <p:cNvGrpSpPr/>
+        <p:nvPr/>
+      </p:nvGrpSpPr>
+      <p:grpSpPr>
+        <a:xfrm>
+          <a:off x="0" y="0"/>
+          <a:ext cx="0" cy="0"/>
+          <a:chOff x="0" y="0"/>
+          <a:chExt cx="0" cy="0"/>
+        </a:xfrm>
+      </p:grpSpPr>
+      <p:sp>
+        <p:nvSpPr>
+          <p:cNvPr id="2" name="幻灯片图像占位符 1">
+            <a:extLst>
+              <a:ext uri="{FF2B5EF4-FFF2-40B4-BE49-F238E27FC236}">
+                <a16:creationId xmlns:a16="http://schemas.microsoft.com/office/drawing/2014/main" id="{3F09D572-36B3-959B-ABF8-CD6CD0F16781}"/>
+              </a:ext>
+            </a:extLst>
+          </p:cNvPr>
+          <p:cNvSpPr>
+            <a:spLocks noGrp="1" noRot="1" noChangeAspect="1"/>
+          </p:cNvSpPr>
+          <p:nvPr>
+            <p:ph type="sldImg"/>
+          </p:nvPr>
+        </p:nvSpPr>
+        <p:spPr/>
+      </p:sp>
+      <p:sp>
+        <p:nvSpPr>
+          <p:cNvPr id="3" name="备注占位符 2">
+            <a:extLst>
+              <a:ext uri="{FF2B5EF4-FFF2-40B4-BE49-F238E27FC236}">
+                <a16:creationId xmlns:a16="http://schemas.microsoft.com/office/drawing/2014/main" id="{B007508C-B834-B018-D40D-A20E5970E61B}"/>
+              </a:ext>
+            </a:extLst>
+          </p:cNvPr>
+          <p:cNvSpPr>
+            <a:spLocks noGrp="1"/>
+          </p:cNvSpPr>
+          <p:nvPr>
+            <p:ph type="body" idx="1"/>
+          </p:nvPr>
+        </p:nvSpPr>
+        <p:spPr/>
+        <p:txBody>
+          <a:bodyPr/>
+          <a:lstStyle/>
+          <a:p>
+            <a:endParaRPr lang="zh-CN" altLang="en-US" dirty="0"/>
+          </a:p>
+        </p:txBody>
+      </p:sp>
+      <p:sp>
+        <p:nvSpPr>
+          <p:cNvPr id="4" name="灯片编号占位符 3">
+            <a:extLst>
+              <a:ext uri="{FF2B5EF4-FFF2-40B4-BE49-F238E27FC236}">
+                <a16:creationId xmlns:a16="http://schemas.microsoft.com/office/drawing/2014/main" id="{70B714AB-817A-2FAB-674D-2C962E6023C8}"/>
+              </a:ext>
+            </a:extLst>
+          </p:cNvPr>
+          <p:cNvSpPr>
+            <a:spLocks noGrp="1"/>
+          </p:cNvSpPr>
+          <p:nvPr>
+            <p:ph type="sldNum" sz="quarter" idx="5"/>
+          </p:nvPr>
+        </p:nvSpPr>
+        <p:spPr/>
+        <p:txBody>
+          <a:bodyPr/>
+          <a:lstStyle/>
+          <a:p>
+            <a:pPr marL="0" marR="0" lvl="0" indent="0" algn="r" defTabSz="914400" rtl="0" eaLnBrk="1" fontAlgn="auto" latinLnBrk="0" hangingPunct="1">
+              <a:lnSpc>
+                <a:spcPct val="100000"/>
+              </a:lnSpc>
+              <a:spcBef>
+                <a:spcPts val="0"/>
+              </a:spcBef>
+              <a:spcAft>
+                <a:spcPts val="0"/>
+              </a:spcAft>
+              <a:buClrTx/>
+              <a:buSzTx/>
+              <a:buFontTx/>
+              <a:buNone/>
+              <a:tabLst/>
+              <a:defRPr/>
+            </a:pPr>
+            <a:fld id="{8F8145D6-6EE7-4E56-9B77-0EB069CF9533}" type="slidenum">
+              <a:rPr kumimoji="0" lang="zh-CN" altLang="en-US" sz="1200" b="0" i="0" u="none" strike="noStrike" kern="1200" cap="none" spc="0" normalizeH="0" baseline="0" noProof="0" smtClean="0">
+                <a:ln>
+                  <a:noFill/>
+                </a:ln>
+                <a:solidFill>
+                  <a:prstClr val="black"/>
+                </a:solidFill>
+                <a:effectLst/>
+                <a:uLnTx/>
+                <a:uFillTx/>
+                <a:latin typeface="等线" panose="02110004020202020204"/>
+                <a:ea typeface="等线" panose="02010600030101010101" pitchFamily="2" charset="-122"/>
+                <a:cs typeface="+mn-cs"/>
+              </a:rPr>
+              <a:pPr marL="0" marR="0" lvl="0" indent="0" algn="r" defTabSz="914400" rtl="0" eaLnBrk="1" fontAlgn="auto" latinLnBrk="0" hangingPunct="1">
+                <a:lnSpc>
+                  <a:spcPct val="100000"/>
+                </a:lnSpc>
+                <a:spcBef>
+                  <a:spcPts val="0"/>
+                </a:spcBef>
+                <a:spcAft>
+                  <a:spcPts val="0"/>
+                </a:spcAft>
+                <a:buClrTx/>
+                <a:buSzTx/>
+                <a:buFontTx/>
+                <a:buNone/>
+                <a:tabLst/>
+                <a:defRPr/>
+              </a:pPr>
+              <a:t>7</a:t>
+            </a:fld>
+            <a:endParaRPr kumimoji="0" lang="zh-CN" altLang="en-US" sz="1200" b="0" i="0" u="none" strike="noStrike" kern="1200" cap="none" spc="0" normalizeH="0" baseline="0" noProof="0">
+              <a:ln>
+                <a:noFill/>
+              </a:ln>
+              <a:solidFill>
+                <a:prstClr val="black"/>
+              </a:solidFill>
+              <a:effectLst/>
+              <a:uLnTx/>
+              <a:uFillTx/>
+              <a:latin typeface="等线" panose="02110004020202020204"/>
+              <a:ea typeface="等线" panose="02010600030101010101" pitchFamily="2" charset="-122"/>
+              <a:cs typeface="+mn-cs"/>
+            </a:endParaRPr>
+          </a:p>
+        </p:txBody>
+      </p:sp>
+    </p:spTree>
+    <p:extLst>
+      <p:ext uri="{BB962C8B-B14F-4D97-AF65-F5344CB8AC3E}">
+        <p14:creationId xmlns:p14="http://schemas.microsoft.com/office/powerpoint/2010/main" val="3593160254"/>
+      </p:ext>
+    </p:extLst>
+  </p:cSld>
+  <p:clrMapOvr>
+    <a:masterClrMapping/>
+  </p:clrMapOvr>
+</p:notes>
+</file>
+
+<file path=ppt/notesSlides/notesSlide8.xml><?xml version="1.0" encoding="utf-8"?>
+<p:notes xmlns:a="http://schemas.openxmlformats.org/drawingml/2006/main" xmlns:r="http://schemas.openxmlformats.org/officeDocument/2006/relationships" xmlns:p="http://schemas.openxmlformats.org/presentationml/2006/main">
+  <p:cSld>
+    <p:spTree>
+      <p:nvGrpSpPr>
+        <p:cNvPr id="1" name="">
+          <a:extLst>
+            <a:ext uri="{FF2B5EF4-FFF2-40B4-BE49-F238E27FC236}">
+              <a16:creationId xmlns:a16="http://schemas.microsoft.com/office/drawing/2014/main" id="{C39595AF-4D91-8ADD-3C92-B100FFD5B3AD}"/>
+            </a:ext>
+          </a:extLst>
+        </p:cNvPr>
+        <p:cNvGrpSpPr/>
+        <p:nvPr/>
+      </p:nvGrpSpPr>
+      <p:grpSpPr>
+        <a:xfrm>
+          <a:off x="0" y="0"/>
+          <a:ext cx="0" cy="0"/>
+          <a:chOff x="0" y="0"/>
+          <a:chExt cx="0" cy="0"/>
+        </a:xfrm>
+      </p:grpSpPr>
+      <p:sp>
+        <p:nvSpPr>
+          <p:cNvPr id="2" name="幻灯片图像占位符 1">
+            <a:extLst>
+              <a:ext uri="{FF2B5EF4-FFF2-40B4-BE49-F238E27FC236}">
+                <a16:creationId xmlns:a16="http://schemas.microsoft.com/office/drawing/2014/main" id="{3F09D572-36B3-959B-ABF8-CD6CD0F16781}"/>
+              </a:ext>
+            </a:extLst>
+          </p:cNvPr>
+          <p:cNvSpPr>
+            <a:spLocks noGrp="1" noRot="1" noChangeAspect="1"/>
+          </p:cNvSpPr>
+          <p:nvPr>
+            <p:ph type="sldImg"/>
+          </p:nvPr>
+        </p:nvSpPr>
+        <p:spPr/>
+      </p:sp>
+      <p:sp>
+        <p:nvSpPr>
+          <p:cNvPr id="3" name="备注占位符 2">
+            <a:extLst>
+              <a:ext uri="{FF2B5EF4-FFF2-40B4-BE49-F238E27FC236}">
+                <a16:creationId xmlns:a16="http://schemas.microsoft.com/office/drawing/2014/main" id="{B007508C-B834-B018-D40D-A20E5970E61B}"/>
+              </a:ext>
+            </a:extLst>
+          </p:cNvPr>
+          <p:cNvSpPr>
+            <a:spLocks noGrp="1"/>
+          </p:cNvSpPr>
+          <p:nvPr>
+            <p:ph type="body" idx="1"/>
+          </p:nvPr>
+        </p:nvSpPr>
+        <p:spPr/>
+        <p:txBody>
+          <a:bodyPr/>
+          <a:lstStyle/>
+          <a:p>
+            <a:endParaRPr lang="zh-CN" altLang="en-US" dirty="0"/>
+          </a:p>
+        </p:txBody>
+      </p:sp>
+      <p:sp>
+        <p:nvSpPr>
+          <p:cNvPr id="4" name="灯片编号占位符 3">
+            <a:extLst>
+              <a:ext uri="{FF2B5EF4-FFF2-40B4-BE49-F238E27FC236}">
+                <a16:creationId xmlns:a16="http://schemas.microsoft.com/office/drawing/2014/main" id="{70B714AB-817A-2FAB-674D-2C962E6023C8}"/>
+              </a:ext>
+            </a:extLst>
+          </p:cNvPr>
+          <p:cNvSpPr>
+            <a:spLocks noGrp="1"/>
+          </p:cNvSpPr>
+          <p:nvPr>
+            <p:ph type="sldNum" sz="quarter" idx="5"/>
+          </p:nvPr>
+        </p:nvSpPr>
+        <p:spPr/>
+        <p:txBody>
+          <a:bodyPr/>
+          <a:lstStyle/>
+          <a:p>
+            <a:pPr marL="0" marR="0" lvl="0" indent="0" algn="r" defTabSz="914400" rtl="0" eaLnBrk="1" fontAlgn="auto" latinLnBrk="0" hangingPunct="1">
+              <a:lnSpc>
+                <a:spcPct val="100000"/>
+              </a:lnSpc>
+              <a:spcBef>
+                <a:spcPts val="0"/>
+              </a:spcBef>
+              <a:spcAft>
+                <a:spcPts val="0"/>
+              </a:spcAft>
+              <a:buClrTx/>
+              <a:buSzTx/>
+              <a:buFontTx/>
+              <a:buNone/>
+              <a:tabLst/>
+              <a:defRPr/>
+            </a:pPr>
+            <a:fld id="{8F8145D6-6EE7-4E56-9B77-0EB069CF9533}" type="slidenum">
+              <a:rPr kumimoji="0" lang="zh-CN" altLang="en-US" sz="1200" b="0" i="0" u="none" strike="noStrike" kern="1200" cap="none" spc="0" normalizeH="0" baseline="0" noProof="0" smtClean="0">
+                <a:ln>
+                  <a:noFill/>
+                </a:ln>
+                <a:solidFill>
+                  <a:prstClr val="black"/>
+                </a:solidFill>
+                <a:effectLst/>
+                <a:uLnTx/>
+                <a:uFillTx/>
+                <a:latin typeface="等线" panose="02110004020202020204"/>
+                <a:ea typeface="等线" panose="02010600030101010101" pitchFamily="2" charset="-122"/>
+                <a:cs typeface="+mn-cs"/>
+              </a:rPr>
+              <a:pPr marL="0" marR="0" lvl="0" indent="0" algn="r" defTabSz="914400" rtl="0" eaLnBrk="1" fontAlgn="auto" latinLnBrk="0" hangingPunct="1">
+                <a:lnSpc>
+                  <a:spcPct val="100000"/>
+                </a:lnSpc>
+                <a:spcBef>
+                  <a:spcPts val="0"/>
+                </a:spcBef>
+                <a:spcAft>
+                  <a:spcPts val="0"/>
+                </a:spcAft>
+                <a:buClrTx/>
+                <a:buSzTx/>
+                <a:buFontTx/>
+                <a:buNone/>
+                <a:tabLst/>
+                <a:defRPr/>
+              </a:pPr>
+              <a:t>8</a:t>
+            </a:fld>
+            <a:endParaRPr kumimoji="0" lang="zh-CN" altLang="en-US" sz="1200" b="0" i="0" u="none" strike="noStrike" kern="1200" cap="none" spc="0" normalizeH="0" baseline="0" noProof="0">
+              <a:ln>
+                <a:noFill/>
+              </a:ln>
+              <a:solidFill>
+                <a:prstClr val="black"/>
+              </a:solidFill>
+              <a:effectLst/>
+              <a:uLnTx/>
+              <a:uFillTx/>
+              <a:latin typeface="等线" panose="02110004020202020204"/>
+              <a:ea typeface="等线" panose="02010600030101010101" pitchFamily="2" charset="-122"/>
+              <a:cs typeface="+mn-cs"/>
+            </a:endParaRPr>
+          </a:p>
+        </p:txBody>
+      </p:sp>
+    </p:spTree>
+    <p:extLst>
+      <p:ext uri="{BB962C8B-B14F-4D97-AF65-F5344CB8AC3E}">
+        <p14:creationId xmlns:p14="http://schemas.microsoft.com/office/powerpoint/2010/main" val="1329737717"/>
+      </p:ext>
+    </p:extLst>
+  </p:cSld>
+  <p:clrMapOvr>
+    <a:masterClrMapping/>
+  </p:clrMapOvr>
+</p:notes>
+</file>
+
+<file path=ppt/notesSlides/notesSlide9.xml><?xml version="1.0" encoding="utf-8"?>
+<p:notes xmlns:a="http://schemas.openxmlformats.org/drawingml/2006/main" xmlns:r="http://schemas.openxmlformats.org/officeDocument/2006/relationships" xmlns:p="http://schemas.openxmlformats.org/presentationml/2006/main">
+  <p:cSld>
+    <p:spTree>
+      <p:nvGrpSpPr>
+        <p:cNvPr id="1" name="">
+          <a:extLst>
+            <a:ext uri="{FF2B5EF4-FFF2-40B4-BE49-F238E27FC236}">
+              <a16:creationId xmlns:a16="http://schemas.microsoft.com/office/drawing/2014/main" id="{C39595AF-4D91-8ADD-3C92-B100FFD5B3AD}"/>
+            </a:ext>
+          </a:extLst>
+        </p:cNvPr>
+        <p:cNvGrpSpPr/>
+        <p:nvPr/>
+      </p:nvGrpSpPr>
+      <p:grpSpPr>
+        <a:xfrm>
+          <a:off x="0" y="0"/>
+          <a:ext cx="0" cy="0"/>
+          <a:chOff x="0" y="0"/>
+          <a:chExt cx="0" cy="0"/>
+        </a:xfrm>
+      </p:grpSpPr>
+      <p:sp>
+        <p:nvSpPr>
+          <p:cNvPr id="2" name="幻灯片图像占位符 1">
+            <a:extLst>
+              <a:ext uri="{FF2B5EF4-FFF2-40B4-BE49-F238E27FC236}">
+                <a16:creationId xmlns:a16="http://schemas.microsoft.com/office/drawing/2014/main" id="{3F09D572-36B3-959B-ABF8-CD6CD0F16781}"/>
+              </a:ext>
+            </a:extLst>
+          </p:cNvPr>
+          <p:cNvSpPr>
+            <a:spLocks noGrp="1" noRot="1" noChangeAspect="1"/>
+          </p:cNvSpPr>
+          <p:nvPr>
+            <p:ph type="sldImg"/>
+          </p:nvPr>
+        </p:nvSpPr>
+        <p:spPr/>
+      </p:sp>
+      <p:sp>
+        <p:nvSpPr>
+          <p:cNvPr id="3" name="备注占位符 2">
+            <a:extLst>
+              <a:ext uri="{FF2B5EF4-FFF2-40B4-BE49-F238E27FC236}">
+                <a16:creationId xmlns:a16="http://schemas.microsoft.com/office/drawing/2014/main" id="{B007508C-B834-B018-D40D-A20E5970E61B}"/>
+              </a:ext>
+            </a:extLst>
+          </p:cNvPr>
+          <p:cNvSpPr>
+            <a:spLocks noGrp="1"/>
+          </p:cNvSpPr>
+          <p:nvPr>
+            <p:ph type="body" idx="1"/>
+          </p:nvPr>
+        </p:nvSpPr>
+        <p:spPr/>
+        <p:txBody>
+          <a:bodyPr/>
+          <a:lstStyle/>
+          <a:p>
+            <a:endParaRPr lang="zh-CN" altLang="en-US" dirty="0"/>
+          </a:p>
+        </p:txBody>
+      </p:sp>
+      <p:sp>
+        <p:nvSpPr>
+          <p:cNvPr id="4" name="灯片编号占位符 3">
+            <a:extLst>
+              <a:ext uri="{FF2B5EF4-FFF2-40B4-BE49-F238E27FC236}">
+                <a16:creationId xmlns:a16="http://schemas.microsoft.com/office/drawing/2014/main" id="{70B714AB-817A-2FAB-674D-2C962E6023C8}"/>
+              </a:ext>
+            </a:extLst>
+          </p:cNvPr>
+          <p:cNvSpPr>
+            <a:spLocks noGrp="1"/>
+          </p:cNvSpPr>
+          <p:nvPr>
+            <p:ph type="sldNum" sz="quarter" idx="5"/>
+          </p:nvPr>
+        </p:nvSpPr>
+        <p:spPr/>
+        <p:txBody>
+          <a:bodyPr/>
+          <a:lstStyle/>
+          <a:p>
+            <a:pPr marL="0" marR="0" lvl="0" indent="0" algn="r" defTabSz="914400" rtl="0" eaLnBrk="1" fontAlgn="auto" latinLnBrk="0" hangingPunct="1">
+              <a:lnSpc>
+                <a:spcPct val="100000"/>
+              </a:lnSpc>
+              <a:spcBef>
+                <a:spcPts val="0"/>
+              </a:spcBef>
+              <a:spcAft>
+                <a:spcPts val="0"/>
+              </a:spcAft>
+              <a:buClrTx/>
+              <a:buSzTx/>
+              <a:buFontTx/>
+              <a:buNone/>
+              <a:tabLst/>
+              <a:defRPr/>
+            </a:pPr>
+            <a:fld id="{8F8145D6-6EE7-4E56-9B77-0EB069CF9533}" type="slidenum">
+              <a:rPr kumimoji="0" lang="zh-CN" altLang="en-US" sz="1200" b="0" i="0" u="none" strike="noStrike" kern="1200" cap="none" spc="0" normalizeH="0" baseline="0" noProof="0" smtClean="0">
+                <a:ln>
+                  <a:noFill/>
+                </a:ln>
+                <a:solidFill>
+                  <a:prstClr val="black"/>
+                </a:solidFill>
+                <a:effectLst/>
+                <a:uLnTx/>
+                <a:uFillTx/>
+                <a:latin typeface="等线" panose="02110004020202020204"/>
+                <a:ea typeface="等线" panose="02010600030101010101" pitchFamily="2" charset="-122"/>
+                <a:cs typeface="+mn-cs"/>
+              </a:rPr>
+              <a:pPr marL="0" marR="0" lvl="0" indent="0" algn="r" defTabSz="914400" rtl="0" eaLnBrk="1" fontAlgn="auto" latinLnBrk="0" hangingPunct="1">
+                <a:lnSpc>
+                  <a:spcPct val="100000"/>
+                </a:lnSpc>
+                <a:spcBef>
+                  <a:spcPts val="0"/>
+                </a:spcBef>
+                <a:spcAft>
+                  <a:spcPts val="0"/>
+                </a:spcAft>
+                <a:buClrTx/>
+                <a:buSzTx/>
+                <a:buFontTx/>
+                <a:buNone/>
+                <a:tabLst/>
+                <a:defRPr/>
+              </a:pPr>
+              <a:t>9</a:t>
+            </a:fld>
+            <a:endParaRPr kumimoji="0" lang="zh-CN" altLang="en-US" sz="1200" b="0" i="0" u="none" strike="noStrike" kern="1200" cap="none" spc="0" normalizeH="0" baseline="0" noProof="0">
+              <a:ln>
+                <a:noFill/>
+              </a:ln>
+              <a:solidFill>
+                <a:prstClr val="black"/>
+              </a:solidFill>
+              <a:effectLst/>
+              <a:uLnTx/>
+              <a:uFillTx/>
+              <a:latin typeface="等线" panose="02110004020202020204"/>
+              <a:ea typeface="等线" panose="02010600030101010101" pitchFamily="2" charset="-122"/>
+              <a:cs typeface="+mn-cs"/>
+            </a:endParaRPr>
+          </a:p>
+        </p:txBody>
+      </p:sp>
+    </p:spTree>
+    <p:extLst>
+      <p:ext uri="{BB962C8B-B14F-4D97-AF65-F5344CB8AC3E}">
+        <p14:creationId xmlns:p14="http://schemas.microsoft.com/office/powerpoint/2010/main" val="2426977340"/>
+      </p:ext>
+    </p:extLst>
+  </p:cSld>
+  <p:clrMapOvr>
+    <a:masterClrMapping/>
+  </p:clrMapOvr>
+</p:notes>
+</file>
+
 <file path=ppt/slideLayouts/slideLayout1.xml><?xml version="1.0" encoding="utf-8"?>
 <p:sldLayout xmlns:a="http://schemas.openxmlformats.org/drawingml/2006/main" xmlns:r="http://schemas.openxmlformats.org/officeDocument/2006/relationships" xmlns:p="http://schemas.openxmlformats.org/presentationml/2006/main" type="title" preserve="1">
   <p:cSld name="标题幻灯片">
@@ -1447,7 +2127,7 @@
           <a:p>
             <a:fld id="{E45C1C0B-BEED-40A4-BB03-2B5E358FDD63}" type="datetimeFigureOut">
               <a:rPr lang="zh-CN" altLang="en-US" smtClean="0"/>
-              <a:t>2026/3/26</a:t>
+              <a:t>2026/4/18</a:t>
             </a:fld>
             <a:endParaRPr lang="zh-CN" altLang="en-US"/>
           </a:p>
@@ -1645,7 +2325,7 @@
           <a:p>
             <a:fld id="{E45C1C0B-BEED-40A4-BB03-2B5E358FDD63}" type="datetimeFigureOut">
               <a:rPr lang="zh-CN" altLang="en-US" smtClean="0"/>
-              <a:t>2026/3/26</a:t>
+              <a:t>2026/4/18</a:t>
             </a:fld>
             <a:endParaRPr lang="zh-CN" altLang="en-US"/>
           </a:p>
@@ -1853,7 +2533,7 @@
           <a:p>
             <a:fld id="{E45C1C0B-BEED-40A4-BB03-2B5E358FDD63}" type="datetimeFigureOut">
               <a:rPr lang="zh-CN" altLang="en-US" smtClean="0"/>
-              <a:t>2026/3/26</a:t>
+              <a:t>2026/4/18</a:t>
             </a:fld>
             <a:endParaRPr lang="zh-CN" altLang="en-US"/>
           </a:p>
@@ -2051,7 +2731,7 @@
           <a:p>
             <a:fld id="{E45C1C0B-BEED-40A4-BB03-2B5E358FDD63}" type="datetimeFigureOut">
               <a:rPr lang="zh-CN" altLang="en-US" smtClean="0"/>
-              <a:t>2026/3/26</a:t>
+              <a:t>2026/4/18</a:t>
             </a:fld>
             <a:endParaRPr lang="zh-CN" altLang="en-US"/>
           </a:p>
@@ -2326,7 +3006,7 @@
           <a:p>
             <a:fld id="{E45C1C0B-BEED-40A4-BB03-2B5E358FDD63}" type="datetimeFigureOut">
               <a:rPr lang="zh-CN" altLang="en-US" smtClean="0"/>
-              <a:t>2026/3/26</a:t>
+              <a:t>2026/4/18</a:t>
             </a:fld>
             <a:endParaRPr lang="zh-CN" altLang="en-US"/>
           </a:p>
@@ -2591,7 +3271,7 @@
           <a:p>
             <a:fld id="{E45C1C0B-BEED-40A4-BB03-2B5E358FDD63}" type="datetimeFigureOut">
               <a:rPr lang="zh-CN" altLang="en-US" smtClean="0"/>
-              <a:t>2026/3/26</a:t>
+              <a:t>2026/4/18</a:t>
             </a:fld>
             <a:endParaRPr lang="zh-CN" altLang="en-US"/>
           </a:p>
@@ -3003,7 +3683,7 @@
           <a:p>
             <a:fld id="{E45C1C0B-BEED-40A4-BB03-2B5E358FDD63}" type="datetimeFigureOut">
               <a:rPr lang="zh-CN" altLang="en-US" smtClean="0"/>
-              <a:t>2026/3/26</a:t>
+              <a:t>2026/4/18</a:t>
             </a:fld>
             <a:endParaRPr lang="zh-CN" altLang="en-US"/>
           </a:p>
@@ -3144,7 +3824,7 @@
           <a:p>
             <a:fld id="{E45C1C0B-BEED-40A4-BB03-2B5E358FDD63}" type="datetimeFigureOut">
               <a:rPr lang="zh-CN" altLang="en-US" smtClean="0"/>
-              <a:t>2026/3/26</a:t>
+              <a:t>2026/4/18</a:t>
             </a:fld>
             <a:endParaRPr lang="zh-CN" altLang="en-US"/>
           </a:p>
@@ -3257,7 +3937,7 @@
           <a:p>
             <a:fld id="{E45C1C0B-BEED-40A4-BB03-2B5E358FDD63}" type="datetimeFigureOut">
               <a:rPr lang="zh-CN" altLang="en-US" smtClean="0"/>
-              <a:t>2026/3/26</a:t>
+              <a:t>2026/4/18</a:t>
             </a:fld>
             <a:endParaRPr lang="zh-CN" altLang="en-US"/>
           </a:p>
@@ -3568,7 +4248,7 @@
           <a:p>
             <a:fld id="{E45C1C0B-BEED-40A4-BB03-2B5E358FDD63}" type="datetimeFigureOut">
               <a:rPr lang="zh-CN" altLang="en-US" smtClean="0"/>
-              <a:t>2026/3/26</a:t>
+              <a:t>2026/4/18</a:t>
             </a:fld>
             <a:endParaRPr lang="zh-CN" altLang="en-US"/>
           </a:p>
@@ -3856,7 +4536,7 @@
           <a:p>
             <a:fld id="{E45C1C0B-BEED-40A4-BB03-2B5E358FDD63}" type="datetimeFigureOut">
               <a:rPr lang="zh-CN" altLang="en-US" smtClean="0"/>
-              <a:t>2026/3/26</a:t>
+              <a:t>2026/4/18</a:t>
             </a:fld>
             <a:endParaRPr lang="zh-CN" altLang="en-US"/>
           </a:p>
@@ -4097,7 +4777,7 @@
           <a:p>
             <a:fld id="{E45C1C0B-BEED-40A4-BB03-2B5E358FDD63}" type="datetimeFigureOut">
               <a:rPr lang="zh-CN" altLang="en-US" smtClean="0"/>
-              <a:t>2026/3/26</a:t>
+              <a:t>2026/4/18</a:t>
             </a:fld>
             <a:endParaRPr lang="zh-CN" altLang="en-US"/>
           </a:p>
@@ -5097,13 +5777,7 @@
     </p:bg>
     <p:spTree>
       <p:nvGrpSpPr>
-        <p:cNvPr id="1" name="">
-          <a:extLst>
-            <a:ext uri="{FF2B5EF4-FFF2-40B4-BE49-F238E27FC236}">
-              <a16:creationId xmlns:a16="http://schemas.microsoft.com/office/drawing/2014/main" id="{D0CEC1BA-77EB-0163-262B-69A2429260D5}"/>
-            </a:ext>
-          </a:extLst>
-        </p:cNvPr>
+        <p:cNvPr id="1" name=""/>
         <p:cNvGrpSpPr/>
         <p:nvPr/>
       </p:nvGrpSpPr>
@@ -5120,7 +5794,7 @@
           <p:cNvPr id="4" name="文本框 3">
             <a:extLst>
               <a:ext uri="{FF2B5EF4-FFF2-40B4-BE49-F238E27FC236}">
-                <a16:creationId xmlns:a16="http://schemas.microsoft.com/office/drawing/2014/main" id="{7CE6233A-334B-C101-7F9F-161C0D47A456}"/>
+                <a16:creationId xmlns:a16="http://schemas.microsoft.com/office/drawing/2014/main" id="{4EDB04CB-2715-9705-511C-D5A184A7CF22}"/>
               </a:ext>
             </a:extLst>
           </p:cNvPr>
@@ -5143,37 +5817,11 @@
           </a:bodyPr>
           <a:lstStyle/>
           <a:p>
-            <a:pPr marL="0" marR="0" lvl="0" indent="0" algn="ctr" defTabSz="914400" rtl="0" eaLnBrk="1" fontAlgn="auto" latinLnBrk="0" hangingPunct="1">
-              <a:lnSpc>
-                <a:spcPct val="100000"/>
-              </a:lnSpc>
-              <a:spcBef>
-                <a:spcPts val="0"/>
-              </a:spcBef>
-              <a:spcAft>
-                <a:spcPts val="0"/>
-              </a:spcAft>
-              <a:buClrTx/>
-              <a:buSzTx/>
-              <a:buFontTx/>
-              <a:buNone/>
-              <a:tabLst/>
-              <a:defRPr/>
-            </a:pPr>
-            <a:r>
-              <a:rPr kumimoji="0" lang="zh-CN" altLang="en-US" sz="5400" b="0" i="0" u="none" strike="noStrike" kern="1200" cap="none" spc="0" normalizeH="0" baseline="0" noProof="0" dirty="0">
-                <a:ln>
-                  <a:noFill/>
-                </a:ln>
-                <a:solidFill>
-                  <a:prstClr val="black"/>
-                </a:solidFill>
-                <a:effectLst/>
-                <a:uLnTx/>
-                <a:uFillTx/>
-                <a:latin typeface="楷体" panose="02010609060101010101" pitchFamily="49" charset="-122"/>
-                <a:ea typeface="楷体" panose="02010609060101010101" pitchFamily="49" charset="-122"/>
-                <a:cs typeface="+mn-cs"/>
+            <a:pPr algn="ctr"/>
+            <a:r>
+              <a:rPr lang="zh-CN" altLang="en-US" sz="5400" dirty="0">
+                <a:latin typeface="楷体" panose="02010609060101010101" pitchFamily="49" charset="-122"/>
+                <a:ea typeface="楷体" panose="02010609060101010101" pitchFamily="49" charset="-122"/>
               </a:rPr>
               <a:t>练习阶段</a:t>
             </a:r>
@@ -5185,7 +5833,7 @@
           <p:cNvPr id="6" name="文本框 5">
             <a:extLst>
               <a:ext uri="{FF2B5EF4-FFF2-40B4-BE49-F238E27FC236}">
-                <a16:creationId xmlns:a16="http://schemas.microsoft.com/office/drawing/2014/main" id="{D7A1EC43-90AE-A0F0-F4BD-9A8211C873A6}"/>
+                <a16:creationId xmlns:a16="http://schemas.microsoft.com/office/drawing/2014/main" id="{89305019-0EE5-749E-994F-544D1011CE7D}"/>
               </a:ext>
             </a:extLst>
           </p:cNvPr>
@@ -5195,7 +5843,7 @@
         <p:spPr>
           <a:xfrm>
             <a:off x="1500050" y="1645919"/>
-            <a:ext cx="9714412" cy="3833742"/>
+            <a:ext cx="9714412" cy="755976"/>
           </a:xfrm>
           <a:prstGeom prst="rect">
             <a:avLst/>
@@ -5207,83 +5855,6 @@
             <a:spAutoFit/>
           </a:bodyPr>
           <a:lstStyle/>
-          <a:p>
-            <a:pPr marL="685800" lvl="0" indent="-685800">
-              <a:lnSpc>
-                <a:spcPct val="125000"/>
-              </a:lnSpc>
-              <a:buFont typeface="Wingdings" panose="05000000000000000000" pitchFamily="2" charset="2"/>
-              <a:buChar char="p"/>
-              <a:defRPr/>
-            </a:pPr>
-            <a:r>
-              <a:rPr lang="zh-CN" altLang="en-US" sz="4000" b="1" u="sng" dirty="0">
-                <a:solidFill>
-                  <a:prstClr val="black"/>
-                </a:solidFill>
-                <a:latin typeface="黑体" panose="02010609060101010101" pitchFamily="49" charset="-122"/>
-                <a:ea typeface="黑体" panose="02010609060101010101" pitchFamily="49" charset="-122"/>
-              </a:rPr>
-              <a:t>盯住</a:t>
-            </a:r>
-            <a:r>
-              <a:rPr lang="zh-CN" altLang="en-US" sz="4000" dirty="0">
-                <a:solidFill>
-                  <a:prstClr val="black"/>
-                </a:solidFill>
-                <a:latin typeface="楷体" panose="02010609060101010101" pitchFamily="49" charset="-122"/>
-                <a:ea typeface="楷体" panose="02010609060101010101" pitchFamily="49" charset="-122"/>
-              </a:rPr>
-              <a:t>黑点按</a:t>
-            </a:r>
-            <a:r>
-              <a:rPr lang="zh-CN" altLang="en-US" sz="4000" b="1" u="sng" dirty="0">
-                <a:solidFill>
-                  <a:prstClr val="black"/>
-                </a:solidFill>
-                <a:latin typeface="黑体" panose="02010609060101010101" pitchFamily="49" charset="-122"/>
-                <a:ea typeface="黑体" panose="02010609060101010101" pitchFamily="49" charset="-122"/>
-              </a:rPr>
-              <a:t>空格</a:t>
-            </a:r>
-            <a:r>
-              <a:rPr lang="zh-CN" altLang="en-US" sz="4000" dirty="0">
-                <a:solidFill>
-                  <a:prstClr val="black"/>
-                </a:solidFill>
-                <a:latin typeface="楷体" panose="02010609060101010101" pitchFamily="49" charset="-122"/>
-                <a:ea typeface="楷体" panose="02010609060101010101" pitchFamily="49" charset="-122"/>
-              </a:rPr>
-              <a:t>，</a:t>
-            </a:r>
-            <a:r>
-              <a:rPr lang="zh-CN" altLang="en-US" sz="4000" b="1" u="sng" dirty="0">
-                <a:solidFill>
-                  <a:prstClr val="black"/>
-                </a:solidFill>
-                <a:latin typeface="黑体" panose="02010609060101010101" pitchFamily="49" charset="-122"/>
-                <a:ea typeface="黑体" panose="02010609060101010101" pitchFamily="49" charset="-122"/>
-              </a:rPr>
-              <a:t>自由观察</a:t>
-            </a:r>
-            <a:r>
-              <a:rPr lang="zh-CN" altLang="en-US" sz="4000" dirty="0">
-                <a:solidFill>
-                  <a:prstClr val="black"/>
-                </a:solidFill>
-                <a:latin typeface="楷体" panose="02010609060101010101" pitchFamily="49" charset="-122"/>
-                <a:ea typeface="楷体" panose="02010609060101010101" pitchFamily="49" charset="-122"/>
-              </a:rPr>
-              <a:t>出现的纹理</a:t>
-            </a:r>
-            <a:endParaRPr lang="en-US" altLang="zh-CN" sz="4000" dirty="0">
-              <a:solidFill>
-                <a:prstClr val="black"/>
-              </a:solidFill>
-              <a:latin typeface="楷体" panose="02010609060101010101" pitchFamily="49" charset="-122"/>
-              <a:ea typeface="楷体" panose="02010609060101010101" pitchFamily="49" charset="-122"/>
-            </a:endParaRPr>
-          </a:p>
           <a:p>
             <a:pPr marL="685800" marR="0" lvl="0" indent="-685800" algn="l" defTabSz="914400" rtl="0" eaLnBrk="1" fontAlgn="auto" latinLnBrk="0" hangingPunct="1">
               <a:lnSpc>
@@ -5303,7 +5874,7 @@
               <a:defRPr/>
             </a:pPr>
             <a:r>
-              <a:rPr kumimoji="0" lang="en-US" altLang="zh-CN" sz="4000" b="1" i="0" u="sng" strike="noStrike" kern="1200" cap="none" spc="0" normalizeH="0" baseline="0" noProof="0" dirty="0">
+              <a:rPr kumimoji="0" lang="zh-CN" altLang="en-US" sz="4000" b="1" i="0" u="sng" strike="noStrike" kern="1200" cap="none" spc="0" normalizeH="0" baseline="0" noProof="0" dirty="0">
                 <a:ln>
                   <a:noFill/>
                 </a:ln>
@@ -5316,7 +5887,24 @@
                 <a:latin typeface="黑体" panose="02010609060101010101" pitchFamily="49" charset="-122"/>
                 <a:ea typeface="黑体" panose="02010609060101010101" pitchFamily="49" charset="-122"/>
               </a:rPr>
-              <a:t>5</a:t>
+              <a:t>盯住</a:t>
+            </a:r>
+            <a:r>
+              <a:rPr kumimoji="0" lang="zh-CN" altLang="en-US" sz="4000" b="0" i="0" u="none" strike="noStrike" kern="1200" cap="none" spc="0" normalizeH="0" baseline="0" noProof="0" dirty="0">
+                <a:ln>
+                  <a:noFill/>
+                </a:ln>
+                <a:solidFill>
+                  <a:prstClr val="black"/>
+                </a:solidFill>
+                <a:effectLst/>
+                <a:uLnTx/>
+                <a:uFillTx/>
+                <a:latin typeface="楷体" panose="02010609060101010101" pitchFamily="49" charset="-122"/>
+                <a:ea typeface="楷体" panose="02010609060101010101" pitchFamily="49" charset="-122"/>
+                <a:cs typeface="+mn-cs"/>
+              </a:rPr>
+              <a:t>黑点按</a:t>
             </a:r>
             <a:r>
               <a:rPr kumimoji="0" lang="zh-CN" altLang="en-US" sz="4000" b="1" i="0" u="sng" strike="noStrike" kern="1200" cap="none" spc="0" normalizeH="0" baseline="0" noProof="0" dirty="0">
@@ -5332,7 +5920,7 @@
                 <a:latin typeface="黑体" panose="02010609060101010101" pitchFamily="49" charset="-122"/>
                 <a:ea typeface="黑体" panose="02010609060101010101" pitchFamily="49" charset="-122"/>
               </a:rPr>
-              <a:t>秒内</a:t>
+              <a:t>空格</a:t>
             </a:r>
             <a:r>
               <a:rPr kumimoji="0" lang="zh-CN" altLang="en-US" sz="4000" b="0" i="0" u="none" strike="noStrike" kern="1200" cap="none" spc="0" normalizeH="0" baseline="0" noProof="0" dirty="0">
@@ -5349,9 +5937,41 @@
                 <a:ea typeface="楷体" panose="02010609060101010101" pitchFamily="49" charset="-122"/>
                 <a:cs typeface="+mn-cs"/>
               </a:rPr>
-              <a:t>找到藏在黑白花纹中的小光栅</a:t>
-            </a:r>
-            <a:endParaRPr kumimoji="0" lang="en-US" altLang="zh-CN" sz="4000" b="0" i="0" u="none" strike="noStrike" kern="1200" cap="none" spc="0" normalizeH="0" baseline="0" noProof="0" dirty="0">
+              <a:t>，</a:t>
+            </a:r>
+            <a:r>
+              <a:rPr kumimoji="0" lang="zh-CN" altLang="en-US" sz="4000" b="1" i="0" u="sng" strike="noStrike" kern="1200" cap="none" spc="0" normalizeH="0" baseline="0" noProof="0" dirty="0">
+                <a:ln>
+                  <a:noFill/>
+                </a:ln>
+                <a:solidFill>
+                  <a:prstClr val="black"/>
+                </a:solidFill>
+                <a:effectLst/>
+                <a:uLnTx/>
+                <a:uFillTx/>
+                <a:latin typeface="黑体" panose="02010609060101010101" pitchFamily="49" charset="-122"/>
+                <a:ea typeface="黑体" panose="02010609060101010101" pitchFamily="49" charset="-122"/>
+              </a:rPr>
+              <a:t>自由观察</a:t>
+            </a:r>
+            <a:r>
+              <a:rPr kumimoji="0" lang="zh-CN" altLang="en-US" sz="4000" i="0" strike="noStrike" kern="1200" cap="none" spc="0" normalizeH="0" baseline="0" noProof="0" dirty="0">
+                <a:ln>
+                  <a:noFill/>
+                </a:ln>
+                <a:solidFill>
+                  <a:prstClr val="black"/>
+                </a:solidFill>
+                <a:effectLst/>
+                <a:uLnTx/>
+                <a:uFillTx/>
+                <a:latin typeface="楷体" panose="02010609060101010101" pitchFamily="49" charset="-122"/>
+                <a:ea typeface="楷体" panose="02010609060101010101" pitchFamily="49" charset="-122"/>
+              </a:rPr>
+              <a:t>出现的纹理</a:t>
+            </a:r>
+            <a:endParaRPr kumimoji="0" lang="en-US" altLang="zh-CN" sz="4000" i="0" strike="noStrike" kern="1200" cap="none" spc="0" normalizeH="0" baseline="0" noProof="0" dirty="0">
               <a:ln>
                 <a:noFill/>
               </a:ln>
@@ -5363,363 +5983,16 @@
               <a:uFillTx/>
               <a:latin typeface="楷体" panose="02010609060101010101" pitchFamily="49" charset="-122"/>
               <a:ea typeface="楷体" panose="02010609060101010101" pitchFamily="49" charset="-122"/>
-              <a:cs typeface="+mn-cs"/>
             </a:endParaRPr>
           </a:p>
-          <a:p>
-            <a:pPr marL="685800" marR="0" lvl="0" indent="-685800" algn="l" defTabSz="914400" rtl="0" eaLnBrk="1" fontAlgn="auto" latinLnBrk="0" hangingPunct="1">
-              <a:lnSpc>
-                <a:spcPct val="125000"/>
-              </a:lnSpc>
-              <a:spcBef>
-                <a:spcPts val="0"/>
-              </a:spcBef>
-              <a:spcAft>
-                <a:spcPts val="0"/>
-              </a:spcAft>
-              <a:buClrTx/>
-              <a:buSzTx/>
-              <a:buFont typeface="Wingdings" panose="05000000000000000000" pitchFamily="2" charset="2"/>
-              <a:buChar char="p"/>
-              <a:tabLst/>
-              <a:defRPr/>
-            </a:pPr>
-            <a:r>
-              <a:rPr kumimoji="0" lang="zh-CN" altLang="en-US" sz="4000" b="0" i="0" u="none" strike="noStrike" kern="1200" cap="none" spc="0" normalizeH="0" baseline="0" noProof="0" dirty="0">
-                <a:ln>
-                  <a:noFill/>
-                </a:ln>
-                <a:solidFill>
-                  <a:prstClr val="black"/>
-                </a:solidFill>
-                <a:effectLst/>
-                <a:uLnTx/>
-                <a:uFillTx/>
-                <a:latin typeface="楷体" panose="02010609060101010101" pitchFamily="49" charset="-122"/>
-                <a:ea typeface="楷体" panose="02010609060101010101" pitchFamily="49" charset="-122"/>
-                <a:cs typeface="+mn-cs"/>
-              </a:rPr>
-              <a:t>余光发现光栅时立刻按下“</a:t>
-            </a:r>
-            <a:r>
-              <a:rPr kumimoji="0" lang="zh-CN" altLang="en-US" sz="4000" b="1" i="0" u="sng" strike="noStrike" kern="1200" cap="none" spc="0" normalizeH="0" baseline="0" noProof="0" dirty="0">
-                <a:ln>
-                  <a:noFill/>
-                </a:ln>
-                <a:solidFill>
-                  <a:prstClr val="black"/>
-                </a:solidFill>
-                <a:effectLst/>
-                <a:uLnTx/>
-                <a:uFillTx/>
-                <a:latin typeface="黑体" panose="02010609060101010101" pitchFamily="49" charset="-122"/>
-                <a:ea typeface="黑体" panose="02010609060101010101" pitchFamily="49" charset="-122"/>
-              </a:rPr>
-              <a:t>空格键</a:t>
-            </a:r>
-            <a:r>
-              <a:rPr kumimoji="0" lang="zh-CN" altLang="en-US" sz="4000" b="0" i="0" u="none" strike="noStrike" kern="1200" cap="none" spc="0" normalizeH="0" baseline="0" noProof="0" dirty="0">
-                <a:ln>
-                  <a:noFill/>
-                </a:ln>
-                <a:solidFill>
-                  <a:prstClr val="black"/>
-                </a:solidFill>
-                <a:effectLst/>
-                <a:uLnTx/>
-                <a:uFillTx/>
-                <a:latin typeface="楷体" panose="02010609060101010101" pitchFamily="49" charset="-122"/>
-                <a:ea typeface="楷体" panose="02010609060101010101" pitchFamily="49" charset="-122"/>
-                <a:cs typeface="+mn-cs"/>
-              </a:rPr>
-              <a:t>”</a:t>
-            </a:r>
-            <a:endParaRPr kumimoji="0" lang="en-US" altLang="zh-CN" sz="4000" b="0" i="0" u="none" strike="noStrike" kern="1200" cap="none" spc="0" normalizeH="0" baseline="0" noProof="0" dirty="0">
-              <a:ln>
-                <a:noFill/>
-              </a:ln>
-              <a:solidFill>
-                <a:prstClr val="black"/>
-              </a:solidFill>
-              <a:effectLst/>
-              <a:uLnTx/>
-              <a:uFillTx/>
-              <a:latin typeface="楷体" panose="02010609060101010101" pitchFamily="49" charset="-122"/>
-              <a:ea typeface="楷体" panose="02010609060101010101" pitchFamily="49" charset="-122"/>
-              <a:cs typeface="+mn-cs"/>
-            </a:endParaRPr>
-          </a:p>
-          <a:p>
-            <a:pPr marL="685800" marR="0" lvl="0" indent="-685800" algn="l" defTabSz="914400" rtl="0" eaLnBrk="1" fontAlgn="auto" latinLnBrk="0" hangingPunct="1">
-              <a:lnSpc>
-                <a:spcPct val="125000"/>
-              </a:lnSpc>
-              <a:spcBef>
-                <a:spcPts val="0"/>
-              </a:spcBef>
-              <a:spcAft>
-                <a:spcPts val="0"/>
-              </a:spcAft>
-              <a:buClrTx/>
-              <a:buSzTx/>
-              <a:buFont typeface="Wingdings" panose="05000000000000000000" pitchFamily="2" charset="2"/>
-              <a:buChar char="p"/>
-              <a:tabLst/>
-              <a:defRPr/>
-            </a:pPr>
-            <a:r>
-              <a:rPr kumimoji="0" lang="zh-CN" altLang="en-US" sz="4000" b="0" i="0" u="none" strike="noStrike" kern="1200" cap="none" spc="0" normalizeH="0" baseline="0" noProof="0" dirty="0">
-                <a:ln>
-                  <a:noFill/>
-                </a:ln>
-                <a:solidFill>
-                  <a:prstClr val="black"/>
-                </a:solidFill>
-                <a:effectLst/>
-                <a:uLnTx/>
-                <a:uFillTx/>
-                <a:latin typeface="楷体" panose="02010609060101010101" pitchFamily="49" charset="-122"/>
-                <a:ea typeface="楷体" panose="02010609060101010101" pitchFamily="49" charset="-122"/>
-                <a:cs typeface="+mn-cs"/>
-              </a:rPr>
-              <a:t>用眼睛盯住光栅后按下“</a:t>
-            </a:r>
-            <a:r>
-              <a:rPr kumimoji="0" lang="en-US" altLang="zh-CN" sz="4000" b="1" i="0" u="sng" strike="noStrike" kern="1200" cap="none" spc="0" normalizeH="0" baseline="0" noProof="0" dirty="0">
-                <a:ln>
-                  <a:noFill/>
-                </a:ln>
-                <a:solidFill>
-                  <a:prstClr val="black"/>
-                </a:solidFill>
-                <a:effectLst/>
-                <a:uLnTx/>
-                <a:uFillTx/>
-                <a:latin typeface="黑体" panose="02010609060101010101" pitchFamily="49" charset="-122"/>
-                <a:ea typeface="黑体" panose="02010609060101010101" pitchFamily="49" charset="-122"/>
-              </a:rPr>
-              <a:t>M</a:t>
-            </a:r>
-            <a:r>
-              <a:rPr kumimoji="0" lang="zh-CN" altLang="en-US" sz="4000" b="1" i="0" u="sng" strike="noStrike" kern="1200" cap="none" spc="0" normalizeH="0" baseline="0" noProof="0" dirty="0">
-                <a:ln>
-                  <a:noFill/>
-                </a:ln>
-                <a:solidFill>
-                  <a:prstClr val="black"/>
-                </a:solidFill>
-                <a:effectLst/>
-                <a:uLnTx/>
-                <a:uFillTx/>
-                <a:latin typeface="黑体" panose="02010609060101010101" pitchFamily="49" charset="-122"/>
-                <a:ea typeface="黑体" panose="02010609060101010101" pitchFamily="49" charset="-122"/>
-              </a:rPr>
-              <a:t>键</a:t>
-            </a:r>
-            <a:r>
-              <a:rPr kumimoji="0" lang="zh-CN" altLang="en-US" sz="4000" b="0" i="0" u="none" strike="noStrike" kern="1200" cap="none" spc="0" normalizeH="0" baseline="0" noProof="0" dirty="0">
-                <a:ln>
-                  <a:noFill/>
-                </a:ln>
-                <a:solidFill>
-                  <a:prstClr val="black"/>
-                </a:solidFill>
-                <a:effectLst/>
-                <a:uLnTx/>
-                <a:uFillTx/>
-                <a:latin typeface="楷体" panose="02010609060101010101" pitchFamily="49" charset="-122"/>
-                <a:ea typeface="楷体" panose="02010609060101010101" pitchFamily="49" charset="-122"/>
-                <a:cs typeface="+mn-cs"/>
-              </a:rPr>
-              <a:t>”</a:t>
-            </a:r>
-            <a:endParaRPr kumimoji="0" lang="en-US" altLang="zh-CN" sz="4000" b="0" i="0" u="none" strike="noStrike" kern="1200" cap="none" spc="0" normalizeH="0" baseline="0" noProof="0" dirty="0">
-              <a:ln>
-                <a:noFill/>
-              </a:ln>
-              <a:solidFill>
-                <a:prstClr val="black"/>
-              </a:solidFill>
-              <a:effectLst/>
-              <a:uLnTx/>
-              <a:uFillTx/>
-              <a:latin typeface="楷体" panose="02010609060101010101" pitchFamily="49" charset="-122"/>
-              <a:ea typeface="楷体" panose="02010609060101010101" pitchFamily="49" charset="-122"/>
-              <a:cs typeface="+mn-cs"/>
-            </a:endParaRPr>
-          </a:p>
-          <a:p>
-            <a:pPr marL="685800" marR="0" lvl="0" indent="-685800" algn="l" defTabSz="914400" rtl="0" eaLnBrk="1" fontAlgn="auto" latinLnBrk="0" hangingPunct="1">
-              <a:lnSpc>
-                <a:spcPct val="125000"/>
-              </a:lnSpc>
-              <a:spcBef>
-                <a:spcPts val="0"/>
-              </a:spcBef>
-              <a:spcAft>
-                <a:spcPts val="0"/>
-              </a:spcAft>
-              <a:buClrTx/>
-              <a:buSzTx/>
-              <a:buFont typeface="Wingdings" panose="05000000000000000000" pitchFamily="2" charset="2"/>
-              <a:buChar char="p"/>
-              <a:tabLst/>
-              <a:defRPr/>
-            </a:pPr>
-            <a:r>
-              <a:rPr kumimoji="0" lang="zh-CN" altLang="en-US" sz="4000" b="1" i="0" u="sng" strike="noStrike" kern="1200" cap="none" spc="0" normalizeH="0" baseline="0" noProof="0" dirty="0">
-                <a:ln>
-                  <a:noFill/>
-                </a:ln>
-                <a:solidFill>
-                  <a:prstClr val="black"/>
-                </a:solidFill>
-                <a:effectLst/>
-                <a:uLnTx/>
-                <a:uFillTx/>
-                <a:latin typeface="黑体" panose="02010609060101010101" pitchFamily="49" charset="-122"/>
-                <a:ea typeface="黑体" panose="02010609060101010101" pitchFamily="49" charset="-122"/>
-              </a:rPr>
-              <a:t>注视位置</a:t>
-            </a:r>
-            <a:r>
-              <a:rPr kumimoji="0" lang="zh-CN" altLang="en-US" sz="4000" b="0" i="0" u="none" strike="noStrike" kern="1200" cap="none" spc="0" normalizeH="0" baseline="0" noProof="0" dirty="0">
-                <a:ln>
-                  <a:noFill/>
-                </a:ln>
-                <a:solidFill>
-                  <a:prstClr val="black"/>
-                </a:solidFill>
-                <a:effectLst/>
-                <a:uLnTx/>
-                <a:uFillTx/>
-                <a:latin typeface="楷体" panose="02010609060101010101" pitchFamily="49" charset="-122"/>
-                <a:ea typeface="楷体" panose="02010609060101010101" pitchFamily="49" charset="-122"/>
-                <a:cs typeface="+mn-cs"/>
-              </a:rPr>
-              <a:t>出现蓝色圆点  表示回答</a:t>
-            </a:r>
-            <a:r>
-              <a:rPr kumimoji="0" lang="zh-CN" altLang="en-US" sz="4000" b="1" i="0" u="none" strike="noStrike" kern="1200" cap="none" spc="0" normalizeH="0" baseline="0" noProof="0" dirty="0">
-                <a:ln>
-                  <a:noFill/>
-                </a:ln>
-                <a:solidFill>
-                  <a:srgbClr val="0070C0"/>
-                </a:solidFill>
-                <a:effectLst/>
-                <a:uLnTx/>
-                <a:uFillTx/>
-                <a:latin typeface="楷体" panose="02010609060101010101" pitchFamily="49" charset="-122"/>
-                <a:ea typeface="楷体" panose="02010609060101010101" pitchFamily="49" charset="-122"/>
-                <a:cs typeface="+mn-cs"/>
-              </a:rPr>
-              <a:t>正确</a:t>
-            </a:r>
-            <a:endParaRPr kumimoji="0" lang="en-US" altLang="zh-CN" sz="4000" b="1" i="0" u="none" strike="noStrike" kern="1200" cap="none" spc="0" normalizeH="0" baseline="0" noProof="0" dirty="0">
-              <a:ln>
-                <a:noFill/>
-              </a:ln>
-              <a:solidFill>
-                <a:srgbClr val="0070C0"/>
-              </a:solidFill>
-              <a:effectLst/>
-              <a:uLnTx/>
-              <a:uFillTx/>
-              <a:latin typeface="楷体" panose="02010609060101010101" pitchFamily="49" charset="-122"/>
-              <a:ea typeface="楷体" panose="02010609060101010101" pitchFamily="49" charset="-122"/>
-              <a:cs typeface="+mn-cs"/>
-            </a:endParaRPr>
-          </a:p>
         </p:txBody>
       </p:sp>
       <p:sp>
         <p:nvSpPr>
-          <p:cNvPr id="7" name="椭圆 6">
-            <a:extLst>
-              <a:ext uri="{FF2B5EF4-FFF2-40B4-BE49-F238E27FC236}">
-                <a16:creationId xmlns:a16="http://schemas.microsoft.com/office/drawing/2014/main" id="{D0DC6F25-8E97-976B-A047-64219172E155}"/>
-              </a:ext>
-            </a:extLst>
-          </p:cNvPr>
-          <p:cNvSpPr/>
-          <p:nvPr/>
-        </p:nvSpPr>
-        <p:spPr>
-          <a:xfrm>
-            <a:off x="7491547" y="4976951"/>
-            <a:ext cx="306977" cy="306977"/>
-          </a:xfrm>
-          <a:prstGeom prst="ellipse">
-            <a:avLst/>
-          </a:prstGeom>
-          <a:solidFill>
-            <a:srgbClr val="0070C0"/>
-          </a:solidFill>
-          <a:ln>
-            <a:noFill/>
-          </a:ln>
-        </p:spPr>
-        <p:style>
-          <a:lnRef idx="2">
-            <a:schemeClr val="accent1">
-              <a:shade val="15000"/>
-            </a:schemeClr>
-          </a:lnRef>
-          <a:fillRef idx="1">
-            <a:schemeClr val="accent1"/>
-          </a:fillRef>
-          <a:effectRef idx="0">
-            <a:schemeClr val="accent1"/>
-          </a:effectRef>
-          <a:fontRef idx="minor">
-            <a:schemeClr val="lt1"/>
-          </a:fontRef>
-        </p:style>
-        <p:txBody>
-          <a:bodyPr rtlCol="0" anchor="ctr"/>
-          <a:lstStyle/>
-          <a:p>
-            <a:pPr marL="0" marR="0" lvl="0" indent="0" algn="ctr" defTabSz="914400" rtl="0" eaLnBrk="1" fontAlgn="auto" latinLnBrk="0" hangingPunct="1">
-              <a:lnSpc>
-                <a:spcPct val="100000"/>
-              </a:lnSpc>
-              <a:spcBef>
-                <a:spcPts val="0"/>
-              </a:spcBef>
-              <a:spcAft>
-                <a:spcPts val="0"/>
-              </a:spcAft>
-              <a:buClrTx/>
-              <a:buSzTx/>
-              <a:buFontTx/>
-              <a:buNone/>
-              <a:tabLst/>
-              <a:defRPr/>
-            </a:pPr>
-            <a:endParaRPr kumimoji="0" lang="zh-CN" altLang="en-US" sz="1800" b="0" i="0" u="none" strike="noStrike" kern="1200" cap="none" spc="0" normalizeH="0" baseline="0" noProof="0">
-              <a:ln>
-                <a:noFill/>
-              </a:ln>
-              <a:solidFill>
-                <a:prstClr val="white"/>
-              </a:solidFill>
-              <a:effectLst/>
-              <a:uLnTx/>
-              <a:uFillTx/>
-              <a:latin typeface="等线" panose="02110004020202020204"/>
-              <a:ea typeface="等线" panose="02010600030101010101" pitchFamily="2" charset="-122"/>
-              <a:cs typeface="+mn-cs"/>
-            </a:endParaRPr>
-          </a:p>
-        </p:txBody>
-      </p:sp>
-      <p:sp>
-        <p:nvSpPr>
-          <p:cNvPr id="2" name="矩形: 圆角 1">
-            <a:extLst>
-              <a:ext uri="{FF2B5EF4-FFF2-40B4-BE49-F238E27FC236}">
-                <a16:creationId xmlns:a16="http://schemas.microsoft.com/office/drawing/2014/main" id="{7253B336-37C1-ABDB-13B7-A199FE136DAD}"/>
+          <p:cNvPr id="8" name="矩形: 圆角 7">
+            <a:extLst>
+              <a:ext uri="{FF2B5EF4-FFF2-40B4-BE49-F238E27FC236}">
+                <a16:creationId xmlns:a16="http://schemas.microsoft.com/office/drawing/2014/main" id="{7A2E032D-AF93-BF4B-1810-0D36A9043BE2}"/>
               </a:ext>
             </a:extLst>
           </p:cNvPr>
@@ -5779,10 +6052,10 @@
       </p:sp>
       <p:sp>
         <p:nvSpPr>
-          <p:cNvPr id="3" name="文本框 2">
-            <a:extLst>
-              <a:ext uri="{FF2B5EF4-FFF2-40B4-BE49-F238E27FC236}">
-                <a16:creationId xmlns:a16="http://schemas.microsoft.com/office/drawing/2014/main" id="{ED459190-D889-C999-CE21-824606FEE97E}"/>
+          <p:cNvPr id="9" name="文本框 8">
+            <a:extLst>
+              <a:ext uri="{FF2B5EF4-FFF2-40B4-BE49-F238E27FC236}">
+                <a16:creationId xmlns:a16="http://schemas.microsoft.com/office/drawing/2014/main" id="{5D70BD79-C266-7A80-F5D1-B58B5D1BC795}"/>
               </a:ext>
             </a:extLst>
           </p:cNvPr>
@@ -5861,45 +6134,10 @@
           </a:p>
         </p:txBody>
       </p:sp>
-      <p:pic>
-        <p:nvPicPr>
-          <p:cNvPr id="5" name="图片 4" descr="卡通人物&#10;&#10;低可信度描述已自动生成">
-            <a:extLst>
-              <a:ext uri="{FF2B5EF4-FFF2-40B4-BE49-F238E27FC236}">
-                <a16:creationId xmlns:a16="http://schemas.microsoft.com/office/drawing/2014/main" id="{99DFA79E-0FCF-EC9B-3467-B940E5845553}"/>
-              </a:ext>
-            </a:extLst>
-          </p:cNvPr>
-          <p:cNvPicPr>
-            <a:picLocks noChangeAspect="1"/>
-          </p:cNvPicPr>
-          <p:nvPr/>
-        </p:nvPicPr>
-        <p:blipFill>
-          <a:blip r:embed="rId2" cstate="hqprint">
-            <a:extLst>
-              <a:ext uri="{28A0092B-C50C-407E-A947-70E740481C1C}">
-                <a14:useLocalDpi xmlns:a14="http://schemas.microsoft.com/office/drawing/2010/main"/>
-              </a:ext>
-            </a:extLst>
-          </a:blip>
-          <a:srcRect/>
-          <a:stretch/>
-        </p:blipFill>
-        <p:spPr>
-          <a:xfrm>
-            <a:off x="10360046" y="2545831"/>
-            <a:ext cx="610009" cy="596751"/>
-          </a:xfrm>
-          <a:prstGeom prst="rect">
-            <a:avLst/>
-          </a:prstGeom>
-        </p:spPr>
-      </p:pic>
     </p:spTree>
     <p:extLst>
       <p:ext uri="{BB962C8B-B14F-4D97-AF65-F5344CB8AC3E}">
-        <p14:creationId xmlns:p14="http://schemas.microsoft.com/office/powerpoint/2010/main" val="3492412918"/>
+        <p14:creationId xmlns:p14="http://schemas.microsoft.com/office/powerpoint/2010/main" val="4052499401"/>
       </p:ext>
     </p:extLst>
   </p:cSld>
@@ -5928,7 +6166,7 @@
         <p:cNvPr id="1" name="">
           <a:extLst>
             <a:ext uri="{FF2B5EF4-FFF2-40B4-BE49-F238E27FC236}">
-              <a16:creationId xmlns:a16="http://schemas.microsoft.com/office/drawing/2014/main" id="{EB7CFC86-901F-CDB7-253E-1DC84EFAE76B}"/>
+              <a16:creationId xmlns:a16="http://schemas.microsoft.com/office/drawing/2014/main" id="{5CAD8C95-8895-357D-700F-23BD971CC610}"/>
             </a:ext>
           </a:extLst>
         </p:cNvPr>
@@ -5948,7 +6186,7 @@
           <p:cNvPr id="4" name="文本框 3">
             <a:extLst>
               <a:ext uri="{FF2B5EF4-FFF2-40B4-BE49-F238E27FC236}">
-                <a16:creationId xmlns:a16="http://schemas.microsoft.com/office/drawing/2014/main" id="{7CFDA22B-07D0-9092-BD3A-A5D3689E278B}"/>
+                <a16:creationId xmlns:a16="http://schemas.microsoft.com/office/drawing/2014/main" id="{46FE46C2-ED6A-E66D-D19C-FB6F83546E73}"/>
               </a:ext>
             </a:extLst>
           </p:cNvPr>
@@ -6013,7 +6251,7 @@
           <p:cNvPr id="6" name="文本框 5">
             <a:extLst>
               <a:ext uri="{FF2B5EF4-FFF2-40B4-BE49-F238E27FC236}">
-                <a16:creationId xmlns:a16="http://schemas.microsoft.com/office/drawing/2014/main" id="{30C527D1-3F6D-B86E-8D8F-D1A482BA5B5A}"/>
+                <a16:creationId xmlns:a16="http://schemas.microsoft.com/office/drawing/2014/main" id="{92E78935-2303-B61E-B7B0-1EFBACF86016}"/>
               </a:ext>
             </a:extLst>
           </p:cNvPr>
@@ -6023,7 +6261,7 @@
         <p:spPr>
           <a:xfrm>
             <a:off x="1500050" y="1645919"/>
-            <a:ext cx="9714412" cy="4603183"/>
+            <a:ext cx="9714412" cy="1525418"/>
           </a:xfrm>
           <a:prstGeom prst="rect">
             <a:avLst/>
@@ -6194,447 +6432,14 @@
               <a:cs typeface="+mn-cs"/>
             </a:endParaRPr>
           </a:p>
-          <a:p>
-            <a:pPr marL="685800" marR="0" lvl="0" indent="-685800" algn="l" defTabSz="914400" rtl="0" eaLnBrk="1" fontAlgn="auto" latinLnBrk="0" hangingPunct="1">
-              <a:lnSpc>
-                <a:spcPct val="125000"/>
-              </a:lnSpc>
-              <a:spcBef>
-                <a:spcPts val="0"/>
-              </a:spcBef>
-              <a:spcAft>
-                <a:spcPts val="0"/>
-              </a:spcAft>
-              <a:buClrTx/>
-              <a:buSzTx/>
-              <a:buFont typeface="Wingdings" panose="05000000000000000000" pitchFamily="2" charset="2"/>
-              <a:buChar char="p"/>
-              <a:tabLst/>
-              <a:defRPr/>
-            </a:pPr>
-            <a:r>
-              <a:rPr kumimoji="0" lang="zh-CN" altLang="en-US" sz="4000" b="0" i="0" u="none" strike="noStrike" kern="1200" cap="none" spc="0" normalizeH="0" baseline="0" noProof="0" dirty="0">
-                <a:ln>
-                  <a:noFill/>
-                </a:ln>
-                <a:solidFill>
-                  <a:prstClr val="black"/>
-                </a:solidFill>
-                <a:effectLst/>
-                <a:uLnTx/>
-                <a:uFillTx/>
-                <a:latin typeface="楷体" panose="02010609060101010101" pitchFamily="49" charset="-122"/>
-                <a:ea typeface="楷体" panose="02010609060101010101" pitchFamily="49" charset="-122"/>
-                <a:cs typeface="+mn-cs"/>
-              </a:rPr>
-              <a:t>余光发现光栅时立刻按下“</a:t>
-            </a:r>
-            <a:r>
-              <a:rPr kumimoji="0" lang="zh-CN" altLang="en-US" sz="4000" b="1" i="0" u="sng" strike="noStrike" kern="1200" cap="none" spc="0" normalizeH="0" baseline="0" noProof="0" dirty="0">
-                <a:ln>
-                  <a:noFill/>
-                </a:ln>
-                <a:solidFill>
-                  <a:prstClr val="black"/>
-                </a:solidFill>
-                <a:effectLst/>
-                <a:uLnTx/>
-                <a:uFillTx/>
-                <a:latin typeface="黑体" panose="02010609060101010101" pitchFamily="49" charset="-122"/>
-                <a:ea typeface="黑体" panose="02010609060101010101" pitchFamily="49" charset="-122"/>
-              </a:rPr>
-              <a:t>空格键</a:t>
-            </a:r>
-            <a:r>
-              <a:rPr kumimoji="0" lang="zh-CN" altLang="en-US" sz="4000" b="0" i="0" u="none" strike="noStrike" kern="1200" cap="none" spc="0" normalizeH="0" baseline="0" noProof="0" dirty="0">
-                <a:ln>
-                  <a:noFill/>
-                </a:ln>
-                <a:solidFill>
-                  <a:prstClr val="black"/>
-                </a:solidFill>
-                <a:effectLst/>
-                <a:uLnTx/>
-                <a:uFillTx/>
-                <a:latin typeface="楷体" panose="02010609060101010101" pitchFamily="49" charset="-122"/>
-                <a:ea typeface="楷体" panose="02010609060101010101" pitchFamily="49" charset="-122"/>
-                <a:cs typeface="+mn-cs"/>
-              </a:rPr>
-              <a:t>”</a:t>
-            </a:r>
-            <a:endParaRPr kumimoji="0" lang="en-US" altLang="zh-CN" sz="4000" b="0" i="0" u="none" strike="noStrike" kern="1200" cap="none" spc="0" normalizeH="0" baseline="0" noProof="0" dirty="0">
-              <a:ln>
-                <a:noFill/>
-              </a:ln>
-              <a:solidFill>
-                <a:prstClr val="black"/>
-              </a:solidFill>
-              <a:effectLst/>
-              <a:uLnTx/>
-              <a:uFillTx/>
-              <a:latin typeface="楷体" panose="02010609060101010101" pitchFamily="49" charset="-122"/>
-              <a:ea typeface="楷体" panose="02010609060101010101" pitchFamily="49" charset="-122"/>
-              <a:cs typeface="+mn-cs"/>
-            </a:endParaRPr>
-          </a:p>
-          <a:p>
-            <a:pPr marL="685800" marR="0" lvl="0" indent="-685800" algn="l" defTabSz="914400" rtl="0" eaLnBrk="1" fontAlgn="auto" latinLnBrk="0" hangingPunct="1">
-              <a:lnSpc>
-                <a:spcPct val="125000"/>
-              </a:lnSpc>
-              <a:spcBef>
-                <a:spcPts val="0"/>
-              </a:spcBef>
-              <a:spcAft>
-                <a:spcPts val="0"/>
-              </a:spcAft>
-              <a:buClrTx/>
-              <a:buSzTx/>
-              <a:buFont typeface="Wingdings" panose="05000000000000000000" pitchFamily="2" charset="2"/>
-              <a:buChar char="p"/>
-              <a:tabLst/>
-              <a:defRPr/>
-            </a:pPr>
-            <a:r>
-              <a:rPr kumimoji="0" lang="zh-CN" altLang="en-US" sz="4000" b="0" i="0" u="none" strike="noStrike" kern="1200" cap="none" spc="0" normalizeH="0" baseline="0" noProof="0" dirty="0">
-                <a:ln>
-                  <a:noFill/>
-                </a:ln>
-                <a:solidFill>
-                  <a:prstClr val="black"/>
-                </a:solidFill>
-                <a:effectLst/>
-                <a:uLnTx/>
-                <a:uFillTx/>
-                <a:latin typeface="楷体" panose="02010609060101010101" pitchFamily="49" charset="-122"/>
-                <a:ea typeface="楷体" panose="02010609060101010101" pitchFamily="49" charset="-122"/>
-                <a:cs typeface="+mn-cs"/>
-              </a:rPr>
-              <a:t>用眼睛盯住光栅后按下“</a:t>
-            </a:r>
-            <a:r>
-              <a:rPr kumimoji="0" lang="en-US" altLang="zh-CN" sz="4000" b="1" i="0" u="sng" strike="noStrike" kern="1200" cap="none" spc="0" normalizeH="0" baseline="0" noProof="0" dirty="0">
-                <a:ln>
-                  <a:noFill/>
-                </a:ln>
-                <a:solidFill>
-                  <a:prstClr val="black"/>
-                </a:solidFill>
-                <a:effectLst/>
-                <a:uLnTx/>
-                <a:uFillTx/>
-                <a:latin typeface="黑体" panose="02010609060101010101" pitchFamily="49" charset="-122"/>
-                <a:ea typeface="黑体" panose="02010609060101010101" pitchFamily="49" charset="-122"/>
-              </a:rPr>
-              <a:t>M</a:t>
-            </a:r>
-            <a:r>
-              <a:rPr kumimoji="0" lang="zh-CN" altLang="en-US" sz="4000" b="1" i="0" u="sng" strike="noStrike" kern="1200" cap="none" spc="0" normalizeH="0" baseline="0" noProof="0" dirty="0">
-                <a:ln>
-                  <a:noFill/>
-                </a:ln>
-                <a:solidFill>
-                  <a:prstClr val="black"/>
-                </a:solidFill>
-                <a:effectLst/>
-                <a:uLnTx/>
-                <a:uFillTx/>
-                <a:latin typeface="黑体" panose="02010609060101010101" pitchFamily="49" charset="-122"/>
-                <a:ea typeface="黑体" panose="02010609060101010101" pitchFamily="49" charset="-122"/>
-              </a:rPr>
-              <a:t>键</a:t>
-            </a:r>
-            <a:r>
-              <a:rPr kumimoji="0" lang="zh-CN" altLang="en-US" sz="4000" b="0" i="0" u="none" strike="noStrike" kern="1200" cap="none" spc="0" normalizeH="0" baseline="0" noProof="0" dirty="0">
-                <a:ln>
-                  <a:noFill/>
-                </a:ln>
-                <a:solidFill>
-                  <a:prstClr val="black"/>
-                </a:solidFill>
-                <a:effectLst/>
-                <a:uLnTx/>
-                <a:uFillTx/>
-                <a:latin typeface="楷体" panose="02010609060101010101" pitchFamily="49" charset="-122"/>
-                <a:ea typeface="楷体" panose="02010609060101010101" pitchFamily="49" charset="-122"/>
-                <a:cs typeface="+mn-cs"/>
-              </a:rPr>
-              <a:t>”</a:t>
-            </a:r>
-            <a:endParaRPr kumimoji="0" lang="en-US" altLang="zh-CN" sz="4000" b="0" i="0" u="none" strike="noStrike" kern="1200" cap="none" spc="0" normalizeH="0" baseline="0" noProof="0" dirty="0">
-              <a:ln>
-                <a:noFill/>
-              </a:ln>
-              <a:solidFill>
-                <a:prstClr val="black"/>
-              </a:solidFill>
-              <a:effectLst/>
-              <a:uLnTx/>
-              <a:uFillTx/>
-              <a:latin typeface="楷体" panose="02010609060101010101" pitchFamily="49" charset="-122"/>
-              <a:ea typeface="楷体" panose="02010609060101010101" pitchFamily="49" charset="-122"/>
-              <a:cs typeface="+mn-cs"/>
-            </a:endParaRPr>
-          </a:p>
-          <a:p>
-            <a:pPr marL="685800" marR="0" lvl="0" indent="-685800" algn="l" defTabSz="914400" rtl="0" eaLnBrk="1" fontAlgn="auto" latinLnBrk="0" hangingPunct="1">
-              <a:lnSpc>
-                <a:spcPct val="125000"/>
-              </a:lnSpc>
-              <a:spcBef>
-                <a:spcPts val="0"/>
-              </a:spcBef>
-              <a:spcAft>
-                <a:spcPts val="0"/>
-              </a:spcAft>
-              <a:buClrTx/>
-              <a:buSzTx/>
-              <a:buFont typeface="Wingdings" panose="05000000000000000000" pitchFamily="2" charset="2"/>
-              <a:buChar char="p"/>
-              <a:tabLst/>
-              <a:defRPr/>
-            </a:pPr>
-            <a:r>
-              <a:rPr kumimoji="0" lang="zh-CN" altLang="en-US" sz="4000" b="1" i="0" u="sng" strike="noStrike" kern="1200" cap="none" spc="0" normalizeH="0" baseline="0" noProof="0" dirty="0">
-                <a:ln>
-                  <a:noFill/>
-                </a:ln>
-                <a:solidFill>
-                  <a:prstClr val="black"/>
-                </a:solidFill>
-                <a:effectLst/>
-                <a:uLnTx/>
-                <a:uFillTx/>
-                <a:latin typeface="黑体" panose="02010609060101010101" pitchFamily="49" charset="-122"/>
-                <a:ea typeface="黑体" panose="02010609060101010101" pitchFamily="49" charset="-122"/>
-              </a:rPr>
-              <a:t>注视位置</a:t>
-            </a:r>
-            <a:r>
-              <a:rPr kumimoji="0" lang="zh-CN" altLang="en-US" sz="4000" b="0" i="0" u="none" strike="noStrike" kern="1200" cap="none" spc="0" normalizeH="0" baseline="0" noProof="0" dirty="0">
-                <a:ln>
-                  <a:noFill/>
-                </a:ln>
-                <a:solidFill>
-                  <a:prstClr val="black"/>
-                </a:solidFill>
-                <a:effectLst/>
-                <a:uLnTx/>
-                <a:uFillTx/>
-                <a:latin typeface="楷体" panose="02010609060101010101" pitchFamily="49" charset="-122"/>
-                <a:ea typeface="楷体" panose="02010609060101010101" pitchFamily="49" charset="-122"/>
-                <a:cs typeface="+mn-cs"/>
-              </a:rPr>
-              <a:t>出现蓝色圆点  表示回答</a:t>
-            </a:r>
-            <a:r>
-              <a:rPr kumimoji="0" lang="zh-CN" altLang="en-US" sz="4000" b="1" i="0" u="none" strike="noStrike" kern="1200" cap="none" spc="0" normalizeH="0" baseline="0" noProof="0" dirty="0">
-                <a:ln>
-                  <a:noFill/>
-                </a:ln>
-                <a:solidFill>
-                  <a:srgbClr val="0070C0"/>
-                </a:solidFill>
-                <a:effectLst/>
-                <a:uLnTx/>
-                <a:uFillTx/>
-                <a:latin typeface="楷体" panose="02010609060101010101" pitchFamily="49" charset="-122"/>
-                <a:ea typeface="楷体" panose="02010609060101010101" pitchFamily="49" charset="-122"/>
-                <a:cs typeface="+mn-cs"/>
-              </a:rPr>
-              <a:t>正确</a:t>
-            </a:r>
-            <a:endParaRPr kumimoji="0" lang="en-US" altLang="zh-CN" sz="4000" b="1" i="0" u="none" strike="noStrike" kern="1200" cap="none" spc="0" normalizeH="0" baseline="0" noProof="0" dirty="0">
-              <a:ln>
-                <a:noFill/>
-              </a:ln>
-              <a:solidFill>
-                <a:srgbClr val="0070C0"/>
-              </a:solidFill>
-              <a:effectLst/>
-              <a:uLnTx/>
-              <a:uFillTx/>
-              <a:latin typeface="楷体" panose="02010609060101010101" pitchFamily="49" charset="-122"/>
-              <a:ea typeface="楷体" panose="02010609060101010101" pitchFamily="49" charset="-122"/>
-              <a:cs typeface="+mn-cs"/>
-            </a:endParaRPr>
-          </a:p>
-          <a:p>
-            <a:pPr marL="685800" marR="0" lvl="0" indent="-685800" algn="l" defTabSz="914400" rtl="0" eaLnBrk="1" fontAlgn="auto" latinLnBrk="0" hangingPunct="1">
-              <a:lnSpc>
-                <a:spcPct val="125000"/>
-              </a:lnSpc>
-              <a:spcBef>
-                <a:spcPts val="0"/>
-              </a:spcBef>
-              <a:spcAft>
-                <a:spcPts val="0"/>
-              </a:spcAft>
-              <a:buClrTx/>
-              <a:buSzTx/>
-              <a:buFont typeface="Wingdings" panose="05000000000000000000" pitchFamily="2" charset="2"/>
-              <a:buChar char="ü"/>
-              <a:tabLst/>
-              <a:defRPr/>
-            </a:pPr>
-            <a:r>
-              <a:rPr kumimoji="0" lang="zh-CN" altLang="en-US" sz="4000" b="0" i="0" u="none" strike="noStrike" kern="1200" cap="none" spc="0" normalizeH="0" baseline="0" noProof="0" dirty="0">
-                <a:ln>
-                  <a:noFill/>
-                </a:ln>
-                <a:solidFill>
-                  <a:prstClr val="black"/>
-                </a:solidFill>
-                <a:effectLst/>
-                <a:uLnTx/>
-                <a:uFillTx/>
-                <a:latin typeface="楷体" panose="02010609060101010101" pitchFamily="49" charset="-122"/>
-                <a:ea typeface="楷体" panose="02010609060101010101" pitchFamily="49" charset="-122"/>
-                <a:cs typeface="+mn-cs"/>
-              </a:rPr>
-              <a:t>连续做对</a:t>
-            </a:r>
-            <a:r>
-              <a:rPr kumimoji="0" lang="en-US" altLang="zh-CN" sz="4000" b="1" i="0" u="none" strike="noStrike" kern="1200" cap="none" spc="0" normalizeH="0" baseline="0" noProof="0" dirty="0">
-                <a:ln>
-                  <a:noFill/>
-                </a:ln>
-                <a:solidFill>
-                  <a:prstClr val="black"/>
-                </a:solidFill>
-                <a:effectLst/>
-                <a:uLnTx/>
-                <a:uFillTx/>
-                <a:latin typeface="楷体" panose="02010609060101010101" pitchFamily="49" charset="-122"/>
-                <a:ea typeface="楷体" panose="02010609060101010101" pitchFamily="49" charset="-122"/>
-                <a:cs typeface="+mn-cs"/>
-              </a:rPr>
-              <a:t>10</a:t>
-            </a:r>
-            <a:r>
-              <a:rPr kumimoji="0" lang="zh-CN" altLang="en-US" sz="4000" b="1" i="0" u="none" strike="noStrike" kern="1200" cap="none" spc="0" normalizeH="0" baseline="0" noProof="0" dirty="0">
-                <a:ln>
-                  <a:noFill/>
-                </a:ln>
-                <a:solidFill>
-                  <a:prstClr val="black"/>
-                </a:solidFill>
-                <a:effectLst/>
-                <a:uLnTx/>
-                <a:uFillTx/>
-                <a:latin typeface="楷体" panose="02010609060101010101" pitchFamily="49" charset="-122"/>
-                <a:ea typeface="楷体" panose="02010609060101010101" pitchFamily="49" charset="-122"/>
-                <a:cs typeface="+mn-cs"/>
-              </a:rPr>
-              <a:t>次</a:t>
-            </a:r>
-            <a:r>
-              <a:rPr kumimoji="0" lang="zh-CN" altLang="en-US" sz="4000" b="0" i="0" u="none" strike="noStrike" kern="1200" cap="none" spc="0" normalizeH="0" baseline="0" noProof="0" dirty="0">
-                <a:ln>
-                  <a:noFill/>
-                </a:ln>
-                <a:solidFill>
-                  <a:prstClr val="black"/>
-                </a:solidFill>
-                <a:effectLst/>
-                <a:uLnTx/>
-                <a:uFillTx/>
-                <a:latin typeface="楷体" panose="02010609060101010101" pitchFamily="49" charset="-122"/>
-                <a:ea typeface="楷体" panose="02010609060101010101" pitchFamily="49" charset="-122"/>
-                <a:cs typeface="+mn-cs"/>
-              </a:rPr>
-              <a:t>即可通过</a:t>
-            </a:r>
-          </a:p>
         </p:txBody>
       </p:sp>
       <p:sp>
         <p:nvSpPr>
-          <p:cNvPr id="7" name="椭圆 6">
-            <a:extLst>
-              <a:ext uri="{FF2B5EF4-FFF2-40B4-BE49-F238E27FC236}">
-                <a16:creationId xmlns:a16="http://schemas.microsoft.com/office/drawing/2014/main" id="{EEE5533C-453C-2085-11B2-E9FA2DCA9CE7}"/>
-              </a:ext>
-            </a:extLst>
-          </p:cNvPr>
-          <p:cNvSpPr/>
-          <p:nvPr/>
-        </p:nvSpPr>
-        <p:spPr>
-          <a:xfrm>
-            <a:off x="7471954" y="4976951"/>
-            <a:ext cx="306977" cy="306977"/>
-          </a:xfrm>
-          <a:prstGeom prst="ellipse">
-            <a:avLst/>
-          </a:prstGeom>
-          <a:solidFill>
-            <a:srgbClr val="0070C0"/>
-          </a:solidFill>
-          <a:ln>
-            <a:noFill/>
-          </a:ln>
-        </p:spPr>
-        <p:style>
-          <a:lnRef idx="2">
-            <a:schemeClr val="accent1">
-              <a:shade val="15000"/>
-            </a:schemeClr>
-          </a:lnRef>
-          <a:fillRef idx="1">
-            <a:schemeClr val="accent1"/>
-          </a:fillRef>
-          <a:effectRef idx="0">
-            <a:schemeClr val="accent1"/>
-          </a:effectRef>
-          <a:fontRef idx="minor">
-            <a:schemeClr val="lt1"/>
-          </a:fontRef>
-        </p:style>
-        <p:txBody>
-          <a:bodyPr rtlCol="0" anchor="ctr"/>
-          <a:lstStyle/>
-          <a:p>
-            <a:pPr marL="0" marR="0" lvl="0" indent="0" algn="ctr" defTabSz="914400" rtl="0" eaLnBrk="1" fontAlgn="auto" latinLnBrk="0" hangingPunct="1">
-              <a:lnSpc>
-                <a:spcPct val="100000"/>
-              </a:lnSpc>
-              <a:spcBef>
-                <a:spcPts val="0"/>
-              </a:spcBef>
-              <a:spcAft>
-                <a:spcPts val="0"/>
-              </a:spcAft>
-              <a:buClrTx/>
-              <a:buSzTx/>
-              <a:buFontTx/>
-              <a:buNone/>
-              <a:tabLst/>
-              <a:defRPr/>
-            </a:pPr>
-            <a:endParaRPr kumimoji="0" lang="zh-CN" altLang="en-US" sz="1800" b="0" i="0" u="none" strike="noStrike" kern="1200" cap="none" spc="0" normalizeH="0" baseline="0" noProof="0">
-              <a:ln>
-                <a:noFill/>
-              </a:ln>
-              <a:solidFill>
-                <a:prstClr val="white"/>
-              </a:solidFill>
-              <a:effectLst/>
-              <a:uLnTx/>
-              <a:uFillTx/>
-              <a:latin typeface="等线" panose="02110004020202020204"/>
-              <a:ea typeface="等线" panose="02010600030101010101" pitchFamily="2" charset="-122"/>
-              <a:cs typeface="+mn-cs"/>
-            </a:endParaRPr>
-          </a:p>
-        </p:txBody>
-      </p:sp>
-      <p:sp>
-        <p:nvSpPr>
           <p:cNvPr id="2" name="矩形: 圆角 1">
             <a:extLst>
               <a:ext uri="{FF2B5EF4-FFF2-40B4-BE49-F238E27FC236}">
-                <a16:creationId xmlns:a16="http://schemas.microsoft.com/office/drawing/2014/main" id="{F648DF66-1849-31FD-9C0E-B6F9ED44623B}"/>
+                <a16:creationId xmlns:a16="http://schemas.microsoft.com/office/drawing/2014/main" id="{BB8A0B00-FC89-2235-BE81-C8F66575014C}"/>
               </a:ext>
             </a:extLst>
           </p:cNvPr>
@@ -6697,7 +6502,7 @@
           <p:cNvPr id="3" name="文本框 2">
             <a:extLst>
               <a:ext uri="{FF2B5EF4-FFF2-40B4-BE49-F238E27FC236}">
-                <a16:creationId xmlns:a16="http://schemas.microsoft.com/office/drawing/2014/main" id="{9D29BDF1-757D-786B-3121-AA7BBCB86AE3}"/>
+                <a16:creationId xmlns:a16="http://schemas.microsoft.com/office/drawing/2014/main" id="{ED4C2EFC-240A-D3CC-F6A3-7CA541F34AB7}"/>
               </a:ext>
             </a:extLst>
           </p:cNvPr>
@@ -6770,25 +6575,9 @@
                 <a:ea typeface="楷体" panose="02010609060101010101" pitchFamily="49" charset="-122"/>
                 <a:cs typeface="+mn-cs"/>
               </a:rPr>
-              <a:t>”</a:t>
-            </a:r>
-            <a:r>
-              <a:rPr lang="zh-CN" altLang="en-US" sz="2800" b="1" dirty="0">
-                <a:solidFill>
-                  <a:srgbClr val="FF0000"/>
-                </a:solidFill>
-                <a:latin typeface="黑体" panose="02010609060101010101" pitchFamily="49" charset="-122"/>
-                <a:ea typeface="黑体" panose="02010609060101010101" pitchFamily="49" charset="-122"/>
-              </a:rPr>
-              <a:t>开始</a:t>
-            </a:r>
-            <a:endParaRPr lang="zh-CN" altLang="en-US" sz="1200" b="1" dirty="0">
-              <a:solidFill>
-                <a:srgbClr val="FF0000"/>
-              </a:solidFill>
-              <a:latin typeface="黑体" panose="02010609060101010101" pitchFamily="49" charset="-122"/>
-              <a:ea typeface="黑体" panose="02010609060101010101" pitchFamily="49" charset="-122"/>
-            </a:endParaRPr>
+              <a:t>”继续</a:t>
+            </a:r>
+            <a:endParaRPr lang="zh-CN" altLang="en-US" sz="1200" dirty="0"/>
           </a:p>
         </p:txBody>
       </p:sp>
@@ -6797,7 +6586,7 @@
           <p:cNvPr id="5" name="图片 4" descr="卡通人物&#10;&#10;低可信度描述已自动生成">
             <a:extLst>
               <a:ext uri="{FF2B5EF4-FFF2-40B4-BE49-F238E27FC236}">
-                <a16:creationId xmlns:a16="http://schemas.microsoft.com/office/drawing/2014/main" id="{D76044CE-4457-84F9-A939-A2300E70AB29}"/>
+                <a16:creationId xmlns:a16="http://schemas.microsoft.com/office/drawing/2014/main" id="{8D61E5B5-4322-7BE2-865E-BA96F6A0108B}"/>
               </a:ext>
             </a:extLst>
           </p:cNvPr>
@@ -6830,7 +6619,7 @@
     </p:spTree>
     <p:extLst>
       <p:ext uri="{BB962C8B-B14F-4D97-AF65-F5344CB8AC3E}">
-        <p14:creationId xmlns:p14="http://schemas.microsoft.com/office/powerpoint/2010/main" val="2273590758"/>
+        <p14:creationId xmlns:p14="http://schemas.microsoft.com/office/powerpoint/2010/main" val="2416682410"/>
       </p:ext>
     </p:extLst>
   </p:cSld>
@@ -6859,7 +6648,7 @@
         <p:cNvPr id="1" name="">
           <a:extLst>
             <a:ext uri="{FF2B5EF4-FFF2-40B4-BE49-F238E27FC236}">
-              <a16:creationId xmlns:a16="http://schemas.microsoft.com/office/drawing/2014/main" id="{7B909AE4-CEF5-3038-F461-47B481C861CB}"/>
+              <a16:creationId xmlns:a16="http://schemas.microsoft.com/office/drawing/2014/main" id="{0B893CF8-50F8-8BC9-EF54-69D8DEBE308B}"/>
             </a:ext>
           </a:extLst>
         </p:cNvPr>
@@ -6879,7 +6668,7 @@
           <p:cNvPr id="4" name="文本框 3">
             <a:extLst>
               <a:ext uri="{FF2B5EF4-FFF2-40B4-BE49-F238E27FC236}">
-                <a16:creationId xmlns:a16="http://schemas.microsoft.com/office/drawing/2014/main" id="{31ACB186-67A8-6A9F-7A20-E3DDA1CA21A1}"/>
+                <a16:creationId xmlns:a16="http://schemas.microsoft.com/office/drawing/2014/main" id="{94B65C78-7C0D-B2A3-F59F-A227D65C21F8}"/>
               </a:ext>
             </a:extLst>
           </p:cNvPr>
@@ -6934,17 +6723,351 @@
                 <a:ea typeface="楷体" panose="02010609060101010101" pitchFamily="49" charset="-122"/>
                 <a:cs typeface="+mn-cs"/>
               </a:rPr>
-              <a:t>校准检查</a:t>
+              <a:t>练习阶段</a:t>
             </a:r>
           </a:p>
         </p:txBody>
       </p:sp>
       <p:sp>
         <p:nvSpPr>
+          <p:cNvPr id="6" name="文本框 5">
+            <a:extLst>
+              <a:ext uri="{FF2B5EF4-FFF2-40B4-BE49-F238E27FC236}">
+                <a16:creationId xmlns:a16="http://schemas.microsoft.com/office/drawing/2014/main" id="{41B9AF2D-EF0E-4241-AEA8-2EAC03F2282A}"/>
+              </a:ext>
+            </a:extLst>
+          </p:cNvPr>
+          <p:cNvSpPr txBox="1"/>
+          <p:nvPr/>
+        </p:nvSpPr>
+        <p:spPr>
+          <a:xfrm>
+            <a:off x="1500050" y="1645919"/>
+            <a:ext cx="9714412" cy="2294859"/>
+          </a:xfrm>
+          <a:prstGeom prst="rect">
+            <a:avLst/>
+          </a:prstGeom>
+          <a:noFill/>
+        </p:spPr>
+        <p:txBody>
+          <a:bodyPr wrap="square" rtlCol="0">
+            <a:spAutoFit/>
+          </a:bodyPr>
+          <a:lstStyle/>
+          <a:p>
+            <a:pPr marL="685800" lvl="0" indent="-685800">
+              <a:lnSpc>
+                <a:spcPct val="125000"/>
+              </a:lnSpc>
+              <a:buFont typeface="Wingdings" panose="05000000000000000000" pitchFamily="2" charset="2"/>
+              <a:buChar char="p"/>
+              <a:defRPr/>
+            </a:pPr>
+            <a:r>
+              <a:rPr lang="zh-CN" altLang="en-US" sz="4000" b="1" u="sng" dirty="0">
+                <a:solidFill>
+                  <a:prstClr val="black"/>
+                </a:solidFill>
+                <a:latin typeface="黑体" panose="02010609060101010101" pitchFamily="49" charset="-122"/>
+                <a:ea typeface="黑体" panose="02010609060101010101" pitchFamily="49" charset="-122"/>
+              </a:rPr>
+              <a:t>盯住</a:t>
+            </a:r>
+            <a:r>
+              <a:rPr lang="zh-CN" altLang="en-US" sz="4000" dirty="0">
+                <a:solidFill>
+                  <a:prstClr val="black"/>
+                </a:solidFill>
+                <a:latin typeface="楷体" panose="02010609060101010101" pitchFamily="49" charset="-122"/>
+                <a:ea typeface="楷体" panose="02010609060101010101" pitchFamily="49" charset="-122"/>
+              </a:rPr>
+              <a:t>黑点按</a:t>
+            </a:r>
+            <a:r>
+              <a:rPr lang="zh-CN" altLang="en-US" sz="4000" b="1" u="sng" dirty="0">
+                <a:solidFill>
+                  <a:prstClr val="black"/>
+                </a:solidFill>
+                <a:latin typeface="黑体" panose="02010609060101010101" pitchFamily="49" charset="-122"/>
+                <a:ea typeface="黑体" panose="02010609060101010101" pitchFamily="49" charset="-122"/>
+              </a:rPr>
+              <a:t>空格</a:t>
+            </a:r>
+            <a:r>
+              <a:rPr lang="zh-CN" altLang="en-US" sz="4000" dirty="0">
+                <a:solidFill>
+                  <a:prstClr val="black"/>
+                </a:solidFill>
+                <a:latin typeface="楷体" panose="02010609060101010101" pitchFamily="49" charset="-122"/>
+                <a:ea typeface="楷体" panose="02010609060101010101" pitchFamily="49" charset="-122"/>
+              </a:rPr>
+              <a:t>，</a:t>
+            </a:r>
+            <a:r>
+              <a:rPr lang="zh-CN" altLang="en-US" sz="4000" b="1" u="sng" dirty="0">
+                <a:solidFill>
+                  <a:prstClr val="black"/>
+                </a:solidFill>
+                <a:latin typeface="黑体" panose="02010609060101010101" pitchFamily="49" charset="-122"/>
+                <a:ea typeface="黑体" panose="02010609060101010101" pitchFamily="49" charset="-122"/>
+              </a:rPr>
+              <a:t>自由观察</a:t>
+            </a:r>
+            <a:r>
+              <a:rPr lang="zh-CN" altLang="en-US" sz="4000" dirty="0">
+                <a:solidFill>
+                  <a:prstClr val="black"/>
+                </a:solidFill>
+                <a:latin typeface="楷体" panose="02010609060101010101" pitchFamily="49" charset="-122"/>
+                <a:ea typeface="楷体" panose="02010609060101010101" pitchFamily="49" charset="-122"/>
+              </a:rPr>
+              <a:t>出现的纹理</a:t>
+            </a:r>
+            <a:endParaRPr lang="en-US" altLang="zh-CN" sz="4000" dirty="0">
+              <a:solidFill>
+                <a:prstClr val="black"/>
+              </a:solidFill>
+              <a:latin typeface="楷体" panose="02010609060101010101" pitchFamily="49" charset="-122"/>
+              <a:ea typeface="楷体" panose="02010609060101010101" pitchFamily="49" charset="-122"/>
+            </a:endParaRPr>
+          </a:p>
+          <a:p>
+            <a:pPr marL="685800" marR="0" lvl="0" indent="-685800" algn="l" defTabSz="914400" rtl="0" eaLnBrk="1" fontAlgn="auto" latinLnBrk="0" hangingPunct="1">
+              <a:lnSpc>
+                <a:spcPct val="125000"/>
+              </a:lnSpc>
+              <a:spcBef>
+                <a:spcPts val="0"/>
+              </a:spcBef>
+              <a:spcAft>
+                <a:spcPts val="0"/>
+              </a:spcAft>
+              <a:buClrTx/>
+              <a:buSzTx/>
+              <a:buFont typeface="Wingdings" panose="05000000000000000000" pitchFamily="2" charset="2"/>
+              <a:buChar char="p"/>
+              <a:tabLst/>
+              <a:defRPr/>
+            </a:pPr>
+            <a:r>
+              <a:rPr kumimoji="0" lang="en-US" altLang="zh-CN" sz="4000" b="1" i="0" u="sng" strike="noStrike" kern="1200" cap="none" spc="0" normalizeH="0" baseline="0" noProof="0" dirty="0">
+                <a:ln>
+                  <a:noFill/>
+                </a:ln>
+                <a:solidFill>
+                  <a:prstClr val="black"/>
+                </a:solidFill>
+                <a:effectLst/>
+                <a:uLnTx/>
+                <a:uFillTx/>
+                <a:latin typeface="黑体" panose="02010609060101010101" pitchFamily="49" charset="-122"/>
+                <a:ea typeface="黑体" panose="02010609060101010101" pitchFamily="49" charset="-122"/>
+              </a:rPr>
+              <a:t>5</a:t>
+            </a:r>
+            <a:r>
+              <a:rPr kumimoji="0" lang="zh-CN" altLang="en-US" sz="4000" b="1" i="0" u="sng" strike="noStrike" kern="1200" cap="none" spc="0" normalizeH="0" baseline="0" noProof="0" dirty="0">
+                <a:ln>
+                  <a:noFill/>
+                </a:ln>
+                <a:solidFill>
+                  <a:prstClr val="black"/>
+                </a:solidFill>
+                <a:effectLst/>
+                <a:uLnTx/>
+                <a:uFillTx/>
+                <a:latin typeface="黑体" panose="02010609060101010101" pitchFamily="49" charset="-122"/>
+                <a:ea typeface="黑体" panose="02010609060101010101" pitchFamily="49" charset="-122"/>
+              </a:rPr>
+              <a:t>秒内</a:t>
+            </a:r>
+            <a:r>
+              <a:rPr kumimoji="0" lang="zh-CN" altLang="en-US" sz="4000" b="0" i="0" u="none" strike="noStrike" kern="1200" cap="none" spc="0" normalizeH="0" baseline="0" noProof="0" dirty="0">
+                <a:ln>
+                  <a:noFill/>
+                </a:ln>
+                <a:solidFill>
+                  <a:prstClr val="black"/>
+                </a:solidFill>
+                <a:effectLst/>
+                <a:uLnTx/>
+                <a:uFillTx/>
+                <a:latin typeface="楷体" panose="02010609060101010101" pitchFamily="49" charset="-122"/>
+                <a:ea typeface="楷体" panose="02010609060101010101" pitchFamily="49" charset="-122"/>
+                <a:cs typeface="+mn-cs"/>
+              </a:rPr>
+              <a:t>找到藏在黑白花纹中的小光栅</a:t>
+            </a:r>
+            <a:endParaRPr kumimoji="0" lang="en-US" altLang="zh-CN" sz="4000" b="0" i="0" u="none" strike="noStrike" kern="1200" cap="none" spc="0" normalizeH="0" baseline="0" noProof="0" dirty="0">
+              <a:ln>
+                <a:noFill/>
+              </a:ln>
+              <a:solidFill>
+                <a:prstClr val="black"/>
+              </a:solidFill>
+              <a:effectLst/>
+              <a:uLnTx/>
+              <a:uFillTx/>
+              <a:latin typeface="楷体" panose="02010609060101010101" pitchFamily="49" charset="-122"/>
+              <a:ea typeface="楷体" panose="02010609060101010101" pitchFamily="49" charset="-122"/>
+              <a:cs typeface="+mn-cs"/>
+            </a:endParaRPr>
+          </a:p>
+          <a:p>
+            <a:pPr marL="685800" marR="0" lvl="0" indent="-685800" algn="l" defTabSz="914400" rtl="0" eaLnBrk="1" fontAlgn="auto" latinLnBrk="0" hangingPunct="1">
+              <a:lnSpc>
+                <a:spcPct val="125000"/>
+              </a:lnSpc>
+              <a:spcBef>
+                <a:spcPts val="0"/>
+              </a:spcBef>
+              <a:spcAft>
+                <a:spcPts val="0"/>
+              </a:spcAft>
+              <a:buClrTx/>
+              <a:buSzTx/>
+              <a:buFont typeface="Wingdings" panose="05000000000000000000" pitchFamily="2" charset="2"/>
+              <a:buChar char="p"/>
+              <a:tabLst/>
+              <a:defRPr/>
+            </a:pPr>
+            <a:r>
+              <a:rPr kumimoji="0" lang="zh-CN" altLang="en-US" sz="4000" b="0" i="0" u="none" strike="noStrike" kern="1200" cap="none" spc="0" normalizeH="0" baseline="0" noProof="0" dirty="0">
+                <a:ln>
+                  <a:noFill/>
+                </a:ln>
+                <a:solidFill>
+                  <a:prstClr val="black"/>
+                </a:solidFill>
+                <a:effectLst/>
+                <a:uLnTx/>
+                <a:uFillTx/>
+                <a:latin typeface="楷体" panose="02010609060101010101" pitchFamily="49" charset="-122"/>
+                <a:ea typeface="楷体" panose="02010609060101010101" pitchFamily="49" charset="-122"/>
+                <a:cs typeface="+mn-cs"/>
+              </a:rPr>
+              <a:t>余光发现光栅时立刻按下“</a:t>
+            </a:r>
+            <a:r>
+              <a:rPr kumimoji="0" lang="zh-CN" altLang="en-US" sz="4000" b="1" i="0" u="sng" strike="noStrike" kern="1200" cap="none" spc="0" normalizeH="0" baseline="0" noProof="0" dirty="0">
+                <a:ln>
+                  <a:noFill/>
+                </a:ln>
+                <a:solidFill>
+                  <a:prstClr val="black"/>
+                </a:solidFill>
+                <a:effectLst/>
+                <a:uLnTx/>
+                <a:uFillTx/>
+                <a:latin typeface="黑体" panose="02010609060101010101" pitchFamily="49" charset="-122"/>
+                <a:ea typeface="黑体" panose="02010609060101010101" pitchFamily="49" charset="-122"/>
+              </a:rPr>
+              <a:t>空格键</a:t>
+            </a:r>
+            <a:r>
+              <a:rPr kumimoji="0" lang="zh-CN" altLang="en-US" sz="4000" b="0" i="0" u="none" strike="noStrike" kern="1200" cap="none" spc="0" normalizeH="0" baseline="0" noProof="0" dirty="0">
+                <a:ln>
+                  <a:noFill/>
+                </a:ln>
+                <a:solidFill>
+                  <a:prstClr val="black"/>
+                </a:solidFill>
+                <a:effectLst/>
+                <a:uLnTx/>
+                <a:uFillTx/>
+                <a:latin typeface="楷体" panose="02010609060101010101" pitchFamily="49" charset="-122"/>
+                <a:ea typeface="楷体" panose="02010609060101010101" pitchFamily="49" charset="-122"/>
+                <a:cs typeface="+mn-cs"/>
+              </a:rPr>
+              <a:t>”</a:t>
+            </a:r>
+            <a:endParaRPr kumimoji="0" lang="en-US" altLang="zh-CN" sz="4000" b="0" i="0" u="none" strike="noStrike" kern="1200" cap="none" spc="0" normalizeH="0" baseline="0" noProof="0" dirty="0">
+              <a:ln>
+                <a:noFill/>
+              </a:ln>
+              <a:solidFill>
+                <a:prstClr val="black"/>
+              </a:solidFill>
+              <a:effectLst/>
+              <a:uLnTx/>
+              <a:uFillTx/>
+              <a:latin typeface="楷体" panose="02010609060101010101" pitchFamily="49" charset="-122"/>
+              <a:ea typeface="楷体" panose="02010609060101010101" pitchFamily="49" charset="-122"/>
+              <a:cs typeface="+mn-cs"/>
+            </a:endParaRPr>
+          </a:p>
+        </p:txBody>
+      </p:sp>
+      <p:sp>
+        <p:nvSpPr>
           <p:cNvPr id="2" name="矩形: 圆角 1">
             <a:extLst>
               <a:ext uri="{FF2B5EF4-FFF2-40B4-BE49-F238E27FC236}">
-                <a16:creationId xmlns:a16="http://schemas.microsoft.com/office/drawing/2014/main" id="{E2D65877-E42C-81B3-A6FB-C196DCFF152F}"/>
+                <a16:creationId xmlns:a16="http://schemas.microsoft.com/office/drawing/2014/main" id="{19C7F6E9-147F-DD4E-BDD7-221D4334DBF0}"/>
+              </a:ext>
+            </a:extLst>
+          </p:cNvPr>
+          <p:cNvSpPr/>
+          <p:nvPr/>
+        </p:nvSpPr>
+        <p:spPr>
+          <a:xfrm>
+            <a:off x="7878103" y="4036426"/>
+            <a:ext cx="2481943" cy="509451"/>
+          </a:xfrm>
+          <a:prstGeom prst="roundRect">
+            <a:avLst/>
+          </a:prstGeom>
+          <a:solidFill>
+            <a:schemeClr val="tx1"/>
+          </a:solidFill>
+          <a:ln>
+            <a:noFill/>
+          </a:ln>
+          <a:scene3d>
+            <a:camera prst="orthographicFront"/>
+            <a:lightRig rig="threePt" dir="t"/>
+          </a:scene3d>
+          <a:sp3d>
+            <a:bevelT/>
+          </a:sp3d>
+        </p:spPr>
+        <p:style>
+          <a:lnRef idx="2">
+            <a:schemeClr val="accent1">
+              <a:shade val="15000"/>
+            </a:schemeClr>
+          </a:lnRef>
+          <a:fillRef idx="1">
+            <a:schemeClr val="accent1"/>
+          </a:fillRef>
+          <a:effectRef idx="0">
+            <a:schemeClr val="accent1"/>
+          </a:effectRef>
+          <a:fontRef idx="minor">
+            <a:schemeClr val="lt1"/>
+          </a:fontRef>
+        </p:style>
+        <p:txBody>
+          <a:bodyPr rtlCol="0" anchor="ctr"/>
+          <a:lstStyle/>
+          <a:p>
+            <a:pPr algn="ctr"/>
+            <a:r>
+              <a:rPr lang="en-US" altLang="zh-CN" b="1" dirty="0"/>
+              <a:t>space</a:t>
+            </a:r>
+            <a:endParaRPr lang="zh-CN" altLang="en-US" b="1" dirty="0"/>
+          </a:p>
+        </p:txBody>
+      </p:sp>
+      <p:sp>
+        <p:nvSpPr>
+          <p:cNvPr id="3" name="矩形: 圆角 2">
+            <a:extLst>
+              <a:ext uri="{FF2B5EF4-FFF2-40B4-BE49-F238E27FC236}">
+                <a16:creationId xmlns:a16="http://schemas.microsoft.com/office/drawing/2014/main" id="{69C6A330-9033-38CB-41DA-1B40FEB7CA39}"/>
               </a:ext>
             </a:extLst>
           </p:cNvPr>
@@ -7004,6 +7127,2786 @@
       </p:sp>
       <p:sp>
         <p:nvSpPr>
+          <p:cNvPr id="10" name="文本框 9">
+            <a:extLst>
+              <a:ext uri="{FF2B5EF4-FFF2-40B4-BE49-F238E27FC236}">
+                <a16:creationId xmlns:a16="http://schemas.microsoft.com/office/drawing/2014/main" id="{30BEEF60-50DF-8D40-D64D-6123EC324982}"/>
+              </a:ext>
+            </a:extLst>
+          </p:cNvPr>
+          <p:cNvSpPr txBox="1"/>
+          <p:nvPr/>
+        </p:nvSpPr>
+        <p:spPr>
+          <a:xfrm>
+            <a:off x="8863151" y="5523102"/>
+            <a:ext cx="3132908" cy="523220"/>
+          </a:xfrm>
+          <a:prstGeom prst="rect">
+            <a:avLst/>
+          </a:prstGeom>
+          <a:noFill/>
+        </p:spPr>
+        <p:txBody>
+          <a:bodyPr wrap="square">
+            <a:spAutoFit/>
+          </a:bodyPr>
+          <a:lstStyle/>
+          <a:p>
+            <a:pPr algn="ctr"/>
+            <a:r>
+              <a:rPr kumimoji="0" lang="zh-CN" altLang="en-US" sz="2800" b="0" i="0" u="none" strike="noStrike" kern="1200" cap="none" spc="0" normalizeH="0" baseline="0" noProof="0" dirty="0">
+                <a:ln>
+                  <a:noFill/>
+                </a:ln>
+                <a:solidFill>
+                  <a:prstClr val="black"/>
+                </a:solidFill>
+                <a:effectLst/>
+                <a:uLnTx/>
+                <a:uFillTx/>
+                <a:latin typeface="楷体" panose="02010609060101010101" pitchFamily="49" charset="-122"/>
+                <a:ea typeface="楷体" panose="02010609060101010101" pitchFamily="49" charset="-122"/>
+                <a:cs typeface="+mn-cs"/>
+              </a:rPr>
+              <a:t>按“</a:t>
+            </a:r>
+            <a:r>
+              <a:rPr kumimoji="0" lang="zh-CN" altLang="en-US" sz="2800" b="1" i="0" u="sng" strike="noStrike" kern="1200" cap="none" spc="0" normalizeH="0" baseline="0" noProof="0" dirty="0">
+                <a:ln>
+                  <a:noFill/>
+                </a:ln>
+                <a:solidFill>
+                  <a:prstClr val="black"/>
+                </a:solidFill>
+                <a:effectLst/>
+                <a:uLnTx/>
+                <a:uFillTx/>
+                <a:latin typeface="楷体" panose="02010609060101010101" pitchFamily="49" charset="-122"/>
+                <a:ea typeface="楷体" panose="02010609060101010101" pitchFamily="49" charset="-122"/>
+                <a:cs typeface="+mn-cs"/>
+              </a:rPr>
+              <a:t>空格键</a:t>
+            </a:r>
+            <a:r>
+              <a:rPr kumimoji="0" lang="zh-CN" altLang="en-US" sz="2800" b="0" i="0" u="none" strike="noStrike" kern="1200" cap="none" spc="0" normalizeH="0" baseline="0" noProof="0" dirty="0">
+                <a:ln>
+                  <a:noFill/>
+                </a:ln>
+                <a:solidFill>
+                  <a:prstClr val="black"/>
+                </a:solidFill>
+                <a:effectLst/>
+                <a:uLnTx/>
+                <a:uFillTx/>
+                <a:latin typeface="楷体" panose="02010609060101010101" pitchFamily="49" charset="-122"/>
+                <a:ea typeface="楷体" panose="02010609060101010101" pitchFamily="49" charset="-122"/>
+                <a:cs typeface="+mn-cs"/>
+              </a:rPr>
+              <a:t>”继续</a:t>
+            </a:r>
+            <a:endParaRPr lang="zh-CN" altLang="en-US" sz="1200" dirty="0"/>
+          </a:p>
+        </p:txBody>
+      </p:sp>
+      <p:pic>
+        <p:nvPicPr>
+          <p:cNvPr id="7" name="图片 6" descr="卡通人物&#10;&#10;低可信度描述已自动生成">
+            <a:extLst>
+              <a:ext uri="{FF2B5EF4-FFF2-40B4-BE49-F238E27FC236}">
+                <a16:creationId xmlns:a16="http://schemas.microsoft.com/office/drawing/2014/main" id="{E7D74646-65BE-1179-3C37-8F446D7C2F05}"/>
+              </a:ext>
+            </a:extLst>
+          </p:cNvPr>
+          <p:cNvPicPr>
+            <a:picLocks noChangeAspect="1"/>
+          </p:cNvPicPr>
+          <p:nvPr/>
+        </p:nvPicPr>
+        <p:blipFill>
+          <a:blip r:embed="rId2" cstate="hqprint">
+            <a:extLst>
+              <a:ext uri="{28A0092B-C50C-407E-A947-70E740481C1C}">
+                <a14:useLocalDpi xmlns:a14="http://schemas.microsoft.com/office/drawing/2010/main"/>
+              </a:ext>
+            </a:extLst>
+          </a:blip>
+          <a:srcRect/>
+          <a:stretch/>
+        </p:blipFill>
+        <p:spPr>
+          <a:xfrm>
+            <a:off x="10360046" y="2545831"/>
+            <a:ext cx="610009" cy="596751"/>
+          </a:xfrm>
+          <a:prstGeom prst="rect">
+            <a:avLst/>
+          </a:prstGeom>
+        </p:spPr>
+      </p:pic>
+    </p:spTree>
+    <p:extLst>
+      <p:ext uri="{BB962C8B-B14F-4D97-AF65-F5344CB8AC3E}">
+        <p14:creationId xmlns:p14="http://schemas.microsoft.com/office/powerpoint/2010/main" val="552457291"/>
+      </p:ext>
+    </p:extLst>
+  </p:cSld>
+  <p:clrMapOvr>
+    <a:masterClrMapping/>
+  </p:clrMapOvr>
+</p:sld>
+</file>
+
+<file path=ppt/slides/slide13.xml><?xml version="1.0" encoding="utf-8"?>
+<p:sld xmlns:a="http://schemas.openxmlformats.org/drawingml/2006/main" xmlns:r="http://schemas.openxmlformats.org/officeDocument/2006/relationships" xmlns:p="http://schemas.openxmlformats.org/presentationml/2006/main">
+  <p:cSld>
+    <p:bg>
+      <p:bgPr>
+        <a:solidFill>
+          <a:schemeClr val="tx1">
+            <a:lumMod val="50000"/>
+            <a:lumOff val="50000"/>
+          </a:schemeClr>
+        </a:solidFill>
+        <a:effectLst/>
+      </p:bgPr>
+    </p:bg>
+    <p:spTree>
+      <p:nvGrpSpPr>
+        <p:cNvPr id="1" name="">
+          <a:extLst>
+            <a:ext uri="{FF2B5EF4-FFF2-40B4-BE49-F238E27FC236}">
+              <a16:creationId xmlns:a16="http://schemas.microsoft.com/office/drawing/2014/main" id="{C90652D7-AE54-4794-B346-5B2D7F48F203}"/>
+            </a:ext>
+          </a:extLst>
+        </p:cNvPr>
+        <p:cNvGrpSpPr/>
+        <p:nvPr/>
+      </p:nvGrpSpPr>
+      <p:grpSpPr>
+        <a:xfrm>
+          <a:off x="0" y="0"/>
+          <a:ext cx="0" cy="0"/>
+          <a:chOff x="0" y="0"/>
+          <a:chExt cx="0" cy="0"/>
+        </a:xfrm>
+      </p:grpSpPr>
+      <p:sp>
+        <p:nvSpPr>
+          <p:cNvPr id="4" name="文本框 3">
+            <a:extLst>
+              <a:ext uri="{FF2B5EF4-FFF2-40B4-BE49-F238E27FC236}">
+                <a16:creationId xmlns:a16="http://schemas.microsoft.com/office/drawing/2014/main" id="{529827CC-8220-DA63-6D70-77634309C8B4}"/>
+              </a:ext>
+            </a:extLst>
+          </p:cNvPr>
+          <p:cNvSpPr txBox="1"/>
+          <p:nvPr/>
+        </p:nvSpPr>
+        <p:spPr>
+          <a:xfrm>
+            <a:off x="2729049" y="515981"/>
+            <a:ext cx="6733902" cy="923330"/>
+          </a:xfrm>
+          <a:prstGeom prst="rect">
+            <a:avLst/>
+          </a:prstGeom>
+          <a:noFill/>
+        </p:spPr>
+        <p:txBody>
+          <a:bodyPr wrap="square" rtlCol="0">
+            <a:spAutoFit/>
+          </a:bodyPr>
+          <a:lstStyle/>
+          <a:p>
+            <a:pPr marL="0" marR="0" lvl="0" indent="0" algn="ctr" defTabSz="914400" rtl="0" eaLnBrk="1" fontAlgn="auto" latinLnBrk="0" hangingPunct="1">
+              <a:lnSpc>
+                <a:spcPct val="100000"/>
+              </a:lnSpc>
+              <a:spcBef>
+                <a:spcPts val="0"/>
+              </a:spcBef>
+              <a:spcAft>
+                <a:spcPts val="0"/>
+              </a:spcAft>
+              <a:buClrTx/>
+              <a:buSzTx/>
+              <a:buFontTx/>
+              <a:buNone/>
+              <a:tabLst/>
+              <a:defRPr/>
+            </a:pPr>
+            <a:r>
+              <a:rPr kumimoji="0" lang="zh-CN" altLang="en-US" sz="5400" b="0" i="0" u="none" strike="noStrike" kern="1200" cap="none" spc="0" normalizeH="0" baseline="0" noProof="0" dirty="0">
+                <a:ln>
+                  <a:noFill/>
+                </a:ln>
+                <a:solidFill>
+                  <a:prstClr val="black"/>
+                </a:solidFill>
+                <a:effectLst/>
+                <a:uLnTx/>
+                <a:uFillTx/>
+                <a:latin typeface="楷体" panose="02010609060101010101" pitchFamily="49" charset="-122"/>
+                <a:ea typeface="楷体" panose="02010609060101010101" pitchFamily="49" charset="-122"/>
+                <a:cs typeface="+mn-cs"/>
+              </a:rPr>
+              <a:t>练习阶段</a:t>
+            </a:r>
+          </a:p>
+        </p:txBody>
+      </p:sp>
+      <p:sp>
+        <p:nvSpPr>
+          <p:cNvPr id="6" name="文本框 5">
+            <a:extLst>
+              <a:ext uri="{FF2B5EF4-FFF2-40B4-BE49-F238E27FC236}">
+                <a16:creationId xmlns:a16="http://schemas.microsoft.com/office/drawing/2014/main" id="{B3CD441E-F638-7052-0586-F628B5C4F852}"/>
+              </a:ext>
+            </a:extLst>
+          </p:cNvPr>
+          <p:cNvSpPr txBox="1"/>
+          <p:nvPr/>
+        </p:nvSpPr>
+        <p:spPr>
+          <a:xfrm>
+            <a:off x="1500050" y="1645919"/>
+            <a:ext cx="9714412" cy="3064300"/>
+          </a:xfrm>
+          <a:prstGeom prst="rect">
+            <a:avLst/>
+          </a:prstGeom>
+          <a:noFill/>
+        </p:spPr>
+        <p:txBody>
+          <a:bodyPr wrap="square" rtlCol="0">
+            <a:spAutoFit/>
+          </a:bodyPr>
+          <a:lstStyle/>
+          <a:p>
+            <a:pPr marL="685800" lvl="0" indent="-685800">
+              <a:lnSpc>
+                <a:spcPct val="125000"/>
+              </a:lnSpc>
+              <a:buFont typeface="Wingdings" panose="05000000000000000000" pitchFamily="2" charset="2"/>
+              <a:buChar char="p"/>
+              <a:defRPr/>
+            </a:pPr>
+            <a:r>
+              <a:rPr lang="zh-CN" altLang="en-US" sz="4000" b="1" u="sng" dirty="0">
+                <a:solidFill>
+                  <a:prstClr val="black"/>
+                </a:solidFill>
+                <a:latin typeface="黑体" panose="02010609060101010101" pitchFamily="49" charset="-122"/>
+                <a:ea typeface="黑体" panose="02010609060101010101" pitchFamily="49" charset="-122"/>
+              </a:rPr>
+              <a:t>盯住</a:t>
+            </a:r>
+            <a:r>
+              <a:rPr lang="zh-CN" altLang="en-US" sz="4000" dirty="0">
+                <a:solidFill>
+                  <a:prstClr val="black"/>
+                </a:solidFill>
+                <a:latin typeface="楷体" panose="02010609060101010101" pitchFamily="49" charset="-122"/>
+                <a:ea typeface="楷体" panose="02010609060101010101" pitchFamily="49" charset="-122"/>
+              </a:rPr>
+              <a:t>黑点按</a:t>
+            </a:r>
+            <a:r>
+              <a:rPr lang="zh-CN" altLang="en-US" sz="4000" b="1" u="sng" dirty="0">
+                <a:solidFill>
+                  <a:prstClr val="black"/>
+                </a:solidFill>
+                <a:latin typeface="黑体" panose="02010609060101010101" pitchFamily="49" charset="-122"/>
+                <a:ea typeface="黑体" panose="02010609060101010101" pitchFamily="49" charset="-122"/>
+              </a:rPr>
+              <a:t>空格</a:t>
+            </a:r>
+            <a:r>
+              <a:rPr lang="zh-CN" altLang="en-US" sz="4000" dirty="0">
+                <a:solidFill>
+                  <a:prstClr val="black"/>
+                </a:solidFill>
+                <a:latin typeface="楷体" panose="02010609060101010101" pitchFamily="49" charset="-122"/>
+                <a:ea typeface="楷体" panose="02010609060101010101" pitchFamily="49" charset="-122"/>
+              </a:rPr>
+              <a:t>，</a:t>
+            </a:r>
+            <a:r>
+              <a:rPr lang="zh-CN" altLang="en-US" sz="4000" b="1" u="sng" dirty="0">
+                <a:solidFill>
+                  <a:prstClr val="black"/>
+                </a:solidFill>
+                <a:latin typeface="黑体" panose="02010609060101010101" pitchFamily="49" charset="-122"/>
+                <a:ea typeface="黑体" panose="02010609060101010101" pitchFamily="49" charset="-122"/>
+              </a:rPr>
+              <a:t>自由观察</a:t>
+            </a:r>
+            <a:r>
+              <a:rPr lang="zh-CN" altLang="en-US" sz="4000" dirty="0">
+                <a:solidFill>
+                  <a:prstClr val="black"/>
+                </a:solidFill>
+                <a:latin typeface="楷体" panose="02010609060101010101" pitchFamily="49" charset="-122"/>
+                <a:ea typeface="楷体" panose="02010609060101010101" pitchFamily="49" charset="-122"/>
+              </a:rPr>
+              <a:t>出现的纹理</a:t>
+            </a:r>
+            <a:endParaRPr lang="en-US" altLang="zh-CN" sz="4000" dirty="0">
+              <a:solidFill>
+                <a:prstClr val="black"/>
+              </a:solidFill>
+              <a:latin typeface="楷体" panose="02010609060101010101" pitchFamily="49" charset="-122"/>
+              <a:ea typeface="楷体" panose="02010609060101010101" pitchFamily="49" charset="-122"/>
+            </a:endParaRPr>
+          </a:p>
+          <a:p>
+            <a:pPr marL="685800" marR="0" lvl="0" indent="-685800" algn="l" defTabSz="914400" rtl="0" eaLnBrk="1" fontAlgn="auto" latinLnBrk="0" hangingPunct="1">
+              <a:lnSpc>
+                <a:spcPct val="125000"/>
+              </a:lnSpc>
+              <a:spcBef>
+                <a:spcPts val="0"/>
+              </a:spcBef>
+              <a:spcAft>
+                <a:spcPts val="0"/>
+              </a:spcAft>
+              <a:buClrTx/>
+              <a:buSzTx/>
+              <a:buFont typeface="Wingdings" panose="05000000000000000000" pitchFamily="2" charset="2"/>
+              <a:buChar char="p"/>
+              <a:tabLst/>
+              <a:defRPr/>
+            </a:pPr>
+            <a:r>
+              <a:rPr kumimoji="0" lang="en-US" altLang="zh-CN" sz="4000" b="1" i="0" u="sng" strike="noStrike" kern="1200" cap="none" spc="0" normalizeH="0" baseline="0" noProof="0" dirty="0">
+                <a:ln>
+                  <a:noFill/>
+                </a:ln>
+                <a:solidFill>
+                  <a:prstClr val="black"/>
+                </a:solidFill>
+                <a:effectLst/>
+                <a:uLnTx/>
+                <a:uFillTx/>
+                <a:latin typeface="黑体" panose="02010609060101010101" pitchFamily="49" charset="-122"/>
+                <a:ea typeface="黑体" panose="02010609060101010101" pitchFamily="49" charset="-122"/>
+              </a:rPr>
+              <a:t>5</a:t>
+            </a:r>
+            <a:r>
+              <a:rPr kumimoji="0" lang="zh-CN" altLang="en-US" sz="4000" b="1" i="0" u="sng" strike="noStrike" kern="1200" cap="none" spc="0" normalizeH="0" baseline="0" noProof="0" dirty="0">
+                <a:ln>
+                  <a:noFill/>
+                </a:ln>
+                <a:solidFill>
+                  <a:prstClr val="black"/>
+                </a:solidFill>
+                <a:effectLst/>
+                <a:uLnTx/>
+                <a:uFillTx/>
+                <a:latin typeface="黑体" panose="02010609060101010101" pitchFamily="49" charset="-122"/>
+                <a:ea typeface="黑体" panose="02010609060101010101" pitchFamily="49" charset="-122"/>
+              </a:rPr>
+              <a:t>秒内</a:t>
+            </a:r>
+            <a:r>
+              <a:rPr kumimoji="0" lang="zh-CN" altLang="en-US" sz="4000" b="0" i="0" u="none" strike="noStrike" kern="1200" cap="none" spc="0" normalizeH="0" baseline="0" noProof="0" dirty="0">
+                <a:ln>
+                  <a:noFill/>
+                </a:ln>
+                <a:solidFill>
+                  <a:prstClr val="black"/>
+                </a:solidFill>
+                <a:effectLst/>
+                <a:uLnTx/>
+                <a:uFillTx/>
+                <a:latin typeface="楷体" panose="02010609060101010101" pitchFamily="49" charset="-122"/>
+                <a:ea typeface="楷体" panose="02010609060101010101" pitchFamily="49" charset="-122"/>
+                <a:cs typeface="+mn-cs"/>
+              </a:rPr>
+              <a:t>找到藏在黑白花纹中的小光栅</a:t>
+            </a:r>
+            <a:endParaRPr kumimoji="0" lang="en-US" altLang="zh-CN" sz="4000" b="0" i="0" u="none" strike="noStrike" kern="1200" cap="none" spc="0" normalizeH="0" baseline="0" noProof="0" dirty="0">
+              <a:ln>
+                <a:noFill/>
+              </a:ln>
+              <a:solidFill>
+                <a:prstClr val="black"/>
+              </a:solidFill>
+              <a:effectLst/>
+              <a:uLnTx/>
+              <a:uFillTx/>
+              <a:latin typeface="楷体" panose="02010609060101010101" pitchFamily="49" charset="-122"/>
+              <a:ea typeface="楷体" panose="02010609060101010101" pitchFamily="49" charset="-122"/>
+              <a:cs typeface="+mn-cs"/>
+            </a:endParaRPr>
+          </a:p>
+          <a:p>
+            <a:pPr marL="685800" marR="0" lvl="0" indent="-685800" algn="l" defTabSz="914400" rtl="0" eaLnBrk="1" fontAlgn="auto" latinLnBrk="0" hangingPunct="1">
+              <a:lnSpc>
+                <a:spcPct val="125000"/>
+              </a:lnSpc>
+              <a:spcBef>
+                <a:spcPts val="0"/>
+              </a:spcBef>
+              <a:spcAft>
+                <a:spcPts val="0"/>
+              </a:spcAft>
+              <a:buClrTx/>
+              <a:buSzTx/>
+              <a:buFont typeface="Wingdings" panose="05000000000000000000" pitchFamily="2" charset="2"/>
+              <a:buChar char="p"/>
+              <a:tabLst/>
+              <a:defRPr/>
+            </a:pPr>
+            <a:r>
+              <a:rPr kumimoji="0" lang="zh-CN" altLang="en-US" sz="4000" b="0" i="0" u="none" strike="noStrike" kern="1200" cap="none" spc="0" normalizeH="0" baseline="0" noProof="0" dirty="0">
+                <a:ln>
+                  <a:noFill/>
+                </a:ln>
+                <a:solidFill>
+                  <a:prstClr val="black"/>
+                </a:solidFill>
+                <a:effectLst/>
+                <a:uLnTx/>
+                <a:uFillTx/>
+                <a:latin typeface="楷体" panose="02010609060101010101" pitchFamily="49" charset="-122"/>
+                <a:ea typeface="楷体" panose="02010609060101010101" pitchFamily="49" charset="-122"/>
+                <a:cs typeface="+mn-cs"/>
+              </a:rPr>
+              <a:t>余光发现光栅时立刻按下“</a:t>
+            </a:r>
+            <a:r>
+              <a:rPr kumimoji="0" lang="zh-CN" altLang="en-US" sz="4000" b="1" i="0" u="sng" strike="noStrike" kern="1200" cap="none" spc="0" normalizeH="0" baseline="0" noProof="0" dirty="0">
+                <a:ln>
+                  <a:noFill/>
+                </a:ln>
+                <a:solidFill>
+                  <a:prstClr val="black"/>
+                </a:solidFill>
+                <a:effectLst/>
+                <a:uLnTx/>
+                <a:uFillTx/>
+                <a:latin typeface="黑体" panose="02010609060101010101" pitchFamily="49" charset="-122"/>
+                <a:ea typeface="黑体" panose="02010609060101010101" pitchFamily="49" charset="-122"/>
+              </a:rPr>
+              <a:t>空格键</a:t>
+            </a:r>
+            <a:r>
+              <a:rPr kumimoji="0" lang="zh-CN" altLang="en-US" sz="4000" b="0" i="0" u="none" strike="noStrike" kern="1200" cap="none" spc="0" normalizeH="0" baseline="0" noProof="0" dirty="0">
+                <a:ln>
+                  <a:noFill/>
+                </a:ln>
+                <a:solidFill>
+                  <a:prstClr val="black"/>
+                </a:solidFill>
+                <a:effectLst/>
+                <a:uLnTx/>
+                <a:uFillTx/>
+                <a:latin typeface="楷体" panose="02010609060101010101" pitchFamily="49" charset="-122"/>
+                <a:ea typeface="楷体" panose="02010609060101010101" pitchFamily="49" charset="-122"/>
+                <a:cs typeface="+mn-cs"/>
+              </a:rPr>
+              <a:t>”</a:t>
+            </a:r>
+            <a:endParaRPr kumimoji="0" lang="en-US" altLang="zh-CN" sz="4000" b="0" i="0" u="none" strike="noStrike" kern="1200" cap="none" spc="0" normalizeH="0" baseline="0" noProof="0" dirty="0">
+              <a:ln>
+                <a:noFill/>
+              </a:ln>
+              <a:solidFill>
+                <a:prstClr val="black"/>
+              </a:solidFill>
+              <a:effectLst/>
+              <a:uLnTx/>
+              <a:uFillTx/>
+              <a:latin typeface="楷体" panose="02010609060101010101" pitchFamily="49" charset="-122"/>
+              <a:ea typeface="楷体" panose="02010609060101010101" pitchFamily="49" charset="-122"/>
+              <a:cs typeface="+mn-cs"/>
+            </a:endParaRPr>
+          </a:p>
+          <a:p>
+            <a:pPr marL="685800" marR="0" lvl="0" indent="-685800" algn="l" defTabSz="914400" rtl="0" eaLnBrk="1" fontAlgn="auto" latinLnBrk="0" hangingPunct="1">
+              <a:lnSpc>
+                <a:spcPct val="125000"/>
+              </a:lnSpc>
+              <a:spcBef>
+                <a:spcPts val="0"/>
+              </a:spcBef>
+              <a:spcAft>
+                <a:spcPts val="0"/>
+              </a:spcAft>
+              <a:buClrTx/>
+              <a:buSzTx/>
+              <a:buFont typeface="Wingdings" panose="05000000000000000000" pitchFamily="2" charset="2"/>
+              <a:buChar char="p"/>
+              <a:tabLst/>
+              <a:defRPr/>
+            </a:pPr>
+            <a:r>
+              <a:rPr kumimoji="0" lang="zh-CN" altLang="en-US" sz="4000" b="0" i="0" u="none" strike="noStrike" kern="1200" cap="none" spc="0" normalizeH="0" baseline="0" noProof="0" dirty="0">
+                <a:ln>
+                  <a:noFill/>
+                </a:ln>
+                <a:solidFill>
+                  <a:prstClr val="black"/>
+                </a:solidFill>
+                <a:effectLst/>
+                <a:uLnTx/>
+                <a:uFillTx/>
+                <a:latin typeface="楷体" panose="02010609060101010101" pitchFamily="49" charset="-122"/>
+                <a:ea typeface="楷体" panose="02010609060101010101" pitchFamily="49" charset="-122"/>
+                <a:cs typeface="+mn-cs"/>
+              </a:rPr>
+              <a:t>用眼睛盯住光栅后按下“</a:t>
+            </a:r>
+            <a:r>
+              <a:rPr kumimoji="0" lang="en-US" altLang="zh-CN" sz="4000" b="1" i="0" u="sng" strike="noStrike" kern="1200" cap="none" spc="0" normalizeH="0" baseline="0" noProof="0" dirty="0">
+                <a:ln>
+                  <a:noFill/>
+                </a:ln>
+                <a:solidFill>
+                  <a:prstClr val="black"/>
+                </a:solidFill>
+                <a:effectLst/>
+                <a:uLnTx/>
+                <a:uFillTx/>
+                <a:latin typeface="黑体" panose="02010609060101010101" pitchFamily="49" charset="-122"/>
+                <a:ea typeface="黑体" panose="02010609060101010101" pitchFamily="49" charset="-122"/>
+              </a:rPr>
+              <a:t>M</a:t>
+            </a:r>
+            <a:r>
+              <a:rPr kumimoji="0" lang="zh-CN" altLang="en-US" sz="4000" b="1" i="0" u="sng" strike="noStrike" kern="1200" cap="none" spc="0" normalizeH="0" baseline="0" noProof="0" dirty="0">
+                <a:ln>
+                  <a:noFill/>
+                </a:ln>
+                <a:solidFill>
+                  <a:prstClr val="black"/>
+                </a:solidFill>
+                <a:effectLst/>
+                <a:uLnTx/>
+                <a:uFillTx/>
+                <a:latin typeface="黑体" panose="02010609060101010101" pitchFamily="49" charset="-122"/>
+                <a:ea typeface="黑体" panose="02010609060101010101" pitchFamily="49" charset="-122"/>
+              </a:rPr>
+              <a:t>键</a:t>
+            </a:r>
+            <a:r>
+              <a:rPr kumimoji="0" lang="zh-CN" altLang="en-US" sz="4000" b="0" i="0" u="none" strike="noStrike" kern="1200" cap="none" spc="0" normalizeH="0" baseline="0" noProof="0" dirty="0">
+                <a:ln>
+                  <a:noFill/>
+                </a:ln>
+                <a:solidFill>
+                  <a:prstClr val="black"/>
+                </a:solidFill>
+                <a:effectLst/>
+                <a:uLnTx/>
+                <a:uFillTx/>
+                <a:latin typeface="楷体" panose="02010609060101010101" pitchFamily="49" charset="-122"/>
+                <a:ea typeface="楷体" panose="02010609060101010101" pitchFamily="49" charset="-122"/>
+                <a:cs typeface="+mn-cs"/>
+              </a:rPr>
+              <a:t>”</a:t>
+            </a:r>
+            <a:endParaRPr kumimoji="0" lang="en-US" altLang="zh-CN" sz="4000" b="0" i="0" u="none" strike="noStrike" kern="1200" cap="none" spc="0" normalizeH="0" baseline="0" noProof="0" dirty="0">
+              <a:ln>
+                <a:noFill/>
+              </a:ln>
+              <a:solidFill>
+                <a:prstClr val="black"/>
+              </a:solidFill>
+              <a:effectLst/>
+              <a:uLnTx/>
+              <a:uFillTx/>
+              <a:latin typeface="楷体" panose="02010609060101010101" pitchFamily="49" charset="-122"/>
+              <a:ea typeface="楷体" panose="02010609060101010101" pitchFamily="49" charset="-122"/>
+              <a:cs typeface="+mn-cs"/>
+            </a:endParaRPr>
+          </a:p>
+        </p:txBody>
+      </p:sp>
+      <p:sp>
+        <p:nvSpPr>
+          <p:cNvPr id="2" name="矩形: 圆角 1">
+            <a:extLst>
+              <a:ext uri="{FF2B5EF4-FFF2-40B4-BE49-F238E27FC236}">
+                <a16:creationId xmlns:a16="http://schemas.microsoft.com/office/drawing/2014/main" id="{449E9047-EAF4-05FC-FB29-6F6E775AF378}"/>
+              </a:ext>
+            </a:extLst>
+          </p:cNvPr>
+          <p:cNvSpPr/>
+          <p:nvPr/>
+        </p:nvSpPr>
+        <p:spPr>
+          <a:xfrm>
+            <a:off x="9255037" y="6115676"/>
+            <a:ext cx="2481943" cy="509451"/>
+          </a:xfrm>
+          <a:prstGeom prst="roundRect">
+            <a:avLst/>
+          </a:prstGeom>
+          <a:solidFill>
+            <a:schemeClr val="tx1"/>
+          </a:solidFill>
+          <a:ln>
+            <a:noFill/>
+          </a:ln>
+          <a:scene3d>
+            <a:camera prst="orthographicFront"/>
+            <a:lightRig rig="threePt" dir="t"/>
+          </a:scene3d>
+          <a:sp3d>
+            <a:bevelT/>
+          </a:sp3d>
+        </p:spPr>
+        <p:style>
+          <a:lnRef idx="2">
+            <a:schemeClr val="accent1">
+              <a:shade val="15000"/>
+            </a:schemeClr>
+          </a:lnRef>
+          <a:fillRef idx="1">
+            <a:schemeClr val="accent1"/>
+          </a:fillRef>
+          <a:effectRef idx="0">
+            <a:schemeClr val="accent1"/>
+          </a:effectRef>
+          <a:fontRef idx="minor">
+            <a:schemeClr val="lt1"/>
+          </a:fontRef>
+        </p:style>
+        <p:txBody>
+          <a:bodyPr rtlCol="0" anchor="ctr"/>
+          <a:lstStyle/>
+          <a:p>
+            <a:pPr algn="ctr"/>
+            <a:r>
+              <a:rPr lang="en-US" altLang="zh-CN" b="1" dirty="0"/>
+              <a:t>space</a:t>
+            </a:r>
+            <a:endParaRPr lang="zh-CN" altLang="en-US" b="1" dirty="0"/>
+          </a:p>
+        </p:txBody>
+      </p:sp>
+      <p:sp>
+        <p:nvSpPr>
+          <p:cNvPr id="3" name="文本框 2">
+            <a:extLst>
+              <a:ext uri="{FF2B5EF4-FFF2-40B4-BE49-F238E27FC236}">
+                <a16:creationId xmlns:a16="http://schemas.microsoft.com/office/drawing/2014/main" id="{18E47240-3877-724D-94DC-B400FA2B0908}"/>
+              </a:ext>
+            </a:extLst>
+          </p:cNvPr>
+          <p:cNvSpPr txBox="1"/>
+          <p:nvPr/>
+        </p:nvSpPr>
+        <p:spPr>
+          <a:xfrm>
+            <a:off x="8863151" y="5523102"/>
+            <a:ext cx="3132908" cy="523220"/>
+          </a:xfrm>
+          <a:prstGeom prst="rect">
+            <a:avLst/>
+          </a:prstGeom>
+          <a:noFill/>
+        </p:spPr>
+        <p:txBody>
+          <a:bodyPr wrap="square">
+            <a:spAutoFit/>
+          </a:bodyPr>
+          <a:lstStyle/>
+          <a:p>
+            <a:pPr algn="ctr"/>
+            <a:r>
+              <a:rPr kumimoji="0" lang="zh-CN" altLang="en-US" sz="2800" b="0" i="0" u="none" strike="noStrike" kern="1200" cap="none" spc="0" normalizeH="0" baseline="0" noProof="0" dirty="0">
+                <a:ln>
+                  <a:noFill/>
+                </a:ln>
+                <a:solidFill>
+                  <a:prstClr val="black"/>
+                </a:solidFill>
+                <a:effectLst/>
+                <a:uLnTx/>
+                <a:uFillTx/>
+                <a:latin typeface="楷体" panose="02010609060101010101" pitchFamily="49" charset="-122"/>
+                <a:ea typeface="楷体" panose="02010609060101010101" pitchFamily="49" charset="-122"/>
+                <a:cs typeface="+mn-cs"/>
+              </a:rPr>
+              <a:t>按“</a:t>
+            </a:r>
+            <a:r>
+              <a:rPr kumimoji="0" lang="zh-CN" altLang="en-US" sz="2800" b="1" i="0" u="sng" strike="noStrike" kern="1200" cap="none" spc="0" normalizeH="0" baseline="0" noProof="0" dirty="0">
+                <a:ln>
+                  <a:noFill/>
+                </a:ln>
+                <a:solidFill>
+                  <a:prstClr val="black"/>
+                </a:solidFill>
+                <a:effectLst/>
+                <a:uLnTx/>
+                <a:uFillTx/>
+                <a:latin typeface="楷体" panose="02010609060101010101" pitchFamily="49" charset="-122"/>
+                <a:ea typeface="楷体" panose="02010609060101010101" pitchFamily="49" charset="-122"/>
+                <a:cs typeface="+mn-cs"/>
+              </a:rPr>
+              <a:t>空格键</a:t>
+            </a:r>
+            <a:r>
+              <a:rPr kumimoji="0" lang="zh-CN" altLang="en-US" sz="2800" b="0" i="0" u="none" strike="noStrike" kern="1200" cap="none" spc="0" normalizeH="0" baseline="0" noProof="0" dirty="0">
+                <a:ln>
+                  <a:noFill/>
+                </a:ln>
+                <a:solidFill>
+                  <a:prstClr val="black"/>
+                </a:solidFill>
+                <a:effectLst/>
+                <a:uLnTx/>
+                <a:uFillTx/>
+                <a:latin typeface="楷体" panose="02010609060101010101" pitchFamily="49" charset="-122"/>
+                <a:ea typeface="楷体" panose="02010609060101010101" pitchFamily="49" charset="-122"/>
+                <a:cs typeface="+mn-cs"/>
+              </a:rPr>
+              <a:t>”继续</a:t>
+            </a:r>
+            <a:endParaRPr lang="zh-CN" altLang="en-US" sz="1200" dirty="0"/>
+          </a:p>
+        </p:txBody>
+      </p:sp>
+      <p:sp>
+        <p:nvSpPr>
+          <p:cNvPr id="5" name="矩形: 圆角 4">
+            <a:extLst>
+              <a:ext uri="{FF2B5EF4-FFF2-40B4-BE49-F238E27FC236}">
+                <a16:creationId xmlns:a16="http://schemas.microsoft.com/office/drawing/2014/main" id="{55435F5E-2FA4-C290-C4C7-0A531F976A59}"/>
+              </a:ext>
+            </a:extLst>
+          </p:cNvPr>
+          <p:cNvSpPr/>
+          <p:nvPr/>
+        </p:nvSpPr>
+        <p:spPr>
+          <a:xfrm>
+            <a:off x="7942221" y="4757139"/>
+            <a:ext cx="581294" cy="509451"/>
+          </a:xfrm>
+          <a:prstGeom prst="roundRect">
+            <a:avLst/>
+          </a:prstGeom>
+          <a:solidFill>
+            <a:schemeClr val="tx1"/>
+          </a:solidFill>
+          <a:ln>
+            <a:noFill/>
+          </a:ln>
+          <a:scene3d>
+            <a:camera prst="orthographicFront"/>
+            <a:lightRig rig="threePt" dir="t"/>
+          </a:scene3d>
+          <a:sp3d>
+            <a:bevelT/>
+          </a:sp3d>
+        </p:spPr>
+        <p:style>
+          <a:lnRef idx="2">
+            <a:schemeClr val="accent1">
+              <a:shade val="15000"/>
+            </a:schemeClr>
+          </a:lnRef>
+          <a:fillRef idx="1">
+            <a:schemeClr val="accent1"/>
+          </a:fillRef>
+          <a:effectRef idx="0">
+            <a:schemeClr val="accent1"/>
+          </a:effectRef>
+          <a:fontRef idx="minor">
+            <a:schemeClr val="lt1"/>
+          </a:fontRef>
+        </p:style>
+        <p:txBody>
+          <a:bodyPr rtlCol="0" anchor="ctr"/>
+          <a:lstStyle/>
+          <a:p>
+            <a:pPr algn="ctr"/>
+            <a:r>
+              <a:rPr lang="en-US" altLang="zh-CN" b="1" dirty="0"/>
+              <a:t>M</a:t>
+            </a:r>
+            <a:endParaRPr lang="zh-CN" altLang="en-US" b="1" dirty="0"/>
+          </a:p>
+        </p:txBody>
+      </p:sp>
+      <p:pic>
+        <p:nvPicPr>
+          <p:cNvPr id="7" name="图片 6" descr="卡通人物&#10;&#10;低可信度描述已自动生成">
+            <a:extLst>
+              <a:ext uri="{FF2B5EF4-FFF2-40B4-BE49-F238E27FC236}">
+                <a16:creationId xmlns:a16="http://schemas.microsoft.com/office/drawing/2014/main" id="{F16DC42E-04B4-6C19-A4E5-F0AEF946B54F}"/>
+              </a:ext>
+            </a:extLst>
+          </p:cNvPr>
+          <p:cNvPicPr>
+            <a:picLocks noChangeAspect="1"/>
+          </p:cNvPicPr>
+          <p:nvPr/>
+        </p:nvPicPr>
+        <p:blipFill>
+          <a:blip r:embed="rId2" cstate="hqprint">
+            <a:extLst>
+              <a:ext uri="{28A0092B-C50C-407E-A947-70E740481C1C}">
+                <a14:useLocalDpi xmlns:a14="http://schemas.microsoft.com/office/drawing/2010/main"/>
+              </a:ext>
+            </a:extLst>
+          </a:blip>
+          <a:srcRect/>
+          <a:stretch/>
+        </p:blipFill>
+        <p:spPr>
+          <a:xfrm>
+            <a:off x="10360046" y="2545831"/>
+            <a:ext cx="610009" cy="596751"/>
+          </a:xfrm>
+          <a:prstGeom prst="rect">
+            <a:avLst/>
+          </a:prstGeom>
+        </p:spPr>
+      </p:pic>
+    </p:spTree>
+    <p:extLst>
+      <p:ext uri="{BB962C8B-B14F-4D97-AF65-F5344CB8AC3E}">
+        <p14:creationId xmlns:p14="http://schemas.microsoft.com/office/powerpoint/2010/main" val="2902820157"/>
+      </p:ext>
+    </p:extLst>
+  </p:cSld>
+  <p:clrMapOvr>
+    <a:masterClrMapping/>
+  </p:clrMapOvr>
+</p:sld>
+</file>
+
+<file path=ppt/slides/slide14.xml><?xml version="1.0" encoding="utf-8"?>
+<p:sld xmlns:a="http://schemas.openxmlformats.org/drawingml/2006/main" xmlns:r="http://schemas.openxmlformats.org/officeDocument/2006/relationships" xmlns:p="http://schemas.openxmlformats.org/presentationml/2006/main">
+  <p:cSld>
+    <p:bg>
+      <p:bgPr>
+        <a:solidFill>
+          <a:schemeClr val="tx1">
+            <a:lumMod val="50000"/>
+            <a:lumOff val="50000"/>
+          </a:schemeClr>
+        </a:solidFill>
+        <a:effectLst/>
+      </p:bgPr>
+    </p:bg>
+    <p:spTree>
+      <p:nvGrpSpPr>
+        <p:cNvPr id="1" name="">
+          <a:extLst>
+            <a:ext uri="{FF2B5EF4-FFF2-40B4-BE49-F238E27FC236}">
+              <a16:creationId xmlns:a16="http://schemas.microsoft.com/office/drawing/2014/main" id="{D0CEC1BA-77EB-0163-262B-69A2429260D5}"/>
+            </a:ext>
+          </a:extLst>
+        </p:cNvPr>
+        <p:cNvGrpSpPr/>
+        <p:nvPr/>
+      </p:nvGrpSpPr>
+      <p:grpSpPr>
+        <a:xfrm>
+          <a:off x="0" y="0"/>
+          <a:ext cx="0" cy="0"/>
+          <a:chOff x="0" y="0"/>
+          <a:chExt cx="0" cy="0"/>
+        </a:xfrm>
+      </p:grpSpPr>
+      <p:sp>
+        <p:nvSpPr>
+          <p:cNvPr id="4" name="文本框 3">
+            <a:extLst>
+              <a:ext uri="{FF2B5EF4-FFF2-40B4-BE49-F238E27FC236}">
+                <a16:creationId xmlns:a16="http://schemas.microsoft.com/office/drawing/2014/main" id="{7CE6233A-334B-C101-7F9F-161C0D47A456}"/>
+              </a:ext>
+            </a:extLst>
+          </p:cNvPr>
+          <p:cNvSpPr txBox="1"/>
+          <p:nvPr/>
+        </p:nvSpPr>
+        <p:spPr>
+          <a:xfrm>
+            <a:off x="2729049" y="515981"/>
+            <a:ext cx="6733902" cy="923330"/>
+          </a:xfrm>
+          <a:prstGeom prst="rect">
+            <a:avLst/>
+          </a:prstGeom>
+          <a:noFill/>
+        </p:spPr>
+        <p:txBody>
+          <a:bodyPr wrap="square" rtlCol="0">
+            <a:spAutoFit/>
+          </a:bodyPr>
+          <a:lstStyle/>
+          <a:p>
+            <a:pPr marL="0" marR="0" lvl="0" indent="0" algn="ctr" defTabSz="914400" rtl="0" eaLnBrk="1" fontAlgn="auto" latinLnBrk="0" hangingPunct="1">
+              <a:lnSpc>
+                <a:spcPct val="100000"/>
+              </a:lnSpc>
+              <a:spcBef>
+                <a:spcPts val="0"/>
+              </a:spcBef>
+              <a:spcAft>
+                <a:spcPts val="0"/>
+              </a:spcAft>
+              <a:buClrTx/>
+              <a:buSzTx/>
+              <a:buFontTx/>
+              <a:buNone/>
+              <a:tabLst/>
+              <a:defRPr/>
+            </a:pPr>
+            <a:r>
+              <a:rPr kumimoji="0" lang="zh-CN" altLang="en-US" sz="5400" b="0" i="0" u="none" strike="noStrike" kern="1200" cap="none" spc="0" normalizeH="0" baseline="0" noProof="0" dirty="0">
+                <a:ln>
+                  <a:noFill/>
+                </a:ln>
+                <a:solidFill>
+                  <a:prstClr val="black"/>
+                </a:solidFill>
+                <a:effectLst/>
+                <a:uLnTx/>
+                <a:uFillTx/>
+                <a:latin typeface="楷体" panose="02010609060101010101" pitchFamily="49" charset="-122"/>
+                <a:ea typeface="楷体" panose="02010609060101010101" pitchFamily="49" charset="-122"/>
+                <a:cs typeface="+mn-cs"/>
+              </a:rPr>
+              <a:t>练习阶段</a:t>
+            </a:r>
+          </a:p>
+        </p:txBody>
+      </p:sp>
+      <p:sp>
+        <p:nvSpPr>
+          <p:cNvPr id="6" name="文本框 5">
+            <a:extLst>
+              <a:ext uri="{FF2B5EF4-FFF2-40B4-BE49-F238E27FC236}">
+                <a16:creationId xmlns:a16="http://schemas.microsoft.com/office/drawing/2014/main" id="{D7A1EC43-90AE-A0F0-F4BD-9A8211C873A6}"/>
+              </a:ext>
+            </a:extLst>
+          </p:cNvPr>
+          <p:cNvSpPr txBox="1"/>
+          <p:nvPr/>
+        </p:nvSpPr>
+        <p:spPr>
+          <a:xfrm>
+            <a:off x="1500050" y="1645919"/>
+            <a:ext cx="9714412" cy="3833742"/>
+          </a:xfrm>
+          <a:prstGeom prst="rect">
+            <a:avLst/>
+          </a:prstGeom>
+          <a:noFill/>
+        </p:spPr>
+        <p:txBody>
+          <a:bodyPr wrap="square" rtlCol="0">
+            <a:spAutoFit/>
+          </a:bodyPr>
+          <a:lstStyle/>
+          <a:p>
+            <a:pPr marL="685800" lvl="0" indent="-685800">
+              <a:lnSpc>
+                <a:spcPct val="125000"/>
+              </a:lnSpc>
+              <a:buFont typeface="Wingdings" panose="05000000000000000000" pitchFamily="2" charset="2"/>
+              <a:buChar char="p"/>
+              <a:defRPr/>
+            </a:pPr>
+            <a:r>
+              <a:rPr lang="zh-CN" altLang="en-US" sz="4000" b="1" u="sng" dirty="0">
+                <a:solidFill>
+                  <a:prstClr val="black"/>
+                </a:solidFill>
+                <a:latin typeface="黑体" panose="02010609060101010101" pitchFamily="49" charset="-122"/>
+                <a:ea typeface="黑体" panose="02010609060101010101" pitchFamily="49" charset="-122"/>
+              </a:rPr>
+              <a:t>盯住</a:t>
+            </a:r>
+            <a:r>
+              <a:rPr lang="zh-CN" altLang="en-US" sz="4000" dirty="0">
+                <a:solidFill>
+                  <a:prstClr val="black"/>
+                </a:solidFill>
+                <a:latin typeface="楷体" panose="02010609060101010101" pitchFamily="49" charset="-122"/>
+                <a:ea typeface="楷体" panose="02010609060101010101" pitchFamily="49" charset="-122"/>
+              </a:rPr>
+              <a:t>黑点按</a:t>
+            </a:r>
+            <a:r>
+              <a:rPr lang="zh-CN" altLang="en-US" sz="4000" b="1" u="sng" dirty="0">
+                <a:solidFill>
+                  <a:prstClr val="black"/>
+                </a:solidFill>
+                <a:latin typeface="黑体" panose="02010609060101010101" pitchFamily="49" charset="-122"/>
+                <a:ea typeface="黑体" panose="02010609060101010101" pitchFamily="49" charset="-122"/>
+              </a:rPr>
+              <a:t>空格</a:t>
+            </a:r>
+            <a:r>
+              <a:rPr lang="zh-CN" altLang="en-US" sz="4000" dirty="0">
+                <a:solidFill>
+                  <a:prstClr val="black"/>
+                </a:solidFill>
+                <a:latin typeface="楷体" panose="02010609060101010101" pitchFamily="49" charset="-122"/>
+                <a:ea typeface="楷体" panose="02010609060101010101" pitchFamily="49" charset="-122"/>
+              </a:rPr>
+              <a:t>，</a:t>
+            </a:r>
+            <a:r>
+              <a:rPr lang="zh-CN" altLang="en-US" sz="4000" b="1" u="sng" dirty="0">
+                <a:solidFill>
+                  <a:prstClr val="black"/>
+                </a:solidFill>
+                <a:latin typeface="黑体" panose="02010609060101010101" pitchFamily="49" charset="-122"/>
+                <a:ea typeface="黑体" panose="02010609060101010101" pitchFamily="49" charset="-122"/>
+              </a:rPr>
+              <a:t>自由观察</a:t>
+            </a:r>
+            <a:r>
+              <a:rPr lang="zh-CN" altLang="en-US" sz="4000" dirty="0">
+                <a:solidFill>
+                  <a:prstClr val="black"/>
+                </a:solidFill>
+                <a:latin typeface="楷体" panose="02010609060101010101" pitchFamily="49" charset="-122"/>
+                <a:ea typeface="楷体" panose="02010609060101010101" pitchFamily="49" charset="-122"/>
+              </a:rPr>
+              <a:t>出现的纹理</a:t>
+            </a:r>
+            <a:endParaRPr lang="en-US" altLang="zh-CN" sz="4000" dirty="0">
+              <a:solidFill>
+                <a:prstClr val="black"/>
+              </a:solidFill>
+              <a:latin typeface="楷体" panose="02010609060101010101" pitchFamily="49" charset="-122"/>
+              <a:ea typeface="楷体" panose="02010609060101010101" pitchFamily="49" charset="-122"/>
+            </a:endParaRPr>
+          </a:p>
+          <a:p>
+            <a:pPr marL="685800" marR="0" lvl="0" indent="-685800" algn="l" defTabSz="914400" rtl="0" eaLnBrk="1" fontAlgn="auto" latinLnBrk="0" hangingPunct="1">
+              <a:lnSpc>
+                <a:spcPct val="125000"/>
+              </a:lnSpc>
+              <a:spcBef>
+                <a:spcPts val="0"/>
+              </a:spcBef>
+              <a:spcAft>
+                <a:spcPts val="0"/>
+              </a:spcAft>
+              <a:buClrTx/>
+              <a:buSzTx/>
+              <a:buFont typeface="Wingdings" panose="05000000000000000000" pitchFamily="2" charset="2"/>
+              <a:buChar char="p"/>
+              <a:tabLst/>
+              <a:defRPr/>
+            </a:pPr>
+            <a:r>
+              <a:rPr kumimoji="0" lang="en-US" altLang="zh-CN" sz="4000" b="1" i="0" u="sng" strike="noStrike" kern="1200" cap="none" spc="0" normalizeH="0" baseline="0" noProof="0" dirty="0">
+                <a:ln>
+                  <a:noFill/>
+                </a:ln>
+                <a:solidFill>
+                  <a:prstClr val="black"/>
+                </a:solidFill>
+                <a:effectLst/>
+                <a:uLnTx/>
+                <a:uFillTx/>
+                <a:latin typeface="黑体" panose="02010609060101010101" pitchFamily="49" charset="-122"/>
+                <a:ea typeface="黑体" panose="02010609060101010101" pitchFamily="49" charset="-122"/>
+              </a:rPr>
+              <a:t>5</a:t>
+            </a:r>
+            <a:r>
+              <a:rPr kumimoji="0" lang="zh-CN" altLang="en-US" sz="4000" b="1" i="0" u="sng" strike="noStrike" kern="1200" cap="none" spc="0" normalizeH="0" baseline="0" noProof="0" dirty="0">
+                <a:ln>
+                  <a:noFill/>
+                </a:ln>
+                <a:solidFill>
+                  <a:prstClr val="black"/>
+                </a:solidFill>
+                <a:effectLst/>
+                <a:uLnTx/>
+                <a:uFillTx/>
+                <a:latin typeface="黑体" panose="02010609060101010101" pitchFamily="49" charset="-122"/>
+                <a:ea typeface="黑体" panose="02010609060101010101" pitchFamily="49" charset="-122"/>
+              </a:rPr>
+              <a:t>秒内</a:t>
+            </a:r>
+            <a:r>
+              <a:rPr kumimoji="0" lang="zh-CN" altLang="en-US" sz="4000" b="0" i="0" u="none" strike="noStrike" kern="1200" cap="none" spc="0" normalizeH="0" baseline="0" noProof="0" dirty="0">
+                <a:ln>
+                  <a:noFill/>
+                </a:ln>
+                <a:solidFill>
+                  <a:prstClr val="black"/>
+                </a:solidFill>
+                <a:effectLst/>
+                <a:uLnTx/>
+                <a:uFillTx/>
+                <a:latin typeface="楷体" panose="02010609060101010101" pitchFamily="49" charset="-122"/>
+                <a:ea typeface="楷体" panose="02010609060101010101" pitchFamily="49" charset="-122"/>
+                <a:cs typeface="+mn-cs"/>
+              </a:rPr>
+              <a:t>找到藏在黑白花纹中的小光栅</a:t>
+            </a:r>
+            <a:endParaRPr kumimoji="0" lang="en-US" altLang="zh-CN" sz="4000" b="0" i="0" u="none" strike="noStrike" kern="1200" cap="none" spc="0" normalizeH="0" baseline="0" noProof="0" dirty="0">
+              <a:ln>
+                <a:noFill/>
+              </a:ln>
+              <a:solidFill>
+                <a:prstClr val="black"/>
+              </a:solidFill>
+              <a:effectLst/>
+              <a:uLnTx/>
+              <a:uFillTx/>
+              <a:latin typeface="楷体" panose="02010609060101010101" pitchFamily="49" charset="-122"/>
+              <a:ea typeface="楷体" panose="02010609060101010101" pitchFamily="49" charset="-122"/>
+              <a:cs typeface="+mn-cs"/>
+            </a:endParaRPr>
+          </a:p>
+          <a:p>
+            <a:pPr marL="685800" marR="0" lvl="0" indent="-685800" algn="l" defTabSz="914400" rtl="0" eaLnBrk="1" fontAlgn="auto" latinLnBrk="0" hangingPunct="1">
+              <a:lnSpc>
+                <a:spcPct val="125000"/>
+              </a:lnSpc>
+              <a:spcBef>
+                <a:spcPts val="0"/>
+              </a:spcBef>
+              <a:spcAft>
+                <a:spcPts val="0"/>
+              </a:spcAft>
+              <a:buClrTx/>
+              <a:buSzTx/>
+              <a:buFont typeface="Wingdings" panose="05000000000000000000" pitchFamily="2" charset="2"/>
+              <a:buChar char="p"/>
+              <a:tabLst/>
+              <a:defRPr/>
+            </a:pPr>
+            <a:r>
+              <a:rPr kumimoji="0" lang="zh-CN" altLang="en-US" sz="4000" b="0" i="0" u="none" strike="noStrike" kern="1200" cap="none" spc="0" normalizeH="0" baseline="0" noProof="0" dirty="0">
+                <a:ln>
+                  <a:noFill/>
+                </a:ln>
+                <a:solidFill>
+                  <a:prstClr val="black"/>
+                </a:solidFill>
+                <a:effectLst/>
+                <a:uLnTx/>
+                <a:uFillTx/>
+                <a:latin typeface="楷体" panose="02010609060101010101" pitchFamily="49" charset="-122"/>
+                <a:ea typeface="楷体" panose="02010609060101010101" pitchFamily="49" charset="-122"/>
+                <a:cs typeface="+mn-cs"/>
+              </a:rPr>
+              <a:t>余光发现光栅时立刻按下“</a:t>
+            </a:r>
+            <a:r>
+              <a:rPr kumimoji="0" lang="zh-CN" altLang="en-US" sz="4000" b="1" i="0" u="sng" strike="noStrike" kern="1200" cap="none" spc="0" normalizeH="0" baseline="0" noProof="0" dirty="0">
+                <a:ln>
+                  <a:noFill/>
+                </a:ln>
+                <a:solidFill>
+                  <a:prstClr val="black"/>
+                </a:solidFill>
+                <a:effectLst/>
+                <a:uLnTx/>
+                <a:uFillTx/>
+                <a:latin typeface="黑体" panose="02010609060101010101" pitchFamily="49" charset="-122"/>
+                <a:ea typeface="黑体" panose="02010609060101010101" pitchFamily="49" charset="-122"/>
+              </a:rPr>
+              <a:t>空格键</a:t>
+            </a:r>
+            <a:r>
+              <a:rPr kumimoji="0" lang="zh-CN" altLang="en-US" sz="4000" b="0" i="0" u="none" strike="noStrike" kern="1200" cap="none" spc="0" normalizeH="0" baseline="0" noProof="0" dirty="0">
+                <a:ln>
+                  <a:noFill/>
+                </a:ln>
+                <a:solidFill>
+                  <a:prstClr val="black"/>
+                </a:solidFill>
+                <a:effectLst/>
+                <a:uLnTx/>
+                <a:uFillTx/>
+                <a:latin typeface="楷体" panose="02010609060101010101" pitchFamily="49" charset="-122"/>
+                <a:ea typeface="楷体" panose="02010609060101010101" pitchFamily="49" charset="-122"/>
+                <a:cs typeface="+mn-cs"/>
+              </a:rPr>
+              <a:t>”</a:t>
+            </a:r>
+            <a:endParaRPr kumimoji="0" lang="en-US" altLang="zh-CN" sz="4000" b="0" i="0" u="none" strike="noStrike" kern="1200" cap="none" spc="0" normalizeH="0" baseline="0" noProof="0" dirty="0">
+              <a:ln>
+                <a:noFill/>
+              </a:ln>
+              <a:solidFill>
+                <a:prstClr val="black"/>
+              </a:solidFill>
+              <a:effectLst/>
+              <a:uLnTx/>
+              <a:uFillTx/>
+              <a:latin typeface="楷体" panose="02010609060101010101" pitchFamily="49" charset="-122"/>
+              <a:ea typeface="楷体" panose="02010609060101010101" pitchFamily="49" charset="-122"/>
+              <a:cs typeface="+mn-cs"/>
+            </a:endParaRPr>
+          </a:p>
+          <a:p>
+            <a:pPr marL="685800" marR="0" lvl="0" indent="-685800" algn="l" defTabSz="914400" rtl="0" eaLnBrk="1" fontAlgn="auto" latinLnBrk="0" hangingPunct="1">
+              <a:lnSpc>
+                <a:spcPct val="125000"/>
+              </a:lnSpc>
+              <a:spcBef>
+                <a:spcPts val="0"/>
+              </a:spcBef>
+              <a:spcAft>
+                <a:spcPts val="0"/>
+              </a:spcAft>
+              <a:buClrTx/>
+              <a:buSzTx/>
+              <a:buFont typeface="Wingdings" panose="05000000000000000000" pitchFamily="2" charset="2"/>
+              <a:buChar char="p"/>
+              <a:tabLst/>
+              <a:defRPr/>
+            </a:pPr>
+            <a:r>
+              <a:rPr kumimoji="0" lang="zh-CN" altLang="en-US" sz="4000" b="0" i="0" u="none" strike="noStrike" kern="1200" cap="none" spc="0" normalizeH="0" baseline="0" noProof="0" dirty="0">
+                <a:ln>
+                  <a:noFill/>
+                </a:ln>
+                <a:solidFill>
+                  <a:prstClr val="black"/>
+                </a:solidFill>
+                <a:effectLst/>
+                <a:uLnTx/>
+                <a:uFillTx/>
+                <a:latin typeface="楷体" panose="02010609060101010101" pitchFamily="49" charset="-122"/>
+                <a:ea typeface="楷体" panose="02010609060101010101" pitchFamily="49" charset="-122"/>
+                <a:cs typeface="+mn-cs"/>
+              </a:rPr>
+              <a:t>用眼睛盯住光栅后按下“</a:t>
+            </a:r>
+            <a:r>
+              <a:rPr kumimoji="0" lang="en-US" altLang="zh-CN" sz="4000" b="1" i="0" u="sng" strike="noStrike" kern="1200" cap="none" spc="0" normalizeH="0" baseline="0" noProof="0" dirty="0">
+                <a:ln>
+                  <a:noFill/>
+                </a:ln>
+                <a:solidFill>
+                  <a:prstClr val="black"/>
+                </a:solidFill>
+                <a:effectLst/>
+                <a:uLnTx/>
+                <a:uFillTx/>
+                <a:latin typeface="黑体" panose="02010609060101010101" pitchFamily="49" charset="-122"/>
+                <a:ea typeface="黑体" panose="02010609060101010101" pitchFamily="49" charset="-122"/>
+              </a:rPr>
+              <a:t>M</a:t>
+            </a:r>
+            <a:r>
+              <a:rPr kumimoji="0" lang="zh-CN" altLang="en-US" sz="4000" b="1" i="0" u="sng" strike="noStrike" kern="1200" cap="none" spc="0" normalizeH="0" baseline="0" noProof="0" dirty="0">
+                <a:ln>
+                  <a:noFill/>
+                </a:ln>
+                <a:solidFill>
+                  <a:prstClr val="black"/>
+                </a:solidFill>
+                <a:effectLst/>
+                <a:uLnTx/>
+                <a:uFillTx/>
+                <a:latin typeface="黑体" panose="02010609060101010101" pitchFamily="49" charset="-122"/>
+                <a:ea typeface="黑体" panose="02010609060101010101" pitchFamily="49" charset="-122"/>
+              </a:rPr>
+              <a:t>键</a:t>
+            </a:r>
+            <a:r>
+              <a:rPr kumimoji="0" lang="zh-CN" altLang="en-US" sz="4000" b="0" i="0" u="none" strike="noStrike" kern="1200" cap="none" spc="0" normalizeH="0" baseline="0" noProof="0" dirty="0">
+                <a:ln>
+                  <a:noFill/>
+                </a:ln>
+                <a:solidFill>
+                  <a:prstClr val="black"/>
+                </a:solidFill>
+                <a:effectLst/>
+                <a:uLnTx/>
+                <a:uFillTx/>
+                <a:latin typeface="楷体" panose="02010609060101010101" pitchFamily="49" charset="-122"/>
+                <a:ea typeface="楷体" panose="02010609060101010101" pitchFamily="49" charset="-122"/>
+                <a:cs typeface="+mn-cs"/>
+              </a:rPr>
+              <a:t>”</a:t>
+            </a:r>
+            <a:endParaRPr kumimoji="0" lang="en-US" altLang="zh-CN" sz="4000" b="0" i="0" u="none" strike="noStrike" kern="1200" cap="none" spc="0" normalizeH="0" baseline="0" noProof="0" dirty="0">
+              <a:ln>
+                <a:noFill/>
+              </a:ln>
+              <a:solidFill>
+                <a:prstClr val="black"/>
+              </a:solidFill>
+              <a:effectLst/>
+              <a:uLnTx/>
+              <a:uFillTx/>
+              <a:latin typeface="楷体" panose="02010609060101010101" pitchFamily="49" charset="-122"/>
+              <a:ea typeface="楷体" panose="02010609060101010101" pitchFamily="49" charset="-122"/>
+              <a:cs typeface="+mn-cs"/>
+            </a:endParaRPr>
+          </a:p>
+          <a:p>
+            <a:pPr marL="685800" marR="0" lvl="0" indent="-685800" algn="l" defTabSz="914400" rtl="0" eaLnBrk="1" fontAlgn="auto" latinLnBrk="0" hangingPunct="1">
+              <a:lnSpc>
+                <a:spcPct val="125000"/>
+              </a:lnSpc>
+              <a:spcBef>
+                <a:spcPts val="0"/>
+              </a:spcBef>
+              <a:spcAft>
+                <a:spcPts val="0"/>
+              </a:spcAft>
+              <a:buClrTx/>
+              <a:buSzTx/>
+              <a:buFont typeface="Wingdings" panose="05000000000000000000" pitchFamily="2" charset="2"/>
+              <a:buChar char="p"/>
+              <a:tabLst/>
+              <a:defRPr/>
+            </a:pPr>
+            <a:r>
+              <a:rPr kumimoji="0" lang="zh-CN" altLang="en-US" sz="4000" b="1" i="0" u="sng" strike="noStrike" kern="1200" cap="none" spc="0" normalizeH="0" baseline="0" noProof="0" dirty="0">
+                <a:ln>
+                  <a:noFill/>
+                </a:ln>
+                <a:solidFill>
+                  <a:prstClr val="black"/>
+                </a:solidFill>
+                <a:effectLst/>
+                <a:uLnTx/>
+                <a:uFillTx/>
+                <a:latin typeface="黑体" panose="02010609060101010101" pitchFamily="49" charset="-122"/>
+                <a:ea typeface="黑体" panose="02010609060101010101" pitchFamily="49" charset="-122"/>
+              </a:rPr>
+              <a:t>注视位置</a:t>
+            </a:r>
+            <a:r>
+              <a:rPr kumimoji="0" lang="zh-CN" altLang="en-US" sz="4000" b="0" i="0" u="none" strike="noStrike" kern="1200" cap="none" spc="0" normalizeH="0" baseline="0" noProof="0" dirty="0">
+                <a:ln>
+                  <a:noFill/>
+                </a:ln>
+                <a:solidFill>
+                  <a:prstClr val="black"/>
+                </a:solidFill>
+                <a:effectLst/>
+                <a:uLnTx/>
+                <a:uFillTx/>
+                <a:latin typeface="楷体" panose="02010609060101010101" pitchFamily="49" charset="-122"/>
+                <a:ea typeface="楷体" panose="02010609060101010101" pitchFamily="49" charset="-122"/>
+                <a:cs typeface="+mn-cs"/>
+              </a:rPr>
+              <a:t>出现蓝色圆点  表示回答</a:t>
+            </a:r>
+            <a:r>
+              <a:rPr kumimoji="0" lang="zh-CN" altLang="en-US" sz="4000" b="1" i="0" u="none" strike="noStrike" kern="1200" cap="none" spc="0" normalizeH="0" baseline="0" noProof="0" dirty="0">
+                <a:ln>
+                  <a:noFill/>
+                </a:ln>
+                <a:solidFill>
+                  <a:srgbClr val="0070C0"/>
+                </a:solidFill>
+                <a:effectLst/>
+                <a:uLnTx/>
+                <a:uFillTx/>
+                <a:latin typeface="楷体" panose="02010609060101010101" pitchFamily="49" charset="-122"/>
+                <a:ea typeface="楷体" panose="02010609060101010101" pitchFamily="49" charset="-122"/>
+                <a:cs typeface="+mn-cs"/>
+              </a:rPr>
+              <a:t>正确</a:t>
+            </a:r>
+            <a:endParaRPr kumimoji="0" lang="en-US" altLang="zh-CN" sz="4000" b="1" i="0" u="none" strike="noStrike" kern="1200" cap="none" spc="0" normalizeH="0" baseline="0" noProof="0" dirty="0">
+              <a:ln>
+                <a:noFill/>
+              </a:ln>
+              <a:solidFill>
+                <a:srgbClr val="0070C0"/>
+              </a:solidFill>
+              <a:effectLst/>
+              <a:uLnTx/>
+              <a:uFillTx/>
+              <a:latin typeface="楷体" panose="02010609060101010101" pitchFamily="49" charset="-122"/>
+              <a:ea typeface="楷体" panose="02010609060101010101" pitchFamily="49" charset="-122"/>
+              <a:cs typeface="+mn-cs"/>
+            </a:endParaRPr>
+          </a:p>
+        </p:txBody>
+      </p:sp>
+      <p:sp>
+        <p:nvSpPr>
+          <p:cNvPr id="7" name="椭圆 6">
+            <a:extLst>
+              <a:ext uri="{FF2B5EF4-FFF2-40B4-BE49-F238E27FC236}">
+                <a16:creationId xmlns:a16="http://schemas.microsoft.com/office/drawing/2014/main" id="{D0DC6F25-8E97-976B-A047-64219172E155}"/>
+              </a:ext>
+            </a:extLst>
+          </p:cNvPr>
+          <p:cNvSpPr/>
+          <p:nvPr/>
+        </p:nvSpPr>
+        <p:spPr>
+          <a:xfrm>
+            <a:off x="7491547" y="4976951"/>
+            <a:ext cx="306977" cy="306977"/>
+          </a:xfrm>
+          <a:prstGeom prst="ellipse">
+            <a:avLst/>
+          </a:prstGeom>
+          <a:solidFill>
+            <a:srgbClr val="0070C0"/>
+          </a:solidFill>
+          <a:ln>
+            <a:noFill/>
+          </a:ln>
+        </p:spPr>
+        <p:style>
+          <a:lnRef idx="2">
+            <a:schemeClr val="accent1">
+              <a:shade val="15000"/>
+            </a:schemeClr>
+          </a:lnRef>
+          <a:fillRef idx="1">
+            <a:schemeClr val="accent1"/>
+          </a:fillRef>
+          <a:effectRef idx="0">
+            <a:schemeClr val="accent1"/>
+          </a:effectRef>
+          <a:fontRef idx="minor">
+            <a:schemeClr val="lt1"/>
+          </a:fontRef>
+        </p:style>
+        <p:txBody>
+          <a:bodyPr rtlCol="0" anchor="ctr"/>
+          <a:lstStyle/>
+          <a:p>
+            <a:pPr marL="0" marR="0" lvl="0" indent="0" algn="ctr" defTabSz="914400" rtl="0" eaLnBrk="1" fontAlgn="auto" latinLnBrk="0" hangingPunct="1">
+              <a:lnSpc>
+                <a:spcPct val="100000"/>
+              </a:lnSpc>
+              <a:spcBef>
+                <a:spcPts val="0"/>
+              </a:spcBef>
+              <a:spcAft>
+                <a:spcPts val="0"/>
+              </a:spcAft>
+              <a:buClrTx/>
+              <a:buSzTx/>
+              <a:buFontTx/>
+              <a:buNone/>
+              <a:tabLst/>
+              <a:defRPr/>
+            </a:pPr>
+            <a:endParaRPr kumimoji="0" lang="zh-CN" altLang="en-US" sz="1800" b="0" i="0" u="none" strike="noStrike" kern="1200" cap="none" spc="0" normalizeH="0" baseline="0" noProof="0">
+              <a:ln>
+                <a:noFill/>
+              </a:ln>
+              <a:solidFill>
+                <a:prstClr val="white"/>
+              </a:solidFill>
+              <a:effectLst/>
+              <a:uLnTx/>
+              <a:uFillTx/>
+              <a:latin typeface="等线" panose="02110004020202020204"/>
+              <a:ea typeface="等线" panose="02010600030101010101" pitchFamily="2" charset="-122"/>
+              <a:cs typeface="+mn-cs"/>
+            </a:endParaRPr>
+          </a:p>
+        </p:txBody>
+      </p:sp>
+      <p:sp>
+        <p:nvSpPr>
+          <p:cNvPr id="2" name="矩形: 圆角 1">
+            <a:extLst>
+              <a:ext uri="{FF2B5EF4-FFF2-40B4-BE49-F238E27FC236}">
+                <a16:creationId xmlns:a16="http://schemas.microsoft.com/office/drawing/2014/main" id="{7253B336-37C1-ABDB-13B7-A199FE136DAD}"/>
+              </a:ext>
+            </a:extLst>
+          </p:cNvPr>
+          <p:cNvSpPr/>
+          <p:nvPr/>
+        </p:nvSpPr>
+        <p:spPr>
+          <a:xfrm>
+            <a:off x="9255037" y="6115676"/>
+            <a:ext cx="2481943" cy="509451"/>
+          </a:xfrm>
+          <a:prstGeom prst="roundRect">
+            <a:avLst/>
+          </a:prstGeom>
+          <a:solidFill>
+            <a:schemeClr val="tx1"/>
+          </a:solidFill>
+          <a:ln>
+            <a:noFill/>
+          </a:ln>
+          <a:scene3d>
+            <a:camera prst="orthographicFront"/>
+            <a:lightRig rig="threePt" dir="t"/>
+          </a:scene3d>
+          <a:sp3d>
+            <a:bevelT/>
+          </a:sp3d>
+        </p:spPr>
+        <p:style>
+          <a:lnRef idx="2">
+            <a:schemeClr val="accent1">
+              <a:shade val="15000"/>
+            </a:schemeClr>
+          </a:lnRef>
+          <a:fillRef idx="1">
+            <a:schemeClr val="accent1"/>
+          </a:fillRef>
+          <a:effectRef idx="0">
+            <a:schemeClr val="accent1"/>
+          </a:effectRef>
+          <a:fontRef idx="minor">
+            <a:schemeClr val="lt1"/>
+          </a:fontRef>
+        </p:style>
+        <p:txBody>
+          <a:bodyPr rtlCol="0" anchor="ctr"/>
+          <a:lstStyle/>
+          <a:p>
+            <a:pPr algn="ctr"/>
+            <a:r>
+              <a:rPr lang="en-US" altLang="zh-CN" b="1" dirty="0"/>
+              <a:t>space</a:t>
+            </a:r>
+            <a:endParaRPr lang="zh-CN" altLang="en-US" b="1" dirty="0"/>
+          </a:p>
+        </p:txBody>
+      </p:sp>
+      <p:sp>
+        <p:nvSpPr>
+          <p:cNvPr id="3" name="文本框 2">
+            <a:extLst>
+              <a:ext uri="{FF2B5EF4-FFF2-40B4-BE49-F238E27FC236}">
+                <a16:creationId xmlns:a16="http://schemas.microsoft.com/office/drawing/2014/main" id="{ED459190-D889-C999-CE21-824606FEE97E}"/>
+              </a:ext>
+            </a:extLst>
+          </p:cNvPr>
+          <p:cNvSpPr txBox="1"/>
+          <p:nvPr/>
+        </p:nvSpPr>
+        <p:spPr>
+          <a:xfrm>
+            <a:off x="8863151" y="5523102"/>
+            <a:ext cx="3132908" cy="523220"/>
+          </a:xfrm>
+          <a:prstGeom prst="rect">
+            <a:avLst/>
+          </a:prstGeom>
+          <a:noFill/>
+        </p:spPr>
+        <p:txBody>
+          <a:bodyPr wrap="square">
+            <a:spAutoFit/>
+          </a:bodyPr>
+          <a:lstStyle/>
+          <a:p>
+            <a:pPr algn="ctr"/>
+            <a:r>
+              <a:rPr kumimoji="0" lang="zh-CN" altLang="en-US" sz="2800" b="0" i="0" u="none" strike="noStrike" kern="1200" cap="none" spc="0" normalizeH="0" baseline="0" noProof="0" dirty="0">
+                <a:ln>
+                  <a:noFill/>
+                </a:ln>
+                <a:solidFill>
+                  <a:prstClr val="black"/>
+                </a:solidFill>
+                <a:effectLst/>
+                <a:uLnTx/>
+                <a:uFillTx/>
+                <a:latin typeface="楷体" panose="02010609060101010101" pitchFamily="49" charset="-122"/>
+                <a:ea typeface="楷体" panose="02010609060101010101" pitchFamily="49" charset="-122"/>
+                <a:cs typeface="+mn-cs"/>
+              </a:rPr>
+              <a:t>按“</a:t>
+            </a:r>
+            <a:r>
+              <a:rPr kumimoji="0" lang="zh-CN" altLang="en-US" sz="2800" b="1" i="0" u="sng" strike="noStrike" kern="1200" cap="none" spc="0" normalizeH="0" baseline="0" noProof="0" dirty="0">
+                <a:ln>
+                  <a:noFill/>
+                </a:ln>
+                <a:solidFill>
+                  <a:prstClr val="black"/>
+                </a:solidFill>
+                <a:effectLst/>
+                <a:uLnTx/>
+                <a:uFillTx/>
+                <a:latin typeface="楷体" panose="02010609060101010101" pitchFamily="49" charset="-122"/>
+                <a:ea typeface="楷体" panose="02010609060101010101" pitchFamily="49" charset="-122"/>
+                <a:cs typeface="+mn-cs"/>
+              </a:rPr>
+              <a:t>空格键</a:t>
+            </a:r>
+            <a:r>
+              <a:rPr kumimoji="0" lang="zh-CN" altLang="en-US" sz="2800" b="0" i="0" u="none" strike="noStrike" kern="1200" cap="none" spc="0" normalizeH="0" baseline="0" noProof="0" dirty="0">
+                <a:ln>
+                  <a:noFill/>
+                </a:ln>
+                <a:solidFill>
+                  <a:prstClr val="black"/>
+                </a:solidFill>
+                <a:effectLst/>
+                <a:uLnTx/>
+                <a:uFillTx/>
+                <a:latin typeface="楷体" panose="02010609060101010101" pitchFamily="49" charset="-122"/>
+                <a:ea typeface="楷体" panose="02010609060101010101" pitchFamily="49" charset="-122"/>
+                <a:cs typeface="+mn-cs"/>
+              </a:rPr>
+              <a:t>”继续</a:t>
+            </a:r>
+            <a:endParaRPr lang="zh-CN" altLang="en-US" sz="1200" dirty="0"/>
+          </a:p>
+        </p:txBody>
+      </p:sp>
+      <p:pic>
+        <p:nvPicPr>
+          <p:cNvPr id="5" name="图片 4" descr="卡通人物&#10;&#10;低可信度描述已自动生成">
+            <a:extLst>
+              <a:ext uri="{FF2B5EF4-FFF2-40B4-BE49-F238E27FC236}">
+                <a16:creationId xmlns:a16="http://schemas.microsoft.com/office/drawing/2014/main" id="{99DFA79E-0FCF-EC9B-3467-B940E5845553}"/>
+              </a:ext>
+            </a:extLst>
+          </p:cNvPr>
+          <p:cNvPicPr>
+            <a:picLocks noChangeAspect="1"/>
+          </p:cNvPicPr>
+          <p:nvPr/>
+        </p:nvPicPr>
+        <p:blipFill>
+          <a:blip r:embed="rId2" cstate="hqprint">
+            <a:extLst>
+              <a:ext uri="{28A0092B-C50C-407E-A947-70E740481C1C}">
+                <a14:useLocalDpi xmlns:a14="http://schemas.microsoft.com/office/drawing/2010/main"/>
+              </a:ext>
+            </a:extLst>
+          </a:blip>
+          <a:srcRect/>
+          <a:stretch/>
+        </p:blipFill>
+        <p:spPr>
+          <a:xfrm>
+            <a:off x="10360046" y="2545831"/>
+            <a:ext cx="610009" cy="596751"/>
+          </a:xfrm>
+          <a:prstGeom prst="rect">
+            <a:avLst/>
+          </a:prstGeom>
+        </p:spPr>
+      </p:pic>
+    </p:spTree>
+    <p:extLst>
+      <p:ext uri="{BB962C8B-B14F-4D97-AF65-F5344CB8AC3E}">
+        <p14:creationId xmlns:p14="http://schemas.microsoft.com/office/powerpoint/2010/main" val="3492412918"/>
+      </p:ext>
+    </p:extLst>
+  </p:cSld>
+  <p:clrMapOvr>
+    <a:masterClrMapping/>
+  </p:clrMapOvr>
+</p:sld>
+</file>
+
+<file path=ppt/slides/slide15.xml><?xml version="1.0" encoding="utf-8"?>
+<p:sld xmlns:a="http://schemas.openxmlformats.org/drawingml/2006/main" xmlns:r="http://schemas.openxmlformats.org/officeDocument/2006/relationships" xmlns:p="http://schemas.openxmlformats.org/presentationml/2006/main">
+  <p:cSld>
+    <p:bg>
+      <p:bgPr>
+        <a:solidFill>
+          <a:schemeClr val="tx1">
+            <a:lumMod val="50000"/>
+            <a:lumOff val="50000"/>
+          </a:schemeClr>
+        </a:solidFill>
+        <a:effectLst/>
+      </p:bgPr>
+    </p:bg>
+    <p:spTree>
+      <p:nvGrpSpPr>
+        <p:cNvPr id="1" name="">
+          <a:extLst>
+            <a:ext uri="{FF2B5EF4-FFF2-40B4-BE49-F238E27FC236}">
+              <a16:creationId xmlns:a16="http://schemas.microsoft.com/office/drawing/2014/main" id="{EB7CFC86-901F-CDB7-253E-1DC84EFAE76B}"/>
+            </a:ext>
+          </a:extLst>
+        </p:cNvPr>
+        <p:cNvGrpSpPr/>
+        <p:nvPr/>
+      </p:nvGrpSpPr>
+      <p:grpSpPr>
+        <a:xfrm>
+          <a:off x="0" y="0"/>
+          <a:ext cx="0" cy="0"/>
+          <a:chOff x="0" y="0"/>
+          <a:chExt cx="0" cy="0"/>
+        </a:xfrm>
+      </p:grpSpPr>
+      <p:sp>
+        <p:nvSpPr>
+          <p:cNvPr id="4" name="文本框 3">
+            <a:extLst>
+              <a:ext uri="{FF2B5EF4-FFF2-40B4-BE49-F238E27FC236}">
+                <a16:creationId xmlns:a16="http://schemas.microsoft.com/office/drawing/2014/main" id="{7CFDA22B-07D0-9092-BD3A-A5D3689E278B}"/>
+              </a:ext>
+            </a:extLst>
+          </p:cNvPr>
+          <p:cNvSpPr txBox="1"/>
+          <p:nvPr/>
+        </p:nvSpPr>
+        <p:spPr>
+          <a:xfrm>
+            <a:off x="2729049" y="515981"/>
+            <a:ext cx="6733902" cy="923330"/>
+          </a:xfrm>
+          <a:prstGeom prst="rect">
+            <a:avLst/>
+          </a:prstGeom>
+          <a:noFill/>
+        </p:spPr>
+        <p:txBody>
+          <a:bodyPr wrap="square" rtlCol="0">
+            <a:spAutoFit/>
+          </a:bodyPr>
+          <a:lstStyle/>
+          <a:p>
+            <a:pPr marL="0" marR="0" lvl="0" indent="0" algn="ctr" defTabSz="914400" rtl="0" eaLnBrk="1" fontAlgn="auto" latinLnBrk="0" hangingPunct="1">
+              <a:lnSpc>
+                <a:spcPct val="100000"/>
+              </a:lnSpc>
+              <a:spcBef>
+                <a:spcPts val="0"/>
+              </a:spcBef>
+              <a:spcAft>
+                <a:spcPts val="0"/>
+              </a:spcAft>
+              <a:buClrTx/>
+              <a:buSzTx/>
+              <a:buFontTx/>
+              <a:buNone/>
+              <a:tabLst/>
+              <a:defRPr/>
+            </a:pPr>
+            <a:r>
+              <a:rPr kumimoji="0" lang="zh-CN" altLang="en-US" sz="5400" b="0" i="0" u="none" strike="noStrike" kern="1200" cap="none" spc="0" normalizeH="0" baseline="0" noProof="0" dirty="0">
+                <a:ln>
+                  <a:noFill/>
+                </a:ln>
+                <a:solidFill>
+                  <a:prstClr val="black"/>
+                </a:solidFill>
+                <a:effectLst/>
+                <a:uLnTx/>
+                <a:uFillTx/>
+                <a:latin typeface="楷体" panose="02010609060101010101" pitchFamily="49" charset="-122"/>
+                <a:ea typeface="楷体" panose="02010609060101010101" pitchFamily="49" charset="-122"/>
+                <a:cs typeface="+mn-cs"/>
+              </a:rPr>
+              <a:t>练习阶段</a:t>
+            </a:r>
+          </a:p>
+        </p:txBody>
+      </p:sp>
+      <p:sp>
+        <p:nvSpPr>
+          <p:cNvPr id="6" name="文本框 5">
+            <a:extLst>
+              <a:ext uri="{FF2B5EF4-FFF2-40B4-BE49-F238E27FC236}">
+                <a16:creationId xmlns:a16="http://schemas.microsoft.com/office/drawing/2014/main" id="{30C527D1-3F6D-B86E-8D8F-D1A482BA5B5A}"/>
+              </a:ext>
+            </a:extLst>
+          </p:cNvPr>
+          <p:cNvSpPr txBox="1"/>
+          <p:nvPr/>
+        </p:nvSpPr>
+        <p:spPr>
+          <a:xfrm>
+            <a:off x="1500050" y="1645919"/>
+            <a:ext cx="9714412" cy="4603183"/>
+          </a:xfrm>
+          <a:prstGeom prst="rect">
+            <a:avLst/>
+          </a:prstGeom>
+          <a:noFill/>
+        </p:spPr>
+        <p:txBody>
+          <a:bodyPr wrap="square" rtlCol="0">
+            <a:spAutoFit/>
+          </a:bodyPr>
+          <a:lstStyle/>
+          <a:p>
+            <a:pPr marL="685800" lvl="0" indent="-685800">
+              <a:lnSpc>
+                <a:spcPct val="125000"/>
+              </a:lnSpc>
+              <a:buFont typeface="Wingdings" panose="05000000000000000000" pitchFamily="2" charset="2"/>
+              <a:buChar char="p"/>
+              <a:defRPr/>
+            </a:pPr>
+            <a:r>
+              <a:rPr lang="zh-CN" altLang="en-US" sz="4000" b="1" u="sng" dirty="0">
+                <a:solidFill>
+                  <a:prstClr val="black"/>
+                </a:solidFill>
+                <a:latin typeface="黑体" panose="02010609060101010101" pitchFamily="49" charset="-122"/>
+                <a:ea typeface="黑体" panose="02010609060101010101" pitchFamily="49" charset="-122"/>
+              </a:rPr>
+              <a:t>盯住</a:t>
+            </a:r>
+            <a:r>
+              <a:rPr lang="zh-CN" altLang="en-US" sz="4000" dirty="0">
+                <a:solidFill>
+                  <a:prstClr val="black"/>
+                </a:solidFill>
+                <a:latin typeface="楷体" panose="02010609060101010101" pitchFamily="49" charset="-122"/>
+                <a:ea typeface="楷体" panose="02010609060101010101" pitchFamily="49" charset="-122"/>
+              </a:rPr>
+              <a:t>黑点按</a:t>
+            </a:r>
+            <a:r>
+              <a:rPr lang="zh-CN" altLang="en-US" sz="4000" b="1" u="sng" dirty="0">
+                <a:solidFill>
+                  <a:prstClr val="black"/>
+                </a:solidFill>
+                <a:latin typeface="黑体" panose="02010609060101010101" pitchFamily="49" charset="-122"/>
+                <a:ea typeface="黑体" panose="02010609060101010101" pitchFamily="49" charset="-122"/>
+              </a:rPr>
+              <a:t>空格</a:t>
+            </a:r>
+            <a:r>
+              <a:rPr lang="zh-CN" altLang="en-US" sz="4000" dirty="0">
+                <a:solidFill>
+                  <a:prstClr val="black"/>
+                </a:solidFill>
+                <a:latin typeface="楷体" panose="02010609060101010101" pitchFamily="49" charset="-122"/>
+                <a:ea typeface="楷体" panose="02010609060101010101" pitchFamily="49" charset="-122"/>
+              </a:rPr>
+              <a:t>，</a:t>
+            </a:r>
+            <a:r>
+              <a:rPr lang="zh-CN" altLang="en-US" sz="4000" b="1" u="sng" dirty="0">
+                <a:solidFill>
+                  <a:prstClr val="black"/>
+                </a:solidFill>
+                <a:latin typeface="黑体" panose="02010609060101010101" pitchFamily="49" charset="-122"/>
+                <a:ea typeface="黑体" panose="02010609060101010101" pitchFamily="49" charset="-122"/>
+              </a:rPr>
+              <a:t>自由观察</a:t>
+            </a:r>
+            <a:r>
+              <a:rPr lang="zh-CN" altLang="en-US" sz="4000" dirty="0">
+                <a:solidFill>
+                  <a:prstClr val="black"/>
+                </a:solidFill>
+                <a:latin typeface="楷体" panose="02010609060101010101" pitchFamily="49" charset="-122"/>
+                <a:ea typeface="楷体" panose="02010609060101010101" pitchFamily="49" charset="-122"/>
+              </a:rPr>
+              <a:t>出现的纹理</a:t>
+            </a:r>
+            <a:endParaRPr lang="en-US" altLang="zh-CN" sz="4000" dirty="0">
+              <a:solidFill>
+                <a:prstClr val="black"/>
+              </a:solidFill>
+              <a:latin typeface="楷体" panose="02010609060101010101" pitchFamily="49" charset="-122"/>
+              <a:ea typeface="楷体" panose="02010609060101010101" pitchFamily="49" charset="-122"/>
+            </a:endParaRPr>
+          </a:p>
+          <a:p>
+            <a:pPr marL="685800" marR="0" lvl="0" indent="-685800" algn="l" defTabSz="914400" rtl="0" eaLnBrk="1" fontAlgn="auto" latinLnBrk="0" hangingPunct="1">
+              <a:lnSpc>
+                <a:spcPct val="125000"/>
+              </a:lnSpc>
+              <a:spcBef>
+                <a:spcPts val="0"/>
+              </a:spcBef>
+              <a:spcAft>
+                <a:spcPts val="0"/>
+              </a:spcAft>
+              <a:buClrTx/>
+              <a:buSzTx/>
+              <a:buFont typeface="Wingdings" panose="05000000000000000000" pitchFamily="2" charset="2"/>
+              <a:buChar char="p"/>
+              <a:tabLst/>
+              <a:defRPr/>
+            </a:pPr>
+            <a:r>
+              <a:rPr kumimoji="0" lang="en-US" altLang="zh-CN" sz="4000" b="1" i="0" u="sng" strike="noStrike" kern="1200" cap="none" spc="0" normalizeH="0" baseline="0" noProof="0" dirty="0">
+                <a:ln>
+                  <a:noFill/>
+                </a:ln>
+                <a:solidFill>
+                  <a:prstClr val="black"/>
+                </a:solidFill>
+                <a:effectLst/>
+                <a:uLnTx/>
+                <a:uFillTx/>
+                <a:latin typeface="黑体" panose="02010609060101010101" pitchFamily="49" charset="-122"/>
+                <a:ea typeface="黑体" panose="02010609060101010101" pitchFamily="49" charset="-122"/>
+              </a:rPr>
+              <a:t>5</a:t>
+            </a:r>
+            <a:r>
+              <a:rPr kumimoji="0" lang="zh-CN" altLang="en-US" sz="4000" b="1" i="0" u="sng" strike="noStrike" kern="1200" cap="none" spc="0" normalizeH="0" baseline="0" noProof="0" dirty="0">
+                <a:ln>
+                  <a:noFill/>
+                </a:ln>
+                <a:solidFill>
+                  <a:prstClr val="black"/>
+                </a:solidFill>
+                <a:effectLst/>
+                <a:uLnTx/>
+                <a:uFillTx/>
+                <a:latin typeface="黑体" panose="02010609060101010101" pitchFamily="49" charset="-122"/>
+                <a:ea typeface="黑体" panose="02010609060101010101" pitchFamily="49" charset="-122"/>
+              </a:rPr>
+              <a:t>秒内</a:t>
+            </a:r>
+            <a:r>
+              <a:rPr kumimoji="0" lang="zh-CN" altLang="en-US" sz="4000" b="0" i="0" u="none" strike="noStrike" kern="1200" cap="none" spc="0" normalizeH="0" baseline="0" noProof="0" dirty="0">
+                <a:ln>
+                  <a:noFill/>
+                </a:ln>
+                <a:solidFill>
+                  <a:prstClr val="black"/>
+                </a:solidFill>
+                <a:effectLst/>
+                <a:uLnTx/>
+                <a:uFillTx/>
+                <a:latin typeface="楷体" panose="02010609060101010101" pitchFamily="49" charset="-122"/>
+                <a:ea typeface="楷体" panose="02010609060101010101" pitchFamily="49" charset="-122"/>
+                <a:cs typeface="+mn-cs"/>
+              </a:rPr>
+              <a:t>找到藏在黑白花纹中的小光栅</a:t>
+            </a:r>
+            <a:endParaRPr kumimoji="0" lang="en-US" altLang="zh-CN" sz="4000" b="0" i="0" u="none" strike="noStrike" kern="1200" cap="none" spc="0" normalizeH="0" baseline="0" noProof="0" dirty="0">
+              <a:ln>
+                <a:noFill/>
+              </a:ln>
+              <a:solidFill>
+                <a:prstClr val="black"/>
+              </a:solidFill>
+              <a:effectLst/>
+              <a:uLnTx/>
+              <a:uFillTx/>
+              <a:latin typeface="楷体" panose="02010609060101010101" pitchFamily="49" charset="-122"/>
+              <a:ea typeface="楷体" panose="02010609060101010101" pitchFamily="49" charset="-122"/>
+              <a:cs typeface="+mn-cs"/>
+            </a:endParaRPr>
+          </a:p>
+          <a:p>
+            <a:pPr marL="685800" marR="0" lvl="0" indent="-685800" algn="l" defTabSz="914400" rtl="0" eaLnBrk="1" fontAlgn="auto" latinLnBrk="0" hangingPunct="1">
+              <a:lnSpc>
+                <a:spcPct val="125000"/>
+              </a:lnSpc>
+              <a:spcBef>
+                <a:spcPts val="0"/>
+              </a:spcBef>
+              <a:spcAft>
+                <a:spcPts val="0"/>
+              </a:spcAft>
+              <a:buClrTx/>
+              <a:buSzTx/>
+              <a:buFont typeface="Wingdings" panose="05000000000000000000" pitchFamily="2" charset="2"/>
+              <a:buChar char="p"/>
+              <a:tabLst/>
+              <a:defRPr/>
+            </a:pPr>
+            <a:r>
+              <a:rPr kumimoji="0" lang="zh-CN" altLang="en-US" sz="4000" b="0" i="0" u="none" strike="noStrike" kern="1200" cap="none" spc="0" normalizeH="0" baseline="0" noProof="0" dirty="0">
+                <a:ln>
+                  <a:noFill/>
+                </a:ln>
+                <a:solidFill>
+                  <a:prstClr val="black"/>
+                </a:solidFill>
+                <a:effectLst/>
+                <a:uLnTx/>
+                <a:uFillTx/>
+                <a:latin typeface="楷体" panose="02010609060101010101" pitchFamily="49" charset="-122"/>
+                <a:ea typeface="楷体" panose="02010609060101010101" pitchFamily="49" charset="-122"/>
+                <a:cs typeface="+mn-cs"/>
+              </a:rPr>
+              <a:t>余光发现光栅时立刻按下“</a:t>
+            </a:r>
+            <a:r>
+              <a:rPr kumimoji="0" lang="zh-CN" altLang="en-US" sz="4000" b="1" i="0" u="sng" strike="noStrike" kern="1200" cap="none" spc="0" normalizeH="0" baseline="0" noProof="0" dirty="0">
+                <a:ln>
+                  <a:noFill/>
+                </a:ln>
+                <a:solidFill>
+                  <a:prstClr val="black"/>
+                </a:solidFill>
+                <a:effectLst/>
+                <a:uLnTx/>
+                <a:uFillTx/>
+                <a:latin typeface="黑体" panose="02010609060101010101" pitchFamily="49" charset="-122"/>
+                <a:ea typeface="黑体" panose="02010609060101010101" pitchFamily="49" charset="-122"/>
+              </a:rPr>
+              <a:t>空格键</a:t>
+            </a:r>
+            <a:r>
+              <a:rPr kumimoji="0" lang="zh-CN" altLang="en-US" sz="4000" b="0" i="0" u="none" strike="noStrike" kern="1200" cap="none" spc="0" normalizeH="0" baseline="0" noProof="0" dirty="0">
+                <a:ln>
+                  <a:noFill/>
+                </a:ln>
+                <a:solidFill>
+                  <a:prstClr val="black"/>
+                </a:solidFill>
+                <a:effectLst/>
+                <a:uLnTx/>
+                <a:uFillTx/>
+                <a:latin typeface="楷体" panose="02010609060101010101" pitchFamily="49" charset="-122"/>
+                <a:ea typeface="楷体" panose="02010609060101010101" pitchFamily="49" charset="-122"/>
+                <a:cs typeface="+mn-cs"/>
+              </a:rPr>
+              <a:t>”</a:t>
+            </a:r>
+            <a:endParaRPr kumimoji="0" lang="en-US" altLang="zh-CN" sz="4000" b="0" i="0" u="none" strike="noStrike" kern="1200" cap="none" spc="0" normalizeH="0" baseline="0" noProof="0" dirty="0">
+              <a:ln>
+                <a:noFill/>
+              </a:ln>
+              <a:solidFill>
+                <a:prstClr val="black"/>
+              </a:solidFill>
+              <a:effectLst/>
+              <a:uLnTx/>
+              <a:uFillTx/>
+              <a:latin typeface="楷体" panose="02010609060101010101" pitchFamily="49" charset="-122"/>
+              <a:ea typeface="楷体" panose="02010609060101010101" pitchFamily="49" charset="-122"/>
+              <a:cs typeface="+mn-cs"/>
+            </a:endParaRPr>
+          </a:p>
+          <a:p>
+            <a:pPr marL="685800" marR="0" lvl="0" indent="-685800" algn="l" defTabSz="914400" rtl="0" eaLnBrk="1" fontAlgn="auto" latinLnBrk="0" hangingPunct="1">
+              <a:lnSpc>
+                <a:spcPct val="125000"/>
+              </a:lnSpc>
+              <a:spcBef>
+                <a:spcPts val="0"/>
+              </a:spcBef>
+              <a:spcAft>
+                <a:spcPts val="0"/>
+              </a:spcAft>
+              <a:buClrTx/>
+              <a:buSzTx/>
+              <a:buFont typeface="Wingdings" panose="05000000000000000000" pitchFamily="2" charset="2"/>
+              <a:buChar char="p"/>
+              <a:tabLst/>
+              <a:defRPr/>
+            </a:pPr>
+            <a:r>
+              <a:rPr kumimoji="0" lang="zh-CN" altLang="en-US" sz="4000" b="0" i="0" u="none" strike="noStrike" kern="1200" cap="none" spc="0" normalizeH="0" baseline="0" noProof="0" dirty="0">
+                <a:ln>
+                  <a:noFill/>
+                </a:ln>
+                <a:solidFill>
+                  <a:prstClr val="black"/>
+                </a:solidFill>
+                <a:effectLst/>
+                <a:uLnTx/>
+                <a:uFillTx/>
+                <a:latin typeface="楷体" panose="02010609060101010101" pitchFamily="49" charset="-122"/>
+                <a:ea typeface="楷体" panose="02010609060101010101" pitchFamily="49" charset="-122"/>
+                <a:cs typeface="+mn-cs"/>
+              </a:rPr>
+              <a:t>用眼睛盯住光栅后按下“</a:t>
+            </a:r>
+            <a:r>
+              <a:rPr kumimoji="0" lang="en-US" altLang="zh-CN" sz="4000" b="1" i="0" u="sng" strike="noStrike" kern="1200" cap="none" spc="0" normalizeH="0" baseline="0" noProof="0" dirty="0">
+                <a:ln>
+                  <a:noFill/>
+                </a:ln>
+                <a:solidFill>
+                  <a:prstClr val="black"/>
+                </a:solidFill>
+                <a:effectLst/>
+                <a:uLnTx/>
+                <a:uFillTx/>
+                <a:latin typeface="黑体" panose="02010609060101010101" pitchFamily="49" charset="-122"/>
+                <a:ea typeface="黑体" panose="02010609060101010101" pitchFamily="49" charset="-122"/>
+              </a:rPr>
+              <a:t>M</a:t>
+            </a:r>
+            <a:r>
+              <a:rPr kumimoji="0" lang="zh-CN" altLang="en-US" sz="4000" b="1" i="0" u="sng" strike="noStrike" kern="1200" cap="none" spc="0" normalizeH="0" baseline="0" noProof="0" dirty="0">
+                <a:ln>
+                  <a:noFill/>
+                </a:ln>
+                <a:solidFill>
+                  <a:prstClr val="black"/>
+                </a:solidFill>
+                <a:effectLst/>
+                <a:uLnTx/>
+                <a:uFillTx/>
+                <a:latin typeface="黑体" panose="02010609060101010101" pitchFamily="49" charset="-122"/>
+                <a:ea typeface="黑体" panose="02010609060101010101" pitchFamily="49" charset="-122"/>
+              </a:rPr>
+              <a:t>键</a:t>
+            </a:r>
+            <a:r>
+              <a:rPr kumimoji="0" lang="zh-CN" altLang="en-US" sz="4000" b="0" i="0" u="none" strike="noStrike" kern="1200" cap="none" spc="0" normalizeH="0" baseline="0" noProof="0" dirty="0">
+                <a:ln>
+                  <a:noFill/>
+                </a:ln>
+                <a:solidFill>
+                  <a:prstClr val="black"/>
+                </a:solidFill>
+                <a:effectLst/>
+                <a:uLnTx/>
+                <a:uFillTx/>
+                <a:latin typeface="楷体" panose="02010609060101010101" pitchFamily="49" charset="-122"/>
+                <a:ea typeface="楷体" panose="02010609060101010101" pitchFamily="49" charset="-122"/>
+                <a:cs typeface="+mn-cs"/>
+              </a:rPr>
+              <a:t>”</a:t>
+            </a:r>
+            <a:endParaRPr kumimoji="0" lang="en-US" altLang="zh-CN" sz="4000" b="0" i="0" u="none" strike="noStrike" kern="1200" cap="none" spc="0" normalizeH="0" baseline="0" noProof="0" dirty="0">
+              <a:ln>
+                <a:noFill/>
+              </a:ln>
+              <a:solidFill>
+                <a:prstClr val="black"/>
+              </a:solidFill>
+              <a:effectLst/>
+              <a:uLnTx/>
+              <a:uFillTx/>
+              <a:latin typeface="楷体" panose="02010609060101010101" pitchFamily="49" charset="-122"/>
+              <a:ea typeface="楷体" panose="02010609060101010101" pitchFamily="49" charset="-122"/>
+              <a:cs typeface="+mn-cs"/>
+            </a:endParaRPr>
+          </a:p>
+          <a:p>
+            <a:pPr marL="685800" marR="0" lvl="0" indent="-685800" algn="l" defTabSz="914400" rtl="0" eaLnBrk="1" fontAlgn="auto" latinLnBrk="0" hangingPunct="1">
+              <a:lnSpc>
+                <a:spcPct val="125000"/>
+              </a:lnSpc>
+              <a:spcBef>
+                <a:spcPts val="0"/>
+              </a:spcBef>
+              <a:spcAft>
+                <a:spcPts val="0"/>
+              </a:spcAft>
+              <a:buClrTx/>
+              <a:buSzTx/>
+              <a:buFont typeface="Wingdings" panose="05000000000000000000" pitchFamily="2" charset="2"/>
+              <a:buChar char="p"/>
+              <a:tabLst/>
+              <a:defRPr/>
+            </a:pPr>
+            <a:r>
+              <a:rPr kumimoji="0" lang="zh-CN" altLang="en-US" sz="4000" b="1" i="0" u="sng" strike="noStrike" kern="1200" cap="none" spc="0" normalizeH="0" baseline="0" noProof="0" dirty="0">
+                <a:ln>
+                  <a:noFill/>
+                </a:ln>
+                <a:solidFill>
+                  <a:prstClr val="black"/>
+                </a:solidFill>
+                <a:effectLst/>
+                <a:uLnTx/>
+                <a:uFillTx/>
+                <a:latin typeface="黑体" panose="02010609060101010101" pitchFamily="49" charset="-122"/>
+                <a:ea typeface="黑体" panose="02010609060101010101" pitchFamily="49" charset="-122"/>
+              </a:rPr>
+              <a:t>注视位置</a:t>
+            </a:r>
+            <a:r>
+              <a:rPr kumimoji="0" lang="zh-CN" altLang="en-US" sz="4000" b="0" i="0" u="none" strike="noStrike" kern="1200" cap="none" spc="0" normalizeH="0" baseline="0" noProof="0" dirty="0">
+                <a:ln>
+                  <a:noFill/>
+                </a:ln>
+                <a:solidFill>
+                  <a:prstClr val="black"/>
+                </a:solidFill>
+                <a:effectLst/>
+                <a:uLnTx/>
+                <a:uFillTx/>
+                <a:latin typeface="楷体" panose="02010609060101010101" pitchFamily="49" charset="-122"/>
+                <a:ea typeface="楷体" panose="02010609060101010101" pitchFamily="49" charset="-122"/>
+                <a:cs typeface="+mn-cs"/>
+              </a:rPr>
+              <a:t>出现蓝色圆点  表示回答</a:t>
+            </a:r>
+            <a:r>
+              <a:rPr kumimoji="0" lang="zh-CN" altLang="en-US" sz="4000" b="1" i="0" u="none" strike="noStrike" kern="1200" cap="none" spc="0" normalizeH="0" baseline="0" noProof="0" dirty="0">
+                <a:ln>
+                  <a:noFill/>
+                </a:ln>
+                <a:solidFill>
+                  <a:srgbClr val="0070C0"/>
+                </a:solidFill>
+                <a:effectLst/>
+                <a:uLnTx/>
+                <a:uFillTx/>
+                <a:latin typeface="楷体" panose="02010609060101010101" pitchFamily="49" charset="-122"/>
+                <a:ea typeface="楷体" panose="02010609060101010101" pitchFamily="49" charset="-122"/>
+                <a:cs typeface="+mn-cs"/>
+              </a:rPr>
+              <a:t>正确</a:t>
+            </a:r>
+            <a:endParaRPr kumimoji="0" lang="en-US" altLang="zh-CN" sz="4000" b="1" i="0" u="none" strike="noStrike" kern="1200" cap="none" spc="0" normalizeH="0" baseline="0" noProof="0" dirty="0">
+              <a:ln>
+                <a:noFill/>
+              </a:ln>
+              <a:solidFill>
+                <a:srgbClr val="0070C0"/>
+              </a:solidFill>
+              <a:effectLst/>
+              <a:uLnTx/>
+              <a:uFillTx/>
+              <a:latin typeface="楷体" panose="02010609060101010101" pitchFamily="49" charset="-122"/>
+              <a:ea typeface="楷体" panose="02010609060101010101" pitchFamily="49" charset="-122"/>
+              <a:cs typeface="+mn-cs"/>
+            </a:endParaRPr>
+          </a:p>
+          <a:p>
+            <a:pPr marL="685800" marR="0" lvl="0" indent="-685800" algn="l" defTabSz="914400" rtl="0" eaLnBrk="1" fontAlgn="auto" latinLnBrk="0" hangingPunct="1">
+              <a:lnSpc>
+                <a:spcPct val="125000"/>
+              </a:lnSpc>
+              <a:spcBef>
+                <a:spcPts val="0"/>
+              </a:spcBef>
+              <a:spcAft>
+                <a:spcPts val="0"/>
+              </a:spcAft>
+              <a:buClrTx/>
+              <a:buSzTx/>
+              <a:buFont typeface="Wingdings" panose="05000000000000000000" pitchFamily="2" charset="2"/>
+              <a:buChar char="ü"/>
+              <a:tabLst/>
+              <a:defRPr/>
+            </a:pPr>
+            <a:r>
+              <a:rPr kumimoji="0" lang="zh-CN" altLang="en-US" sz="4000" b="0" i="0" u="none" strike="noStrike" kern="1200" cap="none" spc="0" normalizeH="0" baseline="0" noProof="0" dirty="0">
+                <a:ln>
+                  <a:noFill/>
+                </a:ln>
+                <a:solidFill>
+                  <a:prstClr val="black"/>
+                </a:solidFill>
+                <a:effectLst/>
+                <a:uLnTx/>
+                <a:uFillTx/>
+                <a:latin typeface="楷体" panose="02010609060101010101" pitchFamily="49" charset="-122"/>
+                <a:ea typeface="楷体" panose="02010609060101010101" pitchFamily="49" charset="-122"/>
+                <a:cs typeface="+mn-cs"/>
+              </a:rPr>
+              <a:t>连续做对</a:t>
+            </a:r>
+            <a:r>
+              <a:rPr kumimoji="0" lang="en-US" altLang="zh-CN" sz="4000" b="1" i="0" u="none" strike="noStrike" kern="1200" cap="none" spc="0" normalizeH="0" baseline="0" noProof="0" dirty="0">
+                <a:ln>
+                  <a:noFill/>
+                </a:ln>
+                <a:solidFill>
+                  <a:prstClr val="black"/>
+                </a:solidFill>
+                <a:effectLst/>
+                <a:uLnTx/>
+                <a:uFillTx/>
+                <a:latin typeface="楷体" panose="02010609060101010101" pitchFamily="49" charset="-122"/>
+                <a:ea typeface="楷体" panose="02010609060101010101" pitchFamily="49" charset="-122"/>
+                <a:cs typeface="+mn-cs"/>
+              </a:rPr>
+              <a:t>10</a:t>
+            </a:r>
+            <a:r>
+              <a:rPr kumimoji="0" lang="zh-CN" altLang="en-US" sz="4000" b="1" i="0" u="none" strike="noStrike" kern="1200" cap="none" spc="0" normalizeH="0" baseline="0" noProof="0" dirty="0">
+                <a:ln>
+                  <a:noFill/>
+                </a:ln>
+                <a:solidFill>
+                  <a:prstClr val="black"/>
+                </a:solidFill>
+                <a:effectLst/>
+                <a:uLnTx/>
+                <a:uFillTx/>
+                <a:latin typeface="楷体" panose="02010609060101010101" pitchFamily="49" charset="-122"/>
+                <a:ea typeface="楷体" panose="02010609060101010101" pitchFamily="49" charset="-122"/>
+                <a:cs typeface="+mn-cs"/>
+              </a:rPr>
+              <a:t>次</a:t>
+            </a:r>
+            <a:r>
+              <a:rPr kumimoji="0" lang="zh-CN" altLang="en-US" sz="4000" b="0" i="0" u="none" strike="noStrike" kern="1200" cap="none" spc="0" normalizeH="0" baseline="0" noProof="0" dirty="0">
+                <a:ln>
+                  <a:noFill/>
+                </a:ln>
+                <a:solidFill>
+                  <a:prstClr val="black"/>
+                </a:solidFill>
+                <a:effectLst/>
+                <a:uLnTx/>
+                <a:uFillTx/>
+                <a:latin typeface="楷体" panose="02010609060101010101" pitchFamily="49" charset="-122"/>
+                <a:ea typeface="楷体" panose="02010609060101010101" pitchFamily="49" charset="-122"/>
+                <a:cs typeface="+mn-cs"/>
+              </a:rPr>
+              <a:t>即可通过</a:t>
+            </a:r>
+          </a:p>
+        </p:txBody>
+      </p:sp>
+      <p:sp>
+        <p:nvSpPr>
+          <p:cNvPr id="7" name="椭圆 6">
+            <a:extLst>
+              <a:ext uri="{FF2B5EF4-FFF2-40B4-BE49-F238E27FC236}">
+                <a16:creationId xmlns:a16="http://schemas.microsoft.com/office/drawing/2014/main" id="{EEE5533C-453C-2085-11B2-E9FA2DCA9CE7}"/>
+              </a:ext>
+            </a:extLst>
+          </p:cNvPr>
+          <p:cNvSpPr/>
+          <p:nvPr/>
+        </p:nvSpPr>
+        <p:spPr>
+          <a:xfrm>
+            <a:off x="7471954" y="4976951"/>
+            <a:ext cx="306977" cy="306977"/>
+          </a:xfrm>
+          <a:prstGeom prst="ellipse">
+            <a:avLst/>
+          </a:prstGeom>
+          <a:solidFill>
+            <a:srgbClr val="0070C0"/>
+          </a:solidFill>
+          <a:ln>
+            <a:noFill/>
+          </a:ln>
+        </p:spPr>
+        <p:style>
+          <a:lnRef idx="2">
+            <a:schemeClr val="accent1">
+              <a:shade val="15000"/>
+            </a:schemeClr>
+          </a:lnRef>
+          <a:fillRef idx="1">
+            <a:schemeClr val="accent1"/>
+          </a:fillRef>
+          <a:effectRef idx="0">
+            <a:schemeClr val="accent1"/>
+          </a:effectRef>
+          <a:fontRef idx="minor">
+            <a:schemeClr val="lt1"/>
+          </a:fontRef>
+        </p:style>
+        <p:txBody>
+          <a:bodyPr rtlCol="0" anchor="ctr"/>
+          <a:lstStyle/>
+          <a:p>
+            <a:pPr marL="0" marR="0" lvl="0" indent="0" algn="ctr" defTabSz="914400" rtl="0" eaLnBrk="1" fontAlgn="auto" latinLnBrk="0" hangingPunct="1">
+              <a:lnSpc>
+                <a:spcPct val="100000"/>
+              </a:lnSpc>
+              <a:spcBef>
+                <a:spcPts val="0"/>
+              </a:spcBef>
+              <a:spcAft>
+                <a:spcPts val="0"/>
+              </a:spcAft>
+              <a:buClrTx/>
+              <a:buSzTx/>
+              <a:buFontTx/>
+              <a:buNone/>
+              <a:tabLst/>
+              <a:defRPr/>
+            </a:pPr>
+            <a:endParaRPr kumimoji="0" lang="zh-CN" altLang="en-US" sz="1800" b="0" i="0" u="none" strike="noStrike" kern="1200" cap="none" spc="0" normalizeH="0" baseline="0" noProof="0">
+              <a:ln>
+                <a:noFill/>
+              </a:ln>
+              <a:solidFill>
+                <a:prstClr val="white"/>
+              </a:solidFill>
+              <a:effectLst/>
+              <a:uLnTx/>
+              <a:uFillTx/>
+              <a:latin typeface="等线" panose="02110004020202020204"/>
+              <a:ea typeface="等线" panose="02010600030101010101" pitchFamily="2" charset="-122"/>
+              <a:cs typeface="+mn-cs"/>
+            </a:endParaRPr>
+          </a:p>
+        </p:txBody>
+      </p:sp>
+      <p:sp>
+        <p:nvSpPr>
+          <p:cNvPr id="2" name="矩形: 圆角 1">
+            <a:extLst>
+              <a:ext uri="{FF2B5EF4-FFF2-40B4-BE49-F238E27FC236}">
+                <a16:creationId xmlns:a16="http://schemas.microsoft.com/office/drawing/2014/main" id="{F648DF66-1849-31FD-9C0E-B6F9ED44623B}"/>
+              </a:ext>
+            </a:extLst>
+          </p:cNvPr>
+          <p:cNvSpPr/>
+          <p:nvPr/>
+        </p:nvSpPr>
+        <p:spPr>
+          <a:xfrm>
+            <a:off x="9255037" y="6115676"/>
+            <a:ext cx="2481943" cy="509451"/>
+          </a:xfrm>
+          <a:prstGeom prst="roundRect">
+            <a:avLst/>
+          </a:prstGeom>
+          <a:solidFill>
+            <a:schemeClr val="tx1"/>
+          </a:solidFill>
+          <a:ln>
+            <a:noFill/>
+          </a:ln>
+          <a:scene3d>
+            <a:camera prst="orthographicFront"/>
+            <a:lightRig rig="threePt" dir="t"/>
+          </a:scene3d>
+          <a:sp3d>
+            <a:bevelT/>
+          </a:sp3d>
+        </p:spPr>
+        <p:style>
+          <a:lnRef idx="2">
+            <a:schemeClr val="accent1">
+              <a:shade val="15000"/>
+            </a:schemeClr>
+          </a:lnRef>
+          <a:fillRef idx="1">
+            <a:schemeClr val="accent1"/>
+          </a:fillRef>
+          <a:effectRef idx="0">
+            <a:schemeClr val="accent1"/>
+          </a:effectRef>
+          <a:fontRef idx="minor">
+            <a:schemeClr val="lt1"/>
+          </a:fontRef>
+        </p:style>
+        <p:txBody>
+          <a:bodyPr rtlCol="0" anchor="ctr"/>
+          <a:lstStyle/>
+          <a:p>
+            <a:pPr algn="ctr"/>
+            <a:r>
+              <a:rPr lang="en-US" altLang="zh-CN" b="1" dirty="0"/>
+              <a:t>space</a:t>
+            </a:r>
+            <a:endParaRPr lang="zh-CN" altLang="en-US" b="1" dirty="0"/>
+          </a:p>
+        </p:txBody>
+      </p:sp>
+      <p:sp>
+        <p:nvSpPr>
+          <p:cNvPr id="3" name="文本框 2">
+            <a:extLst>
+              <a:ext uri="{FF2B5EF4-FFF2-40B4-BE49-F238E27FC236}">
+                <a16:creationId xmlns:a16="http://schemas.microsoft.com/office/drawing/2014/main" id="{9D29BDF1-757D-786B-3121-AA7BBCB86AE3}"/>
+              </a:ext>
+            </a:extLst>
+          </p:cNvPr>
+          <p:cNvSpPr txBox="1"/>
+          <p:nvPr/>
+        </p:nvSpPr>
+        <p:spPr>
+          <a:xfrm>
+            <a:off x="8863151" y="5523102"/>
+            <a:ext cx="3132908" cy="523220"/>
+          </a:xfrm>
+          <a:prstGeom prst="rect">
+            <a:avLst/>
+          </a:prstGeom>
+          <a:noFill/>
+        </p:spPr>
+        <p:txBody>
+          <a:bodyPr wrap="square">
+            <a:spAutoFit/>
+          </a:bodyPr>
+          <a:lstStyle/>
+          <a:p>
+            <a:pPr algn="ctr"/>
+            <a:r>
+              <a:rPr kumimoji="0" lang="zh-CN" altLang="en-US" sz="2800" b="0" i="0" u="none" strike="noStrike" kern="1200" cap="none" spc="0" normalizeH="0" baseline="0" noProof="0" dirty="0">
+                <a:ln>
+                  <a:noFill/>
+                </a:ln>
+                <a:solidFill>
+                  <a:prstClr val="black"/>
+                </a:solidFill>
+                <a:effectLst/>
+                <a:uLnTx/>
+                <a:uFillTx/>
+                <a:latin typeface="楷体" panose="02010609060101010101" pitchFamily="49" charset="-122"/>
+                <a:ea typeface="楷体" panose="02010609060101010101" pitchFamily="49" charset="-122"/>
+                <a:cs typeface="+mn-cs"/>
+              </a:rPr>
+              <a:t>按“</a:t>
+            </a:r>
+            <a:r>
+              <a:rPr kumimoji="0" lang="zh-CN" altLang="en-US" sz="2800" b="1" i="0" u="sng" strike="noStrike" kern="1200" cap="none" spc="0" normalizeH="0" baseline="0" noProof="0" dirty="0">
+                <a:ln>
+                  <a:noFill/>
+                </a:ln>
+                <a:solidFill>
+                  <a:prstClr val="black"/>
+                </a:solidFill>
+                <a:effectLst/>
+                <a:uLnTx/>
+                <a:uFillTx/>
+                <a:latin typeface="楷体" panose="02010609060101010101" pitchFamily="49" charset="-122"/>
+                <a:ea typeface="楷体" panose="02010609060101010101" pitchFamily="49" charset="-122"/>
+                <a:cs typeface="+mn-cs"/>
+              </a:rPr>
+              <a:t>空格键</a:t>
+            </a:r>
+            <a:r>
+              <a:rPr kumimoji="0" lang="zh-CN" altLang="en-US" sz="2800" b="0" i="0" u="none" strike="noStrike" kern="1200" cap="none" spc="0" normalizeH="0" baseline="0" noProof="0" dirty="0">
+                <a:ln>
+                  <a:noFill/>
+                </a:ln>
+                <a:solidFill>
+                  <a:prstClr val="black"/>
+                </a:solidFill>
+                <a:effectLst/>
+                <a:uLnTx/>
+                <a:uFillTx/>
+                <a:latin typeface="楷体" panose="02010609060101010101" pitchFamily="49" charset="-122"/>
+                <a:ea typeface="楷体" panose="02010609060101010101" pitchFamily="49" charset="-122"/>
+                <a:cs typeface="+mn-cs"/>
+              </a:rPr>
+              <a:t>”</a:t>
+            </a:r>
+            <a:r>
+              <a:rPr lang="zh-CN" altLang="en-US" sz="2800" b="1" dirty="0">
+                <a:solidFill>
+                  <a:srgbClr val="FF0000"/>
+                </a:solidFill>
+                <a:latin typeface="黑体" panose="02010609060101010101" pitchFamily="49" charset="-122"/>
+                <a:ea typeface="黑体" panose="02010609060101010101" pitchFamily="49" charset="-122"/>
+              </a:rPr>
+              <a:t>开始</a:t>
+            </a:r>
+            <a:endParaRPr lang="zh-CN" altLang="en-US" sz="1200" b="1" dirty="0">
+              <a:solidFill>
+                <a:srgbClr val="FF0000"/>
+              </a:solidFill>
+              <a:latin typeface="黑体" panose="02010609060101010101" pitchFamily="49" charset="-122"/>
+              <a:ea typeface="黑体" panose="02010609060101010101" pitchFamily="49" charset="-122"/>
+            </a:endParaRPr>
+          </a:p>
+        </p:txBody>
+      </p:sp>
+      <p:pic>
+        <p:nvPicPr>
+          <p:cNvPr id="5" name="图片 4" descr="卡通人物&#10;&#10;低可信度描述已自动生成">
+            <a:extLst>
+              <a:ext uri="{FF2B5EF4-FFF2-40B4-BE49-F238E27FC236}">
+                <a16:creationId xmlns:a16="http://schemas.microsoft.com/office/drawing/2014/main" id="{D76044CE-4457-84F9-A939-A2300E70AB29}"/>
+              </a:ext>
+            </a:extLst>
+          </p:cNvPr>
+          <p:cNvPicPr>
+            <a:picLocks noChangeAspect="1"/>
+          </p:cNvPicPr>
+          <p:nvPr/>
+        </p:nvPicPr>
+        <p:blipFill>
+          <a:blip r:embed="rId2" cstate="hqprint">
+            <a:extLst>
+              <a:ext uri="{28A0092B-C50C-407E-A947-70E740481C1C}">
+                <a14:useLocalDpi xmlns:a14="http://schemas.microsoft.com/office/drawing/2010/main"/>
+              </a:ext>
+            </a:extLst>
+          </a:blip>
+          <a:srcRect/>
+          <a:stretch/>
+        </p:blipFill>
+        <p:spPr>
+          <a:xfrm>
+            <a:off x="10360046" y="2545831"/>
+            <a:ext cx="610009" cy="596751"/>
+          </a:xfrm>
+          <a:prstGeom prst="rect">
+            <a:avLst/>
+          </a:prstGeom>
+        </p:spPr>
+      </p:pic>
+    </p:spTree>
+    <p:extLst>
+      <p:ext uri="{BB962C8B-B14F-4D97-AF65-F5344CB8AC3E}">
+        <p14:creationId xmlns:p14="http://schemas.microsoft.com/office/powerpoint/2010/main" val="2273590758"/>
+      </p:ext>
+    </p:extLst>
+  </p:cSld>
+  <p:clrMapOvr>
+    <a:masterClrMapping/>
+  </p:clrMapOvr>
+</p:sld>
+</file>
+
+<file path=ppt/slides/slide16.xml><?xml version="1.0" encoding="utf-8"?>
+<p:sld xmlns:a="http://schemas.openxmlformats.org/drawingml/2006/main" xmlns:r="http://schemas.openxmlformats.org/officeDocument/2006/relationships" xmlns:p="http://schemas.openxmlformats.org/presentationml/2006/main">
+  <p:cSld>
+    <p:bg>
+      <p:bgPr>
+        <a:solidFill>
+          <a:schemeClr val="tx1">
+            <a:lumMod val="50000"/>
+            <a:lumOff val="50000"/>
+          </a:schemeClr>
+        </a:solidFill>
+        <a:effectLst/>
+      </p:bgPr>
+    </p:bg>
+    <p:spTree>
+      <p:nvGrpSpPr>
+        <p:cNvPr id="1" name="">
+          <a:extLst>
+            <a:ext uri="{FF2B5EF4-FFF2-40B4-BE49-F238E27FC236}">
+              <a16:creationId xmlns:a16="http://schemas.microsoft.com/office/drawing/2014/main" id="{7B909AE4-CEF5-3038-F461-47B481C861CB}"/>
+            </a:ext>
+          </a:extLst>
+        </p:cNvPr>
+        <p:cNvGrpSpPr/>
+        <p:nvPr/>
+      </p:nvGrpSpPr>
+      <p:grpSpPr>
+        <a:xfrm>
+          <a:off x="0" y="0"/>
+          <a:ext cx="0" cy="0"/>
+          <a:chOff x="0" y="0"/>
+          <a:chExt cx="0" cy="0"/>
+        </a:xfrm>
+      </p:grpSpPr>
+      <p:sp>
+        <p:nvSpPr>
+          <p:cNvPr id="4" name="文本框 3">
+            <a:extLst>
+              <a:ext uri="{FF2B5EF4-FFF2-40B4-BE49-F238E27FC236}">
+                <a16:creationId xmlns:a16="http://schemas.microsoft.com/office/drawing/2014/main" id="{31ACB186-67A8-6A9F-7A20-E3DDA1CA21A1}"/>
+              </a:ext>
+            </a:extLst>
+          </p:cNvPr>
+          <p:cNvSpPr txBox="1"/>
+          <p:nvPr/>
+        </p:nvSpPr>
+        <p:spPr>
+          <a:xfrm>
+            <a:off x="2729049" y="515981"/>
+            <a:ext cx="6733902" cy="923330"/>
+          </a:xfrm>
+          <a:prstGeom prst="rect">
+            <a:avLst/>
+          </a:prstGeom>
+          <a:noFill/>
+        </p:spPr>
+        <p:txBody>
+          <a:bodyPr wrap="square" rtlCol="0">
+            <a:spAutoFit/>
+          </a:bodyPr>
+          <a:lstStyle/>
+          <a:p>
+            <a:pPr marL="0" marR="0" lvl="0" indent="0" algn="ctr" defTabSz="914400" rtl="0" eaLnBrk="1" fontAlgn="auto" latinLnBrk="0" hangingPunct="1">
+              <a:lnSpc>
+                <a:spcPct val="100000"/>
+              </a:lnSpc>
+              <a:spcBef>
+                <a:spcPts val="0"/>
+              </a:spcBef>
+              <a:spcAft>
+                <a:spcPts val="0"/>
+              </a:spcAft>
+              <a:buClrTx/>
+              <a:buSzTx/>
+              <a:buFontTx/>
+              <a:buNone/>
+              <a:tabLst/>
+              <a:defRPr/>
+            </a:pPr>
+            <a:r>
+              <a:rPr kumimoji="0" lang="zh-CN" altLang="en-US" sz="5400" b="0" i="0" u="none" strike="noStrike" kern="1200" cap="none" spc="0" normalizeH="0" baseline="0" noProof="0" dirty="0">
+                <a:ln>
+                  <a:noFill/>
+                </a:ln>
+                <a:solidFill>
+                  <a:prstClr val="black"/>
+                </a:solidFill>
+                <a:effectLst/>
+                <a:uLnTx/>
+                <a:uFillTx/>
+                <a:latin typeface="楷体" panose="02010609060101010101" pitchFamily="49" charset="-122"/>
+                <a:ea typeface="楷体" panose="02010609060101010101" pitchFamily="49" charset="-122"/>
+                <a:cs typeface="+mn-cs"/>
+              </a:rPr>
+              <a:t>校准检查</a:t>
+            </a:r>
+          </a:p>
+        </p:txBody>
+      </p:sp>
+      <p:sp>
+        <p:nvSpPr>
+          <p:cNvPr id="2" name="矩形: 圆角 1">
+            <a:extLst>
+              <a:ext uri="{FF2B5EF4-FFF2-40B4-BE49-F238E27FC236}">
+                <a16:creationId xmlns:a16="http://schemas.microsoft.com/office/drawing/2014/main" id="{E2D65877-E42C-81B3-A6FB-C196DCFF152F}"/>
+              </a:ext>
+            </a:extLst>
+          </p:cNvPr>
+          <p:cNvSpPr/>
+          <p:nvPr/>
+        </p:nvSpPr>
+        <p:spPr>
+          <a:xfrm>
+            <a:off x="9255037" y="6115676"/>
+            <a:ext cx="2481943" cy="509451"/>
+          </a:xfrm>
+          <a:prstGeom prst="roundRect">
+            <a:avLst/>
+          </a:prstGeom>
+          <a:solidFill>
+            <a:schemeClr val="tx1"/>
+          </a:solidFill>
+          <a:ln>
+            <a:noFill/>
+          </a:ln>
+          <a:scene3d>
+            <a:camera prst="orthographicFront"/>
+            <a:lightRig rig="threePt" dir="t"/>
+          </a:scene3d>
+          <a:sp3d>
+            <a:bevelT/>
+          </a:sp3d>
+        </p:spPr>
+        <p:style>
+          <a:lnRef idx="2">
+            <a:schemeClr val="accent1">
+              <a:shade val="15000"/>
+            </a:schemeClr>
+          </a:lnRef>
+          <a:fillRef idx="1">
+            <a:schemeClr val="accent1"/>
+          </a:fillRef>
+          <a:effectRef idx="0">
+            <a:schemeClr val="accent1"/>
+          </a:effectRef>
+          <a:fontRef idx="minor">
+            <a:schemeClr val="lt1"/>
+          </a:fontRef>
+        </p:style>
+        <p:txBody>
+          <a:bodyPr rtlCol="0" anchor="ctr"/>
+          <a:lstStyle/>
+          <a:p>
+            <a:pPr algn="ctr"/>
+            <a:r>
+              <a:rPr lang="en-US" altLang="zh-CN" b="1" dirty="0"/>
+              <a:t>space</a:t>
+            </a:r>
+            <a:endParaRPr lang="zh-CN" altLang="en-US" b="1" dirty="0"/>
+          </a:p>
+        </p:txBody>
+      </p:sp>
+      <p:sp>
+        <p:nvSpPr>
           <p:cNvPr id="3" name="文本框 2">
             <a:extLst>
               <a:ext uri="{FF2B5EF4-FFF2-40B4-BE49-F238E27FC236}">
@@ -7531,7 +10434,7 @@
 </p:sld>
 </file>
 
-<file path=ppt/slides/slide13.xml><?xml version="1.0" encoding="utf-8"?>
+<file path=ppt/slides/slide17.xml><?xml version="1.0" encoding="utf-8"?>
 <p:sld xmlns:a="http://schemas.openxmlformats.org/drawingml/2006/main" xmlns:r="http://schemas.openxmlformats.org/officeDocument/2006/relationships" xmlns:p="http://schemas.openxmlformats.org/presentationml/2006/main">
   <p:cSld>
     <p:bg>
@@ -8581,7 +11484,7 @@
 </p:sld>
 </file>
 
-<file path=ppt/slides/slide14.xml><?xml version="1.0" encoding="utf-8"?>
+<file path=ppt/slides/slide18.xml><?xml version="1.0" encoding="utf-8"?>
 <p:sld xmlns:a="http://schemas.openxmlformats.org/drawingml/2006/main" xmlns:r="http://schemas.openxmlformats.org/officeDocument/2006/relationships" xmlns:p="http://schemas.openxmlformats.org/presentationml/2006/main">
   <p:cSld>
     <p:bg>
@@ -9353,7 +12256,7 @@
 </p:sld>
 </file>
 
-<file path=ppt/slides/slide15.xml><?xml version="1.0" encoding="utf-8"?>
+<file path=ppt/slides/slide19.xml><?xml version="1.0" encoding="utf-8"?>
 <p:sld xmlns:a="http://schemas.openxmlformats.org/drawingml/2006/main" xmlns:r="http://schemas.openxmlformats.org/officeDocument/2006/relationships" xmlns:p="http://schemas.openxmlformats.org/presentationml/2006/main">
   <p:cSld>
     <p:bg>
@@ -9660,418 +12563,6 @@
     <p:extLst>
       <p:ext uri="{BB962C8B-B14F-4D97-AF65-F5344CB8AC3E}">
         <p14:creationId xmlns:p14="http://schemas.microsoft.com/office/powerpoint/2010/main" val="3415939462"/>
-      </p:ext>
-    </p:extLst>
-  </p:cSld>
-  <p:clrMapOvr>
-    <a:masterClrMapping/>
-  </p:clrMapOvr>
-</p:sld>
-</file>
-
-<file path=ppt/slides/slide16.xml><?xml version="1.0" encoding="utf-8"?>
-<p:sld xmlns:a="http://schemas.openxmlformats.org/drawingml/2006/main" xmlns:r="http://schemas.openxmlformats.org/officeDocument/2006/relationships" xmlns:p="http://schemas.openxmlformats.org/presentationml/2006/main">
-  <p:cSld>
-    <p:bg>
-      <p:bgPr>
-        <a:solidFill>
-          <a:schemeClr val="tx1">
-            <a:lumMod val="50000"/>
-            <a:lumOff val="50000"/>
-          </a:schemeClr>
-        </a:solidFill>
-        <a:effectLst/>
-      </p:bgPr>
-    </p:bg>
-    <p:spTree>
-      <p:nvGrpSpPr>
-        <p:cNvPr id="1" name="">
-          <a:extLst>
-            <a:ext uri="{FF2B5EF4-FFF2-40B4-BE49-F238E27FC236}">
-              <a16:creationId xmlns:a16="http://schemas.microsoft.com/office/drawing/2014/main" id="{A427084B-3150-1C7F-F74D-4BAE317D36C4}"/>
-            </a:ext>
-          </a:extLst>
-        </p:cNvPr>
-        <p:cNvGrpSpPr/>
-        <p:nvPr/>
-      </p:nvGrpSpPr>
-      <p:grpSpPr>
-        <a:xfrm>
-          <a:off x="0" y="0"/>
-          <a:ext cx="0" cy="0"/>
-          <a:chOff x="0" y="0"/>
-          <a:chExt cx="0" cy="0"/>
-        </a:xfrm>
-      </p:grpSpPr>
-      <p:sp>
-        <p:nvSpPr>
-          <p:cNvPr id="4" name="文本框 3">
-            <a:extLst>
-              <a:ext uri="{FF2B5EF4-FFF2-40B4-BE49-F238E27FC236}">
-                <a16:creationId xmlns:a16="http://schemas.microsoft.com/office/drawing/2014/main" id="{AEB1393A-7D39-1D2A-24CA-38D68B8FA79B}"/>
-              </a:ext>
-            </a:extLst>
-          </p:cNvPr>
-          <p:cNvSpPr txBox="1"/>
-          <p:nvPr/>
-        </p:nvSpPr>
-        <p:spPr>
-          <a:xfrm>
-            <a:off x="2729049" y="1838697"/>
-            <a:ext cx="6733902" cy="923330"/>
-          </a:xfrm>
-          <a:prstGeom prst="rect">
-            <a:avLst/>
-          </a:prstGeom>
-          <a:noFill/>
-        </p:spPr>
-        <p:txBody>
-          <a:bodyPr wrap="square" rtlCol="0">
-            <a:spAutoFit/>
-          </a:bodyPr>
-          <a:lstStyle/>
-          <a:p>
-            <a:pPr marL="0" marR="0" lvl="0" indent="0" algn="ctr" defTabSz="914400" rtl="0" eaLnBrk="1" fontAlgn="auto" latinLnBrk="0" hangingPunct="1">
-              <a:lnSpc>
-                <a:spcPct val="100000"/>
-              </a:lnSpc>
-              <a:spcBef>
-                <a:spcPts val="0"/>
-              </a:spcBef>
-              <a:spcAft>
-                <a:spcPts val="0"/>
-              </a:spcAft>
-              <a:buClrTx/>
-              <a:buSzTx/>
-              <a:buFontTx/>
-              <a:buNone/>
-              <a:tabLst/>
-              <a:defRPr/>
-            </a:pPr>
-            <a:r>
-              <a:rPr kumimoji="0" lang="zh-CN" altLang="en-US" sz="5400" b="0" i="0" u="none" strike="noStrike" kern="1200" cap="none" spc="0" normalizeH="0" baseline="0" noProof="0" dirty="0">
-                <a:ln>
-                  <a:noFill/>
-                </a:ln>
-                <a:solidFill>
-                  <a:prstClr val="black"/>
-                </a:solidFill>
-                <a:effectLst/>
-                <a:uLnTx/>
-                <a:uFillTx/>
-                <a:latin typeface="楷体" panose="02010609060101010101" pitchFamily="49" charset="-122"/>
-                <a:ea typeface="楷体" panose="02010609060101010101" pitchFamily="49" charset="-122"/>
-                <a:cs typeface="+mn-cs"/>
-              </a:rPr>
-              <a:t>实验结束</a:t>
-            </a:r>
-          </a:p>
-        </p:txBody>
-      </p:sp>
-      <p:sp>
-        <p:nvSpPr>
-          <p:cNvPr id="2" name="矩形: 圆角 1">
-            <a:extLst>
-              <a:ext uri="{FF2B5EF4-FFF2-40B4-BE49-F238E27FC236}">
-                <a16:creationId xmlns:a16="http://schemas.microsoft.com/office/drawing/2014/main" id="{B2860658-4437-1B56-404E-1212D111CF54}"/>
-              </a:ext>
-            </a:extLst>
-          </p:cNvPr>
-          <p:cNvSpPr/>
-          <p:nvPr/>
-        </p:nvSpPr>
-        <p:spPr>
-          <a:xfrm>
-            <a:off x="9255037" y="6115676"/>
-            <a:ext cx="2481943" cy="509451"/>
-          </a:xfrm>
-          <a:prstGeom prst="roundRect">
-            <a:avLst/>
-          </a:prstGeom>
-          <a:solidFill>
-            <a:schemeClr val="tx1"/>
-          </a:solidFill>
-          <a:ln>
-            <a:noFill/>
-          </a:ln>
-          <a:scene3d>
-            <a:camera prst="orthographicFront"/>
-            <a:lightRig rig="threePt" dir="t"/>
-          </a:scene3d>
-          <a:sp3d>
-            <a:bevelT/>
-          </a:sp3d>
-        </p:spPr>
-        <p:style>
-          <a:lnRef idx="2">
-            <a:schemeClr val="accent1">
-              <a:shade val="15000"/>
-            </a:schemeClr>
-          </a:lnRef>
-          <a:fillRef idx="1">
-            <a:schemeClr val="accent1"/>
-          </a:fillRef>
-          <a:effectRef idx="0">
-            <a:schemeClr val="accent1"/>
-          </a:effectRef>
-          <a:fontRef idx="minor">
-            <a:schemeClr val="lt1"/>
-          </a:fontRef>
-        </p:style>
-        <p:txBody>
-          <a:bodyPr rtlCol="0" anchor="ctr"/>
-          <a:lstStyle/>
-          <a:p>
-            <a:pPr marL="0" marR="0" lvl="0" indent="0" algn="ctr" defTabSz="914400" rtl="0" eaLnBrk="1" fontAlgn="auto" latinLnBrk="0" hangingPunct="1">
-              <a:lnSpc>
-                <a:spcPct val="100000"/>
-              </a:lnSpc>
-              <a:spcBef>
-                <a:spcPts val="0"/>
-              </a:spcBef>
-              <a:spcAft>
-                <a:spcPts val="0"/>
-              </a:spcAft>
-              <a:buClrTx/>
-              <a:buSzTx/>
-              <a:buFontTx/>
-              <a:buNone/>
-              <a:tabLst/>
-              <a:defRPr/>
-            </a:pPr>
-            <a:r>
-              <a:rPr kumimoji="0" lang="en-US" altLang="zh-CN" sz="1800" b="1" i="0" u="none" strike="noStrike" kern="1200" cap="none" spc="0" normalizeH="0" baseline="0" noProof="0" dirty="0">
-                <a:ln>
-                  <a:noFill/>
-                </a:ln>
-                <a:solidFill>
-                  <a:prstClr val="white"/>
-                </a:solidFill>
-                <a:effectLst/>
-                <a:uLnTx/>
-                <a:uFillTx/>
-                <a:latin typeface="等线" panose="02110004020202020204"/>
-                <a:ea typeface="等线" panose="02010600030101010101" pitchFamily="2" charset="-122"/>
-                <a:cs typeface="+mn-cs"/>
-              </a:rPr>
-              <a:t>space</a:t>
-            </a:r>
-            <a:endParaRPr kumimoji="0" lang="zh-CN" altLang="en-US" sz="1800" b="1" i="0" u="none" strike="noStrike" kern="1200" cap="none" spc="0" normalizeH="0" baseline="0" noProof="0" dirty="0">
-              <a:ln>
-                <a:noFill/>
-              </a:ln>
-              <a:solidFill>
-                <a:prstClr val="white"/>
-              </a:solidFill>
-              <a:effectLst/>
-              <a:uLnTx/>
-              <a:uFillTx/>
-              <a:latin typeface="等线" panose="02110004020202020204"/>
-              <a:ea typeface="等线" panose="02010600030101010101" pitchFamily="2" charset="-122"/>
-              <a:cs typeface="+mn-cs"/>
-            </a:endParaRPr>
-          </a:p>
-        </p:txBody>
-      </p:sp>
-      <p:sp>
-        <p:nvSpPr>
-          <p:cNvPr id="3" name="文本框 2">
-            <a:extLst>
-              <a:ext uri="{FF2B5EF4-FFF2-40B4-BE49-F238E27FC236}">
-                <a16:creationId xmlns:a16="http://schemas.microsoft.com/office/drawing/2014/main" id="{46C4F210-0D1C-9084-F1CF-A2A4D206FC1B}"/>
-              </a:ext>
-            </a:extLst>
-          </p:cNvPr>
-          <p:cNvSpPr txBox="1"/>
-          <p:nvPr/>
-        </p:nvSpPr>
-        <p:spPr>
-          <a:xfrm>
-            <a:off x="8863151" y="5523102"/>
-            <a:ext cx="3132908" cy="523220"/>
-          </a:xfrm>
-          <a:prstGeom prst="rect">
-            <a:avLst/>
-          </a:prstGeom>
-          <a:noFill/>
-        </p:spPr>
-        <p:txBody>
-          <a:bodyPr wrap="square">
-            <a:spAutoFit/>
-          </a:bodyPr>
-          <a:lstStyle/>
-          <a:p>
-            <a:pPr marL="0" marR="0" lvl="0" indent="0" algn="ctr" defTabSz="914400" rtl="0" eaLnBrk="1" fontAlgn="auto" latinLnBrk="0" hangingPunct="1">
-              <a:lnSpc>
-                <a:spcPct val="100000"/>
-              </a:lnSpc>
-              <a:spcBef>
-                <a:spcPts val="0"/>
-              </a:spcBef>
-              <a:spcAft>
-                <a:spcPts val="0"/>
-              </a:spcAft>
-              <a:buClrTx/>
-              <a:buSzTx/>
-              <a:buFontTx/>
-              <a:buNone/>
-              <a:tabLst/>
-              <a:defRPr/>
-            </a:pPr>
-            <a:r>
-              <a:rPr kumimoji="0" lang="zh-CN" altLang="en-US" sz="2800" b="0" i="0" u="none" strike="noStrike" kern="1200" cap="none" spc="0" normalizeH="0" baseline="0" noProof="0" dirty="0">
-                <a:ln>
-                  <a:noFill/>
-                </a:ln>
-                <a:solidFill>
-                  <a:prstClr val="black"/>
-                </a:solidFill>
-                <a:effectLst/>
-                <a:uLnTx/>
-                <a:uFillTx/>
-                <a:latin typeface="楷体" panose="02010609060101010101" pitchFamily="49" charset="-122"/>
-                <a:ea typeface="楷体" panose="02010609060101010101" pitchFamily="49" charset="-122"/>
-                <a:cs typeface="+mn-cs"/>
-              </a:rPr>
-              <a:t>按“</a:t>
-            </a:r>
-            <a:r>
-              <a:rPr kumimoji="0" lang="zh-CN" altLang="en-US" sz="2800" b="1" i="0" u="sng" strike="noStrike" kern="1200" cap="none" spc="0" normalizeH="0" baseline="0" noProof="0" dirty="0">
-                <a:ln>
-                  <a:noFill/>
-                </a:ln>
-                <a:solidFill>
-                  <a:prstClr val="black"/>
-                </a:solidFill>
-                <a:effectLst/>
-                <a:uLnTx/>
-                <a:uFillTx/>
-                <a:latin typeface="楷体" panose="02010609060101010101" pitchFamily="49" charset="-122"/>
-                <a:ea typeface="楷体" panose="02010609060101010101" pitchFamily="49" charset="-122"/>
-                <a:cs typeface="+mn-cs"/>
-              </a:rPr>
-              <a:t>空格键</a:t>
-            </a:r>
-            <a:r>
-              <a:rPr kumimoji="0" lang="zh-CN" altLang="en-US" sz="2800" b="0" i="0" u="none" strike="noStrike" kern="1200" cap="none" spc="0" normalizeH="0" baseline="0" noProof="0" dirty="0">
-                <a:ln>
-                  <a:noFill/>
-                </a:ln>
-                <a:solidFill>
-                  <a:prstClr val="black"/>
-                </a:solidFill>
-                <a:effectLst/>
-                <a:uLnTx/>
-                <a:uFillTx/>
-                <a:latin typeface="楷体" panose="02010609060101010101" pitchFamily="49" charset="-122"/>
-                <a:ea typeface="楷体" panose="02010609060101010101" pitchFamily="49" charset="-122"/>
-                <a:cs typeface="+mn-cs"/>
-              </a:rPr>
-              <a:t>”</a:t>
-            </a:r>
-            <a:r>
-              <a:rPr lang="zh-CN" altLang="en-US" sz="2800" b="1" dirty="0">
-                <a:solidFill>
-                  <a:srgbClr val="FF0000"/>
-                </a:solidFill>
-                <a:latin typeface="黑体" panose="02010609060101010101" pitchFamily="49" charset="-122"/>
-                <a:ea typeface="黑体" panose="02010609060101010101" pitchFamily="49" charset="-122"/>
-              </a:rPr>
-              <a:t>退出</a:t>
-            </a:r>
-            <a:endParaRPr kumimoji="0" lang="zh-CN" altLang="en-US" sz="1200" b="1" i="0" u="none" strike="noStrike" kern="1200" cap="none" spc="0" normalizeH="0" baseline="0" noProof="0" dirty="0">
-              <a:ln>
-                <a:noFill/>
-              </a:ln>
-              <a:solidFill>
-                <a:srgbClr val="FF0000"/>
-              </a:solidFill>
-              <a:effectLst/>
-              <a:uLnTx/>
-              <a:uFillTx/>
-              <a:latin typeface="黑体" panose="02010609060101010101" pitchFamily="49" charset="-122"/>
-              <a:ea typeface="黑体" panose="02010609060101010101" pitchFamily="49" charset="-122"/>
-              <a:cs typeface="+mn-cs"/>
-            </a:endParaRPr>
-          </a:p>
-        </p:txBody>
-      </p:sp>
-      <p:sp>
-        <p:nvSpPr>
-          <p:cNvPr id="8" name="文本框 7">
-            <a:extLst>
-              <a:ext uri="{FF2B5EF4-FFF2-40B4-BE49-F238E27FC236}">
-                <a16:creationId xmlns:a16="http://schemas.microsoft.com/office/drawing/2014/main" id="{AF19A122-95BA-A84C-FFC0-D6641F039786}"/>
-              </a:ext>
-            </a:extLst>
-          </p:cNvPr>
-          <p:cNvSpPr txBox="1"/>
-          <p:nvPr/>
-        </p:nvSpPr>
-        <p:spPr>
-          <a:xfrm>
-            <a:off x="2729049" y="3310939"/>
-            <a:ext cx="6733902" cy="923330"/>
-          </a:xfrm>
-          <a:prstGeom prst="rect">
-            <a:avLst/>
-          </a:prstGeom>
-          <a:noFill/>
-        </p:spPr>
-        <p:txBody>
-          <a:bodyPr wrap="square" rtlCol="0">
-            <a:spAutoFit/>
-          </a:bodyPr>
-          <a:lstStyle/>
-          <a:p>
-            <a:pPr marL="0" marR="0" lvl="0" indent="0" algn="ctr" defTabSz="914400" rtl="0" eaLnBrk="1" fontAlgn="auto" latinLnBrk="0" hangingPunct="1">
-              <a:lnSpc>
-                <a:spcPct val="100000"/>
-              </a:lnSpc>
-              <a:spcBef>
-                <a:spcPts val="0"/>
-              </a:spcBef>
-              <a:spcAft>
-                <a:spcPts val="0"/>
-              </a:spcAft>
-              <a:buClrTx/>
-              <a:buSzTx/>
-              <a:buFontTx/>
-              <a:buNone/>
-              <a:tabLst/>
-              <a:defRPr/>
-            </a:pPr>
-            <a:r>
-              <a:rPr lang="zh-CN" altLang="en-US" sz="5400" dirty="0">
-                <a:solidFill>
-                  <a:prstClr val="black"/>
-                </a:solidFill>
-                <a:latin typeface="楷体" panose="02010609060101010101" pitchFamily="49" charset="-122"/>
-                <a:ea typeface="楷体" panose="02010609060101010101" pitchFamily="49" charset="-122"/>
-              </a:rPr>
-              <a:t>感谢您的参与</a:t>
-            </a:r>
-            <a:endParaRPr kumimoji="0" lang="zh-CN" altLang="en-US" sz="5400" b="0" i="0" u="none" strike="noStrike" kern="1200" cap="none" spc="0" normalizeH="0" baseline="0" noProof="0" dirty="0">
-              <a:ln>
-                <a:noFill/>
-              </a:ln>
-              <a:solidFill>
-                <a:prstClr val="black"/>
-              </a:solidFill>
-              <a:effectLst/>
-              <a:uLnTx/>
-              <a:uFillTx/>
-              <a:latin typeface="楷体" panose="02010609060101010101" pitchFamily="49" charset="-122"/>
-              <a:ea typeface="楷体" panose="02010609060101010101" pitchFamily="49" charset="-122"/>
-              <a:cs typeface="+mn-cs"/>
-            </a:endParaRPr>
-          </a:p>
-        </p:txBody>
-      </p:sp>
-    </p:spTree>
-    <p:extLst>
-      <p:ext uri="{BB962C8B-B14F-4D97-AF65-F5344CB8AC3E}">
-        <p14:creationId xmlns:p14="http://schemas.microsoft.com/office/powerpoint/2010/main" val="3374787170"/>
       </p:ext>
     </p:extLst>
   </p:cSld>
@@ -10539,6 +13030,418 @@
     <p:extLst>
       <p:ext uri="{BB962C8B-B14F-4D97-AF65-F5344CB8AC3E}">
         <p14:creationId xmlns:p14="http://schemas.microsoft.com/office/powerpoint/2010/main" val="2360407619"/>
+      </p:ext>
+    </p:extLst>
+  </p:cSld>
+  <p:clrMapOvr>
+    <a:masterClrMapping/>
+  </p:clrMapOvr>
+</p:sld>
+</file>
+
+<file path=ppt/slides/slide20.xml><?xml version="1.0" encoding="utf-8"?>
+<p:sld xmlns:a="http://schemas.openxmlformats.org/drawingml/2006/main" xmlns:r="http://schemas.openxmlformats.org/officeDocument/2006/relationships" xmlns:p="http://schemas.openxmlformats.org/presentationml/2006/main">
+  <p:cSld>
+    <p:bg>
+      <p:bgPr>
+        <a:solidFill>
+          <a:schemeClr val="tx1">
+            <a:lumMod val="50000"/>
+            <a:lumOff val="50000"/>
+          </a:schemeClr>
+        </a:solidFill>
+        <a:effectLst/>
+      </p:bgPr>
+    </p:bg>
+    <p:spTree>
+      <p:nvGrpSpPr>
+        <p:cNvPr id="1" name="">
+          <a:extLst>
+            <a:ext uri="{FF2B5EF4-FFF2-40B4-BE49-F238E27FC236}">
+              <a16:creationId xmlns:a16="http://schemas.microsoft.com/office/drawing/2014/main" id="{A427084B-3150-1C7F-F74D-4BAE317D36C4}"/>
+            </a:ext>
+          </a:extLst>
+        </p:cNvPr>
+        <p:cNvGrpSpPr/>
+        <p:nvPr/>
+      </p:nvGrpSpPr>
+      <p:grpSpPr>
+        <a:xfrm>
+          <a:off x="0" y="0"/>
+          <a:ext cx="0" cy="0"/>
+          <a:chOff x="0" y="0"/>
+          <a:chExt cx="0" cy="0"/>
+        </a:xfrm>
+      </p:grpSpPr>
+      <p:sp>
+        <p:nvSpPr>
+          <p:cNvPr id="4" name="文本框 3">
+            <a:extLst>
+              <a:ext uri="{FF2B5EF4-FFF2-40B4-BE49-F238E27FC236}">
+                <a16:creationId xmlns:a16="http://schemas.microsoft.com/office/drawing/2014/main" id="{AEB1393A-7D39-1D2A-24CA-38D68B8FA79B}"/>
+              </a:ext>
+            </a:extLst>
+          </p:cNvPr>
+          <p:cNvSpPr txBox="1"/>
+          <p:nvPr/>
+        </p:nvSpPr>
+        <p:spPr>
+          <a:xfrm>
+            <a:off x="2729049" y="1838697"/>
+            <a:ext cx="6733902" cy="923330"/>
+          </a:xfrm>
+          <a:prstGeom prst="rect">
+            <a:avLst/>
+          </a:prstGeom>
+          <a:noFill/>
+        </p:spPr>
+        <p:txBody>
+          <a:bodyPr wrap="square" rtlCol="0">
+            <a:spAutoFit/>
+          </a:bodyPr>
+          <a:lstStyle/>
+          <a:p>
+            <a:pPr marL="0" marR="0" lvl="0" indent="0" algn="ctr" defTabSz="914400" rtl="0" eaLnBrk="1" fontAlgn="auto" latinLnBrk="0" hangingPunct="1">
+              <a:lnSpc>
+                <a:spcPct val="100000"/>
+              </a:lnSpc>
+              <a:spcBef>
+                <a:spcPts val="0"/>
+              </a:spcBef>
+              <a:spcAft>
+                <a:spcPts val="0"/>
+              </a:spcAft>
+              <a:buClrTx/>
+              <a:buSzTx/>
+              <a:buFontTx/>
+              <a:buNone/>
+              <a:tabLst/>
+              <a:defRPr/>
+            </a:pPr>
+            <a:r>
+              <a:rPr kumimoji="0" lang="zh-CN" altLang="en-US" sz="5400" b="0" i="0" u="none" strike="noStrike" kern="1200" cap="none" spc="0" normalizeH="0" baseline="0" noProof="0" dirty="0">
+                <a:ln>
+                  <a:noFill/>
+                </a:ln>
+                <a:solidFill>
+                  <a:prstClr val="black"/>
+                </a:solidFill>
+                <a:effectLst/>
+                <a:uLnTx/>
+                <a:uFillTx/>
+                <a:latin typeface="楷体" panose="02010609060101010101" pitchFamily="49" charset="-122"/>
+                <a:ea typeface="楷体" panose="02010609060101010101" pitchFamily="49" charset="-122"/>
+                <a:cs typeface="+mn-cs"/>
+              </a:rPr>
+              <a:t>实验结束</a:t>
+            </a:r>
+          </a:p>
+        </p:txBody>
+      </p:sp>
+      <p:sp>
+        <p:nvSpPr>
+          <p:cNvPr id="2" name="矩形: 圆角 1">
+            <a:extLst>
+              <a:ext uri="{FF2B5EF4-FFF2-40B4-BE49-F238E27FC236}">
+                <a16:creationId xmlns:a16="http://schemas.microsoft.com/office/drawing/2014/main" id="{B2860658-4437-1B56-404E-1212D111CF54}"/>
+              </a:ext>
+            </a:extLst>
+          </p:cNvPr>
+          <p:cNvSpPr/>
+          <p:nvPr/>
+        </p:nvSpPr>
+        <p:spPr>
+          <a:xfrm>
+            <a:off x="9255037" y="6115676"/>
+            <a:ext cx="2481943" cy="509451"/>
+          </a:xfrm>
+          <a:prstGeom prst="roundRect">
+            <a:avLst/>
+          </a:prstGeom>
+          <a:solidFill>
+            <a:schemeClr val="tx1"/>
+          </a:solidFill>
+          <a:ln>
+            <a:noFill/>
+          </a:ln>
+          <a:scene3d>
+            <a:camera prst="orthographicFront"/>
+            <a:lightRig rig="threePt" dir="t"/>
+          </a:scene3d>
+          <a:sp3d>
+            <a:bevelT/>
+          </a:sp3d>
+        </p:spPr>
+        <p:style>
+          <a:lnRef idx="2">
+            <a:schemeClr val="accent1">
+              <a:shade val="15000"/>
+            </a:schemeClr>
+          </a:lnRef>
+          <a:fillRef idx="1">
+            <a:schemeClr val="accent1"/>
+          </a:fillRef>
+          <a:effectRef idx="0">
+            <a:schemeClr val="accent1"/>
+          </a:effectRef>
+          <a:fontRef idx="minor">
+            <a:schemeClr val="lt1"/>
+          </a:fontRef>
+        </p:style>
+        <p:txBody>
+          <a:bodyPr rtlCol="0" anchor="ctr"/>
+          <a:lstStyle/>
+          <a:p>
+            <a:pPr marL="0" marR="0" lvl="0" indent="0" algn="ctr" defTabSz="914400" rtl="0" eaLnBrk="1" fontAlgn="auto" latinLnBrk="0" hangingPunct="1">
+              <a:lnSpc>
+                <a:spcPct val="100000"/>
+              </a:lnSpc>
+              <a:spcBef>
+                <a:spcPts val="0"/>
+              </a:spcBef>
+              <a:spcAft>
+                <a:spcPts val="0"/>
+              </a:spcAft>
+              <a:buClrTx/>
+              <a:buSzTx/>
+              <a:buFontTx/>
+              <a:buNone/>
+              <a:tabLst/>
+              <a:defRPr/>
+            </a:pPr>
+            <a:r>
+              <a:rPr kumimoji="0" lang="en-US" altLang="zh-CN" sz="1800" b="1" i="0" u="none" strike="noStrike" kern="1200" cap="none" spc="0" normalizeH="0" baseline="0" noProof="0" dirty="0">
+                <a:ln>
+                  <a:noFill/>
+                </a:ln>
+                <a:solidFill>
+                  <a:prstClr val="white"/>
+                </a:solidFill>
+                <a:effectLst/>
+                <a:uLnTx/>
+                <a:uFillTx/>
+                <a:latin typeface="等线" panose="02110004020202020204"/>
+                <a:ea typeface="等线" panose="02010600030101010101" pitchFamily="2" charset="-122"/>
+                <a:cs typeface="+mn-cs"/>
+              </a:rPr>
+              <a:t>space</a:t>
+            </a:r>
+            <a:endParaRPr kumimoji="0" lang="zh-CN" altLang="en-US" sz="1800" b="1" i="0" u="none" strike="noStrike" kern="1200" cap="none" spc="0" normalizeH="0" baseline="0" noProof="0" dirty="0">
+              <a:ln>
+                <a:noFill/>
+              </a:ln>
+              <a:solidFill>
+                <a:prstClr val="white"/>
+              </a:solidFill>
+              <a:effectLst/>
+              <a:uLnTx/>
+              <a:uFillTx/>
+              <a:latin typeface="等线" panose="02110004020202020204"/>
+              <a:ea typeface="等线" panose="02010600030101010101" pitchFamily="2" charset="-122"/>
+              <a:cs typeface="+mn-cs"/>
+            </a:endParaRPr>
+          </a:p>
+        </p:txBody>
+      </p:sp>
+      <p:sp>
+        <p:nvSpPr>
+          <p:cNvPr id="3" name="文本框 2">
+            <a:extLst>
+              <a:ext uri="{FF2B5EF4-FFF2-40B4-BE49-F238E27FC236}">
+                <a16:creationId xmlns:a16="http://schemas.microsoft.com/office/drawing/2014/main" id="{46C4F210-0D1C-9084-F1CF-A2A4D206FC1B}"/>
+              </a:ext>
+            </a:extLst>
+          </p:cNvPr>
+          <p:cNvSpPr txBox="1"/>
+          <p:nvPr/>
+        </p:nvSpPr>
+        <p:spPr>
+          <a:xfrm>
+            <a:off x="8863151" y="5523102"/>
+            <a:ext cx="3132908" cy="523220"/>
+          </a:xfrm>
+          <a:prstGeom prst="rect">
+            <a:avLst/>
+          </a:prstGeom>
+          <a:noFill/>
+        </p:spPr>
+        <p:txBody>
+          <a:bodyPr wrap="square">
+            <a:spAutoFit/>
+          </a:bodyPr>
+          <a:lstStyle/>
+          <a:p>
+            <a:pPr marL="0" marR="0" lvl="0" indent="0" algn="ctr" defTabSz="914400" rtl="0" eaLnBrk="1" fontAlgn="auto" latinLnBrk="0" hangingPunct="1">
+              <a:lnSpc>
+                <a:spcPct val="100000"/>
+              </a:lnSpc>
+              <a:spcBef>
+                <a:spcPts val="0"/>
+              </a:spcBef>
+              <a:spcAft>
+                <a:spcPts val="0"/>
+              </a:spcAft>
+              <a:buClrTx/>
+              <a:buSzTx/>
+              <a:buFontTx/>
+              <a:buNone/>
+              <a:tabLst/>
+              <a:defRPr/>
+            </a:pPr>
+            <a:r>
+              <a:rPr kumimoji="0" lang="zh-CN" altLang="en-US" sz="2800" b="0" i="0" u="none" strike="noStrike" kern="1200" cap="none" spc="0" normalizeH="0" baseline="0" noProof="0" dirty="0">
+                <a:ln>
+                  <a:noFill/>
+                </a:ln>
+                <a:solidFill>
+                  <a:prstClr val="black"/>
+                </a:solidFill>
+                <a:effectLst/>
+                <a:uLnTx/>
+                <a:uFillTx/>
+                <a:latin typeface="楷体" panose="02010609060101010101" pitchFamily="49" charset="-122"/>
+                <a:ea typeface="楷体" panose="02010609060101010101" pitchFamily="49" charset="-122"/>
+                <a:cs typeface="+mn-cs"/>
+              </a:rPr>
+              <a:t>按“</a:t>
+            </a:r>
+            <a:r>
+              <a:rPr kumimoji="0" lang="zh-CN" altLang="en-US" sz="2800" b="1" i="0" u="sng" strike="noStrike" kern="1200" cap="none" spc="0" normalizeH="0" baseline="0" noProof="0" dirty="0">
+                <a:ln>
+                  <a:noFill/>
+                </a:ln>
+                <a:solidFill>
+                  <a:prstClr val="black"/>
+                </a:solidFill>
+                <a:effectLst/>
+                <a:uLnTx/>
+                <a:uFillTx/>
+                <a:latin typeface="楷体" panose="02010609060101010101" pitchFamily="49" charset="-122"/>
+                <a:ea typeface="楷体" panose="02010609060101010101" pitchFamily="49" charset="-122"/>
+                <a:cs typeface="+mn-cs"/>
+              </a:rPr>
+              <a:t>空格键</a:t>
+            </a:r>
+            <a:r>
+              <a:rPr kumimoji="0" lang="zh-CN" altLang="en-US" sz="2800" b="0" i="0" u="none" strike="noStrike" kern="1200" cap="none" spc="0" normalizeH="0" baseline="0" noProof="0" dirty="0">
+                <a:ln>
+                  <a:noFill/>
+                </a:ln>
+                <a:solidFill>
+                  <a:prstClr val="black"/>
+                </a:solidFill>
+                <a:effectLst/>
+                <a:uLnTx/>
+                <a:uFillTx/>
+                <a:latin typeface="楷体" panose="02010609060101010101" pitchFamily="49" charset="-122"/>
+                <a:ea typeface="楷体" panose="02010609060101010101" pitchFamily="49" charset="-122"/>
+                <a:cs typeface="+mn-cs"/>
+              </a:rPr>
+              <a:t>”</a:t>
+            </a:r>
+            <a:r>
+              <a:rPr lang="zh-CN" altLang="en-US" sz="2800" b="1" dirty="0">
+                <a:solidFill>
+                  <a:srgbClr val="FF0000"/>
+                </a:solidFill>
+                <a:latin typeface="黑体" panose="02010609060101010101" pitchFamily="49" charset="-122"/>
+                <a:ea typeface="黑体" panose="02010609060101010101" pitchFamily="49" charset="-122"/>
+              </a:rPr>
+              <a:t>退出</a:t>
+            </a:r>
+            <a:endParaRPr kumimoji="0" lang="zh-CN" altLang="en-US" sz="1200" b="1" i="0" u="none" strike="noStrike" kern="1200" cap="none" spc="0" normalizeH="0" baseline="0" noProof="0" dirty="0">
+              <a:ln>
+                <a:noFill/>
+              </a:ln>
+              <a:solidFill>
+                <a:srgbClr val="FF0000"/>
+              </a:solidFill>
+              <a:effectLst/>
+              <a:uLnTx/>
+              <a:uFillTx/>
+              <a:latin typeface="黑体" panose="02010609060101010101" pitchFamily="49" charset="-122"/>
+              <a:ea typeface="黑体" panose="02010609060101010101" pitchFamily="49" charset="-122"/>
+              <a:cs typeface="+mn-cs"/>
+            </a:endParaRPr>
+          </a:p>
+        </p:txBody>
+      </p:sp>
+      <p:sp>
+        <p:nvSpPr>
+          <p:cNvPr id="8" name="文本框 7">
+            <a:extLst>
+              <a:ext uri="{FF2B5EF4-FFF2-40B4-BE49-F238E27FC236}">
+                <a16:creationId xmlns:a16="http://schemas.microsoft.com/office/drawing/2014/main" id="{AF19A122-95BA-A84C-FFC0-D6641F039786}"/>
+              </a:ext>
+            </a:extLst>
+          </p:cNvPr>
+          <p:cNvSpPr txBox="1"/>
+          <p:nvPr/>
+        </p:nvSpPr>
+        <p:spPr>
+          <a:xfrm>
+            <a:off x="2729049" y="3310939"/>
+            <a:ext cx="6733902" cy="923330"/>
+          </a:xfrm>
+          <a:prstGeom prst="rect">
+            <a:avLst/>
+          </a:prstGeom>
+          <a:noFill/>
+        </p:spPr>
+        <p:txBody>
+          <a:bodyPr wrap="square" rtlCol="0">
+            <a:spAutoFit/>
+          </a:bodyPr>
+          <a:lstStyle/>
+          <a:p>
+            <a:pPr marL="0" marR="0" lvl="0" indent="0" algn="ctr" defTabSz="914400" rtl="0" eaLnBrk="1" fontAlgn="auto" latinLnBrk="0" hangingPunct="1">
+              <a:lnSpc>
+                <a:spcPct val="100000"/>
+              </a:lnSpc>
+              <a:spcBef>
+                <a:spcPts val="0"/>
+              </a:spcBef>
+              <a:spcAft>
+                <a:spcPts val="0"/>
+              </a:spcAft>
+              <a:buClrTx/>
+              <a:buSzTx/>
+              <a:buFontTx/>
+              <a:buNone/>
+              <a:tabLst/>
+              <a:defRPr/>
+            </a:pPr>
+            <a:r>
+              <a:rPr lang="zh-CN" altLang="en-US" sz="5400" dirty="0">
+                <a:solidFill>
+                  <a:prstClr val="black"/>
+                </a:solidFill>
+                <a:latin typeface="楷体" panose="02010609060101010101" pitchFamily="49" charset="-122"/>
+                <a:ea typeface="楷体" panose="02010609060101010101" pitchFamily="49" charset="-122"/>
+              </a:rPr>
+              <a:t>感谢您的参与</a:t>
+            </a:r>
+            <a:endParaRPr kumimoji="0" lang="zh-CN" altLang="en-US" sz="5400" b="0" i="0" u="none" strike="noStrike" kern="1200" cap="none" spc="0" normalizeH="0" baseline="0" noProof="0" dirty="0">
+              <a:ln>
+                <a:noFill/>
+              </a:ln>
+              <a:solidFill>
+                <a:prstClr val="black"/>
+              </a:solidFill>
+              <a:effectLst/>
+              <a:uLnTx/>
+              <a:uFillTx/>
+              <a:latin typeface="楷体" panose="02010609060101010101" pitchFamily="49" charset="-122"/>
+              <a:ea typeface="楷体" panose="02010609060101010101" pitchFamily="49" charset="-122"/>
+              <a:cs typeface="+mn-cs"/>
+            </a:endParaRPr>
+          </a:p>
+        </p:txBody>
+      </p:sp>
+    </p:spTree>
+    <p:extLst>
+      <p:ext uri="{BB962C8B-B14F-4D97-AF65-F5344CB8AC3E}">
+        <p14:creationId xmlns:p14="http://schemas.microsoft.com/office/powerpoint/2010/main" val="3374787170"/>
       </p:ext>
     </p:extLst>
   </p:cSld>
@@ -12498,7 +15401,13 @@
     </p:bg>
     <p:spTree>
       <p:nvGrpSpPr>
-        <p:cNvPr id="1" name=""/>
+        <p:cNvPr id="1" name="">
+          <a:extLst>
+            <a:ext uri="{FF2B5EF4-FFF2-40B4-BE49-F238E27FC236}">
+              <a16:creationId xmlns:a16="http://schemas.microsoft.com/office/drawing/2014/main" id="{11F86887-FDAE-5D28-5A83-358A65358553}"/>
+            </a:ext>
+          </a:extLst>
+        </p:cNvPr>
         <p:cNvGrpSpPr/>
         <p:nvPr/>
       </p:nvGrpSpPr>
@@ -12515,7 +15424,7 @@
           <p:cNvPr id="4" name="文本框 3">
             <a:extLst>
               <a:ext uri="{FF2B5EF4-FFF2-40B4-BE49-F238E27FC236}">
-                <a16:creationId xmlns:a16="http://schemas.microsoft.com/office/drawing/2014/main" id="{4EDB04CB-2715-9705-511C-D5A184A7CF22}"/>
+                <a16:creationId xmlns:a16="http://schemas.microsoft.com/office/drawing/2014/main" id="{68189A07-5028-CF59-BD1F-520C9074F568}"/>
               </a:ext>
             </a:extLst>
           </p:cNvPr>
@@ -12538,48 +15447,9 @@
           </a:bodyPr>
           <a:lstStyle/>
           <a:p>
-            <a:pPr algn="ctr"/>
-            <a:r>
-              <a:rPr lang="zh-CN" altLang="en-US" sz="5400" dirty="0">
-                <a:latin typeface="楷体" panose="02010609060101010101" pitchFamily="49" charset="-122"/>
-                <a:ea typeface="楷体" panose="02010609060101010101" pitchFamily="49" charset="-122"/>
-              </a:rPr>
-              <a:t>练习阶段</a:t>
-            </a:r>
-          </a:p>
-        </p:txBody>
-      </p:sp>
-      <p:sp>
-        <p:nvSpPr>
-          <p:cNvPr id="6" name="文本框 5">
-            <a:extLst>
-              <a:ext uri="{FF2B5EF4-FFF2-40B4-BE49-F238E27FC236}">
-                <a16:creationId xmlns:a16="http://schemas.microsoft.com/office/drawing/2014/main" id="{89305019-0EE5-749E-994F-544D1011CE7D}"/>
-              </a:ext>
-            </a:extLst>
-          </p:cNvPr>
-          <p:cNvSpPr txBox="1"/>
-          <p:nvPr/>
-        </p:nvSpPr>
-        <p:spPr>
-          <a:xfrm>
-            <a:off x="1500050" y="1645919"/>
-            <a:ext cx="9714412" cy="755976"/>
-          </a:xfrm>
-          <a:prstGeom prst="rect">
-            <a:avLst/>
-          </a:prstGeom>
-          <a:noFill/>
-        </p:spPr>
-        <p:txBody>
-          <a:bodyPr wrap="square" rtlCol="0">
-            <a:spAutoFit/>
-          </a:bodyPr>
-          <a:lstStyle/>
-          <a:p>
-            <a:pPr marL="685800" marR="0" lvl="0" indent="-685800" algn="l" defTabSz="914400" rtl="0" eaLnBrk="1" fontAlgn="auto" latinLnBrk="0" hangingPunct="1">
+            <a:pPr marL="0" marR="0" lvl="0" indent="0" algn="ctr" defTabSz="914400" rtl="0" eaLnBrk="1" fontAlgn="auto" latinLnBrk="0" hangingPunct="1">
               <a:lnSpc>
-                <a:spcPct val="125000"/>
+                <a:spcPct val="100000"/>
               </a:lnSpc>
               <a:spcBef>
                 <a:spcPts val="0"/>
@@ -12589,29 +15459,13 @@
               </a:spcAft>
               <a:buClrTx/>
               <a:buSzTx/>
-              <a:buFont typeface="Wingdings" panose="05000000000000000000" pitchFamily="2" charset="2"/>
-              <a:buChar char="p"/>
+              <a:buFontTx/>
+              <a:buNone/>
               <a:tabLst/>
               <a:defRPr/>
             </a:pPr>
             <a:r>
-              <a:rPr kumimoji="0" lang="zh-CN" altLang="en-US" sz="4000" b="1" i="0" u="sng" strike="noStrike" kern="1200" cap="none" spc="0" normalizeH="0" baseline="0" noProof="0" dirty="0">
-                <a:ln>
-                  <a:noFill/>
-                </a:ln>
-                <a:solidFill>
-                  <a:prstClr val="black"/>
-                </a:solidFill>
-                <a:effectLst/>
-                <a:uLnTx/>
-                <a:uFillTx/>
-                <a:latin typeface="黑体" panose="02010609060101010101" pitchFamily="49" charset="-122"/>
-                <a:ea typeface="黑体" panose="02010609060101010101" pitchFamily="49" charset="-122"/>
-              </a:rPr>
-              <a:t>盯住</a:t>
-            </a:r>
-            <a:r>
-              <a:rPr kumimoji="0" lang="zh-CN" altLang="en-US" sz="4000" b="0" i="0" u="none" strike="noStrike" kern="1200" cap="none" spc="0" normalizeH="0" baseline="0" noProof="0" dirty="0">
+              <a:rPr kumimoji="0" lang="zh-CN" altLang="en-US" sz="5400" b="0" i="0" u="none" strike="noStrike" kern="1200" cap="none" spc="0" normalizeH="0" baseline="0" noProof="0" dirty="0">
                 <a:ln>
                   <a:noFill/>
                 </a:ln>
@@ -12625,95 +15479,17 @@
                 <a:ea typeface="楷体" panose="02010609060101010101" pitchFamily="49" charset="-122"/>
                 <a:cs typeface="+mn-cs"/>
               </a:rPr>
-              <a:t>黑点按</a:t>
-            </a:r>
-            <a:r>
-              <a:rPr kumimoji="0" lang="zh-CN" altLang="en-US" sz="4000" b="1" i="0" u="sng" strike="noStrike" kern="1200" cap="none" spc="0" normalizeH="0" baseline="0" noProof="0" dirty="0">
-                <a:ln>
-                  <a:noFill/>
-                </a:ln>
-                <a:solidFill>
-                  <a:prstClr val="black"/>
-                </a:solidFill>
-                <a:effectLst/>
-                <a:uLnTx/>
-                <a:uFillTx/>
-                <a:latin typeface="黑体" panose="02010609060101010101" pitchFamily="49" charset="-122"/>
-                <a:ea typeface="黑体" panose="02010609060101010101" pitchFamily="49" charset="-122"/>
-              </a:rPr>
-              <a:t>空格</a:t>
-            </a:r>
-            <a:r>
-              <a:rPr kumimoji="0" lang="zh-CN" altLang="en-US" sz="4000" b="0" i="0" u="none" strike="noStrike" kern="1200" cap="none" spc="0" normalizeH="0" baseline="0" noProof="0" dirty="0">
-                <a:ln>
-                  <a:noFill/>
-                </a:ln>
-                <a:solidFill>
-                  <a:prstClr val="black"/>
-                </a:solidFill>
-                <a:effectLst/>
-                <a:uLnTx/>
-                <a:uFillTx/>
-                <a:latin typeface="楷体" panose="02010609060101010101" pitchFamily="49" charset="-122"/>
-                <a:ea typeface="楷体" panose="02010609060101010101" pitchFamily="49" charset="-122"/>
-                <a:cs typeface="+mn-cs"/>
-              </a:rPr>
-              <a:t>，</a:t>
-            </a:r>
-            <a:r>
-              <a:rPr kumimoji="0" lang="zh-CN" altLang="en-US" sz="4000" b="1" i="0" u="sng" strike="noStrike" kern="1200" cap="none" spc="0" normalizeH="0" baseline="0" noProof="0" dirty="0">
-                <a:ln>
-                  <a:noFill/>
-                </a:ln>
-                <a:solidFill>
-                  <a:prstClr val="black"/>
-                </a:solidFill>
-                <a:effectLst/>
-                <a:uLnTx/>
-                <a:uFillTx/>
-                <a:latin typeface="黑体" panose="02010609060101010101" pitchFamily="49" charset="-122"/>
-                <a:ea typeface="黑体" panose="02010609060101010101" pitchFamily="49" charset="-122"/>
-              </a:rPr>
-              <a:t>自由观察</a:t>
-            </a:r>
-            <a:r>
-              <a:rPr kumimoji="0" lang="zh-CN" altLang="en-US" sz="4000" i="0" strike="noStrike" kern="1200" cap="none" spc="0" normalizeH="0" baseline="0" noProof="0" dirty="0">
-                <a:ln>
-                  <a:noFill/>
-                </a:ln>
-                <a:solidFill>
-                  <a:prstClr val="black"/>
-                </a:solidFill>
-                <a:effectLst/>
-                <a:uLnTx/>
-                <a:uFillTx/>
-                <a:latin typeface="楷体" panose="02010609060101010101" pitchFamily="49" charset="-122"/>
-                <a:ea typeface="楷体" panose="02010609060101010101" pitchFamily="49" charset="-122"/>
-              </a:rPr>
-              <a:t>出现的纹理</a:t>
-            </a:r>
-            <a:endParaRPr kumimoji="0" lang="en-US" altLang="zh-CN" sz="4000" i="0" strike="noStrike" kern="1200" cap="none" spc="0" normalizeH="0" baseline="0" noProof="0" dirty="0">
-              <a:ln>
-                <a:noFill/>
-              </a:ln>
-              <a:solidFill>
-                <a:prstClr val="black"/>
-              </a:solidFill>
-              <a:effectLst/>
-              <a:uLnTx/>
-              <a:uFillTx/>
-              <a:latin typeface="楷体" panose="02010609060101010101" pitchFamily="49" charset="-122"/>
-              <a:ea typeface="楷体" panose="02010609060101010101" pitchFamily="49" charset="-122"/>
-            </a:endParaRPr>
+              <a:t>自由观看任务</a:t>
+            </a:r>
           </a:p>
         </p:txBody>
       </p:sp>
       <p:sp>
         <p:nvSpPr>
-          <p:cNvPr id="8" name="矩形: 圆角 7">
-            <a:extLst>
-              <a:ext uri="{FF2B5EF4-FFF2-40B4-BE49-F238E27FC236}">
-                <a16:creationId xmlns:a16="http://schemas.microsoft.com/office/drawing/2014/main" id="{7A2E032D-AF93-BF4B-1810-0D36A9043BE2}"/>
+          <p:cNvPr id="2" name="矩形: 圆角 1">
+            <a:extLst>
+              <a:ext uri="{FF2B5EF4-FFF2-40B4-BE49-F238E27FC236}">
+                <a16:creationId xmlns:a16="http://schemas.microsoft.com/office/drawing/2014/main" id="{71048BD8-6DCE-FBAA-1570-EC17A11EA407}"/>
               </a:ext>
             </a:extLst>
           </p:cNvPr>
@@ -12762,21 +15538,63 @@
           <a:bodyPr rtlCol="0" anchor="ctr"/>
           <a:lstStyle/>
           <a:p>
-            <a:pPr algn="ctr"/>
-            <a:r>
-              <a:rPr lang="en-US" altLang="zh-CN" b="1" dirty="0"/>
+            <a:pPr marL="0" marR="0" lvl="0" indent="0" algn="ctr" defTabSz="914400" rtl="0" eaLnBrk="1" fontAlgn="auto" latinLnBrk="0" hangingPunct="1">
+              <a:lnSpc>
+                <a:spcPct val="100000"/>
+              </a:lnSpc>
+              <a:spcBef>
+                <a:spcPts val="0"/>
+              </a:spcBef>
+              <a:spcAft>
+                <a:spcPts val="0"/>
+              </a:spcAft>
+              <a:buClrTx/>
+              <a:buSzTx/>
+              <a:buFontTx/>
+              <a:buNone/>
+              <a:tabLst/>
+              <a:defRPr/>
+            </a:pPr>
+            <a:r>
+              <a:rPr kumimoji="0" lang="en-US" altLang="zh-CN" sz="1800" b="1" i="0" u="none" strike="noStrike" kern="1200" cap="none" spc="0" normalizeH="0" baseline="0" noProof="0" dirty="0">
+                <a:ln>
+                  <a:noFill/>
+                </a:ln>
+                <a:solidFill>
+                  <a:prstClr val="white"/>
+                </a:solidFill>
+                <a:effectLst/>
+                <a:uLnTx/>
+                <a:uFillTx/>
+                <a:latin typeface="等线" panose="02110004020202020204"/>
+                <a:ea typeface="等线" panose="02010600030101010101" pitchFamily="2" charset="-122"/>
+                <a:cs typeface="+mn-cs"/>
+              </a:rPr>
               <a:t>space</a:t>
             </a:r>
-            <a:endParaRPr lang="zh-CN" altLang="en-US" b="1" dirty="0"/>
+            <a:endParaRPr kumimoji="0" lang="zh-CN" altLang="en-US" sz="1800" b="1" i="0" u="none" strike="noStrike" kern="1200" cap="none" spc="0" normalizeH="0" baseline="0" noProof="0" dirty="0">
+              <a:ln>
+                <a:noFill/>
+              </a:ln>
+              <a:solidFill>
+                <a:prstClr val="white"/>
+              </a:solidFill>
+              <a:effectLst/>
+              <a:uLnTx/>
+              <a:uFillTx/>
+              <a:latin typeface="等线" panose="02110004020202020204"/>
+              <a:ea typeface="等线" panose="02010600030101010101" pitchFamily="2" charset="-122"/>
+              <a:cs typeface="+mn-cs"/>
+            </a:endParaRPr>
           </a:p>
         </p:txBody>
       </p:sp>
       <p:sp>
         <p:nvSpPr>
-          <p:cNvPr id="9" name="文本框 8">
-            <a:extLst>
-              <a:ext uri="{FF2B5EF4-FFF2-40B4-BE49-F238E27FC236}">
-                <a16:creationId xmlns:a16="http://schemas.microsoft.com/office/drawing/2014/main" id="{5D70BD79-C266-7A80-F5D1-B58B5D1BC795}"/>
+          <p:cNvPr id="3" name="文本框 2">
+            <a:extLst>
+              <a:ext uri="{FF2B5EF4-FFF2-40B4-BE49-F238E27FC236}">
+                <a16:creationId xmlns:a16="http://schemas.microsoft.com/office/drawing/2014/main" id="{1A655ADE-F740-036F-2930-AD5E3E59F73C}"/>
               </a:ext>
             </a:extLst>
           </p:cNvPr>
@@ -12799,7 +15617,23 @@
           </a:bodyPr>
           <a:lstStyle/>
           <a:p>
-            <a:pPr algn="ctr"/>
+            <a:pPr marL="0" marR="0" lvl="0" indent="0" algn="ctr" defTabSz="914400" rtl="0" eaLnBrk="1" fontAlgn="auto" latinLnBrk="0" hangingPunct="1">
+              <a:lnSpc>
+                <a:spcPct val="100000"/>
+              </a:lnSpc>
+              <a:spcBef>
+                <a:spcPts val="0"/>
+              </a:spcBef>
+              <a:spcAft>
+                <a:spcPts val="0"/>
+              </a:spcAft>
+              <a:buClrTx/>
+              <a:buSzTx/>
+              <a:buFontTx/>
+              <a:buNone/>
+              <a:tabLst/>
+              <a:defRPr/>
+            </a:pPr>
             <a:r>
               <a:rPr kumimoji="0" lang="zh-CN" altLang="en-US" sz="2800" b="0" i="0" u="none" strike="noStrike" kern="1200" cap="none" spc="0" normalizeH="0" baseline="0" noProof="0" dirty="0">
                 <a:ln>
@@ -12849,16 +15683,140 @@
                 <a:ea typeface="楷体" panose="02010609060101010101" pitchFamily="49" charset="-122"/>
                 <a:cs typeface="+mn-cs"/>
               </a:rPr>
-              <a:t>”继续</a:t>
-            </a:r>
-            <a:endParaRPr lang="zh-CN" altLang="en-US" sz="1200" dirty="0"/>
+              <a:t>”</a:t>
+            </a:r>
+            <a:r>
+              <a:rPr kumimoji="0" lang="zh-CN" altLang="en-US" sz="2800" b="1" i="0" u="none" strike="noStrike" kern="1200" cap="none" spc="0" normalizeH="0" baseline="0" noProof="0" dirty="0">
+                <a:ln>
+                  <a:noFill/>
+                </a:ln>
+                <a:solidFill>
+                  <a:srgbClr val="FF0000"/>
+                </a:solidFill>
+                <a:effectLst/>
+                <a:uLnTx/>
+                <a:uFillTx/>
+                <a:latin typeface="黑体" panose="02010609060101010101" pitchFamily="49" charset="-122"/>
+                <a:ea typeface="黑体" panose="02010609060101010101" pitchFamily="49" charset="-122"/>
+              </a:rPr>
+              <a:t>开始</a:t>
+            </a:r>
+            <a:endParaRPr kumimoji="0" lang="zh-CN" altLang="en-US" sz="1200" b="1" i="0" u="none" strike="noStrike" kern="1200" cap="none" spc="0" normalizeH="0" baseline="0" noProof="0" dirty="0">
+              <a:ln>
+                <a:noFill/>
+              </a:ln>
+              <a:solidFill>
+                <a:srgbClr val="FF0000"/>
+              </a:solidFill>
+              <a:effectLst/>
+              <a:uLnTx/>
+              <a:uFillTx/>
+              <a:latin typeface="黑体" panose="02010609060101010101" pitchFamily="49" charset="-122"/>
+              <a:ea typeface="黑体" panose="02010609060101010101" pitchFamily="49" charset="-122"/>
+            </a:endParaRPr>
+          </a:p>
+        </p:txBody>
+      </p:sp>
+      <p:sp>
+        <p:nvSpPr>
+          <p:cNvPr id="5" name="文本框 4">
+            <a:extLst>
+              <a:ext uri="{FF2B5EF4-FFF2-40B4-BE49-F238E27FC236}">
+                <a16:creationId xmlns:a16="http://schemas.microsoft.com/office/drawing/2014/main" id="{035590A3-AB2D-D1BE-3A23-15C891C6DA60}"/>
+              </a:ext>
+            </a:extLst>
+          </p:cNvPr>
+          <p:cNvSpPr txBox="1"/>
+          <p:nvPr/>
+        </p:nvSpPr>
+        <p:spPr>
+          <a:xfrm>
+            <a:off x="1452985" y="2547984"/>
+            <a:ext cx="9714412" cy="1525418"/>
+          </a:xfrm>
+          <a:prstGeom prst="rect">
+            <a:avLst/>
+          </a:prstGeom>
+          <a:noFill/>
+        </p:spPr>
+        <p:txBody>
+          <a:bodyPr wrap="square" rtlCol="0">
+            <a:spAutoFit/>
+          </a:bodyPr>
+          <a:lstStyle/>
+          <a:p>
+            <a:pPr marL="685800" lvl="0" indent="-685800">
+              <a:lnSpc>
+                <a:spcPct val="125000"/>
+              </a:lnSpc>
+              <a:buFont typeface="Wingdings" panose="05000000000000000000" pitchFamily="2" charset="2"/>
+              <a:buChar char="p"/>
+              <a:defRPr/>
+            </a:pPr>
+            <a:r>
+              <a:rPr lang="zh-CN" altLang="en-US" sz="4000" dirty="0">
+                <a:solidFill>
+                  <a:prstClr val="black"/>
+                </a:solidFill>
+                <a:latin typeface="楷体" panose="02010609060101010101" pitchFamily="49" charset="-122"/>
+                <a:ea typeface="楷体" panose="02010609060101010101" pitchFamily="49" charset="-122"/>
+              </a:rPr>
+              <a:t>首先，</a:t>
+            </a:r>
+            <a:r>
+              <a:rPr lang="zh-CN" altLang="en-US" sz="4000" b="1" u="sng" dirty="0">
+                <a:solidFill>
+                  <a:prstClr val="black"/>
+                </a:solidFill>
+                <a:latin typeface="黑体" panose="02010609060101010101" pitchFamily="49" charset="-122"/>
+                <a:ea typeface="黑体" panose="02010609060101010101" pitchFamily="49" charset="-122"/>
+              </a:rPr>
+              <a:t>请盯住</a:t>
+            </a:r>
+            <a:r>
+              <a:rPr lang="zh-CN" altLang="en-US" sz="4000" dirty="0">
+                <a:solidFill>
+                  <a:prstClr val="black"/>
+                </a:solidFill>
+                <a:latin typeface="楷体" panose="02010609060101010101" pitchFamily="49" charset="-122"/>
+                <a:ea typeface="楷体" panose="02010609060101010101" pitchFamily="49" charset="-122"/>
+              </a:rPr>
+              <a:t>中央黑圈，按</a:t>
+            </a:r>
+            <a:r>
+              <a:rPr lang="zh-CN" altLang="en-US" sz="4000" b="1" u="sng" dirty="0">
+                <a:solidFill>
+                  <a:prstClr val="black"/>
+                </a:solidFill>
+                <a:latin typeface="黑体" panose="02010609060101010101" pitchFamily="49" charset="-122"/>
+                <a:ea typeface="黑体" panose="02010609060101010101" pitchFamily="49" charset="-122"/>
+              </a:rPr>
+              <a:t>空格</a:t>
+            </a:r>
+            <a:r>
+              <a:rPr lang="zh-CN" altLang="en-US" sz="4000" dirty="0">
+                <a:solidFill>
+                  <a:prstClr val="black"/>
+                </a:solidFill>
+                <a:latin typeface="楷体" panose="02010609060101010101" pitchFamily="49" charset="-122"/>
+                <a:ea typeface="楷体" panose="02010609060101010101" pitchFamily="49" charset="-122"/>
+              </a:rPr>
+              <a:t>即可开始一次任务</a:t>
+            </a:r>
+            <a:endParaRPr lang="en-US" altLang="zh-CN" sz="4000" dirty="0">
+              <a:solidFill>
+                <a:prstClr val="black"/>
+              </a:solidFill>
+              <a:latin typeface="楷体" panose="02010609060101010101" pitchFamily="49" charset="-122"/>
+              <a:ea typeface="楷体" panose="02010609060101010101" pitchFamily="49" charset="-122"/>
+            </a:endParaRPr>
           </a:p>
         </p:txBody>
       </p:sp>
     </p:spTree>
     <p:extLst>
       <p:ext uri="{BB962C8B-B14F-4D97-AF65-F5344CB8AC3E}">
-        <p14:creationId xmlns:p14="http://schemas.microsoft.com/office/powerpoint/2010/main" val="4052499401"/>
+        <p14:creationId xmlns:p14="http://schemas.microsoft.com/office/powerpoint/2010/main" val="2644793920"/>
       </p:ext>
     </p:extLst>
   </p:cSld>
@@ -12887,7 +15845,7 @@
         <p:cNvPr id="1" name="">
           <a:extLst>
             <a:ext uri="{FF2B5EF4-FFF2-40B4-BE49-F238E27FC236}">
-              <a16:creationId xmlns:a16="http://schemas.microsoft.com/office/drawing/2014/main" id="{5CAD8C95-8895-357D-700F-23BD971CC610}"/>
+              <a16:creationId xmlns:a16="http://schemas.microsoft.com/office/drawing/2014/main" id="{11F86887-FDAE-5D28-5A83-358A65358553}"/>
             </a:ext>
           </a:extLst>
         </p:cNvPr>
@@ -12907,7 +15865,7 @@
           <p:cNvPr id="4" name="文本框 3">
             <a:extLst>
               <a:ext uri="{FF2B5EF4-FFF2-40B4-BE49-F238E27FC236}">
-                <a16:creationId xmlns:a16="http://schemas.microsoft.com/office/drawing/2014/main" id="{46FE46C2-ED6A-E66D-D19C-FB6F83546E73}"/>
+                <a16:creationId xmlns:a16="http://schemas.microsoft.com/office/drawing/2014/main" id="{68189A07-5028-CF59-BD1F-520C9074F568}"/>
               </a:ext>
             </a:extLst>
           </p:cNvPr>
@@ -12962,7 +15920,7 @@
                 <a:ea typeface="楷体" panose="02010609060101010101" pitchFamily="49" charset="-122"/>
                 <a:cs typeface="+mn-cs"/>
               </a:rPr>
-              <a:t>练习阶段</a:t>
+              <a:t>自由观看任务</a:t>
             </a:r>
           </a:p>
         </p:txBody>
@@ -12972,7 +15930,7 @@
           <p:cNvPr id="6" name="文本框 5">
             <a:extLst>
               <a:ext uri="{FF2B5EF4-FFF2-40B4-BE49-F238E27FC236}">
-                <a16:creationId xmlns:a16="http://schemas.microsoft.com/office/drawing/2014/main" id="{92E78935-2303-B61E-B7B0-1EFBACF86016}"/>
+                <a16:creationId xmlns:a16="http://schemas.microsoft.com/office/drawing/2014/main" id="{511D47E1-58E3-DAD6-86CC-55DD5DE9E0E3}"/>
               </a:ext>
             </a:extLst>
           </p:cNvPr>
@@ -12981,8 +15939,8 @@
         </p:nvSpPr>
         <p:spPr>
           <a:xfrm>
-            <a:off x="1500050" y="1645919"/>
-            <a:ext cx="9714412" cy="1525418"/>
+            <a:off x="1452985" y="2048254"/>
+            <a:ext cx="9714412" cy="2294859"/>
           </a:xfrm>
           <a:prstGeom prst="rect">
             <a:avLst/>
@@ -13004,6 +15962,16 @@
               <a:defRPr/>
             </a:pPr>
             <a:r>
+              <a:rPr lang="zh-CN" altLang="en-US" sz="4000" dirty="0">
+                <a:solidFill>
+                  <a:prstClr val="black"/>
+                </a:solidFill>
+                <a:latin typeface="楷体" panose="02010609060101010101" pitchFamily="49" charset="-122"/>
+                <a:ea typeface="楷体" panose="02010609060101010101" pitchFamily="49" charset="-122"/>
+              </a:rPr>
+              <a:t>按键被识别后，中间的圆点将消失，并出现一个环形花纹，大部分情况下，</a:t>
+            </a:r>
+            <a:r>
               <a:rPr lang="zh-CN" altLang="en-US" sz="4000" b="1" u="sng" dirty="0">
                 <a:solidFill>
                   <a:prstClr val="black"/>
@@ -13011,57 +15979,7 @@
                 <a:latin typeface="黑体" panose="02010609060101010101" pitchFamily="49" charset="-122"/>
                 <a:ea typeface="黑体" panose="02010609060101010101" pitchFamily="49" charset="-122"/>
               </a:rPr>
-              <a:t>盯住</a:t>
-            </a:r>
-            <a:r>
-              <a:rPr lang="zh-CN" altLang="en-US" sz="4000" dirty="0">
-                <a:solidFill>
-                  <a:prstClr val="black"/>
-                </a:solidFill>
-                <a:latin typeface="楷体" panose="02010609060101010101" pitchFamily="49" charset="-122"/>
-                <a:ea typeface="楷体" panose="02010609060101010101" pitchFamily="49" charset="-122"/>
-              </a:rPr>
-              <a:t>黑点按</a:t>
-            </a:r>
-            <a:r>
-              <a:rPr lang="zh-CN" altLang="en-US" sz="4000" b="1" u="sng" dirty="0">
-                <a:solidFill>
-                  <a:prstClr val="black"/>
-                </a:solidFill>
-                <a:latin typeface="黑体" panose="02010609060101010101" pitchFamily="49" charset="-122"/>
-                <a:ea typeface="黑体" panose="02010609060101010101" pitchFamily="49" charset="-122"/>
-              </a:rPr>
-              <a:t>空格</a:t>
-            </a:r>
-            <a:r>
-              <a:rPr lang="zh-CN" altLang="en-US" sz="4000" dirty="0">
-                <a:solidFill>
-                  <a:prstClr val="black"/>
-                </a:solidFill>
-                <a:latin typeface="楷体" panose="02010609060101010101" pitchFamily="49" charset="-122"/>
-                <a:ea typeface="楷体" panose="02010609060101010101" pitchFamily="49" charset="-122"/>
-              </a:rPr>
-              <a:t>，</a:t>
-            </a:r>
-            <a:r>
-              <a:rPr lang="zh-CN" altLang="en-US" sz="4000" b="1" u="sng" dirty="0">
-                <a:solidFill>
-                  <a:prstClr val="black"/>
-                </a:solidFill>
-                <a:latin typeface="黑体" panose="02010609060101010101" pitchFamily="49" charset="-122"/>
-                <a:ea typeface="黑体" panose="02010609060101010101" pitchFamily="49" charset="-122"/>
-              </a:rPr>
-              <a:t>自由观察</a:t>
-            </a:r>
-            <a:r>
-              <a:rPr lang="zh-CN" altLang="en-US" sz="4000" dirty="0">
-                <a:solidFill>
-                  <a:prstClr val="black"/>
-                </a:solidFill>
-                <a:latin typeface="楷体" panose="02010609060101010101" pitchFamily="49" charset="-122"/>
-                <a:ea typeface="楷体" panose="02010609060101010101" pitchFamily="49" charset="-122"/>
-              </a:rPr>
-              <a:t>出现的纹理</a:t>
+              <a:t>只需自由、随意地观察，无需按键操作</a:t>
             </a:r>
             <a:endParaRPr lang="en-US" altLang="zh-CN" sz="4000" dirty="0">
               <a:solidFill>
@@ -13071,88 +15989,6 @@
               <a:ea typeface="楷体" panose="02010609060101010101" pitchFamily="49" charset="-122"/>
             </a:endParaRPr>
           </a:p>
-          <a:p>
-            <a:pPr marL="685800" marR="0" lvl="0" indent="-685800" algn="l" defTabSz="914400" rtl="0" eaLnBrk="1" fontAlgn="auto" latinLnBrk="0" hangingPunct="1">
-              <a:lnSpc>
-                <a:spcPct val="125000"/>
-              </a:lnSpc>
-              <a:spcBef>
-                <a:spcPts val="0"/>
-              </a:spcBef>
-              <a:spcAft>
-                <a:spcPts val="0"/>
-              </a:spcAft>
-              <a:buClrTx/>
-              <a:buSzTx/>
-              <a:buFont typeface="Wingdings" panose="05000000000000000000" pitchFamily="2" charset="2"/>
-              <a:buChar char="p"/>
-              <a:tabLst/>
-              <a:defRPr/>
-            </a:pPr>
-            <a:r>
-              <a:rPr kumimoji="0" lang="en-US" altLang="zh-CN" sz="4000" b="1" i="0" u="sng" strike="noStrike" kern="1200" cap="none" spc="0" normalizeH="0" baseline="0" noProof="0" dirty="0">
-                <a:ln>
-                  <a:noFill/>
-                </a:ln>
-                <a:solidFill>
-                  <a:prstClr val="black"/>
-                </a:solidFill>
-                <a:effectLst/>
-                <a:uLnTx/>
-                <a:uFillTx/>
-                <a:latin typeface="黑体" panose="02010609060101010101" pitchFamily="49" charset="-122"/>
-                <a:ea typeface="黑体" panose="02010609060101010101" pitchFamily="49" charset="-122"/>
-              </a:rPr>
-              <a:t>5</a:t>
-            </a:r>
-            <a:r>
-              <a:rPr kumimoji="0" lang="zh-CN" altLang="en-US" sz="4000" b="1" i="0" u="sng" strike="noStrike" kern="1200" cap="none" spc="0" normalizeH="0" baseline="0" noProof="0" dirty="0">
-                <a:ln>
-                  <a:noFill/>
-                </a:ln>
-                <a:solidFill>
-                  <a:prstClr val="black"/>
-                </a:solidFill>
-                <a:effectLst/>
-                <a:uLnTx/>
-                <a:uFillTx/>
-                <a:latin typeface="黑体" panose="02010609060101010101" pitchFamily="49" charset="-122"/>
-                <a:ea typeface="黑体" panose="02010609060101010101" pitchFamily="49" charset="-122"/>
-              </a:rPr>
-              <a:t>秒内</a:t>
-            </a:r>
-            <a:r>
-              <a:rPr kumimoji="0" lang="zh-CN" altLang="en-US" sz="4000" b="0" i="0" u="none" strike="noStrike" kern="1200" cap="none" spc="0" normalizeH="0" baseline="0" noProof="0" dirty="0">
-                <a:ln>
-                  <a:noFill/>
-                </a:ln>
-                <a:solidFill>
-                  <a:prstClr val="black"/>
-                </a:solidFill>
-                <a:effectLst/>
-                <a:uLnTx/>
-                <a:uFillTx/>
-                <a:latin typeface="楷体" panose="02010609060101010101" pitchFamily="49" charset="-122"/>
-                <a:ea typeface="楷体" panose="02010609060101010101" pitchFamily="49" charset="-122"/>
-                <a:cs typeface="+mn-cs"/>
-              </a:rPr>
-              <a:t>找到藏在黑白花纹中的小光栅</a:t>
-            </a:r>
-            <a:endParaRPr kumimoji="0" lang="en-US" altLang="zh-CN" sz="4000" b="0" i="0" u="none" strike="noStrike" kern="1200" cap="none" spc="0" normalizeH="0" baseline="0" noProof="0" dirty="0">
-              <a:ln>
-                <a:noFill/>
-              </a:ln>
-              <a:solidFill>
-                <a:prstClr val="black"/>
-              </a:solidFill>
-              <a:effectLst/>
-              <a:uLnTx/>
-              <a:uFillTx/>
-              <a:latin typeface="楷体" panose="02010609060101010101" pitchFamily="49" charset="-122"/>
-              <a:ea typeface="楷体" panose="02010609060101010101" pitchFamily="49" charset="-122"/>
-              <a:cs typeface="+mn-cs"/>
-            </a:endParaRPr>
-          </a:p>
         </p:txBody>
       </p:sp>
       <p:sp>
@@ -13160,7 +15996,7 @@
           <p:cNvPr id="2" name="矩形: 圆角 1">
             <a:extLst>
               <a:ext uri="{FF2B5EF4-FFF2-40B4-BE49-F238E27FC236}">
-                <a16:creationId xmlns:a16="http://schemas.microsoft.com/office/drawing/2014/main" id="{BB8A0B00-FC89-2235-BE81-C8F66575014C}"/>
+                <a16:creationId xmlns:a16="http://schemas.microsoft.com/office/drawing/2014/main" id="{71048BD8-6DCE-FBAA-1570-EC17A11EA407}"/>
               </a:ext>
             </a:extLst>
           </p:cNvPr>
@@ -13209,12 +16045,54 @@
           <a:bodyPr rtlCol="0" anchor="ctr"/>
           <a:lstStyle/>
           <a:p>
-            <a:pPr algn="ctr"/>
-            <a:r>
-              <a:rPr lang="en-US" altLang="zh-CN" b="1" dirty="0"/>
+            <a:pPr marL="0" marR="0" lvl="0" indent="0" algn="ctr" defTabSz="914400" rtl="0" eaLnBrk="1" fontAlgn="auto" latinLnBrk="0" hangingPunct="1">
+              <a:lnSpc>
+                <a:spcPct val="100000"/>
+              </a:lnSpc>
+              <a:spcBef>
+                <a:spcPts val="0"/>
+              </a:spcBef>
+              <a:spcAft>
+                <a:spcPts val="0"/>
+              </a:spcAft>
+              <a:buClrTx/>
+              <a:buSzTx/>
+              <a:buFontTx/>
+              <a:buNone/>
+              <a:tabLst/>
+              <a:defRPr/>
+            </a:pPr>
+            <a:r>
+              <a:rPr kumimoji="0" lang="en-US" altLang="zh-CN" sz="1800" b="1" i="0" u="none" strike="noStrike" kern="1200" cap="none" spc="0" normalizeH="0" baseline="0" noProof="0" dirty="0">
+                <a:ln>
+                  <a:noFill/>
+                </a:ln>
+                <a:solidFill>
+                  <a:prstClr val="white"/>
+                </a:solidFill>
+                <a:effectLst/>
+                <a:uLnTx/>
+                <a:uFillTx/>
+                <a:latin typeface="等线" panose="02110004020202020204"/>
+                <a:ea typeface="等线" panose="02010600030101010101" pitchFamily="2" charset="-122"/>
+                <a:cs typeface="+mn-cs"/>
+              </a:rPr>
               <a:t>space</a:t>
             </a:r>
-            <a:endParaRPr lang="zh-CN" altLang="en-US" b="1" dirty="0"/>
+            <a:endParaRPr kumimoji="0" lang="zh-CN" altLang="en-US" sz="1800" b="1" i="0" u="none" strike="noStrike" kern="1200" cap="none" spc="0" normalizeH="0" baseline="0" noProof="0" dirty="0">
+              <a:ln>
+                <a:noFill/>
+              </a:ln>
+              <a:solidFill>
+                <a:prstClr val="white"/>
+              </a:solidFill>
+              <a:effectLst/>
+              <a:uLnTx/>
+              <a:uFillTx/>
+              <a:latin typeface="等线" panose="02110004020202020204"/>
+              <a:ea typeface="等线" panose="02010600030101010101" pitchFamily="2" charset="-122"/>
+              <a:cs typeface="+mn-cs"/>
+            </a:endParaRPr>
           </a:p>
         </p:txBody>
       </p:sp>
@@ -13223,7 +16101,7 @@
           <p:cNvPr id="3" name="文本框 2">
             <a:extLst>
               <a:ext uri="{FF2B5EF4-FFF2-40B4-BE49-F238E27FC236}">
-                <a16:creationId xmlns:a16="http://schemas.microsoft.com/office/drawing/2014/main" id="{ED4C2EFC-240A-D3CC-F6A3-7CA541F34AB7}"/>
+                <a16:creationId xmlns:a16="http://schemas.microsoft.com/office/drawing/2014/main" id="{1A655ADE-F740-036F-2930-AD5E3E59F73C}"/>
               </a:ext>
             </a:extLst>
           </p:cNvPr>
@@ -13246,7 +16124,23 @@
           </a:bodyPr>
           <a:lstStyle/>
           <a:p>
-            <a:pPr algn="ctr"/>
+            <a:pPr marL="0" marR="0" lvl="0" indent="0" algn="ctr" defTabSz="914400" rtl="0" eaLnBrk="1" fontAlgn="auto" latinLnBrk="0" hangingPunct="1">
+              <a:lnSpc>
+                <a:spcPct val="100000"/>
+              </a:lnSpc>
+              <a:spcBef>
+                <a:spcPts val="0"/>
+              </a:spcBef>
+              <a:spcAft>
+                <a:spcPts val="0"/>
+              </a:spcAft>
+              <a:buClrTx/>
+              <a:buSzTx/>
+              <a:buFontTx/>
+              <a:buNone/>
+              <a:tabLst/>
+              <a:defRPr/>
+            </a:pPr>
             <a:r>
               <a:rPr kumimoji="0" lang="zh-CN" altLang="en-US" sz="2800" b="0" i="0" u="none" strike="noStrike" kern="1200" cap="none" spc="0" normalizeH="0" baseline="0" noProof="0" dirty="0">
                 <a:ln>
@@ -13296,51 +16190,44 @@
                 <a:ea typeface="楷体" panose="02010609060101010101" pitchFamily="49" charset="-122"/>
                 <a:cs typeface="+mn-cs"/>
               </a:rPr>
-              <a:t>”继续</a:t>
-            </a:r>
-            <a:endParaRPr lang="zh-CN" altLang="en-US" sz="1200" dirty="0"/>
+              <a:t>”</a:t>
+            </a:r>
+            <a:r>
+              <a:rPr kumimoji="0" lang="zh-CN" altLang="en-US" sz="2800" b="1" i="0" u="none" strike="noStrike" kern="1200" cap="none" spc="0" normalizeH="0" baseline="0" noProof="0" dirty="0">
+                <a:ln>
+                  <a:noFill/>
+                </a:ln>
+                <a:solidFill>
+                  <a:srgbClr val="FF0000"/>
+                </a:solidFill>
+                <a:effectLst/>
+                <a:uLnTx/>
+                <a:uFillTx/>
+                <a:latin typeface="黑体" panose="02010609060101010101" pitchFamily="49" charset="-122"/>
+                <a:ea typeface="黑体" panose="02010609060101010101" pitchFamily="49" charset="-122"/>
+              </a:rPr>
+              <a:t>开始</a:t>
+            </a:r>
+            <a:endParaRPr kumimoji="0" lang="zh-CN" altLang="en-US" sz="1200" b="1" i="0" u="none" strike="noStrike" kern="1200" cap="none" spc="0" normalizeH="0" baseline="0" noProof="0" dirty="0">
+              <a:ln>
+                <a:noFill/>
+              </a:ln>
+              <a:solidFill>
+                <a:srgbClr val="FF0000"/>
+              </a:solidFill>
+              <a:effectLst/>
+              <a:uLnTx/>
+              <a:uFillTx/>
+              <a:latin typeface="黑体" panose="02010609060101010101" pitchFamily="49" charset="-122"/>
+              <a:ea typeface="黑体" panose="02010609060101010101" pitchFamily="49" charset="-122"/>
+            </a:endParaRPr>
           </a:p>
         </p:txBody>
       </p:sp>
-      <p:pic>
-        <p:nvPicPr>
-          <p:cNvPr id="5" name="图片 4" descr="卡通人物&#10;&#10;低可信度描述已自动生成">
-            <a:extLst>
-              <a:ext uri="{FF2B5EF4-FFF2-40B4-BE49-F238E27FC236}">
-                <a16:creationId xmlns:a16="http://schemas.microsoft.com/office/drawing/2014/main" id="{8D61E5B5-4322-7BE2-865E-BA96F6A0108B}"/>
-              </a:ext>
-            </a:extLst>
-          </p:cNvPr>
-          <p:cNvPicPr>
-            <a:picLocks noChangeAspect="1"/>
-          </p:cNvPicPr>
-          <p:nvPr/>
-        </p:nvPicPr>
-        <p:blipFill>
-          <a:blip r:embed="rId2" cstate="hqprint">
-            <a:extLst>
-              <a:ext uri="{28A0092B-C50C-407E-A947-70E740481C1C}">
-                <a14:useLocalDpi xmlns:a14="http://schemas.microsoft.com/office/drawing/2010/main"/>
-              </a:ext>
-            </a:extLst>
-          </a:blip>
-          <a:srcRect/>
-          <a:stretch/>
-        </p:blipFill>
-        <p:spPr>
-          <a:xfrm>
-            <a:off x="10360046" y="2545831"/>
-            <a:ext cx="610009" cy="596751"/>
-          </a:xfrm>
-          <a:prstGeom prst="rect">
-            <a:avLst/>
-          </a:prstGeom>
-        </p:spPr>
-      </p:pic>
     </p:spTree>
     <p:extLst>
       <p:ext uri="{BB962C8B-B14F-4D97-AF65-F5344CB8AC3E}">
-        <p14:creationId xmlns:p14="http://schemas.microsoft.com/office/powerpoint/2010/main" val="2416682410"/>
+        <p14:creationId xmlns:p14="http://schemas.microsoft.com/office/powerpoint/2010/main" val="1251546171"/>
       </p:ext>
     </p:extLst>
   </p:cSld>
@@ -13369,7 +16256,7 @@
         <p:cNvPr id="1" name="">
           <a:extLst>
             <a:ext uri="{FF2B5EF4-FFF2-40B4-BE49-F238E27FC236}">
-              <a16:creationId xmlns:a16="http://schemas.microsoft.com/office/drawing/2014/main" id="{0B893CF8-50F8-8BC9-EF54-69D8DEBE308B}"/>
+              <a16:creationId xmlns:a16="http://schemas.microsoft.com/office/drawing/2014/main" id="{11F86887-FDAE-5D28-5A83-358A65358553}"/>
             </a:ext>
           </a:extLst>
         </p:cNvPr>
@@ -13389,7 +16276,7 @@
           <p:cNvPr id="4" name="文本框 3">
             <a:extLst>
               <a:ext uri="{FF2B5EF4-FFF2-40B4-BE49-F238E27FC236}">
-                <a16:creationId xmlns:a16="http://schemas.microsoft.com/office/drawing/2014/main" id="{94B65C78-7C0D-B2A3-F59F-A227D65C21F8}"/>
+                <a16:creationId xmlns:a16="http://schemas.microsoft.com/office/drawing/2014/main" id="{68189A07-5028-CF59-BD1F-520C9074F568}"/>
               </a:ext>
             </a:extLst>
           </p:cNvPr>
@@ -13444,7 +16331,7 @@
                 <a:ea typeface="楷体" panose="02010609060101010101" pitchFamily="49" charset="-122"/>
                 <a:cs typeface="+mn-cs"/>
               </a:rPr>
-              <a:t>练习阶段</a:t>
+              <a:t>自由观看任务</a:t>
             </a:r>
           </a:p>
         </p:txBody>
@@ -13454,7 +16341,7 @@
           <p:cNvPr id="6" name="文本框 5">
             <a:extLst>
               <a:ext uri="{FF2B5EF4-FFF2-40B4-BE49-F238E27FC236}">
-                <a16:creationId xmlns:a16="http://schemas.microsoft.com/office/drawing/2014/main" id="{41B9AF2D-EF0E-4241-AEA8-2EAC03F2282A}"/>
+                <a16:creationId xmlns:a16="http://schemas.microsoft.com/office/drawing/2014/main" id="{511D47E1-58E3-DAD6-86CC-55DD5DE9E0E3}"/>
               </a:ext>
             </a:extLst>
           </p:cNvPr>
@@ -13463,8 +16350,8 @@
         </p:nvSpPr>
         <p:spPr>
           <a:xfrm>
-            <a:off x="1500050" y="1645919"/>
-            <a:ext cx="9714412" cy="2294859"/>
+            <a:off x="1452985" y="2565408"/>
+            <a:ext cx="9714412" cy="1525418"/>
           </a:xfrm>
           <a:prstGeom prst="rect">
             <a:avLst/>
@@ -13486,6 +16373,16 @@
               <a:defRPr/>
             </a:pPr>
             <a:r>
+              <a:rPr lang="zh-CN" altLang="en-US" sz="4000" dirty="0">
+                <a:solidFill>
+                  <a:prstClr val="black"/>
+                </a:solidFill>
+                <a:latin typeface="楷体" panose="02010609060101010101" pitchFamily="49" charset="-122"/>
+                <a:ea typeface="楷体" panose="02010609060101010101" pitchFamily="49" charset="-122"/>
+              </a:rPr>
+              <a:t>但是，少数</a:t>
+            </a:r>
+            <a:r>
               <a:rPr lang="zh-CN" altLang="en-US" sz="4000" b="1" u="sng" dirty="0">
                 <a:solidFill>
                   <a:prstClr val="black"/>
@@ -13493,7 +16390,7 @@
                 <a:latin typeface="黑体" panose="02010609060101010101" pitchFamily="49" charset="-122"/>
                 <a:ea typeface="黑体" panose="02010609060101010101" pitchFamily="49" charset="-122"/>
               </a:rPr>
-              <a:t>盯住</a:t>
+              <a:t>纹理中会渐渐出现一个光斑</a:t>
             </a:r>
             <a:r>
               <a:rPr lang="zh-CN" altLang="en-US" sz="4000" dirty="0">
@@ -13503,7 +16400,7 @@
                 <a:latin typeface="楷体" panose="02010609060101010101" pitchFamily="49" charset="-122"/>
                 <a:ea typeface="楷体" panose="02010609060101010101" pitchFamily="49" charset="-122"/>
               </a:rPr>
-              <a:t>黑点按</a:t>
+              <a:t>，一旦发现，请</a:t>
             </a:r>
             <a:r>
               <a:rPr lang="zh-CN" altLang="en-US" sz="4000" b="1" u="sng" dirty="0">
@@ -13513,37 +16410,27 @@
                 <a:latin typeface="黑体" panose="02010609060101010101" pitchFamily="49" charset="-122"/>
                 <a:ea typeface="黑体" panose="02010609060101010101" pitchFamily="49" charset="-122"/>
               </a:rPr>
-              <a:t>空格</a:t>
-            </a:r>
-            <a:r>
-              <a:rPr lang="zh-CN" altLang="en-US" sz="4000" dirty="0">
-                <a:solidFill>
-                  <a:prstClr val="black"/>
-                </a:solidFill>
-                <a:latin typeface="楷体" panose="02010609060101010101" pitchFamily="49" charset="-122"/>
-                <a:ea typeface="楷体" panose="02010609060101010101" pitchFamily="49" charset="-122"/>
-              </a:rPr>
-              <a:t>，</a:t>
-            </a:r>
-            <a:r>
-              <a:rPr lang="zh-CN" altLang="en-US" sz="4000" b="1" u="sng" dirty="0">
+              <a:t>尽快按右侧</a:t>
+            </a:r>
+            <a:r>
+              <a:rPr lang="en-US" altLang="zh-CN" sz="4000" b="1" u="sng" dirty="0">
                 <a:solidFill>
                   <a:prstClr val="black"/>
                 </a:solidFill>
                 <a:latin typeface="黑体" panose="02010609060101010101" pitchFamily="49" charset="-122"/>
                 <a:ea typeface="黑体" panose="02010609060101010101" pitchFamily="49" charset="-122"/>
               </a:rPr>
-              <a:t>自由观察</a:t>
-            </a:r>
-            <a:r>
-              <a:rPr lang="zh-CN" altLang="en-US" sz="4000" dirty="0">
-                <a:solidFill>
-                  <a:prstClr val="black"/>
-                </a:solidFill>
-                <a:latin typeface="楷体" panose="02010609060101010101" pitchFamily="49" charset="-122"/>
-                <a:ea typeface="楷体" panose="02010609060101010101" pitchFamily="49" charset="-122"/>
-              </a:rPr>
-              <a:t>出现的纹理</a:t>
+              <a:t>Ctrl</a:t>
+            </a:r>
+            <a:r>
+              <a:rPr lang="zh-CN" altLang="en-US" sz="4000" b="1" u="sng" dirty="0">
+                <a:solidFill>
+                  <a:prstClr val="black"/>
+                </a:solidFill>
+                <a:latin typeface="黑体" panose="02010609060101010101" pitchFamily="49" charset="-122"/>
+                <a:ea typeface="黑体" panose="02010609060101010101" pitchFamily="49" charset="-122"/>
+              </a:rPr>
+              <a:t>键</a:t>
             </a:r>
             <a:endParaRPr lang="en-US" altLang="zh-CN" sz="4000" dirty="0">
               <a:solidFill>
@@ -13553,171 +16440,6 @@
               <a:ea typeface="楷体" panose="02010609060101010101" pitchFamily="49" charset="-122"/>
             </a:endParaRPr>
           </a:p>
-          <a:p>
-            <a:pPr marL="685800" marR="0" lvl="0" indent="-685800" algn="l" defTabSz="914400" rtl="0" eaLnBrk="1" fontAlgn="auto" latinLnBrk="0" hangingPunct="1">
-              <a:lnSpc>
-                <a:spcPct val="125000"/>
-              </a:lnSpc>
-              <a:spcBef>
-                <a:spcPts val="0"/>
-              </a:spcBef>
-              <a:spcAft>
-                <a:spcPts val="0"/>
-              </a:spcAft>
-              <a:buClrTx/>
-              <a:buSzTx/>
-              <a:buFont typeface="Wingdings" panose="05000000000000000000" pitchFamily="2" charset="2"/>
-              <a:buChar char="p"/>
-              <a:tabLst/>
-              <a:defRPr/>
-            </a:pPr>
-            <a:r>
-              <a:rPr kumimoji="0" lang="en-US" altLang="zh-CN" sz="4000" b="1" i="0" u="sng" strike="noStrike" kern="1200" cap="none" spc="0" normalizeH="0" baseline="0" noProof="0" dirty="0">
-                <a:ln>
-                  <a:noFill/>
-                </a:ln>
-                <a:solidFill>
-                  <a:prstClr val="black"/>
-                </a:solidFill>
-                <a:effectLst/>
-                <a:uLnTx/>
-                <a:uFillTx/>
-                <a:latin typeface="黑体" panose="02010609060101010101" pitchFamily="49" charset="-122"/>
-                <a:ea typeface="黑体" panose="02010609060101010101" pitchFamily="49" charset="-122"/>
-              </a:rPr>
-              <a:t>5</a:t>
-            </a:r>
-            <a:r>
-              <a:rPr kumimoji="0" lang="zh-CN" altLang="en-US" sz="4000" b="1" i="0" u="sng" strike="noStrike" kern="1200" cap="none" spc="0" normalizeH="0" baseline="0" noProof="0" dirty="0">
-                <a:ln>
-                  <a:noFill/>
-                </a:ln>
-                <a:solidFill>
-                  <a:prstClr val="black"/>
-                </a:solidFill>
-                <a:effectLst/>
-                <a:uLnTx/>
-                <a:uFillTx/>
-                <a:latin typeface="黑体" panose="02010609060101010101" pitchFamily="49" charset="-122"/>
-                <a:ea typeface="黑体" panose="02010609060101010101" pitchFamily="49" charset="-122"/>
-              </a:rPr>
-              <a:t>秒内</a:t>
-            </a:r>
-            <a:r>
-              <a:rPr kumimoji="0" lang="zh-CN" altLang="en-US" sz="4000" b="0" i="0" u="none" strike="noStrike" kern="1200" cap="none" spc="0" normalizeH="0" baseline="0" noProof="0" dirty="0">
-                <a:ln>
-                  <a:noFill/>
-                </a:ln>
-                <a:solidFill>
-                  <a:prstClr val="black"/>
-                </a:solidFill>
-                <a:effectLst/>
-                <a:uLnTx/>
-                <a:uFillTx/>
-                <a:latin typeface="楷体" panose="02010609060101010101" pitchFamily="49" charset="-122"/>
-                <a:ea typeface="楷体" panose="02010609060101010101" pitchFamily="49" charset="-122"/>
-                <a:cs typeface="+mn-cs"/>
-              </a:rPr>
-              <a:t>找到藏在黑白花纹中的小光栅</a:t>
-            </a:r>
-            <a:endParaRPr kumimoji="0" lang="en-US" altLang="zh-CN" sz="4000" b="0" i="0" u="none" strike="noStrike" kern="1200" cap="none" spc="0" normalizeH="0" baseline="0" noProof="0" dirty="0">
-              <a:ln>
-                <a:noFill/>
-              </a:ln>
-              <a:solidFill>
-                <a:prstClr val="black"/>
-              </a:solidFill>
-              <a:effectLst/>
-              <a:uLnTx/>
-              <a:uFillTx/>
-              <a:latin typeface="楷体" panose="02010609060101010101" pitchFamily="49" charset="-122"/>
-              <a:ea typeface="楷体" panose="02010609060101010101" pitchFamily="49" charset="-122"/>
-              <a:cs typeface="+mn-cs"/>
-            </a:endParaRPr>
-          </a:p>
-          <a:p>
-            <a:pPr marL="685800" marR="0" lvl="0" indent="-685800" algn="l" defTabSz="914400" rtl="0" eaLnBrk="1" fontAlgn="auto" latinLnBrk="0" hangingPunct="1">
-              <a:lnSpc>
-                <a:spcPct val="125000"/>
-              </a:lnSpc>
-              <a:spcBef>
-                <a:spcPts val="0"/>
-              </a:spcBef>
-              <a:spcAft>
-                <a:spcPts val="0"/>
-              </a:spcAft>
-              <a:buClrTx/>
-              <a:buSzTx/>
-              <a:buFont typeface="Wingdings" panose="05000000000000000000" pitchFamily="2" charset="2"/>
-              <a:buChar char="p"/>
-              <a:tabLst/>
-              <a:defRPr/>
-            </a:pPr>
-            <a:r>
-              <a:rPr kumimoji="0" lang="zh-CN" altLang="en-US" sz="4000" b="0" i="0" u="none" strike="noStrike" kern="1200" cap="none" spc="0" normalizeH="0" baseline="0" noProof="0" dirty="0">
-                <a:ln>
-                  <a:noFill/>
-                </a:ln>
-                <a:solidFill>
-                  <a:prstClr val="black"/>
-                </a:solidFill>
-                <a:effectLst/>
-                <a:uLnTx/>
-                <a:uFillTx/>
-                <a:latin typeface="楷体" panose="02010609060101010101" pitchFamily="49" charset="-122"/>
-                <a:ea typeface="楷体" panose="02010609060101010101" pitchFamily="49" charset="-122"/>
-                <a:cs typeface="+mn-cs"/>
-              </a:rPr>
-              <a:t>余光发现光栅时立刻按下“</a:t>
-            </a:r>
-            <a:r>
-              <a:rPr kumimoji="0" lang="zh-CN" altLang="en-US" sz="4000" b="1" i="0" u="sng" strike="noStrike" kern="1200" cap="none" spc="0" normalizeH="0" baseline="0" noProof="0" dirty="0">
-                <a:ln>
-                  <a:noFill/>
-                </a:ln>
-                <a:solidFill>
-                  <a:prstClr val="black"/>
-                </a:solidFill>
-                <a:effectLst/>
-                <a:uLnTx/>
-                <a:uFillTx/>
-                <a:latin typeface="黑体" panose="02010609060101010101" pitchFamily="49" charset="-122"/>
-                <a:ea typeface="黑体" panose="02010609060101010101" pitchFamily="49" charset="-122"/>
-              </a:rPr>
-              <a:t>空格键</a:t>
-            </a:r>
-            <a:r>
-              <a:rPr kumimoji="0" lang="zh-CN" altLang="en-US" sz="4000" b="0" i="0" u="none" strike="noStrike" kern="1200" cap="none" spc="0" normalizeH="0" baseline="0" noProof="0" dirty="0">
-                <a:ln>
-                  <a:noFill/>
-                </a:ln>
-                <a:solidFill>
-                  <a:prstClr val="black"/>
-                </a:solidFill>
-                <a:effectLst/>
-                <a:uLnTx/>
-                <a:uFillTx/>
-                <a:latin typeface="楷体" panose="02010609060101010101" pitchFamily="49" charset="-122"/>
-                <a:ea typeface="楷体" panose="02010609060101010101" pitchFamily="49" charset="-122"/>
-                <a:cs typeface="+mn-cs"/>
-              </a:rPr>
-              <a:t>”</a:t>
-            </a:r>
-            <a:endParaRPr kumimoji="0" lang="en-US" altLang="zh-CN" sz="4000" b="0" i="0" u="none" strike="noStrike" kern="1200" cap="none" spc="0" normalizeH="0" baseline="0" noProof="0" dirty="0">
-              <a:ln>
-                <a:noFill/>
-              </a:ln>
-              <a:solidFill>
-                <a:prstClr val="black"/>
-              </a:solidFill>
-              <a:effectLst/>
-              <a:uLnTx/>
-              <a:uFillTx/>
-              <a:latin typeface="楷体" panose="02010609060101010101" pitchFamily="49" charset="-122"/>
-              <a:ea typeface="楷体" panose="02010609060101010101" pitchFamily="49" charset="-122"/>
-              <a:cs typeface="+mn-cs"/>
-            </a:endParaRPr>
-          </a:p>
         </p:txBody>
       </p:sp>
       <p:sp>
@@ -13725,70 +16447,7 @@
           <p:cNvPr id="2" name="矩形: 圆角 1">
             <a:extLst>
               <a:ext uri="{FF2B5EF4-FFF2-40B4-BE49-F238E27FC236}">
-                <a16:creationId xmlns:a16="http://schemas.microsoft.com/office/drawing/2014/main" id="{19C7F6E9-147F-DD4E-BDD7-221D4334DBF0}"/>
-              </a:ext>
-            </a:extLst>
-          </p:cNvPr>
-          <p:cNvSpPr/>
-          <p:nvPr/>
-        </p:nvSpPr>
-        <p:spPr>
-          <a:xfrm>
-            <a:off x="7878103" y="4036426"/>
-            <a:ext cx="2481943" cy="509451"/>
-          </a:xfrm>
-          <a:prstGeom prst="roundRect">
-            <a:avLst/>
-          </a:prstGeom>
-          <a:solidFill>
-            <a:schemeClr val="tx1"/>
-          </a:solidFill>
-          <a:ln>
-            <a:noFill/>
-          </a:ln>
-          <a:scene3d>
-            <a:camera prst="orthographicFront"/>
-            <a:lightRig rig="threePt" dir="t"/>
-          </a:scene3d>
-          <a:sp3d>
-            <a:bevelT/>
-          </a:sp3d>
-        </p:spPr>
-        <p:style>
-          <a:lnRef idx="2">
-            <a:schemeClr val="accent1">
-              <a:shade val="15000"/>
-            </a:schemeClr>
-          </a:lnRef>
-          <a:fillRef idx="1">
-            <a:schemeClr val="accent1"/>
-          </a:fillRef>
-          <a:effectRef idx="0">
-            <a:schemeClr val="accent1"/>
-          </a:effectRef>
-          <a:fontRef idx="minor">
-            <a:schemeClr val="lt1"/>
-          </a:fontRef>
-        </p:style>
-        <p:txBody>
-          <a:bodyPr rtlCol="0" anchor="ctr"/>
-          <a:lstStyle/>
-          <a:p>
-            <a:pPr algn="ctr"/>
-            <a:r>
-              <a:rPr lang="en-US" altLang="zh-CN" b="1" dirty="0"/>
-              <a:t>space</a:t>
-            </a:r>
-            <a:endParaRPr lang="zh-CN" altLang="en-US" b="1" dirty="0"/>
-          </a:p>
-        </p:txBody>
-      </p:sp>
-      <p:sp>
-        <p:nvSpPr>
-          <p:cNvPr id="3" name="矩形: 圆角 2">
-            <a:extLst>
-              <a:ext uri="{FF2B5EF4-FFF2-40B4-BE49-F238E27FC236}">
-                <a16:creationId xmlns:a16="http://schemas.microsoft.com/office/drawing/2014/main" id="{69C6A330-9033-38CB-41DA-1B40FEB7CA39}"/>
+                <a16:creationId xmlns:a16="http://schemas.microsoft.com/office/drawing/2014/main" id="{71048BD8-6DCE-FBAA-1570-EC17A11EA407}"/>
               </a:ext>
             </a:extLst>
           </p:cNvPr>
@@ -13837,21 +16496,63 @@
           <a:bodyPr rtlCol="0" anchor="ctr"/>
           <a:lstStyle/>
           <a:p>
-            <a:pPr algn="ctr"/>
-            <a:r>
-              <a:rPr lang="en-US" altLang="zh-CN" b="1" dirty="0"/>
+            <a:pPr marL="0" marR="0" lvl="0" indent="0" algn="ctr" defTabSz="914400" rtl="0" eaLnBrk="1" fontAlgn="auto" latinLnBrk="0" hangingPunct="1">
+              <a:lnSpc>
+                <a:spcPct val="100000"/>
+              </a:lnSpc>
+              <a:spcBef>
+                <a:spcPts val="0"/>
+              </a:spcBef>
+              <a:spcAft>
+                <a:spcPts val="0"/>
+              </a:spcAft>
+              <a:buClrTx/>
+              <a:buSzTx/>
+              <a:buFontTx/>
+              <a:buNone/>
+              <a:tabLst/>
+              <a:defRPr/>
+            </a:pPr>
+            <a:r>
+              <a:rPr kumimoji="0" lang="en-US" altLang="zh-CN" sz="1800" b="1" i="0" u="none" strike="noStrike" kern="1200" cap="none" spc="0" normalizeH="0" baseline="0" noProof="0" dirty="0">
+                <a:ln>
+                  <a:noFill/>
+                </a:ln>
+                <a:solidFill>
+                  <a:prstClr val="white"/>
+                </a:solidFill>
+                <a:effectLst/>
+                <a:uLnTx/>
+                <a:uFillTx/>
+                <a:latin typeface="等线" panose="02110004020202020204"/>
+                <a:ea typeface="等线" panose="02010600030101010101" pitchFamily="2" charset="-122"/>
+                <a:cs typeface="+mn-cs"/>
+              </a:rPr>
               <a:t>space</a:t>
             </a:r>
-            <a:endParaRPr lang="zh-CN" altLang="en-US" b="1" dirty="0"/>
+            <a:endParaRPr kumimoji="0" lang="zh-CN" altLang="en-US" sz="1800" b="1" i="0" u="none" strike="noStrike" kern="1200" cap="none" spc="0" normalizeH="0" baseline="0" noProof="0" dirty="0">
+              <a:ln>
+                <a:noFill/>
+              </a:ln>
+              <a:solidFill>
+                <a:prstClr val="white"/>
+              </a:solidFill>
+              <a:effectLst/>
+              <a:uLnTx/>
+              <a:uFillTx/>
+              <a:latin typeface="等线" panose="02110004020202020204"/>
+              <a:ea typeface="等线" panose="02010600030101010101" pitchFamily="2" charset="-122"/>
+              <a:cs typeface="+mn-cs"/>
+            </a:endParaRPr>
           </a:p>
         </p:txBody>
       </p:sp>
       <p:sp>
         <p:nvSpPr>
-          <p:cNvPr id="10" name="文本框 9">
-            <a:extLst>
-              <a:ext uri="{FF2B5EF4-FFF2-40B4-BE49-F238E27FC236}">
-                <a16:creationId xmlns:a16="http://schemas.microsoft.com/office/drawing/2014/main" id="{30BEEF60-50DF-8D40-D64D-6123EC324982}"/>
+          <p:cNvPr id="3" name="文本框 2">
+            <a:extLst>
+              <a:ext uri="{FF2B5EF4-FFF2-40B4-BE49-F238E27FC236}">
+                <a16:creationId xmlns:a16="http://schemas.microsoft.com/office/drawing/2014/main" id="{1A655ADE-F740-036F-2930-AD5E3E59F73C}"/>
               </a:ext>
             </a:extLst>
           </p:cNvPr>
@@ -13874,7 +16575,23 @@
           </a:bodyPr>
           <a:lstStyle/>
           <a:p>
-            <a:pPr algn="ctr"/>
+            <a:pPr marL="0" marR="0" lvl="0" indent="0" algn="ctr" defTabSz="914400" rtl="0" eaLnBrk="1" fontAlgn="auto" latinLnBrk="0" hangingPunct="1">
+              <a:lnSpc>
+                <a:spcPct val="100000"/>
+              </a:lnSpc>
+              <a:spcBef>
+                <a:spcPts val="0"/>
+              </a:spcBef>
+              <a:spcAft>
+                <a:spcPts val="0"/>
+              </a:spcAft>
+              <a:buClrTx/>
+              <a:buSzTx/>
+              <a:buFontTx/>
+              <a:buNone/>
+              <a:tabLst/>
+              <a:defRPr/>
+            </a:pPr>
             <a:r>
               <a:rPr kumimoji="0" lang="zh-CN" altLang="en-US" sz="2800" b="0" i="0" u="none" strike="noStrike" kern="1200" cap="none" spc="0" normalizeH="0" baseline="0" noProof="0" dirty="0">
                 <a:ln>
@@ -13924,51 +16641,44 @@
                 <a:ea typeface="楷体" panose="02010609060101010101" pitchFamily="49" charset="-122"/>
                 <a:cs typeface="+mn-cs"/>
               </a:rPr>
-              <a:t>”继续</a:t>
-            </a:r>
-            <a:endParaRPr lang="zh-CN" altLang="en-US" sz="1200" dirty="0"/>
+              <a:t>”</a:t>
+            </a:r>
+            <a:r>
+              <a:rPr kumimoji="0" lang="zh-CN" altLang="en-US" sz="2800" b="1" i="0" u="none" strike="noStrike" kern="1200" cap="none" spc="0" normalizeH="0" baseline="0" noProof="0" dirty="0">
+                <a:ln>
+                  <a:noFill/>
+                </a:ln>
+                <a:solidFill>
+                  <a:srgbClr val="FF0000"/>
+                </a:solidFill>
+                <a:effectLst/>
+                <a:uLnTx/>
+                <a:uFillTx/>
+                <a:latin typeface="黑体" panose="02010609060101010101" pitchFamily="49" charset="-122"/>
+                <a:ea typeface="黑体" panose="02010609060101010101" pitchFamily="49" charset="-122"/>
+              </a:rPr>
+              <a:t>开始</a:t>
+            </a:r>
+            <a:endParaRPr kumimoji="0" lang="zh-CN" altLang="en-US" sz="1200" b="1" i="0" u="none" strike="noStrike" kern="1200" cap="none" spc="0" normalizeH="0" baseline="0" noProof="0" dirty="0">
+              <a:ln>
+                <a:noFill/>
+              </a:ln>
+              <a:solidFill>
+                <a:srgbClr val="FF0000"/>
+              </a:solidFill>
+              <a:effectLst/>
+              <a:uLnTx/>
+              <a:uFillTx/>
+              <a:latin typeface="黑体" panose="02010609060101010101" pitchFamily="49" charset="-122"/>
+              <a:ea typeface="黑体" panose="02010609060101010101" pitchFamily="49" charset="-122"/>
+            </a:endParaRPr>
           </a:p>
         </p:txBody>
       </p:sp>
-      <p:pic>
-        <p:nvPicPr>
-          <p:cNvPr id="7" name="图片 6" descr="卡通人物&#10;&#10;低可信度描述已自动生成">
-            <a:extLst>
-              <a:ext uri="{FF2B5EF4-FFF2-40B4-BE49-F238E27FC236}">
-                <a16:creationId xmlns:a16="http://schemas.microsoft.com/office/drawing/2014/main" id="{E7D74646-65BE-1179-3C37-8F446D7C2F05}"/>
-              </a:ext>
-            </a:extLst>
-          </p:cNvPr>
-          <p:cNvPicPr>
-            <a:picLocks noChangeAspect="1"/>
-          </p:cNvPicPr>
-          <p:nvPr/>
-        </p:nvPicPr>
-        <p:blipFill>
-          <a:blip r:embed="rId2" cstate="hqprint">
-            <a:extLst>
-              <a:ext uri="{28A0092B-C50C-407E-A947-70E740481C1C}">
-                <a14:useLocalDpi xmlns:a14="http://schemas.microsoft.com/office/drawing/2010/main"/>
-              </a:ext>
-            </a:extLst>
-          </a:blip>
-          <a:srcRect/>
-          <a:stretch/>
-        </p:blipFill>
-        <p:spPr>
-          <a:xfrm>
-            <a:off x="10360046" y="2545831"/>
-            <a:ext cx="610009" cy="596751"/>
-          </a:xfrm>
-          <a:prstGeom prst="rect">
-            <a:avLst/>
-          </a:prstGeom>
-        </p:spPr>
-      </p:pic>
     </p:spTree>
     <p:extLst>
       <p:ext uri="{BB962C8B-B14F-4D97-AF65-F5344CB8AC3E}">
-        <p14:creationId xmlns:p14="http://schemas.microsoft.com/office/powerpoint/2010/main" val="552457291"/>
+        <p14:creationId xmlns:p14="http://schemas.microsoft.com/office/powerpoint/2010/main" val="1817932657"/>
       </p:ext>
     </p:extLst>
   </p:cSld>
@@ -13997,7 +16707,7 @@
         <p:cNvPr id="1" name="">
           <a:extLst>
             <a:ext uri="{FF2B5EF4-FFF2-40B4-BE49-F238E27FC236}">
-              <a16:creationId xmlns:a16="http://schemas.microsoft.com/office/drawing/2014/main" id="{C90652D7-AE54-4794-B346-5B2D7F48F203}"/>
+              <a16:creationId xmlns:a16="http://schemas.microsoft.com/office/drawing/2014/main" id="{11F86887-FDAE-5D28-5A83-358A65358553}"/>
             </a:ext>
           </a:extLst>
         </p:cNvPr>
@@ -14017,7 +16727,7 @@
           <p:cNvPr id="4" name="文本框 3">
             <a:extLst>
               <a:ext uri="{FF2B5EF4-FFF2-40B4-BE49-F238E27FC236}">
-                <a16:creationId xmlns:a16="http://schemas.microsoft.com/office/drawing/2014/main" id="{529827CC-8220-DA63-6D70-77634309C8B4}"/>
+                <a16:creationId xmlns:a16="http://schemas.microsoft.com/office/drawing/2014/main" id="{68189A07-5028-CF59-BD1F-520C9074F568}"/>
               </a:ext>
             </a:extLst>
           </p:cNvPr>
@@ -14072,387 +16782,17 @@
                 <a:ea typeface="楷体" panose="02010609060101010101" pitchFamily="49" charset="-122"/>
                 <a:cs typeface="+mn-cs"/>
               </a:rPr>
-              <a:t>练习阶段</a:t>
+              <a:t>自由观看任务</a:t>
             </a:r>
           </a:p>
         </p:txBody>
       </p:sp>
       <p:sp>
         <p:nvSpPr>
-          <p:cNvPr id="6" name="文本框 5">
-            <a:extLst>
-              <a:ext uri="{FF2B5EF4-FFF2-40B4-BE49-F238E27FC236}">
-                <a16:creationId xmlns:a16="http://schemas.microsoft.com/office/drawing/2014/main" id="{B3CD441E-F638-7052-0586-F628B5C4F852}"/>
-              </a:ext>
-            </a:extLst>
-          </p:cNvPr>
-          <p:cNvSpPr txBox="1"/>
-          <p:nvPr/>
-        </p:nvSpPr>
-        <p:spPr>
-          <a:xfrm>
-            <a:off x="1500050" y="1645919"/>
-            <a:ext cx="9714412" cy="3064300"/>
-          </a:xfrm>
-          <a:prstGeom prst="rect">
-            <a:avLst/>
-          </a:prstGeom>
-          <a:noFill/>
-        </p:spPr>
-        <p:txBody>
-          <a:bodyPr wrap="square" rtlCol="0">
-            <a:spAutoFit/>
-          </a:bodyPr>
-          <a:lstStyle/>
-          <a:p>
-            <a:pPr marL="685800" lvl="0" indent="-685800">
-              <a:lnSpc>
-                <a:spcPct val="125000"/>
-              </a:lnSpc>
-              <a:buFont typeface="Wingdings" panose="05000000000000000000" pitchFamily="2" charset="2"/>
-              <a:buChar char="p"/>
-              <a:defRPr/>
-            </a:pPr>
-            <a:r>
-              <a:rPr lang="zh-CN" altLang="en-US" sz="4000" b="1" u="sng" dirty="0">
-                <a:solidFill>
-                  <a:prstClr val="black"/>
-                </a:solidFill>
-                <a:latin typeface="黑体" panose="02010609060101010101" pitchFamily="49" charset="-122"/>
-                <a:ea typeface="黑体" panose="02010609060101010101" pitchFamily="49" charset="-122"/>
-              </a:rPr>
-              <a:t>盯住</a:t>
-            </a:r>
-            <a:r>
-              <a:rPr lang="zh-CN" altLang="en-US" sz="4000" dirty="0">
-                <a:solidFill>
-                  <a:prstClr val="black"/>
-                </a:solidFill>
-                <a:latin typeface="楷体" panose="02010609060101010101" pitchFamily="49" charset="-122"/>
-                <a:ea typeface="楷体" panose="02010609060101010101" pitchFamily="49" charset="-122"/>
-              </a:rPr>
-              <a:t>黑点按</a:t>
-            </a:r>
-            <a:r>
-              <a:rPr lang="zh-CN" altLang="en-US" sz="4000" b="1" u="sng" dirty="0">
-                <a:solidFill>
-                  <a:prstClr val="black"/>
-                </a:solidFill>
-                <a:latin typeface="黑体" panose="02010609060101010101" pitchFamily="49" charset="-122"/>
-                <a:ea typeface="黑体" panose="02010609060101010101" pitchFamily="49" charset="-122"/>
-              </a:rPr>
-              <a:t>空格</a:t>
-            </a:r>
-            <a:r>
-              <a:rPr lang="zh-CN" altLang="en-US" sz="4000" dirty="0">
-                <a:solidFill>
-                  <a:prstClr val="black"/>
-                </a:solidFill>
-                <a:latin typeface="楷体" panose="02010609060101010101" pitchFamily="49" charset="-122"/>
-                <a:ea typeface="楷体" panose="02010609060101010101" pitchFamily="49" charset="-122"/>
-              </a:rPr>
-              <a:t>，</a:t>
-            </a:r>
-            <a:r>
-              <a:rPr lang="zh-CN" altLang="en-US" sz="4000" b="1" u="sng" dirty="0">
-                <a:solidFill>
-                  <a:prstClr val="black"/>
-                </a:solidFill>
-                <a:latin typeface="黑体" panose="02010609060101010101" pitchFamily="49" charset="-122"/>
-                <a:ea typeface="黑体" panose="02010609060101010101" pitchFamily="49" charset="-122"/>
-              </a:rPr>
-              <a:t>自由观察</a:t>
-            </a:r>
-            <a:r>
-              <a:rPr lang="zh-CN" altLang="en-US" sz="4000" dirty="0">
-                <a:solidFill>
-                  <a:prstClr val="black"/>
-                </a:solidFill>
-                <a:latin typeface="楷体" panose="02010609060101010101" pitchFamily="49" charset="-122"/>
-                <a:ea typeface="楷体" panose="02010609060101010101" pitchFamily="49" charset="-122"/>
-              </a:rPr>
-              <a:t>出现的纹理</a:t>
-            </a:r>
-            <a:endParaRPr lang="en-US" altLang="zh-CN" sz="4000" dirty="0">
-              <a:solidFill>
-                <a:prstClr val="black"/>
-              </a:solidFill>
-              <a:latin typeface="楷体" panose="02010609060101010101" pitchFamily="49" charset="-122"/>
-              <a:ea typeface="楷体" panose="02010609060101010101" pitchFamily="49" charset="-122"/>
-            </a:endParaRPr>
-          </a:p>
-          <a:p>
-            <a:pPr marL="685800" marR="0" lvl="0" indent="-685800" algn="l" defTabSz="914400" rtl="0" eaLnBrk="1" fontAlgn="auto" latinLnBrk="0" hangingPunct="1">
-              <a:lnSpc>
-                <a:spcPct val="125000"/>
-              </a:lnSpc>
-              <a:spcBef>
-                <a:spcPts val="0"/>
-              </a:spcBef>
-              <a:spcAft>
-                <a:spcPts val="0"/>
-              </a:spcAft>
-              <a:buClrTx/>
-              <a:buSzTx/>
-              <a:buFont typeface="Wingdings" panose="05000000000000000000" pitchFamily="2" charset="2"/>
-              <a:buChar char="p"/>
-              <a:tabLst/>
-              <a:defRPr/>
-            </a:pPr>
-            <a:r>
-              <a:rPr kumimoji="0" lang="en-US" altLang="zh-CN" sz="4000" b="1" i="0" u="sng" strike="noStrike" kern="1200" cap="none" spc="0" normalizeH="0" baseline="0" noProof="0" dirty="0">
-                <a:ln>
-                  <a:noFill/>
-                </a:ln>
-                <a:solidFill>
-                  <a:prstClr val="black"/>
-                </a:solidFill>
-                <a:effectLst/>
-                <a:uLnTx/>
-                <a:uFillTx/>
-                <a:latin typeface="黑体" panose="02010609060101010101" pitchFamily="49" charset="-122"/>
-                <a:ea typeface="黑体" panose="02010609060101010101" pitchFamily="49" charset="-122"/>
-              </a:rPr>
-              <a:t>5</a:t>
-            </a:r>
-            <a:r>
-              <a:rPr kumimoji="0" lang="zh-CN" altLang="en-US" sz="4000" b="1" i="0" u="sng" strike="noStrike" kern="1200" cap="none" spc="0" normalizeH="0" baseline="0" noProof="0" dirty="0">
-                <a:ln>
-                  <a:noFill/>
-                </a:ln>
-                <a:solidFill>
-                  <a:prstClr val="black"/>
-                </a:solidFill>
-                <a:effectLst/>
-                <a:uLnTx/>
-                <a:uFillTx/>
-                <a:latin typeface="黑体" panose="02010609060101010101" pitchFamily="49" charset="-122"/>
-                <a:ea typeface="黑体" panose="02010609060101010101" pitchFamily="49" charset="-122"/>
-              </a:rPr>
-              <a:t>秒内</a:t>
-            </a:r>
-            <a:r>
-              <a:rPr kumimoji="0" lang="zh-CN" altLang="en-US" sz="4000" b="0" i="0" u="none" strike="noStrike" kern="1200" cap="none" spc="0" normalizeH="0" baseline="0" noProof="0" dirty="0">
-                <a:ln>
-                  <a:noFill/>
-                </a:ln>
-                <a:solidFill>
-                  <a:prstClr val="black"/>
-                </a:solidFill>
-                <a:effectLst/>
-                <a:uLnTx/>
-                <a:uFillTx/>
-                <a:latin typeface="楷体" panose="02010609060101010101" pitchFamily="49" charset="-122"/>
-                <a:ea typeface="楷体" panose="02010609060101010101" pitchFamily="49" charset="-122"/>
-                <a:cs typeface="+mn-cs"/>
-              </a:rPr>
-              <a:t>找到藏在黑白花纹中的小光栅</a:t>
-            </a:r>
-            <a:endParaRPr kumimoji="0" lang="en-US" altLang="zh-CN" sz="4000" b="0" i="0" u="none" strike="noStrike" kern="1200" cap="none" spc="0" normalizeH="0" baseline="0" noProof="0" dirty="0">
-              <a:ln>
-                <a:noFill/>
-              </a:ln>
-              <a:solidFill>
-                <a:prstClr val="black"/>
-              </a:solidFill>
-              <a:effectLst/>
-              <a:uLnTx/>
-              <a:uFillTx/>
-              <a:latin typeface="楷体" panose="02010609060101010101" pitchFamily="49" charset="-122"/>
-              <a:ea typeface="楷体" panose="02010609060101010101" pitchFamily="49" charset="-122"/>
-              <a:cs typeface="+mn-cs"/>
-            </a:endParaRPr>
-          </a:p>
-          <a:p>
-            <a:pPr marL="685800" marR="0" lvl="0" indent="-685800" algn="l" defTabSz="914400" rtl="0" eaLnBrk="1" fontAlgn="auto" latinLnBrk="0" hangingPunct="1">
-              <a:lnSpc>
-                <a:spcPct val="125000"/>
-              </a:lnSpc>
-              <a:spcBef>
-                <a:spcPts val="0"/>
-              </a:spcBef>
-              <a:spcAft>
-                <a:spcPts val="0"/>
-              </a:spcAft>
-              <a:buClrTx/>
-              <a:buSzTx/>
-              <a:buFont typeface="Wingdings" panose="05000000000000000000" pitchFamily="2" charset="2"/>
-              <a:buChar char="p"/>
-              <a:tabLst/>
-              <a:defRPr/>
-            </a:pPr>
-            <a:r>
-              <a:rPr kumimoji="0" lang="zh-CN" altLang="en-US" sz="4000" b="0" i="0" u="none" strike="noStrike" kern="1200" cap="none" spc="0" normalizeH="0" baseline="0" noProof="0" dirty="0">
-                <a:ln>
-                  <a:noFill/>
-                </a:ln>
-                <a:solidFill>
-                  <a:prstClr val="black"/>
-                </a:solidFill>
-                <a:effectLst/>
-                <a:uLnTx/>
-                <a:uFillTx/>
-                <a:latin typeface="楷体" panose="02010609060101010101" pitchFamily="49" charset="-122"/>
-                <a:ea typeface="楷体" panose="02010609060101010101" pitchFamily="49" charset="-122"/>
-                <a:cs typeface="+mn-cs"/>
-              </a:rPr>
-              <a:t>余光发现光栅时立刻按下“</a:t>
-            </a:r>
-            <a:r>
-              <a:rPr kumimoji="0" lang="zh-CN" altLang="en-US" sz="4000" b="1" i="0" u="sng" strike="noStrike" kern="1200" cap="none" spc="0" normalizeH="0" baseline="0" noProof="0" dirty="0">
-                <a:ln>
-                  <a:noFill/>
-                </a:ln>
-                <a:solidFill>
-                  <a:prstClr val="black"/>
-                </a:solidFill>
-                <a:effectLst/>
-                <a:uLnTx/>
-                <a:uFillTx/>
-                <a:latin typeface="黑体" panose="02010609060101010101" pitchFamily="49" charset="-122"/>
-                <a:ea typeface="黑体" panose="02010609060101010101" pitchFamily="49" charset="-122"/>
-              </a:rPr>
-              <a:t>空格键</a:t>
-            </a:r>
-            <a:r>
-              <a:rPr kumimoji="0" lang="zh-CN" altLang="en-US" sz="4000" b="0" i="0" u="none" strike="noStrike" kern="1200" cap="none" spc="0" normalizeH="0" baseline="0" noProof="0" dirty="0">
-                <a:ln>
-                  <a:noFill/>
-                </a:ln>
-                <a:solidFill>
-                  <a:prstClr val="black"/>
-                </a:solidFill>
-                <a:effectLst/>
-                <a:uLnTx/>
-                <a:uFillTx/>
-                <a:latin typeface="楷体" panose="02010609060101010101" pitchFamily="49" charset="-122"/>
-                <a:ea typeface="楷体" panose="02010609060101010101" pitchFamily="49" charset="-122"/>
-                <a:cs typeface="+mn-cs"/>
-              </a:rPr>
-              <a:t>”</a:t>
-            </a:r>
-            <a:endParaRPr kumimoji="0" lang="en-US" altLang="zh-CN" sz="4000" b="0" i="0" u="none" strike="noStrike" kern="1200" cap="none" spc="0" normalizeH="0" baseline="0" noProof="0" dirty="0">
-              <a:ln>
-                <a:noFill/>
-              </a:ln>
-              <a:solidFill>
-                <a:prstClr val="black"/>
-              </a:solidFill>
-              <a:effectLst/>
-              <a:uLnTx/>
-              <a:uFillTx/>
-              <a:latin typeface="楷体" panose="02010609060101010101" pitchFamily="49" charset="-122"/>
-              <a:ea typeface="楷体" panose="02010609060101010101" pitchFamily="49" charset="-122"/>
-              <a:cs typeface="+mn-cs"/>
-            </a:endParaRPr>
-          </a:p>
-          <a:p>
-            <a:pPr marL="685800" marR="0" lvl="0" indent="-685800" algn="l" defTabSz="914400" rtl="0" eaLnBrk="1" fontAlgn="auto" latinLnBrk="0" hangingPunct="1">
-              <a:lnSpc>
-                <a:spcPct val="125000"/>
-              </a:lnSpc>
-              <a:spcBef>
-                <a:spcPts val="0"/>
-              </a:spcBef>
-              <a:spcAft>
-                <a:spcPts val="0"/>
-              </a:spcAft>
-              <a:buClrTx/>
-              <a:buSzTx/>
-              <a:buFont typeface="Wingdings" panose="05000000000000000000" pitchFamily="2" charset="2"/>
-              <a:buChar char="p"/>
-              <a:tabLst/>
-              <a:defRPr/>
-            </a:pPr>
-            <a:r>
-              <a:rPr kumimoji="0" lang="zh-CN" altLang="en-US" sz="4000" b="0" i="0" u="none" strike="noStrike" kern="1200" cap="none" spc="0" normalizeH="0" baseline="0" noProof="0" dirty="0">
-                <a:ln>
-                  <a:noFill/>
-                </a:ln>
-                <a:solidFill>
-                  <a:prstClr val="black"/>
-                </a:solidFill>
-                <a:effectLst/>
-                <a:uLnTx/>
-                <a:uFillTx/>
-                <a:latin typeface="楷体" panose="02010609060101010101" pitchFamily="49" charset="-122"/>
-                <a:ea typeface="楷体" panose="02010609060101010101" pitchFamily="49" charset="-122"/>
-                <a:cs typeface="+mn-cs"/>
-              </a:rPr>
-              <a:t>用眼睛盯住光栅后按下“</a:t>
-            </a:r>
-            <a:r>
-              <a:rPr kumimoji="0" lang="en-US" altLang="zh-CN" sz="4000" b="1" i="0" u="sng" strike="noStrike" kern="1200" cap="none" spc="0" normalizeH="0" baseline="0" noProof="0" dirty="0">
-                <a:ln>
-                  <a:noFill/>
-                </a:ln>
-                <a:solidFill>
-                  <a:prstClr val="black"/>
-                </a:solidFill>
-                <a:effectLst/>
-                <a:uLnTx/>
-                <a:uFillTx/>
-                <a:latin typeface="黑体" panose="02010609060101010101" pitchFamily="49" charset="-122"/>
-                <a:ea typeface="黑体" panose="02010609060101010101" pitchFamily="49" charset="-122"/>
-              </a:rPr>
-              <a:t>M</a:t>
-            </a:r>
-            <a:r>
-              <a:rPr kumimoji="0" lang="zh-CN" altLang="en-US" sz="4000" b="1" i="0" u="sng" strike="noStrike" kern="1200" cap="none" spc="0" normalizeH="0" baseline="0" noProof="0" dirty="0">
-                <a:ln>
-                  <a:noFill/>
-                </a:ln>
-                <a:solidFill>
-                  <a:prstClr val="black"/>
-                </a:solidFill>
-                <a:effectLst/>
-                <a:uLnTx/>
-                <a:uFillTx/>
-                <a:latin typeface="黑体" panose="02010609060101010101" pitchFamily="49" charset="-122"/>
-                <a:ea typeface="黑体" panose="02010609060101010101" pitchFamily="49" charset="-122"/>
-              </a:rPr>
-              <a:t>键</a:t>
-            </a:r>
-            <a:r>
-              <a:rPr kumimoji="0" lang="zh-CN" altLang="en-US" sz="4000" b="0" i="0" u="none" strike="noStrike" kern="1200" cap="none" spc="0" normalizeH="0" baseline="0" noProof="0" dirty="0">
-                <a:ln>
-                  <a:noFill/>
-                </a:ln>
-                <a:solidFill>
-                  <a:prstClr val="black"/>
-                </a:solidFill>
-                <a:effectLst/>
-                <a:uLnTx/>
-                <a:uFillTx/>
-                <a:latin typeface="楷体" panose="02010609060101010101" pitchFamily="49" charset="-122"/>
-                <a:ea typeface="楷体" panose="02010609060101010101" pitchFamily="49" charset="-122"/>
-                <a:cs typeface="+mn-cs"/>
-              </a:rPr>
-              <a:t>”</a:t>
-            </a:r>
-            <a:endParaRPr kumimoji="0" lang="en-US" altLang="zh-CN" sz="4000" b="0" i="0" u="none" strike="noStrike" kern="1200" cap="none" spc="0" normalizeH="0" baseline="0" noProof="0" dirty="0">
-              <a:ln>
-                <a:noFill/>
-              </a:ln>
-              <a:solidFill>
-                <a:prstClr val="black"/>
-              </a:solidFill>
-              <a:effectLst/>
-              <a:uLnTx/>
-              <a:uFillTx/>
-              <a:latin typeface="楷体" panose="02010609060101010101" pitchFamily="49" charset="-122"/>
-              <a:ea typeface="楷体" panose="02010609060101010101" pitchFamily="49" charset="-122"/>
-              <a:cs typeface="+mn-cs"/>
-            </a:endParaRPr>
-          </a:p>
-        </p:txBody>
-      </p:sp>
-      <p:sp>
-        <p:nvSpPr>
           <p:cNvPr id="2" name="矩形: 圆角 1">
             <a:extLst>
               <a:ext uri="{FF2B5EF4-FFF2-40B4-BE49-F238E27FC236}">
-                <a16:creationId xmlns:a16="http://schemas.microsoft.com/office/drawing/2014/main" id="{449E9047-EAF4-05FC-FB29-6F6E775AF378}"/>
+                <a16:creationId xmlns:a16="http://schemas.microsoft.com/office/drawing/2014/main" id="{71048BD8-6DCE-FBAA-1570-EC17A11EA407}"/>
               </a:ext>
             </a:extLst>
           </p:cNvPr>
@@ -14501,12 +16841,54 @@
           <a:bodyPr rtlCol="0" anchor="ctr"/>
           <a:lstStyle/>
           <a:p>
-            <a:pPr algn="ctr"/>
-            <a:r>
-              <a:rPr lang="en-US" altLang="zh-CN" b="1" dirty="0"/>
+            <a:pPr marL="0" marR="0" lvl="0" indent="0" algn="ctr" defTabSz="914400" rtl="0" eaLnBrk="1" fontAlgn="auto" latinLnBrk="0" hangingPunct="1">
+              <a:lnSpc>
+                <a:spcPct val="100000"/>
+              </a:lnSpc>
+              <a:spcBef>
+                <a:spcPts val="0"/>
+              </a:spcBef>
+              <a:spcAft>
+                <a:spcPts val="0"/>
+              </a:spcAft>
+              <a:buClrTx/>
+              <a:buSzTx/>
+              <a:buFontTx/>
+              <a:buNone/>
+              <a:tabLst/>
+              <a:defRPr/>
+            </a:pPr>
+            <a:r>
+              <a:rPr kumimoji="0" lang="en-US" altLang="zh-CN" sz="1800" b="1" i="0" u="none" strike="noStrike" kern="1200" cap="none" spc="0" normalizeH="0" baseline="0" noProof="0" dirty="0">
+                <a:ln>
+                  <a:noFill/>
+                </a:ln>
+                <a:solidFill>
+                  <a:prstClr val="white"/>
+                </a:solidFill>
+                <a:effectLst/>
+                <a:uLnTx/>
+                <a:uFillTx/>
+                <a:latin typeface="等线" panose="02110004020202020204"/>
+                <a:ea typeface="等线" panose="02010600030101010101" pitchFamily="2" charset="-122"/>
+                <a:cs typeface="+mn-cs"/>
+              </a:rPr>
               <a:t>space</a:t>
             </a:r>
-            <a:endParaRPr lang="zh-CN" altLang="en-US" b="1" dirty="0"/>
+            <a:endParaRPr kumimoji="0" lang="zh-CN" altLang="en-US" sz="1800" b="1" i="0" u="none" strike="noStrike" kern="1200" cap="none" spc="0" normalizeH="0" baseline="0" noProof="0" dirty="0">
+              <a:ln>
+                <a:noFill/>
+              </a:ln>
+              <a:solidFill>
+                <a:prstClr val="white"/>
+              </a:solidFill>
+              <a:effectLst/>
+              <a:uLnTx/>
+              <a:uFillTx/>
+              <a:latin typeface="等线" panose="02110004020202020204"/>
+              <a:ea typeface="等线" panose="02010600030101010101" pitchFamily="2" charset="-122"/>
+              <a:cs typeface="+mn-cs"/>
+            </a:endParaRPr>
           </a:p>
         </p:txBody>
       </p:sp>
@@ -14515,7 +16897,7 @@
           <p:cNvPr id="3" name="文本框 2">
             <a:extLst>
               <a:ext uri="{FF2B5EF4-FFF2-40B4-BE49-F238E27FC236}">
-                <a16:creationId xmlns:a16="http://schemas.microsoft.com/office/drawing/2014/main" id="{18E47240-3877-724D-94DC-B400FA2B0908}"/>
+                <a16:creationId xmlns:a16="http://schemas.microsoft.com/office/drawing/2014/main" id="{1A655ADE-F740-036F-2930-AD5E3E59F73C}"/>
               </a:ext>
             </a:extLst>
           </p:cNvPr>
@@ -14538,7 +16920,23 @@
           </a:bodyPr>
           <a:lstStyle/>
           <a:p>
-            <a:pPr algn="ctr"/>
+            <a:pPr marL="0" marR="0" lvl="0" indent="0" algn="ctr" defTabSz="914400" rtl="0" eaLnBrk="1" fontAlgn="auto" latinLnBrk="0" hangingPunct="1">
+              <a:lnSpc>
+                <a:spcPct val="100000"/>
+              </a:lnSpc>
+              <a:spcBef>
+                <a:spcPts val="0"/>
+              </a:spcBef>
+              <a:spcAft>
+                <a:spcPts val="0"/>
+              </a:spcAft>
+              <a:buClrTx/>
+              <a:buSzTx/>
+              <a:buFontTx/>
+              <a:buNone/>
+              <a:tabLst/>
+              <a:defRPr/>
+            </a:pPr>
             <a:r>
               <a:rPr kumimoji="0" lang="zh-CN" altLang="en-US" sz="2800" b="0" i="0" u="none" strike="noStrike" kern="1200" cap="none" spc="0" normalizeH="0" baseline="0" noProof="0" dirty="0">
                 <a:ln>
@@ -14588,18 +16986,253 @@
                 <a:ea typeface="楷体" panose="02010609060101010101" pitchFamily="49" charset="-122"/>
                 <a:cs typeface="+mn-cs"/>
               </a:rPr>
-              <a:t>”继续</a:t>
-            </a:r>
-            <a:endParaRPr lang="zh-CN" altLang="en-US" sz="1200" dirty="0"/>
+              <a:t>”</a:t>
+            </a:r>
+            <a:r>
+              <a:rPr kumimoji="0" lang="zh-CN" altLang="en-US" sz="2800" b="1" i="0" u="none" strike="noStrike" kern="1200" cap="none" spc="0" normalizeH="0" baseline="0" noProof="0" dirty="0">
+                <a:ln>
+                  <a:noFill/>
+                </a:ln>
+                <a:solidFill>
+                  <a:srgbClr val="FF0000"/>
+                </a:solidFill>
+                <a:effectLst/>
+                <a:uLnTx/>
+                <a:uFillTx/>
+                <a:latin typeface="黑体" panose="02010609060101010101" pitchFamily="49" charset="-122"/>
+                <a:ea typeface="黑体" panose="02010609060101010101" pitchFamily="49" charset="-122"/>
+              </a:rPr>
+              <a:t>开始</a:t>
+            </a:r>
+            <a:endParaRPr kumimoji="0" lang="zh-CN" altLang="en-US" sz="1200" b="1" i="0" u="none" strike="noStrike" kern="1200" cap="none" spc="0" normalizeH="0" baseline="0" noProof="0" dirty="0">
+              <a:ln>
+                <a:noFill/>
+              </a:ln>
+              <a:solidFill>
+                <a:srgbClr val="FF0000"/>
+              </a:solidFill>
+              <a:effectLst/>
+              <a:uLnTx/>
+              <a:uFillTx/>
+              <a:latin typeface="黑体" panose="02010609060101010101" pitchFamily="49" charset="-122"/>
+              <a:ea typeface="黑体" panose="02010609060101010101" pitchFamily="49" charset="-122"/>
+            </a:endParaRPr>
           </a:p>
         </p:txBody>
       </p:sp>
       <p:sp>
         <p:nvSpPr>
-          <p:cNvPr id="5" name="矩形: 圆角 4">
-            <a:extLst>
-              <a:ext uri="{FF2B5EF4-FFF2-40B4-BE49-F238E27FC236}">
-                <a16:creationId xmlns:a16="http://schemas.microsoft.com/office/drawing/2014/main" id="{55435F5E-2FA4-C290-C4C7-0A531F976A59}"/>
+          <p:cNvPr id="12" name="文本框 11">
+            <a:extLst>
+              <a:ext uri="{FF2B5EF4-FFF2-40B4-BE49-F238E27FC236}">
+                <a16:creationId xmlns:a16="http://schemas.microsoft.com/office/drawing/2014/main" id="{8D78807C-25C4-557F-A361-DD2B1B558B47}"/>
+              </a:ext>
+            </a:extLst>
+          </p:cNvPr>
+          <p:cNvSpPr txBox="1"/>
+          <p:nvPr/>
+        </p:nvSpPr>
+        <p:spPr>
+          <a:xfrm>
+            <a:off x="1500049" y="1976758"/>
+            <a:ext cx="10029963" cy="3064300"/>
+          </a:xfrm>
+          <a:prstGeom prst="rect">
+            <a:avLst/>
+          </a:prstGeom>
+          <a:noFill/>
+        </p:spPr>
+        <p:txBody>
+          <a:bodyPr wrap="square" rtlCol="0">
+            <a:spAutoFit/>
+          </a:bodyPr>
+          <a:lstStyle/>
+          <a:p>
+            <a:pPr marL="685800" lvl="0" indent="-685800">
+              <a:lnSpc>
+                <a:spcPct val="125000"/>
+              </a:lnSpc>
+              <a:buFont typeface="Wingdings" panose="05000000000000000000" pitchFamily="2" charset="2"/>
+              <a:buChar char="p"/>
+              <a:defRPr/>
+            </a:pPr>
+            <a:r>
+              <a:rPr lang="zh-CN" altLang="en-US" sz="4000" b="1" u="sng" dirty="0">
+                <a:solidFill>
+                  <a:prstClr val="black"/>
+                </a:solidFill>
+                <a:latin typeface="黑体" panose="02010609060101010101" pitchFamily="49" charset="-122"/>
+                <a:ea typeface="黑体" panose="02010609060101010101" pitchFamily="49" charset="-122"/>
+              </a:rPr>
+              <a:t>盯住</a:t>
+            </a:r>
+            <a:r>
+              <a:rPr lang="zh-CN" altLang="en-US" sz="4000" dirty="0">
+                <a:solidFill>
+                  <a:prstClr val="black"/>
+                </a:solidFill>
+                <a:latin typeface="楷体" panose="02010609060101010101" pitchFamily="49" charset="-122"/>
+                <a:ea typeface="楷体" panose="02010609060101010101" pitchFamily="49" charset="-122"/>
+              </a:rPr>
+              <a:t>黑点按</a:t>
+            </a:r>
+            <a:r>
+              <a:rPr lang="zh-CN" altLang="en-US" sz="4000" b="1" u="sng" dirty="0">
+                <a:solidFill>
+                  <a:prstClr val="black"/>
+                </a:solidFill>
+                <a:latin typeface="黑体" panose="02010609060101010101" pitchFamily="49" charset="-122"/>
+                <a:ea typeface="黑体" panose="02010609060101010101" pitchFamily="49" charset="-122"/>
+              </a:rPr>
+              <a:t>空格</a:t>
+            </a:r>
+            <a:r>
+              <a:rPr lang="zh-CN" altLang="en-US" sz="4000" dirty="0">
+                <a:solidFill>
+                  <a:prstClr val="black"/>
+                </a:solidFill>
+                <a:latin typeface="楷体" panose="02010609060101010101" pitchFamily="49" charset="-122"/>
+                <a:ea typeface="楷体" panose="02010609060101010101" pitchFamily="49" charset="-122"/>
+              </a:rPr>
+              <a:t>，</a:t>
+            </a:r>
+            <a:r>
+              <a:rPr lang="zh-CN" altLang="en-US" sz="4000" b="1" u="sng" dirty="0">
+                <a:solidFill>
+                  <a:prstClr val="black"/>
+                </a:solidFill>
+                <a:latin typeface="黑体" panose="02010609060101010101" pitchFamily="49" charset="-122"/>
+                <a:ea typeface="黑体" panose="02010609060101010101" pitchFamily="49" charset="-122"/>
+              </a:rPr>
+              <a:t>自由观察</a:t>
+            </a:r>
+            <a:r>
+              <a:rPr lang="zh-CN" altLang="en-US" sz="4000" dirty="0">
+                <a:solidFill>
+                  <a:prstClr val="black"/>
+                </a:solidFill>
+                <a:latin typeface="楷体" panose="02010609060101010101" pitchFamily="49" charset="-122"/>
+                <a:ea typeface="楷体" panose="02010609060101010101" pitchFamily="49" charset="-122"/>
+              </a:rPr>
+              <a:t>出现的纹理</a:t>
+            </a:r>
+            <a:endParaRPr lang="en-US" altLang="zh-CN" sz="4000" dirty="0">
+              <a:solidFill>
+                <a:prstClr val="black"/>
+              </a:solidFill>
+              <a:latin typeface="楷体" panose="02010609060101010101" pitchFamily="49" charset="-122"/>
+              <a:ea typeface="楷体" panose="02010609060101010101" pitchFamily="49" charset="-122"/>
+            </a:endParaRPr>
+          </a:p>
+          <a:p>
+            <a:pPr marL="685800" lvl="0" indent="-685800">
+              <a:lnSpc>
+                <a:spcPct val="125000"/>
+              </a:lnSpc>
+              <a:buFont typeface="Wingdings" panose="05000000000000000000" pitchFamily="2" charset="2"/>
+              <a:buChar char="p"/>
+              <a:defRPr/>
+            </a:pPr>
+            <a:r>
+              <a:rPr lang="zh-CN" altLang="en-US" sz="4000" dirty="0">
+                <a:solidFill>
+                  <a:prstClr val="black"/>
+                </a:solidFill>
+                <a:latin typeface="楷体" panose="02010609060101010101" pitchFamily="49" charset="-122"/>
+                <a:ea typeface="楷体" panose="02010609060101010101" pitchFamily="49" charset="-122"/>
+              </a:rPr>
+              <a:t>大部分任务会自动结束，无需操作</a:t>
+            </a:r>
+            <a:endParaRPr lang="en-US" altLang="zh-CN" sz="4000" dirty="0">
+              <a:solidFill>
+                <a:prstClr val="black"/>
+              </a:solidFill>
+              <a:latin typeface="楷体" panose="02010609060101010101" pitchFamily="49" charset="-122"/>
+              <a:ea typeface="楷体" panose="02010609060101010101" pitchFamily="49" charset="-122"/>
+            </a:endParaRPr>
+          </a:p>
+          <a:p>
+            <a:pPr marL="685800" lvl="0" indent="-685800">
+              <a:lnSpc>
+                <a:spcPct val="125000"/>
+              </a:lnSpc>
+              <a:buFont typeface="Wingdings" panose="05000000000000000000" pitchFamily="2" charset="2"/>
+              <a:buChar char="p"/>
+              <a:defRPr/>
+            </a:pPr>
+            <a:r>
+              <a:rPr lang="zh-CN" altLang="en-US" sz="4000" dirty="0">
+                <a:solidFill>
+                  <a:prstClr val="black"/>
+                </a:solidFill>
+                <a:latin typeface="楷体" panose="02010609060101010101" pitchFamily="49" charset="-122"/>
+                <a:ea typeface="楷体" panose="02010609060101010101" pitchFamily="49" charset="-122"/>
+              </a:rPr>
+              <a:t>若发现有小光斑出现，尽快按右侧</a:t>
+            </a:r>
+            <a:r>
+              <a:rPr lang="en-US" altLang="zh-CN" sz="4000" dirty="0">
+                <a:solidFill>
+                  <a:prstClr val="black"/>
+                </a:solidFill>
+                <a:latin typeface="楷体" panose="02010609060101010101" pitchFamily="49" charset="-122"/>
+                <a:ea typeface="楷体" panose="02010609060101010101" pitchFamily="49" charset="-122"/>
+              </a:rPr>
+              <a:t>Ctrl</a:t>
+            </a:r>
+            <a:r>
+              <a:rPr lang="zh-CN" altLang="en-US" sz="4000" dirty="0">
+                <a:solidFill>
+                  <a:prstClr val="black"/>
+                </a:solidFill>
+                <a:latin typeface="楷体" panose="02010609060101010101" pitchFamily="49" charset="-122"/>
+                <a:ea typeface="楷体" panose="02010609060101010101" pitchFamily="49" charset="-122"/>
+              </a:rPr>
+              <a:t>键</a:t>
+            </a:r>
+            <a:endParaRPr lang="en-US" altLang="zh-CN" sz="4000" dirty="0">
+              <a:solidFill>
+                <a:prstClr val="black"/>
+              </a:solidFill>
+              <a:latin typeface="楷体" panose="02010609060101010101" pitchFamily="49" charset="-122"/>
+              <a:ea typeface="楷体" panose="02010609060101010101" pitchFamily="49" charset="-122"/>
+            </a:endParaRPr>
+          </a:p>
+          <a:p>
+            <a:pPr marL="685800" lvl="0" indent="-685800">
+              <a:lnSpc>
+                <a:spcPct val="125000"/>
+              </a:lnSpc>
+              <a:buFont typeface="Wingdings" panose="05000000000000000000" pitchFamily="2" charset="2"/>
+              <a:buChar char="p"/>
+              <a:defRPr/>
+            </a:pPr>
+            <a:r>
+              <a:rPr lang="zh-CN" altLang="en-US" sz="4000" dirty="0">
+                <a:solidFill>
+                  <a:prstClr val="black"/>
+                </a:solidFill>
+                <a:latin typeface="楷体" panose="02010609060101010101" pitchFamily="49" charset="-122"/>
+                <a:ea typeface="楷体" panose="02010609060101010101" pitchFamily="49" charset="-122"/>
+              </a:rPr>
+              <a:t>不要长时间闭眼、不要移动头部</a:t>
+            </a:r>
+            <a:endParaRPr lang="en-US" altLang="zh-CN" sz="4000" dirty="0">
+              <a:solidFill>
+                <a:prstClr val="black"/>
+              </a:solidFill>
+              <a:latin typeface="楷体" panose="02010609060101010101" pitchFamily="49" charset="-122"/>
+              <a:ea typeface="楷体" panose="02010609060101010101" pitchFamily="49" charset="-122"/>
+            </a:endParaRPr>
+          </a:p>
+        </p:txBody>
+      </p:sp>
+      <p:sp>
+        <p:nvSpPr>
+          <p:cNvPr id="13" name="矩形: 圆角 12">
+            <a:extLst>
+              <a:ext uri="{FF2B5EF4-FFF2-40B4-BE49-F238E27FC236}">
+                <a16:creationId xmlns:a16="http://schemas.microsoft.com/office/drawing/2014/main" id="{3A493DA2-9692-9F98-2E5E-C9C75295F964}"/>
               </a:ext>
             </a:extLst>
           </p:cNvPr>
@@ -14608,8 +17241,8 @@
         </p:nvSpPr>
         <p:spPr>
           <a:xfrm>
-            <a:off x="7942221" y="4757139"/>
-            <a:ext cx="581294" cy="509451"/>
+            <a:off x="682537" y="6115676"/>
+            <a:ext cx="2481943" cy="509451"/>
           </a:xfrm>
           <a:prstGeom prst="roundRect">
             <a:avLst/>
@@ -14648,54 +17281,199 @@
           <a:bodyPr rtlCol="0" anchor="ctr"/>
           <a:lstStyle/>
           <a:p>
-            <a:pPr algn="ctr"/>
-            <a:r>
-              <a:rPr lang="en-US" altLang="zh-CN" b="1" dirty="0"/>
-              <a:t>M</a:t>
-            </a:r>
-            <a:endParaRPr lang="zh-CN" altLang="en-US" b="1" dirty="0"/>
+            <a:pPr marL="0" marR="0" lvl="0" indent="0" algn="ctr" defTabSz="914400" rtl="0" eaLnBrk="1" fontAlgn="auto" latinLnBrk="0" hangingPunct="1">
+              <a:lnSpc>
+                <a:spcPct val="100000"/>
+              </a:lnSpc>
+              <a:spcBef>
+                <a:spcPts val="0"/>
+              </a:spcBef>
+              <a:spcAft>
+                <a:spcPts val="0"/>
+              </a:spcAft>
+              <a:buClrTx/>
+              <a:buSzTx/>
+              <a:buFontTx/>
+              <a:buNone/>
+              <a:tabLst/>
+              <a:defRPr/>
+            </a:pPr>
+            <a:r>
+              <a:rPr kumimoji="0" lang="en-US" altLang="zh-CN" sz="1800" b="1" i="0" u="none" strike="noStrike" kern="1200" cap="none" spc="0" normalizeH="0" baseline="0" noProof="0" dirty="0">
+                <a:ln>
+                  <a:noFill/>
+                </a:ln>
+                <a:solidFill>
+                  <a:prstClr val="white"/>
+                </a:solidFill>
+                <a:effectLst/>
+                <a:uLnTx/>
+                <a:uFillTx/>
+                <a:latin typeface="等线" panose="02110004020202020204"/>
+                <a:ea typeface="等线" panose="02010600030101010101" pitchFamily="2" charset="-122"/>
+                <a:cs typeface="+mn-cs"/>
+              </a:rPr>
+              <a:t>Backspace</a:t>
+            </a:r>
+            <a:endParaRPr kumimoji="0" lang="zh-CN" altLang="en-US" sz="1800" b="1" i="0" u="none" strike="noStrike" kern="1200" cap="none" spc="0" normalizeH="0" baseline="0" noProof="0" dirty="0">
+              <a:ln>
+                <a:noFill/>
+              </a:ln>
+              <a:solidFill>
+                <a:prstClr val="white"/>
+              </a:solidFill>
+              <a:effectLst/>
+              <a:uLnTx/>
+              <a:uFillTx/>
+              <a:latin typeface="等线" panose="02110004020202020204"/>
+              <a:ea typeface="等线" panose="02010600030101010101" pitchFamily="2" charset="-122"/>
+              <a:cs typeface="+mn-cs"/>
+            </a:endParaRPr>
           </a:p>
         </p:txBody>
       </p:sp>
-      <p:pic>
-        <p:nvPicPr>
-          <p:cNvPr id="7" name="图片 6" descr="卡通人物&#10;&#10;低可信度描述已自动生成">
-            <a:extLst>
-              <a:ext uri="{FF2B5EF4-FFF2-40B4-BE49-F238E27FC236}">
-                <a16:creationId xmlns:a16="http://schemas.microsoft.com/office/drawing/2014/main" id="{F16DC42E-04B4-6C19-A4E5-F0AEF946B54F}"/>
-              </a:ext>
-            </a:extLst>
-          </p:cNvPr>
-          <p:cNvPicPr>
-            <a:picLocks noChangeAspect="1"/>
-          </p:cNvPicPr>
+      <p:sp>
+        <p:nvSpPr>
+          <p:cNvPr id="14" name="文本框 13">
+            <a:extLst>
+              <a:ext uri="{FF2B5EF4-FFF2-40B4-BE49-F238E27FC236}">
+                <a16:creationId xmlns:a16="http://schemas.microsoft.com/office/drawing/2014/main" id="{822EC756-59CA-7246-D1A8-5D78A71A2161}"/>
+              </a:ext>
+            </a:extLst>
+          </p:cNvPr>
+          <p:cNvSpPr txBox="1"/>
           <p:nvPr/>
-        </p:nvPicPr>
-        <p:blipFill>
-          <a:blip r:embed="rId2" cstate="hqprint">
-            <a:extLst>
-              <a:ext uri="{28A0092B-C50C-407E-A947-70E740481C1C}">
-                <a14:useLocalDpi xmlns:a14="http://schemas.microsoft.com/office/drawing/2010/main"/>
-              </a:ext>
-            </a:extLst>
-          </a:blip>
-          <a:srcRect/>
-          <a:stretch/>
-        </p:blipFill>
+        </p:nvSpPr>
         <p:spPr>
           <a:xfrm>
-            <a:off x="10360046" y="2545831"/>
-            <a:ext cx="610009" cy="596751"/>
+            <a:off x="290651" y="5523102"/>
+            <a:ext cx="4002744" cy="523220"/>
           </a:xfrm>
           <a:prstGeom prst="rect">
             <a:avLst/>
           </a:prstGeom>
+          <a:noFill/>
         </p:spPr>
-      </p:pic>
+        <p:txBody>
+          <a:bodyPr wrap="square">
+            <a:spAutoFit/>
+          </a:bodyPr>
+          <a:lstStyle/>
+          <a:p>
+            <a:pPr marL="0" marR="0" lvl="0" indent="0" algn="ctr" defTabSz="914400" rtl="0" eaLnBrk="1" fontAlgn="auto" latinLnBrk="0" hangingPunct="1">
+              <a:lnSpc>
+                <a:spcPct val="100000"/>
+              </a:lnSpc>
+              <a:spcBef>
+                <a:spcPts val="0"/>
+              </a:spcBef>
+              <a:spcAft>
+                <a:spcPts val="0"/>
+              </a:spcAft>
+              <a:buClrTx/>
+              <a:buSzTx/>
+              <a:buFontTx/>
+              <a:buNone/>
+              <a:tabLst/>
+              <a:defRPr/>
+            </a:pPr>
+            <a:r>
+              <a:rPr kumimoji="0" lang="zh-CN" altLang="en-US" sz="2800" b="0" i="0" u="none" strike="noStrike" kern="1200" cap="none" spc="0" normalizeH="0" baseline="0" noProof="0" dirty="0">
+                <a:ln>
+                  <a:noFill/>
+                </a:ln>
+                <a:solidFill>
+                  <a:prstClr val="black"/>
+                </a:solidFill>
+                <a:effectLst/>
+                <a:uLnTx/>
+                <a:uFillTx/>
+                <a:latin typeface="楷体" panose="02010609060101010101" pitchFamily="49" charset="-122"/>
+                <a:ea typeface="楷体" panose="02010609060101010101" pitchFamily="49" charset="-122"/>
+                <a:cs typeface="+mn-cs"/>
+              </a:rPr>
+              <a:t>按“</a:t>
+            </a:r>
+            <a:r>
+              <a:rPr lang="zh-CN" altLang="en-US" sz="2800" b="1" u="sng" dirty="0">
+                <a:solidFill>
+                  <a:prstClr val="black"/>
+                </a:solidFill>
+                <a:latin typeface="楷体" panose="02010609060101010101" pitchFamily="49" charset="-122"/>
+                <a:ea typeface="楷体" panose="02010609060101010101" pitchFamily="49" charset="-122"/>
+              </a:rPr>
+              <a:t>退</a:t>
+            </a:r>
+            <a:r>
+              <a:rPr kumimoji="0" lang="zh-CN" altLang="en-US" sz="2800" b="1" i="0" u="sng" strike="noStrike" kern="1200" cap="none" spc="0" normalizeH="0" baseline="0" noProof="0" dirty="0">
+                <a:ln>
+                  <a:noFill/>
+                </a:ln>
+                <a:solidFill>
+                  <a:prstClr val="black"/>
+                </a:solidFill>
+                <a:effectLst/>
+                <a:uLnTx/>
+                <a:uFillTx/>
+                <a:latin typeface="楷体" panose="02010609060101010101" pitchFamily="49" charset="-122"/>
+                <a:ea typeface="楷体" panose="02010609060101010101" pitchFamily="49" charset="-122"/>
+                <a:cs typeface="+mn-cs"/>
+              </a:rPr>
+              <a:t>格键</a:t>
+            </a:r>
+            <a:r>
+              <a:rPr kumimoji="0" lang="zh-CN" altLang="en-US" sz="2800" b="0" i="0" u="none" strike="noStrike" kern="1200" cap="none" spc="0" normalizeH="0" baseline="0" noProof="0" dirty="0">
+                <a:ln>
+                  <a:noFill/>
+                </a:ln>
+                <a:solidFill>
+                  <a:prstClr val="black"/>
+                </a:solidFill>
+                <a:effectLst/>
+                <a:uLnTx/>
+                <a:uFillTx/>
+                <a:latin typeface="楷体" panose="02010609060101010101" pitchFamily="49" charset="-122"/>
+                <a:ea typeface="楷体" panose="02010609060101010101" pitchFamily="49" charset="-122"/>
+                <a:cs typeface="+mn-cs"/>
+              </a:rPr>
+              <a:t>”</a:t>
+            </a:r>
+            <a:r>
+              <a:rPr kumimoji="0" lang="zh-CN" altLang="en-US" sz="2800" b="1" i="0" u="none" strike="noStrike" kern="1200" cap="none" spc="0" normalizeH="0" baseline="0" noProof="0" dirty="0">
+                <a:ln>
+                  <a:noFill/>
+                </a:ln>
+                <a:solidFill>
+                  <a:srgbClr val="FF0000"/>
+                </a:solidFill>
+                <a:effectLst/>
+                <a:uLnTx/>
+                <a:uFillTx/>
+                <a:latin typeface="黑体" panose="02010609060101010101" pitchFamily="49" charset="-122"/>
+                <a:ea typeface="黑体" panose="02010609060101010101" pitchFamily="49" charset="-122"/>
+              </a:rPr>
+              <a:t>重看示例</a:t>
+            </a:r>
+            <a:endParaRPr kumimoji="0" lang="zh-CN" altLang="en-US" sz="1200" b="1" i="0" u="none" strike="noStrike" kern="1200" cap="none" spc="0" normalizeH="0" baseline="0" noProof="0" dirty="0">
+              <a:ln>
+                <a:noFill/>
+              </a:ln>
+              <a:solidFill>
+                <a:srgbClr val="FF0000"/>
+              </a:solidFill>
+              <a:effectLst/>
+              <a:uLnTx/>
+              <a:uFillTx/>
+              <a:latin typeface="黑体" panose="02010609060101010101" pitchFamily="49" charset="-122"/>
+              <a:ea typeface="黑体" panose="02010609060101010101" pitchFamily="49" charset="-122"/>
+            </a:endParaRPr>
+          </a:p>
+        </p:txBody>
+      </p:sp>
     </p:spTree>
     <p:extLst>
       <p:ext uri="{BB962C8B-B14F-4D97-AF65-F5344CB8AC3E}">
-        <p14:creationId xmlns:p14="http://schemas.microsoft.com/office/powerpoint/2010/main" val="2902820157"/>
+        <p14:creationId xmlns:p14="http://schemas.microsoft.com/office/powerpoint/2010/main" val="3282290110"/>
       </p:ext>
     </p:extLst>
   </p:cSld>
